--- a/assets/Template_Autoconocimiento 2.0 (Padres - Counseling).pptx
+++ b/assets/Template_Autoconocimiento 2.0 (Padres - Counseling).pptx
@@ -1,50 +1,50 @@
 
 <file path=ppt/presentation.xml><?xml version="1.0" encoding="utf-8"?>
-<p:presentation xmlns:a="http://schemas.openxmlformats.org/drawingml/2006/main" xmlns:r="http://schemas.openxmlformats.org/officeDocument/2006/relationships" xmlns:mc="http://schemas.openxmlformats.org/markup-compatibility/2006" xmlns:mv="urn:schemas-microsoft-com:mac:vml" xmlns:p="http://schemas.openxmlformats.org/presentationml/2006/main" xmlns:c="http://schemas.openxmlformats.org/drawingml/2006/chart" xmlns:dgm="http://schemas.openxmlformats.org/drawingml/2006/diagram" xmlns:o="urn:schemas-microsoft-com:office:office" xmlns:v="urn:schemas-microsoft-com:vml" xmlns:pvml="urn:schemas-microsoft-com:office:powerpoint" xmlns:com="http://schemas.openxmlformats.org/drawingml/2006/compatibility" xmlns:p14="http://schemas.microsoft.com/office/powerpoint/2010/main" xmlns:p15="http://schemas.microsoft.com/office/powerpoint/2012/main" xmlns:ahyp="http://schemas.microsoft.com/office/drawing/2018/hyperlinkcolor" autoCompressPictures="0" embedTrueTypeFonts="1" strictFirstAndLastChars="0" saveSubsetFonts="1">
+<p:presentation xmlns:a="http://schemas.openxmlformats.org/drawingml/2006/main" xmlns:r="http://schemas.openxmlformats.org/officeDocument/2006/relationships" xmlns:p="http://schemas.openxmlformats.org/presentationml/2006/main" strictFirstAndLastChars="0" embedTrueTypeFonts="1" saveSubsetFonts="1" autoCompressPictures="0">
   <p:sldMasterIdLst>
-    <p:sldMasterId id="2147483659" r:id="rId4"/>
+    <p:sldMasterId id="2147483659" r:id="rId1"/>
   </p:sldMasterIdLst>
   <p:notesMasterIdLst>
-    <p:notesMasterId r:id="rId5"/>
+    <p:notesMasterId r:id="rId25"/>
   </p:notesMasterIdLst>
   <p:sldIdLst>
-    <p:sldId id="256" r:id="rId6"/>
-    <p:sldId id="257" r:id="rId7"/>
-    <p:sldId id="258" r:id="rId8"/>
-    <p:sldId id="259" r:id="rId9"/>
-    <p:sldId id="260" r:id="rId10"/>
-    <p:sldId id="261" r:id="rId11"/>
-    <p:sldId id="262" r:id="rId12"/>
-    <p:sldId id="263" r:id="rId13"/>
-    <p:sldId id="264" r:id="rId14"/>
-    <p:sldId id="265" r:id="rId15"/>
-    <p:sldId id="266" r:id="rId16"/>
-    <p:sldId id="267" r:id="rId17"/>
-    <p:sldId id="268" r:id="rId18"/>
-    <p:sldId id="269" r:id="rId19"/>
-    <p:sldId id="270" r:id="rId20"/>
-    <p:sldId id="271" r:id="rId21"/>
-    <p:sldId id="272" r:id="rId22"/>
-    <p:sldId id="273" r:id="rId23"/>
-    <p:sldId id="274" r:id="rId24"/>
-    <p:sldId id="275" r:id="rId25"/>
-    <p:sldId id="276" r:id="rId26"/>
-    <p:sldId id="277" r:id="rId27"/>
-    <p:sldId id="278" r:id="rId28"/>
+    <p:sldId id="256" r:id="rId2"/>
+    <p:sldId id="257" r:id="rId3"/>
+    <p:sldId id="258" r:id="rId4"/>
+    <p:sldId id="259" r:id="rId5"/>
+    <p:sldId id="260" r:id="rId6"/>
+    <p:sldId id="261" r:id="rId7"/>
+    <p:sldId id="262" r:id="rId8"/>
+    <p:sldId id="263" r:id="rId9"/>
+    <p:sldId id="264" r:id="rId10"/>
+    <p:sldId id="265" r:id="rId11"/>
+    <p:sldId id="266" r:id="rId12"/>
+    <p:sldId id="267" r:id="rId13"/>
+    <p:sldId id="268" r:id="rId14"/>
+    <p:sldId id="269" r:id="rId15"/>
+    <p:sldId id="270" r:id="rId16"/>
+    <p:sldId id="271" r:id="rId17"/>
+    <p:sldId id="272" r:id="rId18"/>
+    <p:sldId id="273" r:id="rId19"/>
+    <p:sldId id="274" r:id="rId20"/>
+    <p:sldId id="275" r:id="rId21"/>
+    <p:sldId id="276" r:id="rId22"/>
+    <p:sldId id="277" r:id="rId23"/>
+    <p:sldId id="278" r:id="rId24"/>
   </p:sldIdLst>
-  <p:sldSz cy="18288000" cx="10287000"/>
+  <p:sldSz cx="10287000" cy="18288000"/>
   <p:notesSz cx="6858000" cy="9144000"/>
   <p:embeddedFontLst>
     <p:embeddedFont>
-      <p:font typeface="Public Sans"/>
-      <p:regular r:id="rId29"/>
-      <p:bold r:id="rId30"/>
-      <p:italic r:id="rId31"/>
-      <p:boldItalic r:id="rId32"/>
+      <p:font typeface="Public Sans" panose="020B0604020202020204" charset="0"/>
+      <p:regular r:id="rId26"/>
+      <p:bold r:id="rId27"/>
+      <p:italic r:id="rId28"/>
+      <p:boldItalic r:id="rId29"/>
     </p:embeddedFont>
   </p:embeddedFontLst>
   <p:defaultTextStyle>
-    <a:defPPr lvl="0" marR="0" rtl="0" algn="l">
+    <a:defPPr marR="0" lvl="0" algn="l" rtl="0">
       <a:lnSpc>
         <a:spcPct val="100000"/>
       </a:lnSpc>
@@ -55,7 +55,7 @@
         <a:spcPts val="0"/>
       </a:spcAft>
     </a:defPPr>
-    <a:lvl1pPr lvl="0" marR="0" rtl="0" algn="l">
+    <a:lvl1pPr marR="0" lvl="0" algn="l" rtl="0">
       <a:lnSpc>
         <a:spcPct val="100000"/>
       </a:lnSpc>
@@ -69,7 +69,7 @@
         <a:srgbClr val="000000"/>
       </a:buClr>
       <a:buFont typeface="Arial"/>
-      <a:defRPr b="0" i="0" sz="1400" u="none" cap="none" strike="noStrike">
+      <a:defRPr sz="1400" b="0" i="0" u="none" strike="noStrike" cap="none">
         <a:solidFill>
           <a:srgbClr val="000000"/>
         </a:solidFill>
@@ -79,7 +79,7 @@
         <a:sym typeface="Arial"/>
       </a:defRPr>
     </a:lvl1pPr>
-    <a:lvl2pPr lvl="1" marR="0" rtl="0" algn="l">
+    <a:lvl2pPr marR="0" lvl="1" algn="l" rtl="0">
       <a:lnSpc>
         <a:spcPct val="100000"/>
       </a:lnSpc>
@@ -93,7 +93,7 @@
         <a:srgbClr val="000000"/>
       </a:buClr>
       <a:buFont typeface="Arial"/>
-      <a:defRPr b="0" i="0" sz="1400" u="none" cap="none" strike="noStrike">
+      <a:defRPr sz="1400" b="0" i="0" u="none" strike="noStrike" cap="none">
         <a:solidFill>
           <a:srgbClr val="000000"/>
         </a:solidFill>
@@ -103,7 +103,7 @@
         <a:sym typeface="Arial"/>
       </a:defRPr>
     </a:lvl2pPr>
-    <a:lvl3pPr lvl="2" marR="0" rtl="0" algn="l">
+    <a:lvl3pPr marR="0" lvl="2" algn="l" rtl="0">
       <a:lnSpc>
         <a:spcPct val="100000"/>
       </a:lnSpc>
@@ -117,7 +117,7 @@
         <a:srgbClr val="000000"/>
       </a:buClr>
       <a:buFont typeface="Arial"/>
-      <a:defRPr b="0" i="0" sz="1400" u="none" cap="none" strike="noStrike">
+      <a:defRPr sz="1400" b="0" i="0" u="none" strike="noStrike" cap="none">
         <a:solidFill>
           <a:srgbClr val="000000"/>
         </a:solidFill>
@@ -127,7 +127,7 @@
         <a:sym typeface="Arial"/>
       </a:defRPr>
     </a:lvl3pPr>
-    <a:lvl4pPr lvl="3" marR="0" rtl="0" algn="l">
+    <a:lvl4pPr marR="0" lvl="3" algn="l" rtl="0">
       <a:lnSpc>
         <a:spcPct val="100000"/>
       </a:lnSpc>
@@ -141,7 +141,7 @@
         <a:srgbClr val="000000"/>
       </a:buClr>
       <a:buFont typeface="Arial"/>
-      <a:defRPr b="0" i="0" sz="1400" u="none" cap="none" strike="noStrike">
+      <a:defRPr sz="1400" b="0" i="0" u="none" strike="noStrike" cap="none">
         <a:solidFill>
           <a:srgbClr val="000000"/>
         </a:solidFill>
@@ -151,7 +151,7 @@
         <a:sym typeface="Arial"/>
       </a:defRPr>
     </a:lvl4pPr>
-    <a:lvl5pPr lvl="4" marR="0" rtl="0" algn="l">
+    <a:lvl5pPr marR="0" lvl="4" algn="l" rtl="0">
       <a:lnSpc>
         <a:spcPct val="100000"/>
       </a:lnSpc>
@@ -165,7 +165,7 @@
         <a:srgbClr val="000000"/>
       </a:buClr>
       <a:buFont typeface="Arial"/>
-      <a:defRPr b="0" i="0" sz="1400" u="none" cap="none" strike="noStrike">
+      <a:defRPr sz="1400" b="0" i="0" u="none" strike="noStrike" cap="none">
         <a:solidFill>
           <a:srgbClr val="000000"/>
         </a:solidFill>
@@ -175,7 +175,7 @@
         <a:sym typeface="Arial"/>
       </a:defRPr>
     </a:lvl5pPr>
-    <a:lvl6pPr lvl="5" marR="0" rtl="0" algn="l">
+    <a:lvl6pPr marR="0" lvl="5" algn="l" rtl="0">
       <a:lnSpc>
         <a:spcPct val="100000"/>
       </a:lnSpc>
@@ -189,7 +189,7 @@
         <a:srgbClr val="000000"/>
       </a:buClr>
       <a:buFont typeface="Arial"/>
-      <a:defRPr b="0" i="0" sz="1400" u="none" cap="none" strike="noStrike">
+      <a:defRPr sz="1400" b="0" i="0" u="none" strike="noStrike" cap="none">
         <a:solidFill>
           <a:srgbClr val="000000"/>
         </a:solidFill>
@@ -199,7 +199,7 @@
         <a:sym typeface="Arial"/>
       </a:defRPr>
     </a:lvl6pPr>
-    <a:lvl7pPr lvl="6" marR="0" rtl="0" algn="l">
+    <a:lvl7pPr marR="0" lvl="6" algn="l" rtl="0">
       <a:lnSpc>
         <a:spcPct val="100000"/>
       </a:lnSpc>
@@ -213,7 +213,7 @@
         <a:srgbClr val="000000"/>
       </a:buClr>
       <a:buFont typeface="Arial"/>
-      <a:defRPr b="0" i="0" sz="1400" u="none" cap="none" strike="noStrike">
+      <a:defRPr sz="1400" b="0" i="0" u="none" strike="noStrike" cap="none">
         <a:solidFill>
           <a:srgbClr val="000000"/>
         </a:solidFill>
@@ -223,7 +223,7 @@
         <a:sym typeface="Arial"/>
       </a:defRPr>
     </a:lvl7pPr>
-    <a:lvl8pPr lvl="7" marR="0" rtl="0" algn="l">
+    <a:lvl8pPr marR="0" lvl="7" algn="l" rtl="0">
       <a:lnSpc>
         <a:spcPct val="100000"/>
       </a:lnSpc>
@@ -237,7 +237,7 @@
         <a:srgbClr val="000000"/>
       </a:buClr>
       <a:buFont typeface="Arial"/>
-      <a:defRPr b="0" i="0" sz="1400" u="none" cap="none" strike="noStrike">
+      <a:defRPr sz="1400" b="0" i="0" u="none" strike="noStrike" cap="none">
         <a:solidFill>
           <a:srgbClr val="000000"/>
         </a:solidFill>
@@ -247,7 +247,7 @@
         <a:sym typeface="Arial"/>
       </a:defRPr>
     </a:lvl8pPr>
-    <a:lvl9pPr lvl="8" marR="0" rtl="0" algn="l">
+    <a:lvl9pPr marR="0" lvl="8" algn="l" rtl="0">
       <a:lnSpc>
         <a:spcPct val="100000"/>
       </a:lnSpc>
@@ -261,7 +261,7 @@
         <a:srgbClr val="000000"/>
       </a:buClr>
       <a:buFont typeface="Arial"/>
-      <a:defRPr b="0" i="0" sz="1400" u="none" cap="none" strike="noStrike">
+      <a:defRPr sz="1400" b="0" i="0" u="none" strike="noStrike" cap="none">
         <a:solidFill>
           <a:srgbClr val="000000"/>
         </a:solidFill>
@@ -274,7 +274,7 @@
   </p:defaultTextStyle>
   <p:extLst>
     <p:ext uri="{EFAFB233-063F-42B5-8137-9DF3F51BA10A}">
-      <p15:sldGuideLst>
+      <p15:sldGuideLst xmlns:p15="http://schemas.microsoft.com/office/powerpoint/2012/main">
         <p15:guide id="1" pos="609">
           <p15:clr>
             <a:srgbClr val="747775"/>
@@ -296,12 +296,209 @@
 </p:presentation>
 </file>
 
+<file path=ppt/changesInfos/changesInfo1.xml><?xml version="1.0" encoding="utf-8"?>
+<pc:chgInfo xmlns:a="http://schemas.openxmlformats.org/drawingml/2006/main" xmlns:r="http://schemas.openxmlformats.org/officeDocument/2006/relationships" xmlns:ac="http://schemas.microsoft.com/office/drawing/2013/main/command" xmlns:pc="http://schemas.microsoft.com/office/powerpoint/2013/main/command">
+  <pc:docChgLst>
+    <pc:chgData name="juani vila bach" userId="140d79d91c36b714" providerId="LiveId" clId="{681BBBA0-CB6B-4408-8383-25A2ECA50787}"/>
+    <pc:docChg chg="undo custSel modSld">
+      <pc:chgData name="juani vila bach" userId="140d79d91c36b714" providerId="LiveId" clId="{681BBBA0-CB6B-4408-8383-25A2ECA50787}" dt="2025-12-28T06:00:35.493" v="18" actId="255"/>
+      <pc:docMkLst>
+        <pc:docMk/>
+      </pc:docMkLst>
+      <pc:sldChg chg="modSp mod">
+        <pc:chgData name="juani vila bach" userId="140d79d91c36b714" providerId="LiveId" clId="{681BBBA0-CB6B-4408-8383-25A2ECA50787}" dt="2025-12-28T05:59:19.388" v="9" actId="20577"/>
+        <pc:sldMkLst>
+          <pc:docMk/>
+          <pc:sldMk cId="0" sldId="260"/>
+        </pc:sldMkLst>
+        <pc:spChg chg="mod">
+          <ac:chgData name="juani vila bach" userId="140d79d91c36b714" providerId="LiveId" clId="{681BBBA0-CB6B-4408-8383-25A2ECA50787}" dt="2025-12-28T05:59:09.552" v="1" actId="20577"/>
+          <ac:spMkLst>
+            <pc:docMk/>
+            <pc:sldMk cId="0" sldId="260"/>
+            <ac:spMk id="77" creationId="{00000000-0000-0000-0000-000000000000}"/>
+          </ac:spMkLst>
+        </pc:spChg>
+        <pc:spChg chg="mod">
+          <ac:chgData name="juani vila bach" userId="140d79d91c36b714" providerId="LiveId" clId="{681BBBA0-CB6B-4408-8383-25A2ECA50787}" dt="2025-12-28T05:59:10.811" v="2" actId="20577"/>
+          <ac:spMkLst>
+            <pc:docMk/>
+            <pc:sldMk cId="0" sldId="260"/>
+            <ac:spMk id="80" creationId="{00000000-0000-0000-0000-000000000000}"/>
+          </ac:spMkLst>
+        </pc:spChg>
+        <pc:spChg chg="mod">
+          <ac:chgData name="juani vila bach" userId="140d79d91c36b714" providerId="LiveId" clId="{681BBBA0-CB6B-4408-8383-25A2ECA50787}" dt="2025-12-28T05:59:11.895" v="3" actId="20577"/>
+          <ac:spMkLst>
+            <pc:docMk/>
+            <pc:sldMk cId="0" sldId="260"/>
+            <ac:spMk id="83" creationId="{00000000-0000-0000-0000-000000000000}"/>
+          </ac:spMkLst>
+        </pc:spChg>
+        <pc:spChg chg="mod">
+          <ac:chgData name="juani vila bach" userId="140d79d91c36b714" providerId="LiveId" clId="{681BBBA0-CB6B-4408-8383-25A2ECA50787}" dt="2025-12-28T05:59:12.796" v="4" actId="20577"/>
+          <ac:spMkLst>
+            <pc:docMk/>
+            <pc:sldMk cId="0" sldId="260"/>
+            <ac:spMk id="86" creationId="{00000000-0000-0000-0000-000000000000}"/>
+          </ac:spMkLst>
+        </pc:spChg>
+        <pc:spChg chg="mod">
+          <ac:chgData name="juani vila bach" userId="140d79d91c36b714" providerId="LiveId" clId="{681BBBA0-CB6B-4408-8383-25A2ECA50787}" dt="2025-12-28T05:59:14.330" v="5" actId="20577"/>
+          <ac:spMkLst>
+            <pc:docMk/>
+            <pc:sldMk cId="0" sldId="260"/>
+            <ac:spMk id="89" creationId="{00000000-0000-0000-0000-000000000000}"/>
+          </ac:spMkLst>
+        </pc:spChg>
+        <pc:spChg chg="mod">
+          <ac:chgData name="juani vila bach" userId="140d79d91c36b714" providerId="LiveId" clId="{681BBBA0-CB6B-4408-8383-25A2ECA50787}" dt="2025-12-28T05:59:15.499" v="6" actId="20577"/>
+          <ac:spMkLst>
+            <pc:docMk/>
+            <pc:sldMk cId="0" sldId="260"/>
+            <ac:spMk id="92" creationId="{00000000-0000-0000-0000-000000000000}"/>
+          </ac:spMkLst>
+        </pc:spChg>
+        <pc:spChg chg="mod">
+          <ac:chgData name="juani vila bach" userId="140d79d91c36b714" providerId="LiveId" clId="{681BBBA0-CB6B-4408-8383-25A2ECA50787}" dt="2025-12-28T05:59:19.388" v="9" actId="20577"/>
+          <ac:spMkLst>
+            <pc:docMk/>
+            <pc:sldMk cId="0" sldId="260"/>
+            <ac:spMk id="95" creationId="{00000000-0000-0000-0000-000000000000}"/>
+          </ac:spMkLst>
+        </pc:spChg>
+        <pc:spChg chg="mod">
+          <ac:chgData name="juani vila bach" userId="140d79d91c36b714" providerId="LiveId" clId="{681BBBA0-CB6B-4408-8383-25A2ECA50787}" dt="2025-12-28T05:59:08.390" v="0" actId="20577"/>
+          <ac:spMkLst>
+            <pc:docMk/>
+            <pc:sldMk cId="0" sldId="260"/>
+            <ac:spMk id="98" creationId="{00000000-0000-0000-0000-000000000000}"/>
+          </ac:spMkLst>
+        </pc:spChg>
+      </pc:sldChg>
+      <pc:sldChg chg="modSp mod">
+        <pc:chgData name="juani vila bach" userId="140d79d91c36b714" providerId="LiveId" clId="{681BBBA0-CB6B-4408-8383-25A2ECA50787}" dt="2025-12-28T06:00:02.732" v="13" actId="1076"/>
+        <pc:sldMkLst>
+          <pc:docMk/>
+          <pc:sldMk cId="0" sldId="267"/>
+        </pc:sldMkLst>
+        <pc:spChg chg="mod">
+          <ac:chgData name="juani vila bach" userId="140d79d91c36b714" providerId="LiveId" clId="{681BBBA0-CB6B-4408-8383-25A2ECA50787}" dt="2025-12-28T06:00:02.732" v="13" actId="1076"/>
+          <ac:spMkLst>
+            <pc:docMk/>
+            <pc:sldMk cId="0" sldId="267"/>
+            <ac:spMk id="158" creationId="{00000000-0000-0000-0000-000000000000}"/>
+          </ac:spMkLst>
+        </pc:spChg>
+        <pc:spChg chg="mod">
+          <ac:chgData name="juani vila bach" userId="140d79d91c36b714" providerId="LiveId" clId="{681BBBA0-CB6B-4408-8383-25A2ECA50787}" dt="2025-12-28T05:59:40.353" v="10" actId="1076"/>
+          <ac:spMkLst>
+            <pc:docMk/>
+            <pc:sldMk cId="0" sldId="267"/>
+            <ac:spMk id="161" creationId="{00000000-0000-0000-0000-000000000000}"/>
+          </ac:spMkLst>
+        </pc:spChg>
+      </pc:sldChg>
+      <pc:sldChg chg="modSp mod">
+        <pc:chgData name="juani vila bach" userId="140d79d91c36b714" providerId="LiveId" clId="{681BBBA0-CB6B-4408-8383-25A2ECA50787}" dt="2025-12-28T06:00:21.796" v="15" actId="255"/>
+        <pc:sldMkLst>
+          <pc:docMk/>
+          <pc:sldMk cId="0" sldId="273"/>
+        </pc:sldMkLst>
+        <pc:spChg chg="mod">
+          <ac:chgData name="juani vila bach" userId="140d79d91c36b714" providerId="LiveId" clId="{681BBBA0-CB6B-4408-8383-25A2ECA50787}" dt="2025-12-28T06:00:21.796" v="15" actId="255"/>
+          <ac:spMkLst>
+            <pc:docMk/>
+            <pc:sldMk cId="0" sldId="273"/>
+            <ac:spMk id="214" creationId="{00000000-0000-0000-0000-000000000000}"/>
+          </ac:spMkLst>
+        </pc:spChg>
+        <pc:spChg chg="mod">
+          <ac:chgData name="juani vila bach" userId="140d79d91c36b714" providerId="LiveId" clId="{681BBBA0-CB6B-4408-8383-25A2ECA50787}" dt="2025-12-28T06:00:21.796" v="15" actId="255"/>
+          <ac:spMkLst>
+            <pc:docMk/>
+            <pc:sldMk cId="0" sldId="273"/>
+            <ac:spMk id="215" creationId="{00000000-0000-0000-0000-000000000000}"/>
+          </ac:spMkLst>
+        </pc:spChg>
+        <pc:spChg chg="mod">
+          <ac:chgData name="juani vila bach" userId="140d79d91c36b714" providerId="LiveId" clId="{681BBBA0-CB6B-4408-8383-25A2ECA50787}" dt="2025-12-28T06:00:21.796" v="15" actId="255"/>
+          <ac:spMkLst>
+            <pc:docMk/>
+            <pc:sldMk cId="0" sldId="273"/>
+            <ac:spMk id="216" creationId="{00000000-0000-0000-0000-000000000000}"/>
+          </ac:spMkLst>
+        </pc:spChg>
+        <pc:spChg chg="mod">
+          <ac:chgData name="juani vila bach" userId="140d79d91c36b714" providerId="LiveId" clId="{681BBBA0-CB6B-4408-8383-25A2ECA50787}" dt="2025-12-28T06:00:21.796" v="15" actId="255"/>
+          <ac:spMkLst>
+            <pc:docMk/>
+            <pc:sldMk cId="0" sldId="273"/>
+            <ac:spMk id="217" creationId="{00000000-0000-0000-0000-000000000000}"/>
+          </ac:spMkLst>
+        </pc:spChg>
+      </pc:sldChg>
+      <pc:sldChg chg="modSp mod">
+        <pc:chgData name="juani vila bach" userId="140d79d91c36b714" providerId="LiveId" clId="{681BBBA0-CB6B-4408-8383-25A2ECA50787}" dt="2025-12-28T06:00:28.365" v="16" actId="255"/>
+        <pc:sldMkLst>
+          <pc:docMk/>
+          <pc:sldMk cId="0" sldId="274"/>
+        </pc:sldMkLst>
+        <pc:spChg chg="mod">
+          <ac:chgData name="juani vila bach" userId="140d79d91c36b714" providerId="LiveId" clId="{681BBBA0-CB6B-4408-8383-25A2ECA50787}" dt="2025-12-28T06:00:28.365" v="16" actId="255"/>
+          <ac:spMkLst>
+            <pc:docMk/>
+            <pc:sldMk cId="0" sldId="274"/>
+            <ac:spMk id="223" creationId="{00000000-0000-0000-0000-000000000000}"/>
+          </ac:spMkLst>
+        </pc:spChg>
+      </pc:sldChg>
+      <pc:sldChg chg="modSp mod">
+        <pc:chgData name="juani vila bach" userId="140d79d91c36b714" providerId="LiveId" clId="{681BBBA0-CB6B-4408-8383-25A2ECA50787}" dt="2025-12-28T06:00:32.009" v="17" actId="255"/>
+        <pc:sldMkLst>
+          <pc:docMk/>
+          <pc:sldMk cId="0" sldId="275"/>
+        </pc:sldMkLst>
+        <pc:spChg chg="mod">
+          <ac:chgData name="juani vila bach" userId="140d79d91c36b714" providerId="LiveId" clId="{681BBBA0-CB6B-4408-8383-25A2ECA50787}" dt="2025-12-28T06:00:32.009" v="17" actId="255"/>
+          <ac:spMkLst>
+            <pc:docMk/>
+            <pc:sldMk cId="0" sldId="275"/>
+            <ac:spMk id="231" creationId="{00000000-0000-0000-0000-000000000000}"/>
+          </ac:spMkLst>
+        </pc:spChg>
+      </pc:sldChg>
+      <pc:sldChg chg="modSp mod">
+        <pc:chgData name="juani vila bach" userId="140d79d91c36b714" providerId="LiveId" clId="{681BBBA0-CB6B-4408-8383-25A2ECA50787}" dt="2025-12-28T06:00:35.493" v="18" actId="255"/>
+        <pc:sldMkLst>
+          <pc:docMk/>
+          <pc:sldMk cId="0" sldId="276"/>
+        </pc:sldMkLst>
+        <pc:spChg chg="mod">
+          <ac:chgData name="juani vila bach" userId="140d79d91c36b714" providerId="LiveId" clId="{681BBBA0-CB6B-4408-8383-25A2ECA50787}" dt="2025-12-28T06:00:35.493" v="18" actId="255"/>
+          <ac:spMkLst>
+            <pc:docMk/>
+            <pc:sldMk cId="0" sldId="276"/>
+            <ac:spMk id="239" creationId="{00000000-0000-0000-0000-000000000000}"/>
+          </ac:spMkLst>
+        </pc:spChg>
+      </pc:sldChg>
+    </pc:docChg>
+  </pc:docChgLst>
+</pc:chgInfo>
+</file>
+
 <file path=ppt/notesMasters/notesMaster1.xml><?xml version="1.0" encoding="utf-8"?>
-<p:notesMaster xmlns:a="http://schemas.openxmlformats.org/drawingml/2006/main" xmlns:r="http://schemas.openxmlformats.org/officeDocument/2006/relationships" xmlns:mc="http://schemas.openxmlformats.org/markup-compatibility/2006" xmlns:mv="urn:schemas-microsoft-com:mac:vml" xmlns:p="http://schemas.openxmlformats.org/presentationml/2006/main" xmlns:c="http://schemas.openxmlformats.org/drawingml/2006/chart" xmlns:dgm="http://schemas.openxmlformats.org/drawingml/2006/diagram" xmlns:o="urn:schemas-microsoft-com:office:office" xmlns:v="urn:schemas-microsoft-com:vml" xmlns:pvml="urn:schemas-microsoft-com:office:powerpoint" xmlns:com="http://schemas.openxmlformats.org/drawingml/2006/compatibility" xmlns:p14="http://schemas.microsoft.com/office/powerpoint/2010/main" xmlns:p15="http://schemas.microsoft.com/office/powerpoint/2012/main" xmlns:ahyp="http://schemas.microsoft.com/office/drawing/2018/hyperlinkcolor">
+<p:notesMaster xmlns:a="http://schemas.openxmlformats.org/drawingml/2006/main" xmlns:r="http://schemas.openxmlformats.org/officeDocument/2006/relationships" xmlns:p="http://schemas.openxmlformats.org/presentationml/2006/main">
   <p:cSld>
+    <p:bg>
+      <p:bgRef idx="1001">
+        <a:schemeClr val="bg1"/>
+      </p:bgRef>
+    </p:bg>
     <p:spTree>
       <p:nvGrpSpPr>
-        <p:cNvPr id="2" name="Shape 2"/>
+        <p:cNvPr id="1" name="Shape 2"/>
         <p:cNvGrpSpPr/>
         <p:nvPr/>
       </p:nvGrpSpPr>
@@ -316,9 +513,11 @@
       <p:sp>
         <p:nvSpPr>
           <p:cNvPr id="3" name="Google Shape;3;n"/>
-          <p:cNvSpPr/>
+          <p:cNvSpPr>
+            <a:spLocks noGrp="1" noRot="1" noChangeAspect="1"/>
+          </p:cNvSpPr>
           <p:nvPr>
-            <p:ph idx="2" type="sldImg"/>
+            <p:ph type="sldImg" idx="2"/>
           </p:nvPr>
         </p:nvSpPr>
         <p:spPr>
@@ -327,9 +526,13 @@
             <a:ext cx="1928700" cy="3429000"/>
           </a:xfrm>
           <a:custGeom>
-            <a:rect b="b" l="l" r="r" t="t"/>
+            <a:avLst/>
+            <a:gdLst/>
+            <a:ahLst/>
+            <a:cxnLst/>
+            <a:rect l="l" t="t" r="r" b="b"/>
             <a:pathLst>
-              <a:path extrusionOk="0" h="120000" w="120000">
+              <a:path w="120000" h="120000" extrusionOk="0">
                 <a:moveTo>
                   <a:pt x="0" y="0"/>
                 </a:moveTo>
@@ -347,23 +550,25 @@
             </a:pathLst>
           </a:custGeom>
           <a:noFill/>
-          <a:ln cap="flat" cmpd="sng" w="9525">
+          <a:ln w="9525" cap="flat" cmpd="sng">
             <a:solidFill>
               <a:srgbClr val="000000"/>
             </a:solidFill>
             <a:prstDash val="solid"/>
             <a:round/>
-            <a:headEnd len="sm" w="sm" type="none"/>
-            <a:tailEnd len="sm" w="sm" type="none"/>
+            <a:headEnd type="none" w="sm" len="sm"/>
+            <a:tailEnd type="none" w="sm" len="sm"/>
           </a:ln>
         </p:spPr>
       </p:sp>
       <p:sp>
         <p:nvSpPr>
           <p:cNvPr id="4" name="Google Shape;4;n"/>
-          <p:cNvSpPr txBox="1"/>
+          <p:cNvSpPr txBox="1">
+            <a:spLocks noGrp="1"/>
+          </p:cNvSpPr>
           <p:nvPr>
-            <p:ph idx="1" type="body"/>
+            <p:ph type="body" idx="1"/>
           </p:nvPr>
         </p:nvSpPr>
         <p:spPr>
@@ -380,11 +585,11 @@
           </a:ln>
         </p:spPr>
         <p:txBody>
-          <a:bodyPr anchorCtr="0" anchor="t" bIns="91425" lIns="91425" spcFirstLastPara="1" rIns="91425" wrap="square" tIns="91425">
+          <a:bodyPr spcFirstLastPara="1" wrap="square" lIns="91425" tIns="91425" rIns="91425" bIns="91425" anchor="t" anchorCtr="0">
             <a:noAutofit/>
           </a:bodyPr>
           <a:lstStyle>
-            <a:lvl1pPr indent="-298450" lvl="0" marL="457200">
+            <a:lvl1pPr marL="457200" lvl="0" indent="-298450">
               <a:spcBef>
                 <a:spcPts val="0"/>
               </a:spcBef>
@@ -395,7 +600,7 @@
               <a:buChar char="●"/>
               <a:defRPr sz="1100"/>
             </a:lvl1pPr>
-            <a:lvl2pPr indent="-298450" lvl="1" marL="914400">
+            <a:lvl2pPr marL="914400" lvl="1" indent="-298450">
               <a:spcBef>
                 <a:spcPts val="0"/>
               </a:spcBef>
@@ -406,7 +611,7 @@
               <a:buChar char="○"/>
               <a:defRPr sz="1100"/>
             </a:lvl2pPr>
-            <a:lvl3pPr indent="-298450" lvl="2" marL="1371600">
+            <a:lvl3pPr marL="1371600" lvl="2" indent="-298450">
               <a:spcBef>
                 <a:spcPts val="0"/>
               </a:spcBef>
@@ -417,7 +622,7 @@
               <a:buChar char="■"/>
               <a:defRPr sz="1100"/>
             </a:lvl3pPr>
-            <a:lvl4pPr indent="-298450" lvl="3" marL="1828800">
+            <a:lvl4pPr marL="1828800" lvl="3" indent="-298450">
               <a:spcBef>
                 <a:spcPts val="0"/>
               </a:spcBef>
@@ -428,7 +633,7 @@
               <a:buChar char="●"/>
               <a:defRPr sz="1100"/>
             </a:lvl4pPr>
-            <a:lvl5pPr indent="-298450" lvl="4" marL="2286000">
+            <a:lvl5pPr marL="2286000" lvl="4" indent="-298450">
               <a:spcBef>
                 <a:spcPts val="0"/>
               </a:spcBef>
@@ -439,7 +644,7 @@
               <a:buChar char="○"/>
               <a:defRPr sz="1100"/>
             </a:lvl5pPr>
-            <a:lvl6pPr indent="-298450" lvl="5" marL="2743200">
+            <a:lvl6pPr marL="2743200" lvl="5" indent="-298450">
               <a:spcBef>
                 <a:spcPts val="0"/>
               </a:spcBef>
@@ -450,7 +655,7 @@
               <a:buChar char="■"/>
               <a:defRPr sz="1100"/>
             </a:lvl6pPr>
-            <a:lvl7pPr indent="-298450" lvl="6" marL="3200400">
+            <a:lvl7pPr marL="3200400" lvl="6" indent="-298450">
               <a:spcBef>
                 <a:spcPts val="0"/>
               </a:spcBef>
@@ -461,7 +666,7 @@
               <a:buChar char="●"/>
               <a:defRPr sz="1100"/>
             </a:lvl7pPr>
-            <a:lvl8pPr indent="-298450" lvl="7" marL="3657600">
+            <a:lvl8pPr marL="3657600" lvl="7" indent="-298450">
               <a:spcBef>
                 <a:spcPts val="0"/>
               </a:spcBef>
@@ -472,7 +677,7 @@
               <a:buChar char="○"/>
               <a:defRPr sz="1100"/>
             </a:lvl8pPr>
-            <a:lvl9pPr indent="-298450" lvl="8" marL="4114800">
+            <a:lvl9pPr marL="4114800" lvl="8" indent="-298450">
               <a:spcBef>
                 <a:spcPts val="0"/>
               </a:spcBef>
@@ -484,14 +689,16 @@
               <a:defRPr sz="1100"/>
             </a:lvl9pPr>
           </a:lstStyle>
-          <a:p/>
+          <a:p>
+            <a:endParaRPr/>
+          </a:p>
         </p:txBody>
       </p:sp>
     </p:spTree>
   </p:cSld>
-  <p:clrMap accent1="accent1" accent2="accent2" accent3="accent3" accent4="accent4" accent5="accent5" accent6="accent6" bg1="lt1" bg2="dk2" tx1="dk1" tx2="lt2" folHlink="folHlink" hlink="hlink"/>
+  <p:clrMap bg1="lt1" tx1="dk1" bg2="dk2" tx2="lt2" accent1="accent1" accent2="accent2" accent3="accent3" accent4="accent4" accent5="accent5" accent6="accent6" hlink="hlink" folHlink="folHlink"/>
   <p:notesStyle>
-    <a:defPPr lvl="0" marR="0" rtl="0" algn="l">
+    <a:defPPr marR="0" lvl="0" algn="l" rtl="0">
       <a:lnSpc>
         <a:spcPct val="100000"/>
       </a:lnSpc>
@@ -502,7 +709,7 @@
         <a:spcPts val="0"/>
       </a:spcAft>
     </a:defPPr>
-    <a:lvl1pPr lvl="0" marR="0" rtl="0" algn="l">
+    <a:lvl1pPr marR="0" lvl="0" algn="l" rtl="0">
       <a:lnSpc>
         <a:spcPct val="100000"/>
       </a:lnSpc>
@@ -516,7 +723,7 @@
         <a:srgbClr val="000000"/>
       </a:buClr>
       <a:buFont typeface="Arial"/>
-      <a:defRPr b="0" i="0" sz="1400" u="none" cap="none" strike="noStrike">
+      <a:defRPr sz="1400" b="0" i="0" u="none" strike="noStrike" cap="none">
         <a:solidFill>
           <a:srgbClr val="000000"/>
         </a:solidFill>
@@ -526,7 +733,7 @@
         <a:sym typeface="Arial"/>
       </a:defRPr>
     </a:lvl1pPr>
-    <a:lvl2pPr lvl="1" marR="0" rtl="0" algn="l">
+    <a:lvl2pPr marR="0" lvl="1" algn="l" rtl="0">
       <a:lnSpc>
         <a:spcPct val="100000"/>
       </a:lnSpc>
@@ -540,7 +747,7 @@
         <a:srgbClr val="000000"/>
       </a:buClr>
       <a:buFont typeface="Arial"/>
-      <a:defRPr b="0" i="0" sz="1400" u="none" cap="none" strike="noStrike">
+      <a:defRPr sz="1400" b="0" i="0" u="none" strike="noStrike" cap="none">
         <a:solidFill>
           <a:srgbClr val="000000"/>
         </a:solidFill>
@@ -550,7 +757,7 @@
         <a:sym typeface="Arial"/>
       </a:defRPr>
     </a:lvl2pPr>
-    <a:lvl3pPr lvl="2" marR="0" rtl="0" algn="l">
+    <a:lvl3pPr marR="0" lvl="2" algn="l" rtl="0">
       <a:lnSpc>
         <a:spcPct val="100000"/>
       </a:lnSpc>
@@ -564,7 +771,7 @@
         <a:srgbClr val="000000"/>
       </a:buClr>
       <a:buFont typeface="Arial"/>
-      <a:defRPr b="0" i="0" sz="1400" u="none" cap="none" strike="noStrike">
+      <a:defRPr sz="1400" b="0" i="0" u="none" strike="noStrike" cap="none">
         <a:solidFill>
           <a:srgbClr val="000000"/>
         </a:solidFill>
@@ -574,7 +781,7 @@
         <a:sym typeface="Arial"/>
       </a:defRPr>
     </a:lvl3pPr>
-    <a:lvl4pPr lvl="3" marR="0" rtl="0" algn="l">
+    <a:lvl4pPr marR="0" lvl="3" algn="l" rtl="0">
       <a:lnSpc>
         <a:spcPct val="100000"/>
       </a:lnSpc>
@@ -588,7 +795,7 @@
         <a:srgbClr val="000000"/>
       </a:buClr>
       <a:buFont typeface="Arial"/>
-      <a:defRPr b="0" i="0" sz="1400" u="none" cap="none" strike="noStrike">
+      <a:defRPr sz="1400" b="0" i="0" u="none" strike="noStrike" cap="none">
         <a:solidFill>
           <a:srgbClr val="000000"/>
         </a:solidFill>
@@ -598,7 +805,7 @@
         <a:sym typeface="Arial"/>
       </a:defRPr>
     </a:lvl4pPr>
-    <a:lvl5pPr lvl="4" marR="0" rtl="0" algn="l">
+    <a:lvl5pPr marR="0" lvl="4" algn="l" rtl="0">
       <a:lnSpc>
         <a:spcPct val="100000"/>
       </a:lnSpc>
@@ -612,7 +819,7 @@
         <a:srgbClr val="000000"/>
       </a:buClr>
       <a:buFont typeface="Arial"/>
-      <a:defRPr b="0" i="0" sz="1400" u="none" cap="none" strike="noStrike">
+      <a:defRPr sz="1400" b="0" i="0" u="none" strike="noStrike" cap="none">
         <a:solidFill>
           <a:srgbClr val="000000"/>
         </a:solidFill>
@@ -622,7 +829,7 @@
         <a:sym typeface="Arial"/>
       </a:defRPr>
     </a:lvl5pPr>
-    <a:lvl6pPr lvl="5" marR="0" rtl="0" algn="l">
+    <a:lvl6pPr marR="0" lvl="5" algn="l" rtl="0">
       <a:lnSpc>
         <a:spcPct val="100000"/>
       </a:lnSpc>
@@ -636,7 +843,7 @@
         <a:srgbClr val="000000"/>
       </a:buClr>
       <a:buFont typeface="Arial"/>
-      <a:defRPr b="0" i="0" sz="1400" u="none" cap="none" strike="noStrike">
+      <a:defRPr sz="1400" b="0" i="0" u="none" strike="noStrike" cap="none">
         <a:solidFill>
           <a:srgbClr val="000000"/>
         </a:solidFill>
@@ -646,7 +853,7 @@
         <a:sym typeface="Arial"/>
       </a:defRPr>
     </a:lvl6pPr>
-    <a:lvl7pPr lvl="6" marR="0" rtl="0" algn="l">
+    <a:lvl7pPr marR="0" lvl="6" algn="l" rtl="0">
       <a:lnSpc>
         <a:spcPct val="100000"/>
       </a:lnSpc>
@@ -660,7 +867,7 @@
         <a:srgbClr val="000000"/>
       </a:buClr>
       <a:buFont typeface="Arial"/>
-      <a:defRPr b="0" i="0" sz="1400" u="none" cap="none" strike="noStrike">
+      <a:defRPr sz="1400" b="0" i="0" u="none" strike="noStrike" cap="none">
         <a:solidFill>
           <a:srgbClr val="000000"/>
         </a:solidFill>
@@ -670,7 +877,7 @@
         <a:sym typeface="Arial"/>
       </a:defRPr>
     </a:lvl7pPr>
-    <a:lvl8pPr lvl="7" marR="0" rtl="0" algn="l">
+    <a:lvl8pPr marR="0" lvl="7" algn="l" rtl="0">
       <a:lnSpc>
         <a:spcPct val="100000"/>
       </a:lnSpc>
@@ -684,7 +891,7 @@
         <a:srgbClr val="000000"/>
       </a:buClr>
       <a:buFont typeface="Arial"/>
-      <a:defRPr b="0" i="0" sz="1400" u="none" cap="none" strike="noStrike">
+      <a:defRPr sz="1400" b="0" i="0" u="none" strike="noStrike" cap="none">
         <a:solidFill>
           <a:srgbClr val="000000"/>
         </a:solidFill>
@@ -694,7 +901,7 @@
         <a:sym typeface="Arial"/>
       </a:defRPr>
     </a:lvl8pPr>
-    <a:lvl9pPr lvl="8" marR="0" rtl="0" algn="l">
+    <a:lvl9pPr marR="0" lvl="8" algn="l" rtl="0">
       <a:lnSpc>
         <a:spcPct val="100000"/>
       </a:lnSpc>
@@ -708,7 +915,7 @@
         <a:srgbClr val="000000"/>
       </a:buClr>
       <a:buFont typeface="Arial"/>
-      <a:defRPr b="0" i="0" sz="1400" u="none" cap="none" strike="noStrike">
+      <a:defRPr sz="1400" b="0" i="0" u="none" strike="noStrike" cap="none">
         <a:solidFill>
           <a:srgbClr val="000000"/>
         </a:solidFill>
@@ -723,11 +930,11 @@
 </file>
 
 <file path=ppt/notesSlides/notesSlide1.xml><?xml version="1.0" encoding="utf-8"?>
-<p:notes xmlns:a="http://schemas.openxmlformats.org/drawingml/2006/main" xmlns:r="http://schemas.openxmlformats.org/officeDocument/2006/relationships" xmlns:mc="http://schemas.openxmlformats.org/markup-compatibility/2006" xmlns:mv="urn:schemas-microsoft-com:mac:vml" xmlns:p="http://schemas.openxmlformats.org/presentationml/2006/main" xmlns:c="http://schemas.openxmlformats.org/drawingml/2006/chart" xmlns:dgm="http://schemas.openxmlformats.org/drawingml/2006/diagram" xmlns:o="urn:schemas-microsoft-com:office:office" xmlns:v="urn:schemas-microsoft-com:vml" xmlns:pvml="urn:schemas-microsoft-com:office:powerpoint" xmlns:com="http://schemas.openxmlformats.org/drawingml/2006/compatibility" xmlns:p14="http://schemas.microsoft.com/office/powerpoint/2010/main" xmlns:p15="http://schemas.microsoft.com/office/powerpoint/2012/main" xmlns:ahyp="http://schemas.microsoft.com/office/drawing/2018/hyperlinkcolor" showMasterPhAnim="0" showMasterSp="0">
+<p:notes xmlns:a="http://schemas.openxmlformats.org/drawingml/2006/main" xmlns:r="http://schemas.openxmlformats.org/officeDocument/2006/relationships" xmlns:p="http://schemas.openxmlformats.org/presentationml/2006/main" showMasterSp="0" showMasterPhAnim="0">
   <p:cSld>
     <p:spTree>
       <p:nvGrpSpPr>
-        <p:cNvPr id="50" name="Shape 50"/>
+        <p:cNvPr id="1" name="Shape 50"/>
         <p:cNvGrpSpPr/>
         <p:nvPr/>
       </p:nvGrpSpPr>
@@ -742,9 +949,11 @@
       <p:sp>
         <p:nvSpPr>
           <p:cNvPr id="51" name="Google Shape;51;p:notes"/>
-          <p:cNvSpPr/>
+          <p:cNvSpPr>
+            <a:spLocks noGrp="1" noRot="1" noChangeAspect="1"/>
+          </p:cNvSpPr>
           <p:nvPr>
-            <p:ph idx="2" type="sldImg"/>
+            <p:ph type="sldImg" idx="2"/>
           </p:nvPr>
         </p:nvSpPr>
         <p:spPr>
@@ -753,9 +962,13 @@
             <a:ext cx="1928700" cy="3429000"/>
           </a:xfrm>
           <a:custGeom>
-            <a:rect b="b" l="l" r="r" t="t"/>
+            <a:avLst/>
+            <a:gdLst/>
+            <a:ahLst/>
+            <a:cxnLst/>
+            <a:rect l="l" t="t" r="r" b="b"/>
             <a:pathLst>
-              <a:path extrusionOk="0" h="120000" w="120000">
+              <a:path w="120000" h="120000" extrusionOk="0">
                 <a:moveTo>
                   <a:pt x="0" y="0"/>
                 </a:moveTo>
@@ -777,9 +990,11 @@
       <p:sp>
         <p:nvSpPr>
           <p:cNvPr id="52" name="Google Shape;52;p:notes"/>
-          <p:cNvSpPr txBox="1"/>
+          <p:cNvSpPr txBox="1">
+            <a:spLocks noGrp="1"/>
+          </p:cNvSpPr>
           <p:nvPr>
-            <p:ph idx="1" type="body"/>
+            <p:ph type="body" idx="1"/>
           </p:nvPr>
         </p:nvSpPr>
         <p:spPr>
@@ -792,12 +1007,12 @@
           </a:prstGeom>
         </p:spPr>
         <p:txBody>
-          <a:bodyPr anchorCtr="0" anchor="t" bIns="91425" lIns="91425" spcFirstLastPara="1" rIns="91425" wrap="square" tIns="91425">
+          <a:bodyPr spcFirstLastPara="1" wrap="square" lIns="91425" tIns="91425" rIns="91425" bIns="91425" anchor="t" anchorCtr="0">
             <a:noAutofit/>
           </a:bodyPr>
           <a:lstStyle/>
           <a:p>
-            <a:pPr indent="0" lvl="0" marL="0" rtl="0" algn="l">
+            <a:pPr marL="0" lvl="0" indent="0" algn="l" rtl="0">
               <a:spcBef>
                 <a:spcPts val="0"/>
               </a:spcBef>
@@ -806,9 +1021,6 @@
               </a:spcAft>
               <a:buNone/>
             </a:pPr>
-            <a:r>
-              <a:t/>
-            </a:r>
             <a:endParaRPr/>
           </a:p>
         </p:txBody>
@@ -822,11 +1034,11 @@
 </file>
 
 <file path=ppt/notesSlides/notesSlide10.xml><?xml version="1.0" encoding="utf-8"?>
-<p:notes xmlns:a="http://schemas.openxmlformats.org/drawingml/2006/main" xmlns:r="http://schemas.openxmlformats.org/officeDocument/2006/relationships" xmlns:mc="http://schemas.openxmlformats.org/markup-compatibility/2006" xmlns:mv="urn:schemas-microsoft-com:mac:vml" xmlns:p="http://schemas.openxmlformats.org/presentationml/2006/main" xmlns:c="http://schemas.openxmlformats.org/drawingml/2006/chart" xmlns:dgm="http://schemas.openxmlformats.org/drawingml/2006/diagram" xmlns:o="urn:schemas-microsoft-com:office:office" xmlns:v="urn:schemas-microsoft-com:vml" xmlns:pvml="urn:schemas-microsoft-com:office:powerpoint" xmlns:com="http://schemas.openxmlformats.org/drawingml/2006/compatibility" xmlns:p14="http://schemas.microsoft.com/office/powerpoint/2010/main" xmlns:p15="http://schemas.microsoft.com/office/powerpoint/2012/main" xmlns:ahyp="http://schemas.microsoft.com/office/drawing/2018/hyperlinkcolor" showMasterPhAnim="0" showMasterSp="0">
+<p:notes xmlns:a="http://schemas.openxmlformats.org/drawingml/2006/main" xmlns:r="http://schemas.openxmlformats.org/officeDocument/2006/relationships" xmlns:p="http://schemas.openxmlformats.org/presentationml/2006/main" showMasterSp="0" showMasterPhAnim="0">
   <p:cSld>
     <p:spTree>
       <p:nvGrpSpPr>
-        <p:cNvPr id="124" name="Shape 124"/>
+        <p:cNvPr id="1" name="Shape 124"/>
         <p:cNvGrpSpPr/>
         <p:nvPr/>
       </p:nvGrpSpPr>
@@ -841,9 +1053,11 @@
       <p:sp>
         <p:nvSpPr>
           <p:cNvPr id="125" name="Google Shape;125;g36500989760_0_226:notes"/>
-          <p:cNvSpPr/>
+          <p:cNvSpPr>
+            <a:spLocks noGrp="1" noRot="1" noChangeAspect="1"/>
+          </p:cNvSpPr>
           <p:nvPr>
-            <p:ph idx="2" type="sldImg"/>
+            <p:ph type="sldImg" idx="2"/>
           </p:nvPr>
         </p:nvSpPr>
         <p:spPr>
@@ -852,9 +1066,13 @@
             <a:ext cx="1928700" cy="3429000"/>
           </a:xfrm>
           <a:custGeom>
-            <a:rect b="b" l="l" r="r" t="t"/>
+            <a:avLst/>
+            <a:gdLst/>
+            <a:ahLst/>
+            <a:cxnLst/>
+            <a:rect l="l" t="t" r="r" b="b"/>
             <a:pathLst>
-              <a:path extrusionOk="0" h="120000" w="120000">
+              <a:path w="120000" h="120000" extrusionOk="0">
                 <a:moveTo>
                   <a:pt x="0" y="0"/>
                 </a:moveTo>
@@ -876,9 +1094,11 @@
       <p:sp>
         <p:nvSpPr>
           <p:cNvPr id="126" name="Google Shape;126;g36500989760_0_226:notes"/>
-          <p:cNvSpPr txBox="1"/>
+          <p:cNvSpPr txBox="1">
+            <a:spLocks noGrp="1"/>
+          </p:cNvSpPr>
           <p:nvPr>
-            <p:ph idx="1" type="body"/>
+            <p:ph type="body" idx="1"/>
           </p:nvPr>
         </p:nvSpPr>
         <p:spPr>
@@ -891,12 +1111,12 @@
           </a:prstGeom>
         </p:spPr>
         <p:txBody>
-          <a:bodyPr anchorCtr="0" anchor="t" bIns="91425" lIns="91425" spcFirstLastPara="1" rIns="91425" wrap="square" tIns="91425">
+          <a:bodyPr spcFirstLastPara="1" wrap="square" lIns="91425" tIns="91425" rIns="91425" bIns="91425" anchor="t" anchorCtr="0">
             <a:noAutofit/>
           </a:bodyPr>
           <a:lstStyle/>
           <a:p>
-            <a:pPr indent="0" lvl="0" marL="0" rtl="0" algn="l">
+            <a:pPr marL="0" lvl="0" indent="0" algn="l" rtl="0">
               <a:spcBef>
                 <a:spcPts val="0"/>
               </a:spcBef>
@@ -905,9 +1125,6 @@
               </a:spcAft>
               <a:buNone/>
             </a:pPr>
-            <a:r>
-              <a:t/>
-            </a:r>
             <a:endParaRPr/>
           </a:p>
         </p:txBody>
@@ -921,11 +1138,11 @@
 </file>
 
 <file path=ppt/notesSlides/notesSlide11.xml><?xml version="1.0" encoding="utf-8"?>
-<p:notes xmlns:a="http://schemas.openxmlformats.org/drawingml/2006/main" xmlns:r="http://schemas.openxmlformats.org/officeDocument/2006/relationships" xmlns:mc="http://schemas.openxmlformats.org/markup-compatibility/2006" xmlns:mv="urn:schemas-microsoft-com:mac:vml" xmlns:p="http://schemas.openxmlformats.org/presentationml/2006/main" xmlns:c="http://schemas.openxmlformats.org/drawingml/2006/chart" xmlns:dgm="http://schemas.openxmlformats.org/drawingml/2006/diagram" xmlns:o="urn:schemas-microsoft-com:office:office" xmlns:v="urn:schemas-microsoft-com:vml" xmlns:pvml="urn:schemas-microsoft-com:office:powerpoint" xmlns:com="http://schemas.openxmlformats.org/drawingml/2006/compatibility" xmlns:p14="http://schemas.microsoft.com/office/powerpoint/2010/main" xmlns:p15="http://schemas.microsoft.com/office/powerpoint/2012/main" xmlns:ahyp="http://schemas.microsoft.com/office/drawing/2018/hyperlinkcolor" showMasterPhAnim="0" showMasterSp="0">
+<p:notes xmlns:a="http://schemas.openxmlformats.org/drawingml/2006/main" xmlns:r="http://schemas.openxmlformats.org/officeDocument/2006/relationships" xmlns:p="http://schemas.openxmlformats.org/presentationml/2006/main" showMasterSp="0" showMasterPhAnim="0">
   <p:cSld>
     <p:spTree>
       <p:nvGrpSpPr>
-        <p:cNvPr id="130" name="Shape 130"/>
+        <p:cNvPr id="1" name="Shape 130"/>
         <p:cNvGrpSpPr/>
         <p:nvPr/>
       </p:nvGrpSpPr>
@@ -940,9 +1157,11 @@
       <p:sp>
         <p:nvSpPr>
           <p:cNvPr id="131" name="Google Shape;131;g36500989760_0_43:notes"/>
-          <p:cNvSpPr/>
+          <p:cNvSpPr>
+            <a:spLocks noGrp="1" noRot="1" noChangeAspect="1"/>
+          </p:cNvSpPr>
           <p:nvPr>
-            <p:ph idx="2" type="sldImg"/>
+            <p:ph type="sldImg" idx="2"/>
           </p:nvPr>
         </p:nvSpPr>
         <p:spPr>
@@ -951,9 +1170,13 @@
             <a:ext cx="1928700" cy="3429000"/>
           </a:xfrm>
           <a:custGeom>
-            <a:rect b="b" l="l" r="r" t="t"/>
+            <a:avLst/>
+            <a:gdLst/>
+            <a:ahLst/>
+            <a:cxnLst/>
+            <a:rect l="l" t="t" r="r" b="b"/>
             <a:pathLst>
-              <a:path extrusionOk="0" h="120000" w="120000">
+              <a:path w="120000" h="120000" extrusionOk="0">
                 <a:moveTo>
                   <a:pt x="0" y="0"/>
                 </a:moveTo>
@@ -975,9 +1198,11 @@
       <p:sp>
         <p:nvSpPr>
           <p:cNvPr id="132" name="Google Shape;132;g36500989760_0_43:notes"/>
-          <p:cNvSpPr txBox="1"/>
+          <p:cNvSpPr txBox="1">
+            <a:spLocks noGrp="1"/>
+          </p:cNvSpPr>
           <p:nvPr>
-            <p:ph idx="1" type="body"/>
+            <p:ph type="body" idx="1"/>
           </p:nvPr>
         </p:nvSpPr>
         <p:spPr>
@@ -990,12 +1215,12 @@
           </a:prstGeom>
         </p:spPr>
         <p:txBody>
-          <a:bodyPr anchorCtr="0" anchor="t" bIns="91425" lIns="91425" spcFirstLastPara="1" rIns="91425" wrap="square" tIns="91425">
+          <a:bodyPr spcFirstLastPara="1" wrap="square" lIns="91425" tIns="91425" rIns="91425" bIns="91425" anchor="t" anchorCtr="0">
             <a:noAutofit/>
           </a:bodyPr>
           <a:lstStyle/>
           <a:p>
-            <a:pPr indent="0" lvl="0" marL="0" rtl="0" algn="l">
+            <a:pPr marL="0" lvl="0" indent="0" algn="l" rtl="0">
               <a:spcBef>
                 <a:spcPts val="0"/>
               </a:spcBef>
@@ -1004,9 +1229,6 @@
               </a:spcAft>
               <a:buNone/>
             </a:pPr>
-            <a:r>
-              <a:t/>
-            </a:r>
             <a:endParaRPr/>
           </a:p>
         </p:txBody>
@@ -1020,11 +1242,11 @@
 </file>
 
 <file path=ppt/notesSlides/notesSlide12.xml><?xml version="1.0" encoding="utf-8"?>
-<p:notes xmlns:a="http://schemas.openxmlformats.org/drawingml/2006/main" xmlns:r="http://schemas.openxmlformats.org/officeDocument/2006/relationships" xmlns:mc="http://schemas.openxmlformats.org/markup-compatibility/2006" xmlns:mv="urn:schemas-microsoft-com:mac:vml" xmlns:p="http://schemas.openxmlformats.org/presentationml/2006/main" xmlns:c="http://schemas.openxmlformats.org/drawingml/2006/chart" xmlns:dgm="http://schemas.openxmlformats.org/drawingml/2006/diagram" xmlns:o="urn:schemas-microsoft-com:office:office" xmlns:v="urn:schemas-microsoft-com:vml" xmlns:pvml="urn:schemas-microsoft-com:office:powerpoint" xmlns:com="http://schemas.openxmlformats.org/drawingml/2006/compatibility" xmlns:p14="http://schemas.microsoft.com/office/powerpoint/2010/main" xmlns:p15="http://schemas.microsoft.com/office/powerpoint/2012/main" xmlns:ahyp="http://schemas.microsoft.com/office/drawing/2018/hyperlinkcolor" showMasterPhAnim="0" showMasterSp="0">
+<p:notes xmlns:a="http://schemas.openxmlformats.org/drawingml/2006/main" xmlns:r="http://schemas.openxmlformats.org/officeDocument/2006/relationships" xmlns:p="http://schemas.openxmlformats.org/presentationml/2006/main" showMasterSp="0" showMasterPhAnim="0">
   <p:cSld>
     <p:spTree>
       <p:nvGrpSpPr>
-        <p:cNvPr id="134" name="Shape 134"/>
+        <p:cNvPr id="1" name="Shape 134"/>
         <p:cNvGrpSpPr/>
         <p:nvPr/>
       </p:nvGrpSpPr>
@@ -1039,20 +1261,26 @@
       <p:sp>
         <p:nvSpPr>
           <p:cNvPr id="135" name="Google Shape;135;g36500989760_0_46:notes"/>
-          <p:cNvSpPr/>
+          <p:cNvSpPr>
+            <a:spLocks noGrp="1" noRot="1" noChangeAspect="1"/>
+          </p:cNvSpPr>
           <p:nvPr>
-            <p:ph idx="2" type="sldImg"/>
+            <p:ph type="sldImg" idx="2"/>
           </p:nvPr>
         </p:nvSpPr>
         <p:spPr>
           <a:xfrm>
-            <a:off x="2464919" y="685800"/>
-            <a:ext cx="1928700" cy="3429000"/>
+            <a:off x="2465388" y="685800"/>
+            <a:ext cx="1928812" cy="3429000"/>
           </a:xfrm>
           <a:custGeom>
-            <a:rect b="b" l="l" r="r" t="t"/>
+            <a:avLst/>
+            <a:gdLst/>
+            <a:ahLst/>
+            <a:cxnLst/>
+            <a:rect l="l" t="t" r="r" b="b"/>
             <a:pathLst>
-              <a:path extrusionOk="0" h="120000" w="120000">
+              <a:path w="120000" h="120000" extrusionOk="0">
                 <a:moveTo>
                   <a:pt x="0" y="0"/>
                 </a:moveTo>
@@ -1074,9 +1302,11 @@
       <p:sp>
         <p:nvSpPr>
           <p:cNvPr id="136" name="Google Shape;136;g36500989760_0_46:notes"/>
-          <p:cNvSpPr txBox="1"/>
+          <p:cNvSpPr txBox="1">
+            <a:spLocks noGrp="1"/>
+          </p:cNvSpPr>
           <p:nvPr>
-            <p:ph idx="1" type="body"/>
+            <p:ph type="body" idx="1"/>
           </p:nvPr>
         </p:nvSpPr>
         <p:spPr>
@@ -1089,12 +1319,12 @@
           </a:prstGeom>
         </p:spPr>
         <p:txBody>
-          <a:bodyPr anchorCtr="0" anchor="t" bIns="91425" lIns="91425" spcFirstLastPara="1" rIns="91425" wrap="square" tIns="91425">
+          <a:bodyPr spcFirstLastPara="1" wrap="square" lIns="91425" tIns="91425" rIns="91425" bIns="91425" anchor="t" anchorCtr="0">
             <a:noAutofit/>
           </a:bodyPr>
           <a:lstStyle/>
           <a:p>
-            <a:pPr indent="0" lvl="0" marL="0" rtl="0" algn="l">
+            <a:pPr marL="0" lvl="0" indent="0" algn="l" rtl="0">
               <a:spcBef>
                 <a:spcPts val="0"/>
               </a:spcBef>
@@ -1103,9 +1333,6 @@
               </a:spcAft>
               <a:buNone/>
             </a:pPr>
-            <a:r>
-              <a:t/>
-            </a:r>
             <a:endParaRPr/>
           </a:p>
         </p:txBody>
@@ -1119,11 +1346,11 @@
 </file>
 
 <file path=ppt/notesSlides/notesSlide13.xml><?xml version="1.0" encoding="utf-8"?>
-<p:notes xmlns:a="http://schemas.openxmlformats.org/drawingml/2006/main" xmlns:r="http://schemas.openxmlformats.org/officeDocument/2006/relationships" xmlns:mc="http://schemas.openxmlformats.org/markup-compatibility/2006" xmlns:mv="urn:schemas-microsoft-com:mac:vml" xmlns:p="http://schemas.openxmlformats.org/presentationml/2006/main" xmlns:c="http://schemas.openxmlformats.org/drawingml/2006/chart" xmlns:dgm="http://schemas.openxmlformats.org/drawingml/2006/diagram" xmlns:o="urn:schemas-microsoft-com:office:office" xmlns:v="urn:schemas-microsoft-com:vml" xmlns:pvml="urn:schemas-microsoft-com:office:powerpoint" xmlns:com="http://schemas.openxmlformats.org/drawingml/2006/compatibility" xmlns:p14="http://schemas.microsoft.com/office/powerpoint/2010/main" xmlns:p15="http://schemas.microsoft.com/office/powerpoint/2012/main" xmlns:ahyp="http://schemas.microsoft.com/office/drawing/2018/hyperlinkcolor" showMasterPhAnim="0" showMasterSp="0">
+<p:notes xmlns:a="http://schemas.openxmlformats.org/drawingml/2006/main" xmlns:r="http://schemas.openxmlformats.org/officeDocument/2006/relationships" xmlns:p="http://schemas.openxmlformats.org/presentationml/2006/main" showMasterSp="0" showMasterPhAnim="0">
   <p:cSld>
     <p:spTree>
       <p:nvGrpSpPr>
-        <p:cNvPr id="162" name="Shape 162"/>
+        <p:cNvPr id="1" name="Shape 162"/>
         <p:cNvGrpSpPr/>
         <p:nvPr/>
       </p:nvGrpSpPr>
@@ -1138,9 +1365,11 @@
       <p:sp>
         <p:nvSpPr>
           <p:cNvPr id="163" name="Google Shape;163;g36500989760_0_300:notes"/>
-          <p:cNvSpPr/>
+          <p:cNvSpPr>
+            <a:spLocks noGrp="1" noRot="1" noChangeAspect="1"/>
+          </p:cNvSpPr>
           <p:nvPr>
-            <p:ph idx="2" type="sldImg"/>
+            <p:ph type="sldImg" idx="2"/>
           </p:nvPr>
         </p:nvSpPr>
         <p:spPr>
@@ -1149,9 +1378,13 @@
             <a:ext cx="1928700" cy="3429000"/>
           </a:xfrm>
           <a:custGeom>
-            <a:rect b="b" l="l" r="r" t="t"/>
+            <a:avLst/>
+            <a:gdLst/>
+            <a:ahLst/>
+            <a:cxnLst/>
+            <a:rect l="l" t="t" r="r" b="b"/>
             <a:pathLst>
-              <a:path extrusionOk="0" h="120000" w="120000">
+              <a:path w="120000" h="120000" extrusionOk="0">
                 <a:moveTo>
                   <a:pt x="0" y="0"/>
                 </a:moveTo>
@@ -1173,9 +1406,11 @@
       <p:sp>
         <p:nvSpPr>
           <p:cNvPr id="164" name="Google Shape;164;g36500989760_0_300:notes"/>
-          <p:cNvSpPr txBox="1"/>
+          <p:cNvSpPr txBox="1">
+            <a:spLocks noGrp="1"/>
+          </p:cNvSpPr>
           <p:nvPr>
-            <p:ph idx="1" type="body"/>
+            <p:ph type="body" idx="1"/>
           </p:nvPr>
         </p:nvSpPr>
         <p:spPr>
@@ -1188,12 +1423,12 @@
           </a:prstGeom>
         </p:spPr>
         <p:txBody>
-          <a:bodyPr anchorCtr="0" anchor="t" bIns="91425" lIns="91425" spcFirstLastPara="1" rIns="91425" wrap="square" tIns="91425">
+          <a:bodyPr spcFirstLastPara="1" wrap="square" lIns="91425" tIns="91425" rIns="91425" bIns="91425" anchor="t" anchorCtr="0">
             <a:noAutofit/>
           </a:bodyPr>
           <a:lstStyle/>
           <a:p>
-            <a:pPr indent="0" lvl="0" marL="0" rtl="0" algn="l">
+            <a:pPr marL="0" lvl="0" indent="0" algn="l" rtl="0">
               <a:spcBef>
                 <a:spcPts val="0"/>
               </a:spcBef>
@@ -1202,9 +1437,6 @@
               </a:spcAft>
               <a:buNone/>
             </a:pPr>
-            <a:r>
-              <a:t/>
-            </a:r>
             <a:endParaRPr/>
           </a:p>
         </p:txBody>
@@ -1218,11 +1450,11 @@
 </file>
 
 <file path=ppt/notesSlides/notesSlide14.xml><?xml version="1.0" encoding="utf-8"?>
-<p:notes xmlns:a="http://schemas.openxmlformats.org/drawingml/2006/main" xmlns:r="http://schemas.openxmlformats.org/officeDocument/2006/relationships" xmlns:mc="http://schemas.openxmlformats.org/markup-compatibility/2006" xmlns:mv="urn:schemas-microsoft-com:mac:vml" xmlns:p="http://schemas.openxmlformats.org/presentationml/2006/main" xmlns:c="http://schemas.openxmlformats.org/drawingml/2006/chart" xmlns:dgm="http://schemas.openxmlformats.org/drawingml/2006/diagram" xmlns:o="urn:schemas-microsoft-com:office:office" xmlns:v="urn:schemas-microsoft-com:vml" xmlns:pvml="urn:schemas-microsoft-com:office:powerpoint" xmlns:com="http://schemas.openxmlformats.org/drawingml/2006/compatibility" xmlns:p14="http://schemas.microsoft.com/office/powerpoint/2010/main" xmlns:p15="http://schemas.microsoft.com/office/powerpoint/2012/main" xmlns:ahyp="http://schemas.microsoft.com/office/drawing/2018/hyperlinkcolor" showMasterPhAnim="0" showMasterSp="0">
+<p:notes xmlns:a="http://schemas.openxmlformats.org/drawingml/2006/main" xmlns:r="http://schemas.openxmlformats.org/officeDocument/2006/relationships" xmlns:p="http://schemas.openxmlformats.org/presentationml/2006/main" showMasterSp="0" showMasterPhAnim="0">
   <p:cSld>
     <p:spTree>
       <p:nvGrpSpPr>
-        <p:cNvPr id="172" name="Shape 172"/>
+        <p:cNvPr id="1" name="Shape 172"/>
         <p:cNvGrpSpPr/>
         <p:nvPr/>
       </p:nvGrpSpPr>
@@ -1237,9 +1469,11 @@
       <p:sp>
         <p:nvSpPr>
           <p:cNvPr id="173" name="Google Shape;173;g36500989760_0_309:notes"/>
-          <p:cNvSpPr/>
+          <p:cNvSpPr>
+            <a:spLocks noGrp="1" noRot="1" noChangeAspect="1"/>
+          </p:cNvSpPr>
           <p:nvPr>
-            <p:ph idx="2" type="sldImg"/>
+            <p:ph type="sldImg" idx="2"/>
           </p:nvPr>
         </p:nvSpPr>
         <p:spPr>
@@ -1248,9 +1482,13 @@
             <a:ext cx="1928700" cy="3429000"/>
           </a:xfrm>
           <a:custGeom>
-            <a:rect b="b" l="l" r="r" t="t"/>
+            <a:avLst/>
+            <a:gdLst/>
+            <a:ahLst/>
+            <a:cxnLst/>
+            <a:rect l="l" t="t" r="r" b="b"/>
             <a:pathLst>
-              <a:path extrusionOk="0" h="120000" w="120000">
+              <a:path w="120000" h="120000" extrusionOk="0">
                 <a:moveTo>
                   <a:pt x="0" y="0"/>
                 </a:moveTo>
@@ -1272,9 +1510,11 @@
       <p:sp>
         <p:nvSpPr>
           <p:cNvPr id="174" name="Google Shape;174;g36500989760_0_309:notes"/>
-          <p:cNvSpPr txBox="1"/>
+          <p:cNvSpPr txBox="1">
+            <a:spLocks noGrp="1"/>
+          </p:cNvSpPr>
           <p:nvPr>
-            <p:ph idx="1" type="body"/>
+            <p:ph type="body" idx="1"/>
           </p:nvPr>
         </p:nvSpPr>
         <p:spPr>
@@ -1287,12 +1527,12 @@
           </a:prstGeom>
         </p:spPr>
         <p:txBody>
-          <a:bodyPr anchorCtr="0" anchor="t" bIns="91425" lIns="91425" spcFirstLastPara="1" rIns="91425" wrap="square" tIns="91425">
+          <a:bodyPr spcFirstLastPara="1" wrap="square" lIns="91425" tIns="91425" rIns="91425" bIns="91425" anchor="t" anchorCtr="0">
             <a:noAutofit/>
           </a:bodyPr>
           <a:lstStyle/>
           <a:p>
-            <a:pPr indent="0" lvl="0" marL="0" rtl="0" algn="l">
+            <a:pPr marL="0" lvl="0" indent="0" algn="l" rtl="0">
               <a:spcBef>
                 <a:spcPts val="0"/>
               </a:spcBef>
@@ -1301,9 +1541,6 @@
               </a:spcAft>
               <a:buNone/>
             </a:pPr>
-            <a:r>
-              <a:t/>
-            </a:r>
             <a:endParaRPr/>
           </a:p>
         </p:txBody>
@@ -1317,11 +1554,11 @@
 </file>
 
 <file path=ppt/notesSlides/notesSlide15.xml><?xml version="1.0" encoding="utf-8"?>
-<p:notes xmlns:a="http://schemas.openxmlformats.org/drawingml/2006/main" xmlns:r="http://schemas.openxmlformats.org/officeDocument/2006/relationships" xmlns:mc="http://schemas.openxmlformats.org/markup-compatibility/2006" xmlns:mv="urn:schemas-microsoft-com:mac:vml" xmlns:p="http://schemas.openxmlformats.org/presentationml/2006/main" xmlns:c="http://schemas.openxmlformats.org/drawingml/2006/chart" xmlns:dgm="http://schemas.openxmlformats.org/drawingml/2006/diagram" xmlns:o="urn:schemas-microsoft-com:office:office" xmlns:v="urn:schemas-microsoft-com:vml" xmlns:pvml="urn:schemas-microsoft-com:office:powerpoint" xmlns:com="http://schemas.openxmlformats.org/drawingml/2006/compatibility" xmlns:p14="http://schemas.microsoft.com/office/powerpoint/2010/main" xmlns:p15="http://schemas.microsoft.com/office/powerpoint/2012/main" xmlns:ahyp="http://schemas.microsoft.com/office/drawing/2018/hyperlinkcolor" showMasterPhAnim="0" showMasterSp="0">
+<p:notes xmlns:a="http://schemas.openxmlformats.org/drawingml/2006/main" xmlns:r="http://schemas.openxmlformats.org/officeDocument/2006/relationships" xmlns:p="http://schemas.openxmlformats.org/presentationml/2006/main" showMasterSp="0" showMasterPhAnim="0">
   <p:cSld>
     <p:spTree>
       <p:nvGrpSpPr>
-        <p:cNvPr id="182" name="Shape 182"/>
+        <p:cNvPr id="1" name="Shape 182"/>
         <p:cNvGrpSpPr/>
         <p:nvPr/>
       </p:nvGrpSpPr>
@@ -1336,9 +1573,11 @@
       <p:sp>
         <p:nvSpPr>
           <p:cNvPr id="183" name="Google Shape;183;g37ac5191999_0_118:notes"/>
-          <p:cNvSpPr/>
+          <p:cNvSpPr>
+            <a:spLocks noGrp="1" noRot="1" noChangeAspect="1"/>
+          </p:cNvSpPr>
           <p:nvPr>
-            <p:ph idx="2" type="sldImg"/>
+            <p:ph type="sldImg" idx="2"/>
           </p:nvPr>
         </p:nvSpPr>
         <p:spPr>
@@ -1347,9 +1586,13 @@
             <a:ext cx="1928700" cy="3429000"/>
           </a:xfrm>
           <a:custGeom>
-            <a:rect b="b" l="l" r="r" t="t"/>
+            <a:avLst/>
+            <a:gdLst/>
+            <a:ahLst/>
+            <a:cxnLst/>
+            <a:rect l="l" t="t" r="r" b="b"/>
             <a:pathLst>
-              <a:path extrusionOk="0" h="120000" w="120000">
+              <a:path w="120000" h="120000" extrusionOk="0">
                 <a:moveTo>
                   <a:pt x="0" y="0"/>
                 </a:moveTo>
@@ -1371,9 +1614,11 @@
       <p:sp>
         <p:nvSpPr>
           <p:cNvPr id="184" name="Google Shape;184;g37ac5191999_0_118:notes"/>
-          <p:cNvSpPr txBox="1"/>
+          <p:cNvSpPr txBox="1">
+            <a:spLocks noGrp="1"/>
+          </p:cNvSpPr>
           <p:nvPr>
-            <p:ph idx="1" type="body"/>
+            <p:ph type="body" idx="1"/>
           </p:nvPr>
         </p:nvSpPr>
         <p:spPr>
@@ -1386,12 +1631,12 @@
           </a:prstGeom>
         </p:spPr>
         <p:txBody>
-          <a:bodyPr anchorCtr="0" anchor="t" bIns="91425" lIns="91425" spcFirstLastPara="1" rIns="91425" wrap="square" tIns="91425">
+          <a:bodyPr spcFirstLastPara="1" wrap="square" lIns="91425" tIns="91425" rIns="91425" bIns="91425" anchor="t" anchorCtr="0">
             <a:noAutofit/>
           </a:bodyPr>
           <a:lstStyle/>
           <a:p>
-            <a:pPr indent="0" lvl="0" marL="0" rtl="0" algn="l">
+            <a:pPr marL="0" lvl="0" indent="0" algn="l" rtl="0">
               <a:spcBef>
                 <a:spcPts val="0"/>
               </a:spcBef>
@@ -1400,9 +1645,6 @@
               </a:spcAft>
               <a:buNone/>
             </a:pPr>
-            <a:r>
-              <a:t/>
-            </a:r>
             <a:endParaRPr/>
           </a:p>
         </p:txBody>
@@ -1416,11 +1658,11 @@
 </file>
 
 <file path=ppt/notesSlides/notesSlide16.xml><?xml version="1.0" encoding="utf-8"?>
-<p:notes xmlns:a="http://schemas.openxmlformats.org/drawingml/2006/main" xmlns:r="http://schemas.openxmlformats.org/officeDocument/2006/relationships" xmlns:mc="http://schemas.openxmlformats.org/markup-compatibility/2006" xmlns:mv="urn:schemas-microsoft-com:mac:vml" xmlns:p="http://schemas.openxmlformats.org/presentationml/2006/main" xmlns:c="http://schemas.openxmlformats.org/drawingml/2006/chart" xmlns:dgm="http://schemas.openxmlformats.org/drawingml/2006/diagram" xmlns:o="urn:schemas-microsoft-com:office:office" xmlns:v="urn:schemas-microsoft-com:vml" xmlns:pvml="urn:schemas-microsoft-com:office:powerpoint" xmlns:com="http://schemas.openxmlformats.org/drawingml/2006/compatibility" xmlns:p14="http://schemas.microsoft.com/office/powerpoint/2010/main" xmlns:p15="http://schemas.microsoft.com/office/powerpoint/2012/main" xmlns:ahyp="http://schemas.microsoft.com/office/drawing/2018/hyperlinkcolor" showMasterPhAnim="0" showMasterSp="0">
+<p:notes xmlns:a="http://schemas.openxmlformats.org/drawingml/2006/main" xmlns:r="http://schemas.openxmlformats.org/officeDocument/2006/relationships" xmlns:p="http://schemas.openxmlformats.org/presentationml/2006/main" showMasterSp="0" showMasterPhAnim="0">
   <p:cSld>
     <p:spTree>
       <p:nvGrpSpPr>
-        <p:cNvPr id="192" name="Shape 192"/>
+        <p:cNvPr id="1" name="Shape 192"/>
         <p:cNvGrpSpPr/>
         <p:nvPr/>
       </p:nvGrpSpPr>
@@ -1435,9 +1677,11 @@
       <p:sp>
         <p:nvSpPr>
           <p:cNvPr id="193" name="Google Shape;193;g37ac5191999_0_109:notes"/>
-          <p:cNvSpPr/>
+          <p:cNvSpPr>
+            <a:spLocks noGrp="1" noRot="1" noChangeAspect="1"/>
+          </p:cNvSpPr>
           <p:nvPr>
-            <p:ph idx="2" type="sldImg"/>
+            <p:ph type="sldImg" idx="2"/>
           </p:nvPr>
         </p:nvSpPr>
         <p:spPr>
@@ -1446,9 +1690,13 @@
             <a:ext cx="1928700" cy="3429000"/>
           </a:xfrm>
           <a:custGeom>
-            <a:rect b="b" l="l" r="r" t="t"/>
+            <a:avLst/>
+            <a:gdLst/>
+            <a:ahLst/>
+            <a:cxnLst/>
+            <a:rect l="l" t="t" r="r" b="b"/>
             <a:pathLst>
-              <a:path extrusionOk="0" h="120000" w="120000">
+              <a:path w="120000" h="120000" extrusionOk="0">
                 <a:moveTo>
                   <a:pt x="0" y="0"/>
                 </a:moveTo>
@@ -1470,9 +1718,11 @@
       <p:sp>
         <p:nvSpPr>
           <p:cNvPr id="194" name="Google Shape;194;g37ac5191999_0_109:notes"/>
-          <p:cNvSpPr txBox="1"/>
+          <p:cNvSpPr txBox="1">
+            <a:spLocks noGrp="1"/>
+          </p:cNvSpPr>
           <p:nvPr>
-            <p:ph idx="1" type="body"/>
+            <p:ph type="body" idx="1"/>
           </p:nvPr>
         </p:nvSpPr>
         <p:spPr>
@@ -1485,12 +1735,12 @@
           </a:prstGeom>
         </p:spPr>
         <p:txBody>
-          <a:bodyPr anchorCtr="0" anchor="t" bIns="91425" lIns="91425" spcFirstLastPara="1" rIns="91425" wrap="square" tIns="91425">
+          <a:bodyPr spcFirstLastPara="1" wrap="square" lIns="91425" tIns="91425" rIns="91425" bIns="91425" anchor="t" anchorCtr="0">
             <a:noAutofit/>
           </a:bodyPr>
           <a:lstStyle/>
           <a:p>
-            <a:pPr indent="0" lvl="0" marL="0" rtl="0" algn="l">
+            <a:pPr marL="0" lvl="0" indent="0" algn="l" rtl="0">
               <a:spcBef>
                 <a:spcPts val="0"/>
               </a:spcBef>
@@ -1499,9 +1749,6 @@
               </a:spcAft>
               <a:buNone/>
             </a:pPr>
-            <a:r>
-              <a:t/>
-            </a:r>
             <a:endParaRPr/>
           </a:p>
         </p:txBody>
@@ -1515,11 +1762,11 @@
 </file>
 
 <file path=ppt/notesSlides/notesSlide17.xml><?xml version="1.0" encoding="utf-8"?>
-<p:notes xmlns:a="http://schemas.openxmlformats.org/drawingml/2006/main" xmlns:r="http://schemas.openxmlformats.org/officeDocument/2006/relationships" xmlns:mc="http://schemas.openxmlformats.org/markup-compatibility/2006" xmlns:mv="urn:schemas-microsoft-com:mac:vml" xmlns:p="http://schemas.openxmlformats.org/presentationml/2006/main" xmlns:c="http://schemas.openxmlformats.org/drawingml/2006/chart" xmlns:dgm="http://schemas.openxmlformats.org/drawingml/2006/diagram" xmlns:o="urn:schemas-microsoft-com:office:office" xmlns:v="urn:schemas-microsoft-com:vml" xmlns:pvml="urn:schemas-microsoft-com:office:powerpoint" xmlns:com="http://schemas.openxmlformats.org/drawingml/2006/compatibility" xmlns:p14="http://schemas.microsoft.com/office/powerpoint/2010/main" xmlns:p15="http://schemas.microsoft.com/office/powerpoint/2012/main" xmlns:ahyp="http://schemas.microsoft.com/office/drawing/2018/hyperlinkcolor" showMasterPhAnim="0" showMasterSp="0">
+<p:notes xmlns:a="http://schemas.openxmlformats.org/drawingml/2006/main" xmlns:r="http://schemas.openxmlformats.org/officeDocument/2006/relationships" xmlns:p="http://schemas.openxmlformats.org/presentationml/2006/main" showMasterSp="0" showMasterPhAnim="0">
   <p:cSld>
     <p:spTree>
       <p:nvGrpSpPr>
-        <p:cNvPr id="202" name="Shape 202"/>
+        <p:cNvPr id="1" name="Shape 202"/>
         <p:cNvGrpSpPr/>
         <p:nvPr/>
       </p:nvGrpSpPr>
@@ -1534,9 +1781,11 @@
       <p:sp>
         <p:nvSpPr>
           <p:cNvPr id="203" name="Google Shape;203;g36500989760_0_58:notes"/>
-          <p:cNvSpPr/>
+          <p:cNvSpPr>
+            <a:spLocks noGrp="1" noRot="1" noChangeAspect="1"/>
+          </p:cNvSpPr>
           <p:nvPr>
-            <p:ph idx="2" type="sldImg"/>
+            <p:ph type="sldImg" idx="2"/>
           </p:nvPr>
         </p:nvSpPr>
         <p:spPr>
@@ -1545,9 +1794,13 @@
             <a:ext cx="1928700" cy="3429000"/>
           </a:xfrm>
           <a:custGeom>
-            <a:rect b="b" l="l" r="r" t="t"/>
+            <a:avLst/>
+            <a:gdLst/>
+            <a:ahLst/>
+            <a:cxnLst/>
+            <a:rect l="l" t="t" r="r" b="b"/>
             <a:pathLst>
-              <a:path extrusionOk="0" h="120000" w="120000">
+              <a:path w="120000" h="120000" extrusionOk="0">
                 <a:moveTo>
                   <a:pt x="0" y="0"/>
                 </a:moveTo>
@@ -1569,9 +1822,11 @@
       <p:sp>
         <p:nvSpPr>
           <p:cNvPr id="204" name="Google Shape;204;g36500989760_0_58:notes"/>
-          <p:cNvSpPr txBox="1"/>
+          <p:cNvSpPr txBox="1">
+            <a:spLocks noGrp="1"/>
+          </p:cNvSpPr>
           <p:nvPr>
-            <p:ph idx="1" type="body"/>
+            <p:ph type="body" idx="1"/>
           </p:nvPr>
         </p:nvSpPr>
         <p:spPr>
@@ -1584,12 +1839,12 @@
           </a:prstGeom>
         </p:spPr>
         <p:txBody>
-          <a:bodyPr anchorCtr="0" anchor="t" bIns="91425" lIns="91425" spcFirstLastPara="1" rIns="91425" wrap="square" tIns="91425">
+          <a:bodyPr spcFirstLastPara="1" wrap="square" lIns="91425" tIns="91425" rIns="91425" bIns="91425" anchor="t" anchorCtr="0">
             <a:noAutofit/>
           </a:bodyPr>
           <a:lstStyle/>
           <a:p>
-            <a:pPr indent="0" lvl="0" marL="0" rtl="0" algn="l">
+            <a:pPr marL="0" lvl="0" indent="0" algn="l" rtl="0">
               <a:spcBef>
                 <a:spcPts val="0"/>
               </a:spcBef>
@@ -1598,9 +1853,6 @@
               </a:spcAft>
               <a:buNone/>
             </a:pPr>
-            <a:r>
-              <a:t/>
-            </a:r>
             <a:endParaRPr/>
           </a:p>
         </p:txBody>
@@ -1614,11 +1866,11 @@
 </file>
 
 <file path=ppt/notesSlides/notesSlide18.xml><?xml version="1.0" encoding="utf-8"?>
-<p:notes xmlns:a="http://schemas.openxmlformats.org/drawingml/2006/main" xmlns:r="http://schemas.openxmlformats.org/officeDocument/2006/relationships" xmlns:mc="http://schemas.openxmlformats.org/markup-compatibility/2006" xmlns:mv="urn:schemas-microsoft-com:mac:vml" xmlns:p="http://schemas.openxmlformats.org/presentationml/2006/main" xmlns:c="http://schemas.openxmlformats.org/drawingml/2006/chart" xmlns:dgm="http://schemas.openxmlformats.org/drawingml/2006/diagram" xmlns:o="urn:schemas-microsoft-com:office:office" xmlns:v="urn:schemas-microsoft-com:vml" xmlns:pvml="urn:schemas-microsoft-com:office:powerpoint" xmlns:com="http://schemas.openxmlformats.org/drawingml/2006/compatibility" xmlns:p14="http://schemas.microsoft.com/office/powerpoint/2010/main" xmlns:p15="http://schemas.microsoft.com/office/powerpoint/2012/main" xmlns:ahyp="http://schemas.microsoft.com/office/drawing/2018/hyperlinkcolor" showMasterPhAnim="0" showMasterSp="0">
+<p:notes xmlns:a="http://schemas.openxmlformats.org/drawingml/2006/main" xmlns:r="http://schemas.openxmlformats.org/officeDocument/2006/relationships" xmlns:p="http://schemas.openxmlformats.org/presentationml/2006/main" showMasterSp="0" showMasterPhAnim="0">
   <p:cSld>
     <p:spTree>
       <p:nvGrpSpPr>
-        <p:cNvPr id="206" name="Shape 206"/>
+        <p:cNvPr id="1" name="Shape 206"/>
         <p:cNvGrpSpPr/>
         <p:nvPr/>
       </p:nvGrpSpPr>
@@ -1633,20 +1885,26 @@
       <p:sp>
         <p:nvSpPr>
           <p:cNvPr id="207" name="Google Shape;207;g36500989760_0_76:notes"/>
-          <p:cNvSpPr/>
+          <p:cNvSpPr>
+            <a:spLocks noGrp="1" noRot="1" noChangeAspect="1"/>
+          </p:cNvSpPr>
           <p:nvPr>
-            <p:ph idx="2" type="sldImg"/>
+            <p:ph type="sldImg" idx="2"/>
           </p:nvPr>
         </p:nvSpPr>
         <p:spPr>
           <a:xfrm>
-            <a:off x="2464919" y="685800"/>
-            <a:ext cx="1928700" cy="3429000"/>
+            <a:off x="2465388" y="685800"/>
+            <a:ext cx="1928812" cy="3429000"/>
           </a:xfrm>
           <a:custGeom>
-            <a:rect b="b" l="l" r="r" t="t"/>
+            <a:avLst/>
+            <a:gdLst/>
+            <a:ahLst/>
+            <a:cxnLst/>
+            <a:rect l="l" t="t" r="r" b="b"/>
             <a:pathLst>
-              <a:path extrusionOk="0" h="120000" w="120000">
+              <a:path w="120000" h="120000" extrusionOk="0">
                 <a:moveTo>
                   <a:pt x="0" y="0"/>
                 </a:moveTo>
@@ -1668,9 +1926,11 @@
       <p:sp>
         <p:nvSpPr>
           <p:cNvPr id="208" name="Google Shape;208;g36500989760_0_76:notes"/>
-          <p:cNvSpPr txBox="1"/>
+          <p:cNvSpPr txBox="1">
+            <a:spLocks noGrp="1"/>
+          </p:cNvSpPr>
           <p:nvPr>
-            <p:ph idx="1" type="body"/>
+            <p:ph type="body" idx="1"/>
           </p:nvPr>
         </p:nvSpPr>
         <p:spPr>
@@ -1683,12 +1943,12 @@
           </a:prstGeom>
         </p:spPr>
         <p:txBody>
-          <a:bodyPr anchorCtr="0" anchor="t" bIns="91425" lIns="91425" spcFirstLastPara="1" rIns="91425" wrap="square" tIns="91425">
+          <a:bodyPr spcFirstLastPara="1" wrap="square" lIns="91425" tIns="91425" rIns="91425" bIns="91425" anchor="t" anchorCtr="0">
             <a:noAutofit/>
           </a:bodyPr>
           <a:lstStyle/>
           <a:p>
-            <a:pPr indent="0" lvl="0" marL="0" rtl="0" algn="l">
+            <a:pPr marL="0" lvl="0" indent="0" algn="l" rtl="0">
               <a:spcBef>
                 <a:spcPts val="0"/>
               </a:spcBef>
@@ -1697,9 +1957,6 @@
               </a:spcAft>
               <a:buNone/>
             </a:pPr>
-            <a:r>
-              <a:t/>
-            </a:r>
             <a:endParaRPr/>
           </a:p>
         </p:txBody>
@@ -1713,11 +1970,11 @@
 </file>
 
 <file path=ppt/notesSlides/notesSlide19.xml><?xml version="1.0" encoding="utf-8"?>
-<p:notes xmlns:a="http://schemas.openxmlformats.org/drawingml/2006/main" xmlns:r="http://schemas.openxmlformats.org/officeDocument/2006/relationships" xmlns:mc="http://schemas.openxmlformats.org/markup-compatibility/2006" xmlns:mv="urn:schemas-microsoft-com:mac:vml" xmlns:p="http://schemas.openxmlformats.org/presentationml/2006/main" xmlns:c="http://schemas.openxmlformats.org/drawingml/2006/chart" xmlns:dgm="http://schemas.openxmlformats.org/drawingml/2006/diagram" xmlns:o="urn:schemas-microsoft-com:office:office" xmlns:v="urn:schemas-microsoft-com:vml" xmlns:pvml="urn:schemas-microsoft-com:office:powerpoint" xmlns:com="http://schemas.openxmlformats.org/drawingml/2006/compatibility" xmlns:p14="http://schemas.microsoft.com/office/powerpoint/2010/main" xmlns:p15="http://schemas.microsoft.com/office/powerpoint/2012/main" xmlns:ahyp="http://schemas.microsoft.com/office/drawing/2018/hyperlinkcolor" showMasterPhAnim="0" showMasterSp="0">
+<p:notes xmlns:a="http://schemas.openxmlformats.org/drawingml/2006/main" xmlns:r="http://schemas.openxmlformats.org/officeDocument/2006/relationships" xmlns:p="http://schemas.openxmlformats.org/presentationml/2006/main" showMasterSp="0" showMasterPhAnim="0">
   <p:cSld>
     <p:spTree>
       <p:nvGrpSpPr>
-        <p:cNvPr id="219" name="Shape 219"/>
+        <p:cNvPr id="1" name="Shape 219"/>
         <p:cNvGrpSpPr/>
         <p:nvPr/>
       </p:nvGrpSpPr>
@@ -1732,20 +1989,26 @@
       <p:sp>
         <p:nvSpPr>
           <p:cNvPr id="220" name="Google Shape;220;g37fcf4463bc_0_0:notes"/>
-          <p:cNvSpPr/>
+          <p:cNvSpPr>
+            <a:spLocks noGrp="1" noRot="1" noChangeAspect="1"/>
+          </p:cNvSpPr>
           <p:nvPr>
-            <p:ph idx="2" type="sldImg"/>
+            <p:ph type="sldImg" idx="2"/>
           </p:nvPr>
         </p:nvSpPr>
         <p:spPr>
           <a:xfrm>
-            <a:off x="2464919" y="685800"/>
-            <a:ext cx="1928700" cy="3429000"/>
+            <a:off x="2465388" y="685800"/>
+            <a:ext cx="1928812" cy="3429000"/>
           </a:xfrm>
           <a:custGeom>
-            <a:rect b="b" l="l" r="r" t="t"/>
+            <a:avLst/>
+            <a:gdLst/>
+            <a:ahLst/>
+            <a:cxnLst/>
+            <a:rect l="l" t="t" r="r" b="b"/>
             <a:pathLst>
-              <a:path extrusionOk="0" h="120000" w="120000">
+              <a:path w="120000" h="120000" extrusionOk="0">
                 <a:moveTo>
                   <a:pt x="0" y="0"/>
                 </a:moveTo>
@@ -1767,9 +2030,11 @@
       <p:sp>
         <p:nvSpPr>
           <p:cNvPr id="221" name="Google Shape;221;g37fcf4463bc_0_0:notes"/>
-          <p:cNvSpPr txBox="1"/>
+          <p:cNvSpPr txBox="1">
+            <a:spLocks noGrp="1"/>
+          </p:cNvSpPr>
           <p:nvPr>
-            <p:ph idx="1" type="body"/>
+            <p:ph type="body" idx="1"/>
           </p:nvPr>
         </p:nvSpPr>
         <p:spPr>
@@ -1782,12 +2047,12 @@
           </a:prstGeom>
         </p:spPr>
         <p:txBody>
-          <a:bodyPr anchorCtr="0" anchor="t" bIns="91425" lIns="91425" spcFirstLastPara="1" rIns="91425" wrap="square" tIns="91425">
+          <a:bodyPr spcFirstLastPara="1" wrap="square" lIns="91425" tIns="91425" rIns="91425" bIns="91425" anchor="t" anchorCtr="0">
             <a:noAutofit/>
           </a:bodyPr>
           <a:lstStyle/>
           <a:p>
-            <a:pPr indent="0" lvl="0" marL="0" rtl="0" algn="l">
+            <a:pPr marL="0" lvl="0" indent="0" algn="l" rtl="0">
               <a:spcBef>
                 <a:spcPts val="0"/>
               </a:spcBef>
@@ -1796,9 +2061,6 @@
               </a:spcAft>
               <a:buNone/>
             </a:pPr>
-            <a:r>
-              <a:t/>
-            </a:r>
             <a:endParaRPr/>
           </a:p>
         </p:txBody>
@@ -1812,11 +2074,11 @@
 </file>
 
 <file path=ppt/notesSlides/notesSlide2.xml><?xml version="1.0" encoding="utf-8"?>
-<p:notes xmlns:a="http://schemas.openxmlformats.org/drawingml/2006/main" xmlns:r="http://schemas.openxmlformats.org/officeDocument/2006/relationships" xmlns:mc="http://schemas.openxmlformats.org/markup-compatibility/2006" xmlns:mv="urn:schemas-microsoft-com:mac:vml" xmlns:p="http://schemas.openxmlformats.org/presentationml/2006/main" xmlns:c="http://schemas.openxmlformats.org/drawingml/2006/chart" xmlns:dgm="http://schemas.openxmlformats.org/drawingml/2006/diagram" xmlns:o="urn:schemas-microsoft-com:office:office" xmlns:v="urn:schemas-microsoft-com:vml" xmlns:pvml="urn:schemas-microsoft-com:office:powerpoint" xmlns:com="http://schemas.openxmlformats.org/drawingml/2006/compatibility" xmlns:p14="http://schemas.microsoft.com/office/powerpoint/2010/main" xmlns:p15="http://schemas.microsoft.com/office/powerpoint/2012/main" xmlns:ahyp="http://schemas.microsoft.com/office/drawing/2018/hyperlinkcolor" showMasterPhAnim="0" showMasterSp="0">
+<p:notes xmlns:a="http://schemas.openxmlformats.org/drawingml/2006/main" xmlns:r="http://schemas.openxmlformats.org/officeDocument/2006/relationships" xmlns:p="http://schemas.openxmlformats.org/presentationml/2006/main" showMasterSp="0" showMasterPhAnim="0">
   <p:cSld>
     <p:spTree>
       <p:nvGrpSpPr>
-        <p:cNvPr id="55" name="Shape 55"/>
+        <p:cNvPr id="1" name="Shape 55"/>
         <p:cNvGrpSpPr/>
         <p:nvPr/>
       </p:nvGrpSpPr>
@@ -1831,9 +2093,11 @@
       <p:sp>
         <p:nvSpPr>
           <p:cNvPr id="56" name="Google Shape;56;g36500989760_0_0:notes"/>
-          <p:cNvSpPr/>
+          <p:cNvSpPr>
+            <a:spLocks noGrp="1" noRot="1" noChangeAspect="1"/>
+          </p:cNvSpPr>
           <p:nvPr>
-            <p:ph idx="2" type="sldImg"/>
+            <p:ph type="sldImg" idx="2"/>
           </p:nvPr>
         </p:nvSpPr>
         <p:spPr>
@@ -1842,9 +2106,13 @@
             <a:ext cx="1928700" cy="3429000"/>
           </a:xfrm>
           <a:custGeom>
-            <a:rect b="b" l="l" r="r" t="t"/>
+            <a:avLst/>
+            <a:gdLst/>
+            <a:ahLst/>
+            <a:cxnLst/>
+            <a:rect l="l" t="t" r="r" b="b"/>
             <a:pathLst>
-              <a:path extrusionOk="0" h="120000" w="120000">
+              <a:path w="120000" h="120000" extrusionOk="0">
                 <a:moveTo>
                   <a:pt x="0" y="0"/>
                 </a:moveTo>
@@ -1866,9 +2134,11 @@
       <p:sp>
         <p:nvSpPr>
           <p:cNvPr id="57" name="Google Shape;57;g36500989760_0_0:notes"/>
-          <p:cNvSpPr txBox="1"/>
+          <p:cNvSpPr txBox="1">
+            <a:spLocks noGrp="1"/>
+          </p:cNvSpPr>
           <p:nvPr>
-            <p:ph idx="1" type="body"/>
+            <p:ph type="body" idx="1"/>
           </p:nvPr>
         </p:nvSpPr>
         <p:spPr>
@@ -1881,12 +2151,12 @@
           </a:prstGeom>
         </p:spPr>
         <p:txBody>
-          <a:bodyPr anchorCtr="0" anchor="t" bIns="91425" lIns="91425" spcFirstLastPara="1" rIns="91425" wrap="square" tIns="91425">
+          <a:bodyPr spcFirstLastPara="1" wrap="square" lIns="91425" tIns="91425" rIns="91425" bIns="91425" anchor="t" anchorCtr="0">
             <a:noAutofit/>
           </a:bodyPr>
           <a:lstStyle/>
           <a:p>
-            <a:pPr indent="0" lvl="0" marL="0" rtl="0" algn="l">
+            <a:pPr marL="0" lvl="0" indent="0" algn="l" rtl="0">
               <a:spcBef>
                 <a:spcPts val="0"/>
               </a:spcBef>
@@ -1895,9 +2165,6 @@
               </a:spcAft>
               <a:buNone/>
             </a:pPr>
-            <a:r>
-              <a:t/>
-            </a:r>
             <a:endParaRPr/>
           </a:p>
         </p:txBody>
@@ -1911,11 +2178,11 @@
 </file>
 
 <file path=ppt/notesSlides/notesSlide20.xml><?xml version="1.0" encoding="utf-8"?>
-<p:notes xmlns:a="http://schemas.openxmlformats.org/drawingml/2006/main" xmlns:r="http://schemas.openxmlformats.org/officeDocument/2006/relationships" xmlns:mc="http://schemas.openxmlformats.org/markup-compatibility/2006" xmlns:mv="urn:schemas-microsoft-com:mac:vml" xmlns:p="http://schemas.openxmlformats.org/presentationml/2006/main" xmlns:c="http://schemas.openxmlformats.org/drawingml/2006/chart" xmlns:dgm="http://schemas.openxmlformats.org/drawingml/2006/diagram" xmlns:o="urn:schemas-microsoft-com:office:office" xmlns:v="urn:schemas-microsoft-com:vml" xmlns:pvml="urn:schemas-microsoft-com:office:powerpoint" xmlns:com="http://schemas.openxmlformats.org/drawingml/2006/compatibility" xmlns:p14="http://schemas.microsoft.com/office/powerpoint/2010/main" xmlns:p15="http://schemas.microsoft.com/office/powerpoint/2012/main" xmlns:ahyp="http://schemas.microsoft.com/office/drawing/2018/hyperlinkcolor" showMasterPhAnim="0" showMasterSp="0">
+<p:notes xmlns:a="http://schemas.openxmlformats.org/drawingml/2006/main" xmlns:r="http://schemas.openxmlformats.org/officeDocument/2006/relationships" xmlns:p="http://schemas.openxmlformats.org/presentationml/2006/main" showMasterSp="0" showMasterPhAnim="0">
   <p:cSld>
     <p:spTree>
       <p:nvGrpSpPr>
-        <p:cNvPr id="227" name="Shape 227"/>
+        <p:cNvPr id="1" name="Shape 227"/>
         <p:cNvGrpSpPr/>
         <p:nvPr/>
       </p:nvGrpSpPr>
@@ -1930,20 +2197,26 @@
       <p:sp>
         <p:nvSpPr>
           <p:cNvPr id="228" name="Google Shape;228;g37fcf4463bc_0_7:notes"/>
-          <p:cNvSpPr/>
+          <p:cNvSpPr>
+            <a:spLocks noGrp="1" noRot="1" noChangeAspect="1"/>
+          </p:cNvSpPr>
           <p:nvPr>
-            <p:ph idx="2" type="sldImg"/>
+            <p:ph type="sldImg" idx="2"/>
           </p:nvPr>
         </p:nvSpPr>
         <p:spPr>
           <a:xfrm>
-            <a:off x="2464919" y="685800"/>
-            <a:ext cx="1928700" cy="3429000"/>
+            <a:off x="2465388" y="685800"/>
+            <a:ext cx="1928812" cy="3429000"/>
           </a:xfrm>
           <a:custGeom>
-            <a:rect b="b" l="l" r="r" t="t"/>
+            <a:avLst/>
+            <a:gdLst/>
+            <a:ahLst/>
+            <a:cxnLst/>
+            <a:rect l="l" t="t" r="r" b="b"/>
             <a:pathLst>
-              <a:path extrusionOk="0" h="120000" w="120000">
+              <a:path w="120000" h="120000" extrusionOk="0">
                 <a:moveTo>
                   <a:pt x="0" y="0"/>
                 </a:moveTo>
@@ -1965,9 +2238,11 @@
       <p:sp>
         <p:nvSpPr>
           <p:cNvPr id="229" name="Google Shape;229;g37fcf4463bc_0_7:notes"/>
-          <p:cNvSpPr txBox="1"/>
+          <p:cNvSpPr txBox="1">
+            <a:spLocks noGrp="1"/>
+          </p:cNvSpPr>
           <p:nvPr>
-            <p:ph idx="1" type="body"/>
+            <p:ph type="body" idx="1"/>
           </p:nvPr>
         </p:nvSpPr>
         <p:spPr>
@@ -1980,12 +2255,12 @@
           </a:prstGeom>
         </p:spPr>
         <p:txBody>
-          <a:bodyPr anchorCtr="0" anchor="t" bIns="91425" lIns="91425" spcFirstLastPara="1" rIns="91425" wrap="square" tIns="91425">
+          <a:bodyPr spcFirstLastPara="1" wrap="square" lIns="91425" tIns="91425" rIns="91425" bIns="91425" anchor="t" anchorCtr="0">
             <a:noAutofit/>
           </a:bodyPr>
           <a:lstStyle/>
           <a:p>
-            <a:pPr indent="0" lvl="0" marL="0" rtl="0" algn="l">
+            <a:pPr marL="0" lvl="0" indent="0" algn="l" rtl="0">
               <a:spcBef>
                 <a:spcPts val="0"/>
               </a:spcBef>
@@ -1994,9 +2269,6 @@
               </a:spcAft>
               <a:buNone/>
             </a:pPr>
-            <a:r>
-              <a:t/>
-            </a:r>
             <a:endParaRPr/>
           </a:p>
         </p:txBody>
@@ -2010,11 +2282,11 @@
 </file>
 
 <file path=ppt/notesSlides/notesSlide21.xml><?xml version="1.0" encoding="utf-8"?>
-<p:notes xmlns:a="http://schemas.openxmlformats.org/drawingml/2006/main" xmlns:r="http://schemas.openxmlformats.org/officeDocument/2006/relationships" xmlns:mc="http://schemas.openxmlformats.org/markup-compatibility/2006" xmlns:mv="urn:schemas-microsoft-com:mac:vml" xmlns:p="http://schemas.openxmlformats.org/presentationml/2006/main" xmlns:c="http://schemas.openxmlformats.org/drawingml/2006/chart" xmlns:dgm="http://schemas.openxmlformats.org/drawingml/2006/diagram" xmlns:o="urn:schemas-microsoft-com:office:office" xmlns:v="urn:schemas-microsoft-com:vml" xmlns:pvml="urn:schemas-microsoft-com:office:powerpoint" xmlns:com="http://schemas.openxmlformats.org/drawingml/2006/compatibility" xmlns:p14="http://schemas.microsoft.com/office/powerpoint/2010/main" xmlns:p15="http://schemas.microsoft.com/office/powerpoint/2012/main" xmlns:ahyp="http://schemas.microsoft.com/office/drawing/2018/hyperlinkcolor" showMasterPhAnim="0" showMasterSp="0">
+<p:notes xmlns:a="http://schemas.openxmlformats.org/drawingml/2006/main" xmlns:r="http://schemas.openxmlformats.org/officeDocument/2006/relationships" xmlns:p="http://schemas.openxmlformats.org/presentationml/2006/main" showMasterSp="0" showMasterPhAnim="0">
   <p:cSld>
     <p:spTree>
       <p:nvGrpSpPr>
-        <p:cNvPr id="235" name="Shape 235"/>
+        <p:cNvPr id="1" name="Shape 235"/>
         <p:cNvGrpSpPr/>
         <p:nvPr/>
       </p:nvGrpSpPr>
@@ -2029,20 +2301,26 @@
       <p:sp>
         <p:nvSpPr>
           <p:cNvPr id="236" name="Google Shape;236;g37fcf4463bc_0_14:notes"/>
-          <p:cNvSpPr/>
+          <p:cNvSpPr>
+            <a:spLocks noGrp="1" noRot="1" noChangeAspect="1"/>
+          </p:cNvSpPr>
           <p:nvPr>
-            <p:ph idx="2" type="sldImg"/>
+            <p:ph type="sldImg" idx="2"/>
           </p:nvPr>
         </p:nvSpPr>
         <p:spPr>
           <a:xfrm>
-            <a:off x="2464919" y="685800"/>
-            <a:ext cx="1928700" cy="3429000"/>
+            <a:off x="2465388" y="685800"/>
+            <a:ext cx="1928812" cy="3429000"/>
           </a:xfrm>
           <a:custGeom>
-            <a:rect b="b" l="l" r="r" t="t"/>
+            <a:avLst/>
+            <a:gdLst/>
+            <a:ahLst/>
+            <a:cxnLst/>
+            <a:rect l="l" t="t" r="r" b="b"/>
             <a:pathLst>
-              <a:path extrusionOk="0" h="120000" w="120000">
+              <a:path w="120000" h="120000" extrusionOk="0">
                 <a:moveTo>
                   <a:pt x="0" y="0"/>
                 </a:moveTo>
@@ -2064,9 +2342,11 @@
       <p:sp>
         <p:nvSpPr>
           <p:cNvPr id="237" name="Google Shape;237;g37fcf4463bc_0_14:notes"/>
-          <p:cNvSpPr txBox="1"/>
+          <p:cNvSpPr txBox="1">
+            <a:spLocks noGrp="1"/>
+          </p:cNvSpPr>
           <p:nvPr>
-            <p:ph idx="1" type="body"/>
+            <p:ph type="body" idx="1"/>
           </p:nvPr>
         </p:nvSpPr>
         <p:spPr>
@@ -2079,12 +2359,12 @@
           </a:prstGeom>
         </p:spPr>
         <p:txBody>
-          <a:bodyPr anchorCtr="0" anchor="t" bIns="91425" lIns="91425" spcFirstLastPara="1" rIns="91425" wrap="square" tIns="91425">
+          <a:bodyPr spcFirstLastPara="1" wrap="square" lIns="91425" tIns="91425" rIns="91425" bIns="91425" anchor="t" anchorCtr="0">
             <a:noAutofit/>
           </a:bodyPr>
           <a:lstStyle/>
           <a:p>
-            <a:pPr indent="0" lvl="0" marL="0" rtl="0" algn="l">
+            <a:pPr marL="0" lvl="0" indent="0" algn="l" rtl="0">
               <a:spcBef>
                 <a:spcPts val="0"/>
               </a:spcBef>
@@ -2093,9 +2373,6 @@
               </a:spcAft>
               <a:buNone/>
             </a:pPr>
-            <a:r>
-              <a:t/>
-            </a:r>
             <a:endParaRPr/>
           </a:p>
         </p:txBody>
@@ -2109,11 +2386,11 @@
 </file>
 
 <file path=ppt/notesSlides/notesSlide22.xml><?xml version="1.0" encoding="utf-8"?>
-<p:notes xmlns:a="http://schemas.openxmlformats.org/drawingml/2006/main" xmlns:r="http://schemas.openxmlformats.org/officeDocument/2006/relationships" xmlns:mc="http://schemas.openxmlformats.org/markup-compatibility/2006" xmlns:mv="urn:schemas-microsoft-com:mac:vml" xmlns:p="http://schemas.openxmlformats.org/presentationml/2006/main" xmlns:c="http://schemas.openxmlformats.org/drawingml/2006/chart" xmlns:dgm="http://schemas.openxmlformats.org/drawingml/2006/diagram" xmlns:o="urn:schemas-microsoft-com:office:office" xmlns:v="urn:schemas-microsoft-com:vml" xmlns:pvml="urn:schemas-microsoft-com:office:powerpoint" xmlns:com="http://schemas.openxmlformats.org/drawingml/2006/compatibility" xmlns:p14="http://schemas.microsoft.com/office/powerpoint/2010/main" xmlns:p15="http://schemas.microsoft.com/office/powerpoint/2012/main" xmlns:ahyp="http://schemas.microsoft.com/office/drawing/2018/hyperlinkcolor" showMasterPhAnim="0" showMasterSp="0">
+<p:notes xmlns:a="http://schemas.openxmlformats.org/drawingml/2006/main" xmlns:r="http://schemas.openxmlformats.org/officeDocument/2006/relationships" xmlns:p="http://schemas.openxmlformats.org/presentationml/2006/main" showMasterSp="0" showMasterPhAnim="0">
   <p:cSld>
     <p:spTree>
       <p:nvGrpSpPr>
-        <p:cNvPr id="243" name="Shape 243"/>
+        <p:cNvPr id="1" name="Shape 243"/>
         <p:cNvGrpSpPr/>
         <p:nvPr/>
       </p:nvGrpSpPr>
@@ -2128,9 +2405,11 @@
       <p:sp>
         <p:nvSpPr>
           <p:cNvPr id="244" name="Google Shape;244;g37fcf4463bc_0_21:notes"/>
-          <p:cNvSpPr/>
+          <p:cNvSpPr>
+            <a:spLocks noGrp="1" noRot="1" noChangeAspect="1"/>
+          </p:cNvSpPr>
           <p:nvPr>
-            <p:ph idx="2" type="sldImg"/>
+            <p:ph type="sldImg" idx="2"/>
           </p:nvPr>
         </p:nvSpPr>
         <p:spPr>
@@ -2139,9 +2418,13 @@
             <a:ext cx="1928700" cy="3429000"/>
           </a:xfrm>
           <a:custGeom>
-            <a:rect b="b" l="l" r="r" t="t"/>
+            <a:avLst/>
+            <a:gdLst/>
+            <a:ahLst/>
+            <a:cxnLst/>
+            <a:rect l="l" t="t" r="r" b="b"/>
             <a:pathLst>
-              <a:path extrusionOk="0" h="120000" w="120000">
+              <a:path w="120000" h="120000" extrusionOk="0">
                 <a:moveTo>
                   <a:pt x="0" y="0"/>
                 </a:moveTo>
@@ -2163,9 +2446,11 @@
       <p:sp>
         <p:nvSpPr>
           <p:cNvPr id="245" name="Google Shape;245;g37fcf4463bc_0_21:notes"/>
-          <p:cNvSpPr txBox="1"/>
+          <p:cNvSpPr txBox="1">
+            <a:spLocks noGrp="1"/>
+          </p:cNvSpPr>
           <p:nvPr>
-            <p:ph idx="1" type="body"/>
+            <p:ph type="body" idx="1"/>
           </p:nvPr>
         </p:nvSpPr>
         <p:spPr>
@@ -2178,12 +2463,12 @@
           </a:prstGeom>
         </p:spPr>
         <p:txBody>
-          <a:bodyPr anchorCtr="0" anchor="t" bIns="91425" lIns="91425" spcFirstLastPara="1" rIns="91425" wrap="square" tIns="91425">
+          <a:bodyPr spcFirstLastPara="1" wrap="square" lIns="91425" tIns="91425" rIns="91425" bIns="91425" anchor="t" anchorCtr="0">
             <a:noAutofit/>
           </a:bodyPr>
           <a:lstStyle/>
           <a:p>
-            <a:pPr indent="0" lvl="0" marL="0" rtl="0" algn="l">
+            <a:pPr marL="0" lvl="0" indent="0" algn="l" rtl="0">
               <a:spcBef>
                 <a:spcPts val="0"/>
               </a:spcBef>
@@ -2192,9 +2477,6 @@
               </a:spcAft>
               <a:buNone/>
             </a:pPr>
-            <a:r>
-              <a:t/>
-            </a:r>
             <a:endParaRPr/>
           </a:p>
         </p:txBody>
@@ -2208,11 +2490,11 @@
 </file>
 
 <file path=ppt/notesSlides/notesSlide23.xml><?xml version="1.0" encoding="utf-8"?>
-<p:notes xmlns:a="http://schemas.openxmlformats.org/drawingml/2006/main" xmlns:r="http://schemas.openxmlformats.org/officeDocument/2006/relationships" xmlns:mc="http://schemas.openxmlformats.org/markup-compatibility/2006" xmlns:mv="urn:schemas-microsoft-com:mac:vml" xmlns:p="http://schemas.openxmlformats.org/presentationml/2006/main" xmlns:c="http://schemas.openxmlformats.org/drawingml/2006/chart" xmlns:dgm="http://schemas.openxmlformats.org/drawingml/2006/diagram" xmlns:o="urn:schemas-microsoft-com:office:office" xmlns:v="urn:schemas-microsoft-com:vml" xmlns:pvml="urn:schemas-microsoft-com:office:powerpoint" xmlns:com="http://schemas.openxmlformats.org/drawingml/2006/compatibility" xmlns:p14="http://schemas.microsoft.com/office/powerpoint/2010/main" xmlns:p15="http://schemas.microsoft.com/office/powerpoint/2012/main" xmlns:ahyp="http://schemas.microsoft.com/office/drawing/2018/hyperlinkcolor" showMasterPhAnim="0" showMasterSp="0">
+<p:notes xmlns:a="http://schemas.openxmlformats.org/drawingml/2006/main" xmlns:r="http://schemas.openxmlformats.org/officeDocument/2006/relationships" xmlns:p="http://schemas.openxmlformats.org/presentationml/2006/main" showMasterSp="0" showMasterPhAnim="0">
   <p:cSld>
     <p:spTree>
       <p:nvGrpSpPr>
-        <p:cNvPr id="251" name="Shape 251"/>
+        <p:cNvPr id="1" name="Shape 251"/>
         <p:cNvGrpSpPr/>
         <p:nvPr/>
       </p:nvGrpSpPr>
@@ -2227,9 +2509,11 @@
       <p:sp>
         <p:nvSpPr>
           <p:cNvPr id="252" name="Google Shape;252;g36500989760_0_79:notes"/>
-          <p:cNvSpPr/>
+          <p:cNvSpPr>
+            <a:spLocks noGrp="1" noRot="1" noChangeAspect="1"/>
+          </p:cNvSpPr>
           <p:nvPr>
-            <p:ph idx="2" type="sldImg"/>
+            <p:ph type="sldImg" idx="2"/>
           </p:nvPr>
         </p:nvSpPr>
         <p:spPr>
@@ -2238,9 +2522,13 @@
             <a:ext cx="1928700" cy="3429000"/>
           </a:xfrm>
           <a:custGeom>
-            <a:rect b="b" l="l" r="r" t="t"/>
+            <a:avLst/>
+            <a:gdLst/>
+            <a:ahLst/>
+            <a:cxnLst/>
+            <a:rect l="l" t="t" r="r" b="b"/>
             <a:pathLst>
-              <a:path extrusionOk="0" h="120000" w="120000">
+              <a:path w="120000" h="120000" extrusionOk="0">
                 <a:moveTo>
                   <a:pt x="0" y="0"/>
                 </a:moveTo>
@@ -2262,9 +2550,11 @@
       <p:sp>
         <p:nvSpPr>
           <p:cNvPr id="253" name="Google Shape;253;g36500989760_0_79:notes"/>
-          <p:cNvSpPr txBox="1"/>
+          <p:cNvSpPr txBox="1">
+            <a:spLocks noGrp="1"/>
+          </p:cNvSpPr>
           <p:nvPr>
-            <p:ph idx="1" type="body"/>
+            <p:ph type="body" idx="1"/>
           </p:nvPr>
         </p:nvSpPr>
         <p:spPr>
@@ -2277,12 +2567,12 @@
           </a:prstGeom>
         </p:spPr>
         <p:txBody>
-          <a:bodyPr anchorCtr="0" anchor="t" bIns="91425" lIns="91425" spcFirstLastPara="1" rIns="91425" wrap="square" tIns="91425">
+          <a:bodyPr spcFirstLastPara="1" wrap="square" lIns="91425" tIns="91425" rIns="91425" bIns="91425" anchor="t" anchorCtr="0">
             <a:noAutofit/>
           </a:bodyPr>
           <a:lstStyle/>
           <a:p>
-            <a:pPr indent="0" lvl="0" marL="0" rtl="0" algn="l">
+            <a:pPr marL="0" lvl="0" indent="0" algn="l" rtl="0">
               <a:spcBef>
                 <a:spcPts val="0"/>
               </a:spcBef>
@@ -2291,9 +2581,6 @@
               </a:spcAft>
               <a:buNone/>
             </a:pPr>
-            <a:r>
-              <a:t/>
-            </a:r>
             <a:endParaRPr/>
           </a:p>
         </p:txBody>
@@ -2307,11 +2594,11 @@
 </file>
 
 <file path=ppt/notesSlides/notesSlide3.xml><?xml version="1.0" encoding="utf-8"?>
-<p:notes xmlns:a="http://schemas.openxmlformats.org/drawingml/2006/main" xmlns:r="http://schemas.openxmlformats.org/officeDocument/2006/relationships" xmlns:mc="http://schemas.openxmlformats.org/markup-compatibility/2006" xmlns:mv="urn:schemas-microsoft-com:mac:vml" xmlns:p="http://schemas.openxmlformats.org/presentationml/2006/main" xmlns:c="http://schemas.openxmlformats.org/drawingml/2006/chart" xmlns:dgm="http://schemas.openxmlformats.org/drawingml/2006/diagram" xmlns:o="urn:schemas-microsoft-com:office:office" xmlns:v="urn:schemas-microsoft-com:vml" xmlns:pvml="urn:schemas-microsoft-com:office:powerpoint" xmlns:com="http://schemas.openxmlformats.org/drawingml/2006/compatibility" xmlns:p14="http://schemas.microsoft.com/office/powerpoint/2010/main" xmlns:p15="http://schemas.microsoft.com/office/powerpoint/2012/main" xmlns:ahyp="http://schemas.microsoft.com/office/drawing/2018/hyperlinkcolor" showMasterPhAnim="0" showMasterSp="0">
+<p:notes xmlns:a="http://schemas.openxmlformats.org/drawingml/2006/main" xmlns:r="http://schemas.openxmlformats.org/officeDocument/2006/relationships" xmlns:p="http://schemas.openxmlformats.org/presentationml/2006/main" showMasterSp="0" showMasterPhAnim="0">
   <p:cSld>
     <p:spTree>
       <p:nvGrpSpPr>
-        <p:cNvPr id="61" name="Shape 61"/>
+        <p:cNvPr id="1" name="Shape 61"/>
         <p:cNvGrpSpPr/>
         <p:nvPr/>
       </p:nvGrpSpPr>
@@ -2326,9 +2613,11 @@
       <p:sp>
         <p:nvSpPr>
           <p:cNvPr id="62" name="Google Shape;62;g36500989760_0_13:notes"/>
-          <p:cNvSpPr/>
+          <p:cNvSpPr>
+            <a:spLocks noGrp="1" noRot="1" noChangeAspect="1"/>
+          </p:cNvSpPr>
           <p:nvPr>
-            <p:ph idx="2" type="sldImg"/>
+            <p:ph type="sldImg" idx="2"/>
           </p:nvPr>
         </p:nvSpPr>
         <p:spPr>
@@ -2337,9 +2626,13 @@
             <a:ext cx="1928700" cy="3429000"/>
           </a:xfrm>
           <a:custGeom>
-            <a:rect b="b" l="l" r="r" t="t"/>
+            <a:avLst/>
+            <a:gdLst/>
+            <a:ahLst/>
+            <a:cxnLst/>
+            <a:rect l="l" t="t" r="r" b="b"/>
             <a:pathLst>
-              <a:path extrusionOk="0" h="120000" w="120000">
+              <a:path w="120000" h="120000" extrusionOk="0">
                 <a:moveTo>
                   <a:pt x="0" y="0"/>
                 </a:moveTo>
@@ -2361,9 +2654,11 @@
       <p:sp>
         <p:nvSpPr>
           <p:cNvPr id="63" name="Google Shape;63;g36500989760_0_13:notes"/>
-          <p:cNvSpPr txBox="1"/>
+          <p:cNvSpPr txBox="1">
+            <a:spLocks noGrp="1"/>
+          </p:cNvSpPr>
           <p:nvPr>
-            <p:ph idx="1" type="body"/>
+            <p:ph type="body" idx="1"/>
           </p:nvPr>
         </p:nvSpPr>
         <p:spPr>
@@ -2376,12 +2671,12 @@
           </a:prstGeom>
         </p:spPr>
         <p:txBody>
-          <a:bodyPr anchorCtr="0" anchor="t" bIns="91425" lIns="91425" spcFirstLastPara="1" rIns="91425" wrap="square" tIns="91425">
+          <a:bodyPr spcFirstLastPara="1" wrap="square" lIns="91425" tIns="91425" rIns="91425" bIns="91425" anchor="t" anchorCtr="0">
             <a:noAutofit/>
           </a:bodyPr>
           <a:lstStyle/>
           <a:p>
-            <a:pPr indent="0" lvl="0" marL="0" rtl="0" algn="l">
+            <a:pPr marL="0" lvl="0" indent="0" algn="l" rtl="0">
               <a:spcBef>
                 <a:spcPts val="0"/>
               </a:spcBef>
@@ -2390,9 +2685,6 @@
               </a:spcAft>
               <a:buNone/>
             </a:pPr>
-            <a:r>
-              <a:t/>
-            </a:r>
             <a:endParaRPr/>
           </a:p>
         </p:txBody>
@@ -2406,11 +2698,11 @@
 </file>
 
 <file path=ppt/notesSlides/notesSlide4.xml><?xml version="1.0" encoding="utf-8"?>
-<p:notes xmlns:a="http://schemas.openxmlformats.org/drawingml/2006/main" xmlns:r="http://schemas.openxmlformats.org/officeDocument/2006/relationships" xmlns:mc="http://schemas.openxmlformats.org/markup-compatibility/2006" xmlns:mv="urn:schemas-microsoft-com:mac:vml" xmlns:p="http://schemas.openxmlformats.org/presentationml/2006/main" xmlns:c="http://schemas.openxmlformats.org/drawingml/2006/chart" xmlns:dgm="http://schemas.openxmlformats.org/drawingml/2006/diagram" xmlns:o="urn:schemas-microsoft-com:office:office" xmlns:v="urn:schemas-microsoft-com:vml" xmlns:pvml="urn:schemas-microsoft-com:office:powerpoint" xmlns:com="http://schemas.openxmlformats.org/drawingml/2006/compatibility" xmlns:p14="http://schemas.microsoft.com/office/powerpoint/2010/main" xmlns:p15="http://schemas.microsoft.com/office/powerpoint/2012/main" xmlns:ahyp="http://schemas.microsoft.com/office/drawing/2018/hyperlinkcolor" showMasterPhAnim="0" showMasterSp="0">
+<p:notes xmlns:a="http://schemas.openxmlformats.org/drawingml/2006/main" xmlns:r="http://schemas.openxmlformats.org/officeDocument/2006/relationships" xmlns:p="http://schemas.openxmlformats.org/presentationml/2006/main" showMasterSp="0" showMasterPhAnim="0">
   <p:cSld>
     <p:spTree>
       <p:nvGrpSpPr>
-        <p:cNvPr id="65" name="Shape 65"/>
+        <p:cNvPr id="1" name="Shape 65"/>
         <p:cNvGrpSpPr/>
         <p:nvPr/>
       </p:nvGrpSpPr>
@@ -2425,9 +2717,11 @@
       <p:sp>
         <p:nvSpPr>
           <p:cNvPr id="66" name="Google Shape;66;g36500989760_0_16:notes"/>
-          <p:cNvSpPr/>
+          <p:cNvSpPr>
+            <a:spLocks noGrp="1" noRot="1" noChangeAspect="1"/>
+          </p:cNvSpPr>
           <p:nvPr>
-            <p:ph idx="2" type="sldImg"/>
+            <p:ph type="sldImg" idx="2"/>
           </p:nvPr>
         </p:nvSpPr>
         <p:spPr>
@@ -2436,9 +2730,13 @@
             <a:ext cx="1928700" cy="3429000"/>
           </a:xfrm>
           <a:custGeom>
-            <a:rect b="b" l="l" r="r" t="t"/>
+            <a:avLst/>
+            <a:gdLst/>
+            <a:ahLst/>
+            <a:cxnLst/>
+            <a:rect l="l" t="t" r="r" b="b"/>
             <a:pathLst>
-              <a:path extrusionOk="0" h="120000" w="120000">
+              <a:path w="120000" h="120000" extrusionOk="0">
                 <a:moveTo>
                   <a:pt x="0" y="0"/>
                 </a:moveTo>
@@ -2460,9 +2758,11 @@
       <p:sp>
         <p:nvSpPr>
           <p:cNvPr id="67" name="Google Shape;67;g36500989760_0_16:notes"/>
-          <p:cNvSpPr txBox="1"/>
+          <p:cNvSpPr txBox="1">
+            <a:spLocks noGrp="1"/>
+          </p:cNvSpPr>
           <p:nvPr>
-            <p:ph idx="1" type="body"/>
+            <p:ph type="body" idx="1"/>
           </p:nvPr>
         </p:nvSpPr>
         <p:spPr>
@@ -2475,12 +2775,12 @@
           </a:prstGeom>
         </p:spPr>
         <p:txBody>
-          <a:bodyPr anchorCtr="0" anchor="t" bIns="91425" lIns="91425" spcFirstLastPara="1" rIns="91425" wrap="square" tIns="91425">
+          <a:bodyPr spcFirstLastPara="1" wrap="square" lIns="91425" tIns="91425" rIns="91425" bIns="91425" anchor="t" anchorCtr="0">
             <a:noAutofit/>
           </a:bodyPr>
           <a:lstStyle/>
           <a:p>
-            <a:pPr indent="0" lvl="0" marL="0" rtl="0" algn="l">
+            <a:pPr marL="0" lvl="0" indent="0" algn="l" rtl="0">
               <a:spcBef>
                 <a:spcPts val="0"/>
               </a:spcBef>
@@ -2489,9 +2789,6 @@
               </a:spcAft>
               <a:buNone/>
             </a:pPr>
-            <a:r>
-              <a:t/>
-            </a:r>
             <a:endParaRPr/>
           </a:p>
         </p:txBody>
@@ -2505,11 +2802,11 @@
 </file>
 
 <file path=ppt/notesSlides/notesSlide5.xml><?xml version="1.0" encoding="utf-8"?>
-<p:notes xmlns:a="http://schemas.openxmlformats.org/drawingml/2006/main" xmlns:r="http://schemas.openxmlformats.org/officeDocument/2006/relationships" xmlns:mc="http://schemas.openxmlformats.org/markup-compatibility/2006" xmlns:mv="urn:schemas-microsoft-com:mac:vml" xmlns:p="http://schemas.openxmlformats.org/presentationml/2006/main" xmlns:c="http://schemas.openxmlformats.org/drawingml/2006/chart" xmlns:dgm="http://schemas.openxmlformats.org/drawingml/2006/diagram" xmlns:o="urn:schemas-microsoft-com:office:office" xmlns:v="urn:schemas-microsoft-com:vml" xmlns:pvml="urn:schemas-microsoft-com:office:powerpoint" xmlns:com="http://schemas.openxmlformats.org/drawingml/2006/compatibility" xmlns:p14="http://schemas.microsoft.com/office/powerpoint/2010/main" xmlns:p15="http://schemas.microsoft.com/office/powerpoint/2012/main" xmlns:ahyp="http://schemas.microsoft.com/office/drawing/2018/hyperlinkcolor" showMasterPhAnim="0" showMasterSp="0">
+<p:notes xmlns:a="http://schemas.openxmlformats.org/drawingml/2006/main" xmlns:r="http://schemas.openxmlformats.org/officeDocument/2006/relationships" xmlns:p="http://schemas.openxmlformats.org/presentationml/2006/main" showMasterSp="0" showMasterPhAnim="0">
   <p:cSld>
     <p:spTree>
       <p:nvGrpSpPr>
-        <p:cNvPr id="72" name="Shape 72"/>
+        <p:cNvPr id="1" name="Shape 72"/>
         <p:cNvGrpSpPr/>
         <p:nvPr/>
       </p:nvGrpSpPr>
@@ -2524,20 +2821,26 @@
       <p:sp>
         <p:nvSpPr>
           <p:cNvPr id="73" name="Google Shape;73;g36500989760_0_19:notes"/>
-          <p:cNvSpPr/>
+          <p:cNvSpPr>
+            <a:spLocks noGrp="1" noRot="1" noChangeAspect="1"/>
+          </p:cNvSpPr>
           <p:nvPr>
-            <p:ph idx="2" type="sldImg"/>
+            <p:ph type="sldImg" idx="2"/>
           </p:nvPr>
         </p:nvSpPr>
         <p:spPr>
           <a:xfrm>
-            <a:off x="2464919" y="685800"/>
-            <a:ext cx="1928700" cy="3429000"/>
+            <a:off x="2465388" y="685800"/>
+            <a:ext cx="1928812" cy="3429000"/>
           </a:xfrm>
           <a:custGeom>
-            <a:rect b="b" l="l" r="r" t="t"/>
+            <a:avLst/>
+            <a:gdLst/>
+            <a:ahLst/>
+            <a:cxnLst/>
+            <a:rect l="l" t="t" r="r" b="b"/>
             <a:pathLst>
-              <a:path extrusionOk="0" h="120000" w="120000">
+              <a:path w="120000" h="120000" extrusionOk="0">
                 <a:moveTo>
                   <a:pt x="0" y="0"/>
                 </a:moveTo>
@@ -2559,9 +2862,11 @@
       <p:sp>
         <p:nvSpPr>
           <p:cNvPr id="74" name="Google Shape;74;g36500989760_0_19:notes"/>
-          <p:cNvSpPr txBox="1"/>
+          <p:cNvSpPr txBox="1">
+            <a:spLocks noGrp="1"/>
+          </p:cNvSpPr>
           <p:nvPr>
-            <p:ph idx="1" type="body"/>
+            <p:ph type="body" idx="1"/>
           </p:nvPr>
         </p:nvSpPr>
         <p:spPr>
@@ -2574,12 +2879,12 @@
           </a:prstGeom>
         </p:spPr>
         <p:txBody>
-          <a:bodyPr anchorCtr="0" anchor="t" bIns="91425" lIns="91425" spcFirstLastPara="1" rIns="91425" wrap="square" tIns="91425">
+          <a:bodyPr spcFirstLastPara="1" wrap="square" lIns="91425" tIns="91425" rIns="91425" bIns="91425" anchor="t" anchorCtr="0">
             <a:noAutofit/>
           </a:bodyPr>
           <a:lstStyle/>
           <a:p>
-            <a:pPr indent="0" lvl="0" marL="0" rtl="0" algn="l">
+            <a:pPr marL="0" lvl="0" indent="0" algn="l" rtl="0">
               <a:spcBef>
                 <a:spcPts val="0"/>
               </a:spcBef>
@@ -2588,9 +2893,6 @@
               </a:spcAft>
               <a:buNone/>
             </a:pPr>
-            <a:r>
-              <a:t/>
-            </a:r>
             <a:endParaRPr/>
           </a:p>
         </p:txBody>
@@ -2604,11 +2906,11 @@
 </file>
 
 <file path=ppt/notesSlides/notesSlide6.xml><?xml version="1.0" encoding="utf-8"?>
-<p:notes xmlns:a="http://schemas.openxmlformats.org/drawingml/2006/main" xmlns:r="http://schemas.openxmlformats.org/officeDocument/2006/relationships" xmlns:mc="http://schemas.openxmlformats.org/markup-compatibility/2006" xmlns:mv="urn:schemas-microsoft-com:mac:vml" xmlns:p="http://schemas.openxmlformats.org/presentationml/2006/main" xmlns:c="http://schemas.openxmlformats.org/drawingml/2006/chart" xmlns:dgm="http://schemas.openxmlformats.org/drawingml/2006/diagram" xmlns:o="urn:schemas-microsoft-com:office:office" xmlns:v="urn:schemas-microsoft-com:vml" xmlns:pvml="urn:schemas-microsoft-com:office:powerpoint" xmlns:com="http://schemas.openxmlformats.org/drawingml/2006/compatibility" xmlns:p14="http://schemas.microsoft.com/office/powerpoint/2010/main" xmlns:p15="http://schemas.microsoft.com/office/powerpoint/2012/main" xmlns:ahyp="http://schemas.microsoft.com/office/drawing/2018/hyperlinkcolor" showMasterPhAnim="0" showMasterSp="0">
+<p:notes xmlns:a="http://schemas.openxmlformats.org/drawingml/2006/main" xmlns:r="http://schemas.openxmlformats.org/officeDocument/2006/relationships" xmlns:p="http://schemas.openxmlformats.org/presentationml/2006/main" showMasterSp="0" showMasterPhAnim="0">
   <p:cSld>
     <p:spTree>
       <p:nvGrpSpPr>
-        <p:cNvPr id="100" name="Shape 100"/>
+        <p:cNvPr id="1" name="Shape 100"/>
         <p:cNvGrpSpPr/>
         <p:nvPr/>
       </p:nvGrpSpPr>
@@ -2623,9 +2925,11 @@
       <p:sp>
         <p:nvSpPr>
           <p:cNvPr id="101" name="Google Shape;101;g36500989760_0_28:notes"/>
-          <p:cNvSpPr/>
+          <p:cNvSpPr>
+            <a:spLocks noGrp="1" noRot="1" noChangeAspect="1"/>
+          </p:cNvSpPr>
           <p:nvPr>
-            <p:ph idx="2" type="sldImg"/>
+            <p:ph type="sldImg" idx="2"/>
           </p:nvPr>
         </p:nvSpPr>
         <p:spPr>
@@ -2634,9 +2938,13 @@
             <a:ext cx="1928700" cy="3429000"/>
           </a:xfrm>
           <a:custGeom>
-            <a:rect b="b" l="l" r="r" t="t"/>
+            <a:avLst/>
+            <a:gdLst/>
+            <a:ahLst/>
+            <a:cxnLst/>
+            <a:rect l="l" t="t" r="r" b="b"/>
             <a:pathLst>
-              <a:path extrusionOk="0" h="120000" w="120000">
+              <a:path w="120000" h="120000" extrusionOk="0">
                 <a:moveTo>
                   <a:pt x="0" y="0"/>
                 </a:moveTo>
@@ -2658,9 +2966,11 @@
       <p:sp>
         <p:nvSpPr>
           <p:cNvPr id="102" name="Google Shape;102;g36500989760_0_28:notes"/>
-          <p:cNvSpPr txBox="1"/>
+          <p:cNvSpPr txBox="1">
+            <a:spLocks noGrp="1"/>
+          </p:cNvSpPr>
           <p:nvPr>
-            <p:ph idx="1" type="body"/>
+            <p:ph type="body" idx="1"/>
           </p:nvPr>
         </p:nvSpPr>
         <p:spPr>
@@ -2673,12 +2983,12 @@
           </a:prstGeom>
         </p:spPr>
         <p:txBody>
-          <a:bodyPr anchorCtr="0" anchor="t" bIns="91425" lIns="91425" spcFirstLastPara="1" rIns="91425" wrap="square" tIns="91425">
+          <a:bodyPr spcFirstLastPara="1" wrap="square" lIns="91425" tIns="91425" rIns="91425" bIns="91425" anchor="t" anchorCtr="0">
             <a:noAutofit/>
           </a:bodyPr>
           <a:lstStyle/>
           <a:p>
-            <a:pPr indent="0" lvl="0" marL="0" rtl="0" algn="l">
+            <a:pPr marL="0" lvl="0" indent="0" algn="l" rtl="0">
               <a:spcBef>
                 <a:spcPts val="0"/>
               </a:spcBef>
@@ -2687,9 +2997,6 @@
               </a:spcAft>
               <a:buNone/>
             </a:pPr>
-            <a:r>
-              <a:t/>
-            </a:r>
             <a:endParaRPr/>
           </a:p>
         </p:txBody>
@@ -2703,11 +3010,11 @@
 </file>
 
 <file path=ppt/notesSlides/notesSlide7.xml><?xml version="1.0" encoding="utf-8"?>
-<p:notes xmlns:a="http://schemas.openxmlformats.org/drawingml/2006/main" xmlns:r="http://schemas.openxmlformats.org/officeDocument/2006/relationships" xmlns:mc="http://schemas.openxmlformats.org/markup-compatibility/2006" xmlns:mv="urn:schemas-microsoft-com:mac:vml" xmlns:p="http://schemas.openxmlformats.org/presentationml/2006/main" xmlns:c="http://schemas.openxmlformats.org/drawingml/2006/chart" xmlns:dgm="http://schemas.openxmlformats.org/drawingml/2006/diagram" xmlns:o="urn:schemas-microsoft-com:office:office" xmlns:v="urn:schemas-microsoft-com:vml" xmlns:pvml="urn:schemas-microsoft-com:office:powerpoint" xmlns:com="http://schemas.openxmlformats.org/drawingml/2006/compatibility" xmlns:p14="http://schemas.microsoft.com/office/powerpoint/2010/main" xmlns:p15="http://schemas.microsoft.com/office/powerpoint/2012/main" xmlns:ahyp="http://schemas.microsoft.com/office/drawing/2018/hyperlinkcolor" showMasterPhAnim="0" showMasterSp="0">
+<p:notes xmlns:a="http://schemas.openxmlformats.org/drawingml/2006/main" xmlns:r="http://schemas.openxmlformats.org/officeDocument/2006/relationships" xmlns:p="http://schemas.openxmlformats.org/presentationml/2006/main" showMasterSp="0" showMasterPhAnim="0">
   <p:cSld>
     <p:spTree>
       <p:nvGrpSpPr>
-        <p:cNvPr id="106" name="Shape 106"/>
+        <p:cNvPr id="1" name="Shape 106"/>
         <p:cNvGrpSpPr/>
         <p:nvPr/>
       </p:nvGrpSpPr>
@@ -2722,9 +3029,11 @@
       <p:sp>
         <p:nvSpPr>
           <p:cNvPr id="107" name="Google Shape;107;g36500989760_0_31:notes"/>
-          <p:cNvSpPr/>
+          <p:cNvSpPr>
+            <a:spLocks noGrp="1" noRot="1" noChangeAspect="1"/>
+          </p:cNvSpPr>
           <p:nvPr>
-            <p:ph idx="2" type="sldImg"/>
+            <p:ph type="sldImg" idx="2"/>
           </p:nvPr>
         </p:nvSpPr>
         <p:spPr>
@@ -2733,9 +3042,13 @@
             <a:ext cx="1928700" cy="3429000"/>
           </a:xfrm>
           <a:custGeom>
-            <a:rect b="b" l="l" r="r" t="t"/>
+            <a:avLst/>
+            <a:gdLst/>
+            <a:ahLst/>
+            <a:cxnLst/>
+            <a:rect l="l" t="t" r="r" b="b"/>
             <a:pathLst>
-              <a:path extrusionOk="0" h="120000" w="120000">
+              <a:path w="120000" h="120000" extrusionOk="0">
                 <a:moveTo>
                   <a:pt x="0" y="0"/>
                 </a:moveTo>
@@ -2757,9 +3070,11 @@
       <p:sp>
         <p:nvSpPr>
           <p:cNvPr id="108" name="Google Shape;108;g36500989760_0_31:notes"/>
-          <p:cNvSpPr txBox="1"/>
+          <p:cNvSpPr txBox="1">
+            <a:spLocks noGrp="1"/>
+          </p:cNvSpPr>
           <p:nvPr>
-            <p:ph idx="1" type="body"/>
+            <p:ph type="body" idx="1"/>
           </p:nvPr>
         </p:nvSpPr>
         <p:spPr>
@@ -2772,12 +3087,12 @@
           </a:prstGeom>
         </p:spPr>
         <p:txBody>
-          <a:bodyPr anchorCtr="0" anchor="t" bIns="91425" lIns="91425" spcFirstLastPara="1" rIns="91425" wrap="square" tIns="91425">
+          <a:bodyPr spcFirstLastPara="1" wrap="square" lIns="91425" tIns="91425" rIns="91425" bIns="91425" anchor="t" anchorCtr="0">
             <a:noAutofit/>
           </a:bodyPr>
           <a:lstStyle/>
           <a:p>
-            <a:pPr indent="0" lvl="0" marL="0" rtl="0" algn="l">
+            <a:pPr marL="0" lvl="0" indent="0" algn="l" rtl="0">
               <a:spcBef>
                 <a:spcPts val="0"/>
               </a:spcBef>
@@ -2786,9 +3101,6 @@
               </a:spcAft>
               <a:buNone/>
             </a:pPr>
-            <a:r>
-              <a:t/>
-            </a:r>
             <a:endParaRPr/>
           </a:p>
         </p:txBody>
@@ -2802,11 +3114,11 @@
 </file>
 
 <file path=ppt/notesSlides/notesSlide8.xml><?xml version="1.0" encoding="utf-8"?>
-<p:notes xmlns:a="http://schemas.openxmlformats.org/drawingml/2006/main" xmlns:r="http://schemas.openxmlformats.org/officeDocument/2006/relationships" xmlns:mc="http://schemas.openxmlformats.org/markup-compatibility/2006" xmlns:mv="urn:schemas-microsoft-com:mac:vml" xmlns:p="http://schemas.openxmlformats.org/presentationml/2006/main" xmlns:c="http://schemas.openxmlformats.org/drawingml/2006/chart" xmlns:dgm="http://schemas.openxmlformats.org/drawingml/2006/diagram" xmlns:o="urn:schemas-microsoft-com:office:office" xmlns:v="urn:schemas-microsoft-com:vml" xmlns:pvml="urn:schemas-microsoft-com:office:powerpoint" xmlns:com="http://schemas.openxmlformats.org/drawingml/2006/compatibility" xmlns:p14="http://schemas.microsoft.com/office/powerpoint/2010/main" xmlns:p15="http://schemas.microsoft.com/office/powerpoint/2012/main" xmlns:ahyp="http://schemas.microsoft.com/office/drawing/2018/hyperlinkcolor" showMasterPhAnim="0" showMasterSp="0">
+<p:notes xmlns:a="http://schemas.openxmlformats.org/drawingml/2006/main" xmlns:r="http://schemas.openxmlformats.org/officeDocument/2006/relationships" xmlns:p="http://schemas.openxmlformats.org/presentationml/2006/main" showMasterSp="0" showMasterPhAnim="0">
   <p:cSld>
     <p:spTree>
       <p:nvGrpSpPr>
-        <p:cNvPr id="112" name="Shape 112"/>
+        <p:cNvPr id="1" name="Shape 112"/>
         <p:cNvGrpSpPr/>
         <p:nvPr/>
       </p:nvGrpSpPr>
@@ -2821,9 +3133,11 @@
       <p:sp>
         <p:nvSpPr>
           <p:cNvPr id="113" name="Google Shape;113;g36500989760_0_122:notes"/>
-          <p:cNvSpPr/>
+          <p:cNvSpPr>
+            <a:spLocks noGrp="1" noRot="1" noChangeAspect="1"/>
+          </p:cNvSpPr>
           <p:nvPr>
-            <p:ph idx="2" type="sldImg"/>
+            <p:ph type="sldImg" idx="2"/>
           </p:nvPr>
         </p:nvSpPr>
         <p:spPr>
@@ -2832,9 +3146,13 @@
             <a:ext cx="1928700" cy="3429000"/>
           </a:xfrm>
           <a:custGeom>
-            <a:rect b="b" l="l" r="r" t="t"/>
+            <a:avLst/>
+            <a:gdLst/>
+            <a:ahLst/>
+            <a:cxnLst/>
+            <a:rect l="l" t="t" r="r" b="b"/>
             <a:pathLst>
-              <a:path extrusionOk="0" h="120000" w="120000">
+              <a:path w="120000" h="120000" extrusionOk="0">
                 <a:moveTo>
                   <a:pt x="0" y="0"/>
                 </a:moveTo>
@@ -2856,9 +3174,11 @@
       <p:sp>
         <p:nvSpPr>
           <p:cNvPr id="114" name="Google Shape;114;g36500989760_0_122:notes"/>
-          <p:cNvSpPr txBox="1"/>
+          <p:cNvSpPr txBox="1">
+            <a:spLocks noGrp="1"/>
+          </p:cNvSpPr>
           <p:nvPr>
-            <p:ph idx="1" type="body"/>
+            <p:ph type="body" idx="1"/>
           </p:nvPr>
         </p:nvSpPr>
         <p:spPr>
@@ -2871,12 +3191,12 @@
           </a:prstGeom>
         </p:spPr>
         <p:txBody>
-          <a:bodyPr anchorCtr="0" anchor="t" bIns="91425" lIns="91425" spcFirstLastPara="1" rIns="91425" wrap="square" tIns="91425">
+          <a:bodyPr spcFirstLastPara="1" wrap="square" lIns="91425" tIns="91425" rIns="91425" bIns="91425" anchor="t" anchorCtr="0">
             <a:noAutofit/>
           </a:bodyPr>
           <a:lstStyle/>
           <a:p>
-            <a:pPr indent="0" lvl="0" marL="0" rtl="0" algn="l">
+            <a:pPr marL="0" lvl="0" indent="0" algn="l" rtl="0">
               <a:spcBef>
                 <a:spcPts val="0"/>
               </a:spcBef>
@@ -2885,9 +3205,6 @@
               </a:spcAft>
               <a:buNone/>
             </a:pPr>
-            <a:r>
-              <a:t/>
-            </a:r>
             <a:endParaRPr/>
           </a:p>
         </p:txBody>
@@ -2901,11 +3218,11 @@
 </file>
 
 <file path=ppt/notesSlides/notesSlide9.xml><?xml version="1.0" encoding="utf-8"?>
-<p:notes xmlns:a="http://schemas.openxmlformats.org/drawingml/2006/main" xmlns:r="http://schemas.openxmlformats.org/officeDocument/2006/relationships" xmlns:mc="http://schemas.openxmlformats.org/markup-compatibility/2006" xmlns:mv="urn:schemas-microsoft-com:mac:vml" xmlns:p="http://schemas.openxmlformats.org/presentationml/2006/main" xmlns:c="http://schemas.openxmlformats.org/drawingml/2006/chart" xmlns:dgm="http://schemas.openxmlformats.org/drawingml/2006/diagram" xmlns:o="urn:schemas-microsoft-com:office:office" xmlns:v="urn:schemas-microsoft-com:vml" xmlns:pvml="urn:schemas-microsoft-com:office:powerpoint" xmlns:com="http://schemas.openxmlformats.org/drawingml/2006/compatibility" xmlns:p14="http://schemas.microsoft.com/office/powerpoint/2010/main" xmlns:p15="http://schemas.microsoft.com/office/powerpoint/2012/main" xmlns:ahyp="http://schemas.microsoft.com/office/drawing/2018/hyperlinkcolor" showMasterPhAnim="0" showMasterSp="0">
+<p:notes xmlns:a="http://schemas.openxmlformats.org/drawingml/2006/main" xmlns:r="http://schemas.openxmlformats.org/officeDocument/2006/relationships" xmlns:p="http://schemas.openxmlformats.org/presentationml/2006/main" showMasterSp="0" showMasterPhAnim="0">
   <p:cSld>
     <p:spTree>
       <p:nvGrpSpPr>
-        <p:cNvPr id="118" name="Shape 118"/>
+        <p:cNvPr id="1" name="Shape 118"/>
         <p:cNvGrpSpPr/>
         <p:nvPr/>
       </p:nvGrpSpPr>
@@ -2920,9 +3237,11 @@
       <p:sp>
         <p:nvSpPr>
           <p:cNvPr id="119" name="Google Shape;119;g36500989760_0_176:notes"/>
-          <p:cNvSpPr/>
+          <p:cNvSpPr>
+            <a:spLocks noGrp="1" noRot="1" noChangeAspect="1"/>
+          </p:cNvSpPr>
           <p:nvPr>
-            <p:ph idx="2" type="sldImg"/>
+            <p:ph type="sldImg" idx="2"/>
           </p:nvPr>
         </p:nvSpPr>
         <p:spPr>
@@ -2931,9 +3250,13 @@
             <a:ext cx="1928700" cy="3429000"/>
           </a:xfrm>
           <a:custGeom>
-            <a:rect b="b" l="l" r="r" t="t"/>
+            <a:avLst/>
+            <a:gdLst/>
+            <a:ahLst/>
+            <a:cxnLst/>
+            <a:rect l="l" t="t" r="r" b="b"/>
             <a:pathLst>
-              <a:path extrusionOk="0" h="120000" w="120000">
+              <a:path w="120000" h="120000" extrusionOk="0">
                 <a:moveTo>
                   <a:pt x="0" y="0"/>
                 </a:moveTo>
@@ -2955,9 +3278,11 @@
       <p:sp>
         <p:nvSpPr>
           <p:cNvPr id="120" name="Google Shape;120;g36500989760_0_176:notes"/>
-          <p:cNvSpPr txBox="1"/>
+          <p:cNvSpPr txBox="1">
+            <a:spLocks noGrp="1"/>
+          </p:cNvSpPr>
           <p:nvPr>
-            <p:ph idx="1" type="body"/>
+            <p:ph type="body" idx="1"/>
           </p:nvPr>
         </p:nvSpPr>
         <p:spPr>
@@ -2970,12 +3295,12 @@
           </a:prstGeom>
         </p:spPr>
         <p:txBody>
-          <a:bodyPr anchorCtr="0" anchor="t" bIns="91425" lIns="91425" spcFirstLastPara="1" rIns="91425" wrap="square" tIns="91425">
+          <a:bodyPr spcFirstLastPara="1" wrap="square" lIns="91425" tIns="91425" rIns="91425" bIns="91425" anchor="t" anchorCtr="0">
             <a:noAutofit/>
           </a:bodyPr>
           <a:lstStyle/>
           <a:p>
-            <a:pPr indent="0" lvl="0" marL="0" rtl="0" algn="l">
+            <a:pPr marL="0" lvl="0" indent="0" algn="l" rtl="0">
               <a:spcBef>
                 <a:spcPts val="0"/>
               </a:spcBef>
@@ -2984,9 +3309,6 @@
               </a:spcAft>
               <a:buNone/>
             </a:pPr>
-            <a:r>
-              <a:t/>
-            </a:r>
             <a:endParaRPr/>
           </a:p>
         </p:txBody>
@@ -3000,11 +3322,11 @@
 </file>
 
 <file path=ppt/slideLayouts/slideLayout1.xml><?xml version="1.0" encoding="utf-8"?>
-<p:sldLayout xmlns:a="http://schemas.openxmlformats.org/drawingml/2006/main" xmlns:r="http://schemas.openxmlformats.org/officeDocument/2006/relationships" xmlns:mc="http://schemas.openxmlformats.org/markup-compatibility/2006" xmlns:mv="urn:schemas-microsoft-com:mac:vml" xmlns:p="http://schemas.openxmlformats.org/presentationml/2006/main" xmlns:c="http://schemas.openxmlformats.org/drawingml/2006/chart" xmlns:dgm="http://schemas.openxmlformats.org/drawingml/2006/diagram" xmlns:o="urn:schemas-microsoft-com:office:office" xmlns:v="urn:schemas-microsoft-com:vml" xmlns:pvml="urn:schemas-microsoft-com:office:powerpoint" xmlns:com="http://schemas.openxmlformats.org/drawingml/2006/compatibility" xmlns:p14="http://schemas.microsoft.com/office/powerpoint/2010/main" xmlns:p15="http://schemas.microsoft.com/office/powerpoint/2012/main" xmlns:ahyp="http://schemas.microsoft.com/office/drawing/2018/hyperlinkcolor" matchingName="Title slide" type="title">
+<p:sldLayout xmlns:a="http://schemas.openxmlformats.org/drawingml/2006/main" xmlns:r="http://schemas.openxmlformats.org/officeDocument/2006/relationships" xmlns:p="http://schemas.openxmlformats.org/presentationml/2006/main" matchingName="Title slide" type="title">
   <p:cSld name="TITLE">
     <p:spTree>
       <p:nvGrpSpPr>
-        <p:cNvPr id="9" name="Shape 9"/>
+        <p:cNvPr id="1" name="Shape 9"/>
         <p:cNvGrpSpPr/>
         <p:nvPr/>
       </p:nvGrpSpPr>
@@ -3019,7 +3341,9 @@
       <p:sp>
         <p:nvSpPr>
           <p:cNvPr id="10" name="Google Shape;10;p2"/>
-          <p:cNvSpPr txBox="1"/>
+          <p:cNvSpPr txBox="1">
+            <a:spLocks noGrp="1"/>
+          </p:cNvSpPr>
           <p:nvPr>
             <p:ph type="ctrTitle"/>
           </p:nvPr>
@@ -3034,7 +3358,7 @@
           </a:prstGeom>
         </p:spPr>
         <p:txBody>
-          <a:bodyPr anchorCtr="0" anchor="b" bIns="176925" lIns="176925" spcFirstLastPara="1" rIns="176925" wrap="square" tIns="176925">
+          <a:bodyPr spcFirstLastPara="1" wrap="square" lIns="176925" tIns="176925" rIns="176925" bIns="176925" anchor="b" anchorCtr="0">
             <a:normAutofit/>
           </a:bodyPr>
           <a:lstStyle>
@@ -3138,15 +3462,19 @@
               <a:defRPr sz="10062"/>
             </a:lvl9pPr>
           </a:lstStyle>
-          <a:p/>
+          <a:p>
+            <a:endParaRPr/>
+          </a:p>
         </p:txBody>
       </p:sp>
       <p:sp>
         <p:nvSpPr>
           <p:cNvPr id="11" name="Google Shape;11;p2"/>
-          <p:cNvSpPr txBox="1"/>
+          <p:cNvSpPr txBox="1">
+            <a:spLocks noGrp="1"/>
+          </p:cNvSpPr>
           <p:nvPr>
-            <p:ph idx="1" type="subTitle"/>
+            <p:ph type="subTitle" idx="1"/>
           </p:nvPr>
         </p:nvSpPr>
         <p:spPr>
@@ -3159,7 +3487,7 @@
           </a:prstGeom>
         </p:spPr>
         <p:txBody>
-          <a:bodyPr anchorCtr="0" anchor="t" bIns="176925" lIns="176925" spcFirstLastPara="1" rIns="176925" wrap="square" tIns="176925">
+          <a:bodyPr spcFirstLastPara="1" wrap="square" lIns="176925" tIns="176925" rIns="176925" bIns="176925" anchor="t" anchorCtr="0">
             <a:normAutofit/>
           </a:bodyPr>
           <a:lstStyle>
@@ -3290,15 +3618,19 @@
               <a:defRPr sz="5418"/>
             </a:lvl9pPr>
           </a:lstStyle>
-          <a:p/>
+          <a:p>
+            <a:endParaRPr/>
+          </a:p>
         </p:txBody>
       </p:sp>
       <p:sp>
         <p:nvSpPr>
           <p:cNvPr id="12" name="Google Shape;12;p2"/>
-          <p:cNvSpPr txBox="1"/>
+          <p:cNvSpPr txBox="1">
+            <a:spLocks noGrp="1"/>
+          </p:cNvSpPr>
           <p:nvPr>
-            <p:ph idx="12" type="sldNum"/>
+            <p:ph type="sldNum" idx="12"/>
           </p:nvPr>
         </p:nvSpPr>
         <p:spPr>
@@ -3311,7 +3643,7 @@
           </a:prstGeom>
         </p:spPr>
         <p:txBody>
-          <a:bodyPr anchorCtr="0" anchor="ctr" bIns="176925" lIns="176925" spcFirstLastPara="1" rIns="176925" wrap="square" tIns="176925">
+          <a:bodyPr spcFirstLastPara="1" wrap="square" lIns="176925" tIns="176925" rIns="176925" bIns="176925" anchor="ctr" anchorCtr="0">
             <a:normAutofit/>
           </a:bodyPr>
           <a:lstStyle>
@@ -3353,7 +3685,7 @@
             </a:lvl9pPr>
           </a:lstStyle>
           <a:p>
-            <a:pPr indent="0" lvl="0" marL="0" rtl="0" algn="r">
+            <a:pPr marL="0" lvl="0" indent="0" algn="r" rtl="0">
               <a:spcBef>
                 <a:spcPts val="0"/>
               </a:spcBef>
@@ -3379,11 +3711,11 @@
 </file>
 
 <file path=ppt/slideLayouts/slideLayout10.xml><?xml version="1.0" encoding="utf-8"?>
-<p:sldLayout xmlns:a="http://schemas.openxmlformats.org/drawingml/2006/main" xmlns:r="http://schemas.openxmlformats.org/officeDocument/2006/relationships" xmlns:mc="http://schemas.openxmlformats.org/markup-compatibility/2006" xmlns:mv="urn:schemas-microsoft-com:mac:vml" xmlns:p="http://schemas.openxmlformats.org/presentationml/2006/main" xmlns:c="http://schemas.openxmlformats.org/drawingml/2006/chart" xmlns:dgm="http://schemas.openxmlformats.org/drawingml/2006/diagram" xmlns:o="urn:schemas-microsoft-com:office:office" xmlns:v="urn:schemas-microsoft-com:vml" xmlns:pvml="urn:schemas-microsoft-com:office:powerpoint" xmlns:com="http://schemas.openxmlformats.org/drawingml/2006/compatibility" xmlns:p14="http://schemas.microsoft.com/office/powerpoint/2010/main" xmlns:p15="http://schemas.microsoft.com/office/powerpoint/2012/main" xmlns:ahyp="http://schemas.microsoft.com/office/drawing/2018/hyperlinkcolor" matchingName="Big number">
+<p:sldLayout xmlns:a="http://schemas.openxmlformats.org/drawingml/2006/main" xmlns:r="http://schemas.openxmlformats.org/officeDocument/2006/relationships" xmlns:p="http://schemas.openxmlformats.org/presentationml/2006/main" matchingName="Big number">
   <p:cSld name="BIG_NUMBER">
     <p:spTree>
       <p:nvGrpSpPr>
-        <p:cNvPr id="44" name="Shape 44"/>
+        <p:cNvPr id="1" name="Shape 44"/>
         <p:cNvGrpSpPr/>
         <p:nvPr/>
       </p:nvGrpSpPr>
@@ -3398,9 +3730,11 @@
       <p:sp>
         <p:nvSpPr>
           <p:cNvPr id="45" name="Google Shape;45;p11"/>
-          <p:cNvSpPr txBox="1"/>
+          <p:cNvSpPr txBox="1">
+            <a:spLocks noGrp="1"/>
+          </p:cNvSpPr>
           <p:nvPr>
-            <p:ph hasCustomPrompt="1" type="title"/>
+            <p:ph type="title" hasCustomPrompt="1"/>
           </p:nvPr>
         </p:nvSpPr>
         <p:spPr>
@@ -3413,7 +3747,7 @@
           </a:prstGeom>
         </p:spPr>
         <p:txBody>
-          <a:bodyPr anchorCtr="0" anchor="b" bIns="176925" lIns="176925" spcFirstLastPara="1" rIns="176925" wrap="square" tIns="176925">
+          <a:bodyPr spcFirstLastPara="1" wrap="square" lIns="176925" tIns="176925" rIns="176925" bIns="176925" anchor="b" anchorCtr="0">
             <a:normAutofit/>
           </a:bodyPr>
           <a:lstStyle>
@@ -3527,9 +3861,11 @@
       <p:sp>
         <p:nvSpPr>
           <p:cNvPr id="46" name="Google Shape;46;p11"/>
-          <p:cNvSpPr txBox="1"/>
+          <p:cNvSpPr txBox="1">
+            <a:spLocks noGrp="1"/>
+          </p:cNvSpPr>
           <p:nvPr>
-            <p:ph idx="1" type="body"/>
+            <p:ph type="body" idx="1"/>
           </p:nvPr>
         </p:nvSpPr>
         <p:spPr>
@@ -3542,11 +3878,11 @@
           </a:prstGeom>
         </p:spPr>
         <p:txBody>
-          <a:bodyPr anchorCtr="0" anchor="t" bIns="176925" lIns="176925" spcFirstLastPara="1" rIns="176925" wrap="square" tIns="176925">
+          <a:bodyPr spcFirstLastPara="1" wrap="square" lIns="176925" tIns="176925" rIns="176925" bIns="176925" anchor="t" anchorCtr="0">
             <a:normAutofit/>
           </a:bodyPr>
           <a:lstStyle>
-            <a:lvl1pPr indent="-449791" lvl="0" marL="457200" algn="ctr">
+            <a:lvl1pPr marL="457200" lvl="0" indent="-449791" algn="ctr">
               <a:spcBef>
                 <a:spcPts val="0"/>
               </a:spcBef>
@@ -3557,7 +3893,7 @@
               <a:buChar char="●"/>
               <a:defRPr sz="3483"/>
             </a:lvl1pPr>
-            <a:lvl2pPr indent="-400638" lvl="1" marL="914400" algn="ctr">
+            <a:lvl2pPr marL="914400" lvl="1" indent="-400638" algn="ctr">
               <a:spcBef>
                 <a:spcPts val="0"/>
               </a:spcBef>
@@ -3568,7 +3904,7 @@
               <a:buChar char="○"/>
               <a:defRPr sz="2709"/>
             </a:lvl2pPr>
-            <a:lvl3pPr indent="-400638" lvl="2" marL="1371600" algn="ctr">
+            <a:lvl3pPr marL="1371600" lvl="2" indent="-400638" algn="ctr">
               <a:spcBef>
                 <a:spcPts val="0"/>
               </a:spcBef>
@@ -3579,7 +3915,7 @@
               <a:buChar char="■"/>
               <a:defRPr sz="2709"/>
             </a:lvl3pPr>
-            <a:lvl4pPr indent="-400638" lvl="3" marL="1828800" algn="ctr">
+            <a:lvl4pPr marL="1828800" lvl="3" indent="-400638" algn="ctr">
               <a:spcBef>
                 <a:spcPts val="0"/>
               </a:spcBef>
@@ -3590,7 +3926,7 @@
               <a:buChar char="●"/>
               <a:defRPr sz="2709"/>
             </a:lvl4pPr>
-            <a:lvl5pPr indent="-400637" lvl="4" marL="2286000" algn="ctr">
+            <a:lvl5pPr marL="2286000" lvl="4" indent="-400637" algn="ctr">
               <a:spcBef>
                 <a:spcPts val="0"/>
               </a:spcBef>
@@ -3601,7 +3937,7 @@
               <a:buChar char="○"/>
               <a:defRPr sz="2709"/>
             </a:lvl5pPr>
-            <a:lvl6pPr indent="-400637" lvl="5" marL="2743200" algn="ctr">
+            <a:lvl6pPr marL="2743200" lvl="5" indent="-400637" algn="ctr">
               <a:spcBef>
                 <a:spcPts val="0"/>
               </a:spcBef>
@@ -3612,7 +3948,7 @@
               <a:buChar char="■"/>
               <a:defRPr sz="2709"/>
             </a:lvl6pPr>
-            <a:lvl7pPr indent="-400637" lvl="6" marL="3200400" algn="ctr">
+            <a:lvl7pPr marL="3200400" lvl="6" indent="-400637" algn="ctr">
               <a:spcBef>
                 <a:spcPts val="0"/>
               </a:spcBef>
@@ -3623,7 +3959,7 @@
               <a:buChar char="●"/>
               <a:defRPr sz="2709"/>
             </a:lvl7pPr>
-            <a:lvl8pPr indent="-400637" lvl="7" marL="3657600" algn="ctr">
+            <a:lvl8pPr marL="3657600" lvl="7" indent="-400637" algn="ctr">
               <a:spcBef>
                 <a:spcPts val="0"/>
               </a:spcBef>
@@ -3634,7 +3970,7 @@
               <a:buChar char="○"/>
               <a:defRPr sz="2709"/>
             </a:lvl8pPr>
-            <a:lvl9pPr indent="-400637" lvl="8" marL="4114800" algn="ctr">
+            <a:lvl9pPr marL="4114800" lvl="8" indent="-400637" algn="ctr">
               <a:spcBef>
                 <a:spcPts val="0"/>
               </a:spcBef>
@@ -3646,15 +3982,19 @@
               <a:defRPr sz="2709"/>
             </a:lvl9pPr>
           </a:lstStyle>
-          <a:p/>
+          <a:p>
+            <a:endParaRPr/>
+          </a:p>
         </p:txBody>
       </p:sp>
       <p:sp>
         <p:nvSpPr>
           <p:cNvPr id="47" name="Google Shape;47;p11"/>
-          <p:cNvSpPr txBox="1"/>
+          <p:cNvSpPr txBox="1">
+            <a:spLocks noGrp="1"/>
+          </p:cNvSpPr>
           <p:nvPr>
-            <p:ph idx="12" type="sldNum"/>
+            <p:ph type="sldNum" idx="12"/>
           </p:nvPr>
         </p:nvSpPr>
         <p:spPr>
@@ -3667,7 +4007,7 @@
           </a:prstGeom>
         </p:spPr>
         <p:txBody>
-          <a:bodyPr anchorCtr="0" anchor="ctr" bIns="176925" lIns="176925" spcFirstLastPara="1" rIns="176925" wrap="square" tIns="176925">
+          <a:bodyPr spcFirstLastPara="1" wrap="square" lIns="176925" tIns="176925" rIns="176925" bIns="176925" anchor="ctr" anchorCtr="0">
             <a:normAutofit/>
           </a:bodyPr>
           <a:lstStyle>
@@ -3709,7 +4049,7 @@
             </a:lvl9pPr>
           </a:lstStyle>
           <a:p>
-            <a:pPr indent="0" lvl="0" marL="0" rtl="0" algn="r">
+            <a:pPr marL="0" lvl="0" indent="0" algn="r" rtl="0">
               <a:spcBef>
                 <a:spcPts val="0"/>
               </a:spcBef>
@@ -3735,11 +4075,11 @@
 </file>
 
 <file path=ppt/slideLayouts/slideLayout11.xml><?xml version="1.0" encoding="utf-8"?>
-<p:sldLayout xmlns:a="http://schemas.openxmlformats.org/drawingml/2006/main" xmlns:r="http://schemas.openxmlformats.org/officeDocument/2006/relationships" xmlns:mc="http://schemas.openxmlformats.org/markup-compatibility/2006" xmlns:mv="urn:schemas-microsoft-com:mac:vml" xmlns:p="http://schemas.openxmlformats.org/presentationml/2006/main" xmlns:c="http://schemas.openxmlformats.org/drawingml/2006/chart" xmlns:dgm="http://schemas.openxmlformats.org/drawingml/2006/diagram" xmlns:o="urn:schemas-microsoft-com:office:office" xmlns:v="urn:schemas-microsoft-com:vml" xmlns:pvml="urn:schemas-microsoft-com:office:powerpoint" xmlns:com="http://schemas.openxmlformats.org/drawingml/2006/compatibility" xmlns:p14="http://schemas.microsoft.com/office/powerpoint/2010/main" xmlns:p15="http://schemas.microsoft.com/office/powerpoint/2012/main" xmlns:ahyp="http://schemas.microsoft.com/office/drawing/2018/hyperlinkcolor" matchingName="Blank" type="blank">
+<p:sldLayout xmlns:a="http://schemas.openxmlformats.org/drawingml/2006/main" xmlns:r="http://schemas.openxmlformats.org/officeDocument/2006/relationships" xmlns:p="http://schemas.openxmlformats.org/presentationml/2006/main" matchingName="Blank" type="blank">
   <p:cSld name="BLANK">
     <p:spTree>
       <p:nvGrpSpPr>
-        <p:cNvPr id="48" name="Shape 48"/>
+        <p:cNvPr id="1" name="Shape 48"/>
         <p:cNvGrpSpPr/>
         <p:nvPr/>
       </p:nvGrpSpPr>
@@ -3754,9 +4094,11 @@
       <p:sp>
         <p:nvSpPr>
           <p:cNvPr id="49" name="Google Shape;49;p12"/>
-          <p:cNvSpPr txBox="1"/>
+          <p:cNvSpPr txBox="1">
+            <a:spLocks noGrp="1"/>
+          </p:cNvSpPr>
           <p:nvPr>
-            <p:ph idx="12" type="sldNum"/>
+            <p:ph type="sldNum" idx="12"/>
           </p:nvPr>
         </p:nvSpPr>
         <p:spPr>
@@ -3769,7 +4111,7 @@
           </a:prstGeom>
         </p:spPr>
         <p:txBody>
-          <a:bodyPr anchorCtr="0" anchor="ctr" bIns="176925" lIns="176925" spcFirstLastPara="1" rIns="176925" wrap="square" tIns="176925">
+          <a:bodyPr spcFirstLastPara="1" wrap="square" lIns="176925" tIns="176925" rIns="176925" bIns="176925" anchor="ctr" anchorCtr="0">
             <a:normAutofit/>
           </a:bodyPr>
           <a:lstStyle>
@@ -3811,7 +4153,7 @@
             </a:lvl9pPr>
           </a:lstStyle>
           <a:p>
-            <a:pPr indent="0" lvl="0" marL="0" rtl="0" algn="r">
+            <a:pPr marL="0" lvl="0" indent="0" algn="r" rtl="0">
               <a:spcBef>
                 <a:spcPts val="0"/>
               </a:spcBef>
@@ -3837,11 +4179,11 @@
 </file>
 
 <file path=ppt/slideLayouts/slideLayout2.xml><?xml version="1.0" encoding="utf-8"?>
-<p:sldLayout xmlns:a="http://schemas.openxmlformats.org/drawingml/2006/main" xmlns:r="http://schemas.openxmlformats.org/officeDocument/2006/relationships" xmlns:mc="http://schemas.openxmlformats.org/markup-compatibility/2006" xmlns:mv="urn:schemas-microsoft-com:mac:vml" xmlns:p="http://schemas.openxmlformats.org/presentationml/2006/main" xmlns:c="http://schemas.openxmlformats.org/drawingml/2006/chart" xmlns:dgm="http://schemas.openxmlformats.org/drawingml/2006/diagram" xmlns:o="urn:schemas-microsoft-com:office:office" xmlns:v="urn:schemas-microsoft-com:vml" xmlns:pvml="urn:schemas-microsoft-com:office:powerpoint" xmlns:com="http://schemas.openxmlformats.org/drawingml/2006/compatibility" xmlns:p14="http://schemas.microsoft.com/office/powerpoint/2010/main" xmlns:p15="http://schemas.microsoft.com/office/powerpoint/2012/main" xmlns:ahyp="http://schemas.microsoft.com/office/drawing/2018/hyperlinkcolor" matchingName="Section header" type="secHead">
+<p:sldLayout xmlns:a="http://schemas.openxmlformats.org/drawingml/2006/main" xmlns:r="http://schemas.openxmlformats.org/officeDocument/2006/relationships" xmlns:p="http://schemas.openxmlformats.org/presentationml/2006/main" matchingName="Section header" type="secHead">
   <p:cSld name="SECTION_HEADER">
     <p:spTree>
       <p:nvGrpSpPr>
-        <p:cNvPr id="13" name="Shape 13"/>
+        <p:cNvPr id="1" name="Shape 13"/>
         <p:cNvGrpSpPr/>
         <p:nvPr/>
       </p:nvGrpSpPr>
@@ -3856,7 +4198,9 @@
       <p:sp>
         <p:nvSpPr>
           <p:cNvPr id="14" name="Google Shape;14;p3"/>
-          <p:cNvSpPr txBox="1"/>
+          <p:cNvSpPr txBox="1">
+            <a:spLocks noGrp="1"/>
+          </p:cNvSpPr>
           <p:nvPr>
             <p:ph type="title"/>
           </p:nvPr>
@@ -3871,7 +4215,7 @@
           </a:prstGeom>
         </p:spPr>
         <p:txBody>
-          <a:bodyPr anchorCtr="0" anchor="ctr" bIns="176925" lIns="176925" spcFirstLastPara="1" rIns="176925" wrap="square" tIns="176925">
+          <a:bodyPr spcFirstLastPara="1" wrap="square" lIns="176925" tIns="176925" rIns="176925" bIns="176925" anchor="ctr" anchorCtr="0">
             <a:normAutofit/>
           </a:bodyPr>
           <a:lstStyle>
@@ -3975,15 +4319,19 @@
               <a:defRPr sz="6966"/>
             </a:lvl9pPr>
           </a:lstStyle>
-          <a:p/>
+          <a:p>
+            <a:endParaRPr/>
+          </a:p>
         </p:txBody>
       </p:sp>
       <p:sp>
         <p:nvSpPr>
           <p:cNvPr id="15" name="Google Shape;15;p3"/>
-          <p:cNvSpPr txBox="1"/>
+          <p:cNvSpPr txBox="1">
+            <a:spLocks noGrp="1"/>
+          </p:cNvSpPr>
           <p:nvPr>
-            <p:ph idx="12" type="sldNum"/>
+            <p:ph type="sldNum" idx="12"/>
           </p:nvPr>
         </p:nvSpPr>
         <p:spPr>
@@ -3996,7 +4344,7 @@
           </a:prstGeom>
         </p:spPr>
         <p:txBody>
-          <a:bodyPr anchorCtr="0" anchor="ctr" bIns="176925" lIns="176925" spcFirstLastPara="1" rIns="176925" wrap="square" tIns="176925">
+          <a:bodyPr spcFirstLastPara="1" wrap="square" lIns="176925" tIns="176925" rIns="176925" bIns="176925" anchor="ctr" anchorCtr="0">
             <a:normAutofit/>
           </a:bodyPr>
           <a:lstStyle>
@@ -4038,7 +4386,7 @@
             </a:lvl9pPr>
           </a:lstStyle>
           <a:p>
-            <a:pPr indent="0" lvl="0" marL="0" rtl="0" algn="r">
+            <a:pPr marL="0" lvl="0" indent="0" algn="r" rtl="0">
               <a:spcBef>
                 <a:spcPts val="0"/>
               </a:spcBef>
@@ -4064,11 +4412,11 @@
 </file>
 
 <file path=ppt/slideLayouts/slideLayout3.xml><?xml version="1.0" encoding="utf-8"?>
-<p:sldLayout xmlns:a="http://schemas.openxmlformats.org/drawingml/2006/main" xmlns:r="http://schemas.openxmlformats.org/officeDocument/2006/relationships" xmlns:mc="http://schemas.openxmlformats.org/markup-compatibility/2006" xmlns:mv="urn:schemas-microsoft-com:mac:vml" xmlns:p="http://schemas.openxmlformats.org/presentationml/2006/main" xmlns:c="http://schemas.openxmlformats.org/drawingml/2006/chart" xmlns:dgm="http://schemas.openxmlformats.org/drawingml/2006/diagram" xmlns:o="urn:schemas-microsoft-com:office:office" xmlns:v="urn:schemas-microsoft-com:vml" xmlns:pvml="urn:schemas-microsoft-com:office:powerpoint" xmlns:com="http://schemas.openxmlformats.org/drawingml/2006/compatibility" xmlns:p14="http://schemas.microsoft.com/office/powerpoint/2010/main" xmlns:p15="http://schemas.microsoft.com/office/powerpoint/2012/main" xmlns:ahyp="http://schemas.microsoft.com/office/drawing/2018/hyperlinkcolor" matchingName="Title and body" type="tx">
+<p:sldLayout xmlns:a="http://schemas.openxmlformats.org/drawingml/2006/main" xmlns:r="http://schemas.openxmlformats.org/officeDocument/2006/relationships" xmlns:p="http://schemas.openxmlformats.org/presentationml/2006/main" matchingName="Title and body" type="tx">
   <p:cSld name="TITLE_AND_BODY">
     <p:spTree>
       <p:nvGrpSpPr>
-        <p:cNvPr id="16" name="Shape 16"/>
+        <p:cNvPr id="1" name="Shape 16"/>
         <p:cNvGrpSpPr/>
         <p:nvPr/>
       </p:nvGrpSpPr>
@@ -4083,7 +4431,9 @@
       <p:sp>
         <p:nvSpPr>
           <p:cNvPr id="17" name="Google Shape;17;p4"/>
-          <p:cNvSpPr txBox="1"/>
+          <p:cNvSpPr txBox="1">
+            <a:spLocks noGrp="1"/>
+          </p:cNvSpPr>
           <p:nvPr>
             <p:ph type="title"/>
           </p:nvPr>
@@ -4098,7 +4448,7 @@
           </a:prstGeom>
         </p:spPr>
         <p:txBody>
-          <a:bodyPr anchorCtr="0" anchor="t" bIns="176925" lIns="176925" spcFirstLastPara="1" rIns="176925" wrap="square" tIns="176925">
+          <a:bodyPr spcFirstLastPara="1" wrap="square" lIns="176925" tIns="176925" rIns="176925" bIns="176925" anchor="t" anchorCtr="0">
             <a:normAutofit/>
           </a:bodyPr>
           <a:lstStyle>
@@ -4202,15 +4552,19 @@
               <a:defRPr sz="5418"/>
             </a:lvl9pPr>
           </a:lstStyle>
-          <a:p/>
+          <a:p>
+            <a:endParaRPr/>
+          </a:p>
         </p:txBody>
       </p:sp>
       <p:sp>
         <p:nvSpPr>
           <p:cNvPr id="18" name="Google Shape;18;p4"/>
-          <p:cNvSpPr txBox="1"/>
+          <p:cNvSpPr txBox="1">
+            <a:spLocks noGrp="1"/>
+          </p:cNvSpPr>
           <p:nvPr>
-            <p:ph idx="1" type="body"/>
+            <p:ph type="body" idx="1"/>
           </p:nvPr>
         </p:nvSpPr>
         <p:spPr>
@@ -4223,11 +4577,11 @@
           </a:prstGeom>
         </p:spPr>
         <p:txBody>
-          <a:bodyPr anchorCtr="0" anchor="t" bIns="176925" lIns="176925" spcFirstLastPara="1" rIns="176925" wrap="square" tIns="176925">
+          <a:bodyPr spcFirstLastPara="1" wrap="square" lIns="176925" tIns="176925" rIns="176925" bIns="176925" anchor="t" anchorCtr="0">
             <a:normAutofit/>
           </a:bodyPr>
           <a:lstStyle>
-            <a:lvl1pPr indent="-449791" lvl="0" marL="457200">
+            <a:lvl1pPr marL="457200" lvl="0" indent="-449791">
               <a:spcBef>
                 <a:spcPts val="0"/>
               </a:spcBef>
@@ -4238,7 +4592,7 @@
               <a:buChar char="●"/>
               <a:defRPr sz="3483"/>
             </a:lvl1pPr>
-            <a:lvl2pPr indent="-400638" lvl="1" marL="914400">
+            <a:lvl2pPr marL="914400" lvl="1" indent="-400638">
               <a:spcBef>
                 <a:spcPts val="0"/>
               </a:spcBef>
@@ -4249,7 +4603,7 @@
               <a:buChar char="○"/>
               <a:defRPr sz="2709"/>
             </a:lvl2pPr>
-            <a:lvl3pPr indent="-400638" lvl="2" marL="1371600">
+            <a:lvl3pPr marL="1371600" lvl="2" indent="-400638">
               <a:spcBef>
                 <a:spcPts val="0"/>
               </a:spcBef>
@@ -4260,7 +4614,7 @@
               <a:buChar char="■"/>
               <a:defRPr sz="2709"/>
             </a:lvl3pPr>
-            <a:lvl4pPr indent="-400638" lvl="3" marL="1828800">
+            <a:lvl4pPr marL="1828800" lvl="3" indent="-400638">
               <a:spcBef>
                 <a:spcPts val="0"/>
               </a:spcBef>
@@ -4271,7 +4625,7 @@
               <a:buChar char="●"/>
               <a:defRPr sz="2709"/>
             </a:lvl4pPr>
-            <a:lvl5pPr indent="-400637" lvl="4" marL="2286000">
+            <a:lvl5pPr marL="2286000" lvl="4" indent="-400637">
               <a:spcBef>
                 <a:spcPts val="0"/>
               </a:spcBef>
@@ -4282,7 +4636,7 @@
               <a:buChar char="○"/>
               <a:defRPr sz="2709"/>
             </a:lvl5pPr>
-            <a:lvl6pPr indent="-400637" lvl="5" marL="2743200">
+            <a:lvl6pPr marL="2743200" lvl="5" indent="-400637">
               <a:spcBef>
                 <a:spcPts val="0"/>
               </a:spcBef>
@@ -4293,7 +4647,7 @@
               <a:buChar char="■"/>
               <a:defRPr sz="2709"/>
             </a:lvl6pPr>
-            <a:lvl7pPr indent="-400637" lvl="6" marL="3200400">
+            <a:lvl7pPr marL="3200400" lvl="6" indent="-400637">
               <a:spcBef>
                 <a:spcPts val="0"/>
               </a:spcBef>
@@ -4304,7 +4658,7 @@
               <a:buChar char="●"/>
               <a:defRPr sz="2709"/>
             </a:lvl7pPr>
-            <a:lvl8pPr indent="-400637" lvl="7" marL="3657600">
+            <a:lvl8pPr marL="3657600" lvl="7" indent="-400637">
               <a:spcBef>
                 <a:spcPts val="0"/>
               </a:spcBef>
@@ -4315,7 +4669,7 @@
               <a:buChar char="○"/>
               <a:defRPr sz="2709"/>
             </a:lvl8pPr>
-            <a:lvl9pPr indent="-400637" lvl="8" marL="4114800">
+            <a:lvl9pPr marL="4114800" lvl="8" indent="-400637">
               <a:spcBef>
                 <a:spcPts val="0"/>
               </a:spcBef>
@@ -4327,15 +4681,19 @@
               <a:defRPr sz="2709"/>
             </a:lvl9pPr>
           </a:lstStyle>
-          <a:p/>
+          <a:p>
+            <a:endParaRPr/>
+          </a:p>
         </p:txBody>
       </p:sp>
       <p:sp>
         <p:nvSpPr>
           <p:cNvPr id="19" name="Google Shape;19;p4"/>
-          <p:cNvSpPr txBox="1"/>
+          <p:cNvSpPr txBox="1">
+            <a:spLocks noGrp="1"/>
+          </p:cNvSpPr>
           <p:nvPr>
-            <p:ph idx="12" type="sldNum"/>
+            <p:ph type="sldNum" idx="12"/>
           </p:nvPr>
         </p:nvSpPr>
         <p:spPr>
@@ -4348,7 +4706,7 @@
           </a:prstGeom>
         </p:spPr>
         <p:txBody>
-          <a:bodyPr anchorCtr="0" anchor="ctr" bIns="176925" lIns="176925" spcFirstLastPara="1" rIns="176925" wrap="square" tIns="176925">
+          <a:bodyPr spcFirstLastPara="1" wrap="square" lIns="176925" tIns="176925" rIns="176925" bIns="176925" anchor="ctr" anchorCtr="0">
             <a:normAutofit/>
           </a:bodyPr>
           <a:lstStyle>
@@ -4390,7 +4748,7 @@
             </a:lvl9pPr>
           </a:lstStyle>
           <a:p>
-            <a:pPr indent="0" lvl="0" marL="0" rtl="0" algn="r">
+            <a:pPr marL="0" lvl="0" indent="0" algn="r" rtl="0">
               <a:spcBef>
                 <a:spcPts val="0"/>
               </a:spcBef>
@@ -4416,11 +4774,11 @@
 </file>
 
 <file path=ppt/slideLayouts/slideLayout4.xml><?xml version="1.0" encoding="utf-8"?>
-<p:sldLayout xmlns:a="http://schemas.openxmlformats.org/drawingml/2006/main" xmlns:r="http://schemas.openxmlformats.org/officeDocument/2006/relationships" xmlns:mc="http://schemas.openxmlformats.org/markup-compatibility/2006" xmlns:mv="urn:schemas-microsoft-com:mac:vml" xmlns:p="http://schemas.openxmlformats.org/presentationml/2006/main" xmlns:c="http://schemas.openxmlformats.org/drawingml/2006/chart" xmlns:dgm="http://schemas.openxmlformats.org/drawingml/2006/diagram" xmlns:o="urn:schemas-microsoft-com:office:office" xmlns:v="urn:schemas-microsoft-com:vml" xmlns:pvml="urn:schemas-microsoft-com:office:powerpoint" xmlns:com="http://schemas.openxmlformats.org/drawingml/2006/compatibility" xmlns:p14="http://schemas.microsoft.com/office/powerpoint/2010/main" xmlns:p15="http://schemas.microsoft.com/office/powerpoint/2012/main" xmlns:ahyp="http://schemas.microsoft.com/office/drawing/2018/hyperlinkcolor" matchingName="Title and two columns" type="twoColTx">
+<p:sldLayout xmlns:a="http://schemas.openxmlformats.org/drawingml/2006/main" xmlns:r="http://schemas.openxmlformats.org/officeDocument/2006/relationships" xmlns:p="http://schemas.openxmlformats.org/presentationml/2006/main" matchingName="Title and two columns" type="twoColTx">
   <p:cSld name="TITLE_AND_TWO_COLUMNS">
     <p:spTree>
       <p:nvGrpSpPr>
-        <p:cNvPr id="20" name="Shape 20"/>
+        <p:cNvPr id="1" name="Shape 20"/>
         <p:cNvGrpSpPr/>
         <p:nvPr/>
       </p:nvGrpSpPr>
@@ -4435,7 +4793,9 @@
       <p:sp>
         <p:nvSpPr>
           <p:cNvPr id="21" name="Google Shape;21;p5"/>
-          <p:cNvSpPr txBox="1"/>
+          <p:cNvSpPr txBox="1">
+            <a:spLocks noGrp="1"/>
+          </p:cNvSpPr>
           <p:nvPr>
             <p:ph type="title"/>
           </p:nvPr>
@@ -4450,7 +4810,7 @@
           </a:prstGeom>
         </p:spPr>
         <p:txBody>
-          <a:bodyPr anchorCtr="0" anchor="t" bIns="176925" lIns="176925" spcFirstLastPara="1" rIns="176925" wrap="square" tIns="176925">
+          <a:bodyPr spcFirstLastPara="1" wrap="square" lIns="176925" tIns="176925" rIns="176925" bIns="176925" anchor="t" anchorCtr="0">
             <a:normAutofit/>
           </a:bodyPr>
           <a:lstStyle>
@@ -4554,15 +4914,19 @@
               <a:defRPr sz="5418"/>
             </a:lvl9pPr>
           </a:lstStyle>
-          <a:p/>
+          <a:p>
+            <a:endParaRPr/>
+          </a:p>
         </p:txBody>
       </p:sp>
       <p:sp>
         <p:nvSpPr>
           <p:cNvPr id="22" name="Google Shape;22;p5"/>
-          <p:cNvSpPr txBox="1"/>
+          <p:cNvSpPr txBox="1">
+            <a:spLocks noGrp="1"/>
+          </p:cNvSpPr>
           <p:nvPr>
-            <p:ph idx="1" type="body"/>
+            <p:ph type="body" idx="1"/>
           </p:nvPr>
         </p:nvSpPr>
         <p:spPr>
@@ -4575,11 +4939,11 @@
           </a:prstGeom>
         </p:spPr>
         <p:txBody>
-          <a:bodyPr anchorCtr="0" anchor="t" bIns="176925" lIns="176925" spcFirstLastPara="1" rIns="176925" wrap="square" tIns="176925">
+          <a:bodyPr spcFirstLastPara="1" wrap="square" lIns="176925" tIns="176925" rIns="176925" bIns="176925" anchor="t" anchorCtr="0">
             <a:normAutofit/>
           </a:bodyPr>
           <a:lstStyle>
-            <a:lvl1pPr indent="-400638" lvl="0" marL="457200">
+            <a:lvl1pPr marL="457200" lvl="0" indent="-400638">
               <a:spcBef>
                 <a:spcPts val="0"/>
               </a:spcBef>
@@ -4590,7 +4954,7 @@
               <a:buChar char="●"/>
               <a:defRPr sz="2709"/>
             </a:lvl1pPr>
-            <a:lvl2pPr indent="-376060" lvl="1" marL="914400">
+            <a:lvl2pPr marL="914400" lvl="1" indent="-376060">
               <a:spcBef>
                 <a:spcPts val="0"/>
               </a:spcBef>
@@ -4601,7 +4965,7 @@
               <a:buChar char="○"/>
               <a:defRPr sz="2322"/>
             </a:lvl2pPr>
-            <a:lvl3pPr indent="-376060" lvl="2" marL="1371600">
+            <a:lvl3pPr marL="1371600" lvl="2" indent="-376060">
               <a:spcBef>
                 <a:spcPts val="0"/>
               </a:spcBef>
@@ -4612,7 +4976,7 @@
               <a:buChar char="■"/>
               <a:defRPr sz="2322"/>
             </a:lvl3pPr>
-            <a:lvl4pPr indent="-376060" lvl="3" marL="1828800">
+            <a:lvl4pPr marL="1828800" lvl="3" indent="-376060">
               <a:spcBef>
                 <a:spcPts val="0"/>
               </a:spcBef>
@@ -4623,7 +4987,7 @@
               <a:buChar char="●"/>
               <a:defRPr sz="2322"/>
             </a:lvl4pPr>
-            <a:lvl5pPr indent="-376060" lvl="4" marL="2286000">
+            <a:lvl5pPr marL="2286000" lvl="4" indent="-376060">
               <a:spcBef>
                 <a:spcPts val="0"/>
               </a:spcBef>
@@ -4634,7 +4998,7 @@
               <a:buChar char="○"/>
               <a:defRPr sz="2322"/>
             </a:lvl5pPr>
-            <a:lvl6pPr indent="-376060" lvl="5" marL="2743200">
+            <a:lvl6pPr marL="2743200" lvl="5" indent="-376060">
               <a:spcBef>
                 <a:spcPts val="0"/>
               </a:spcBef>
@@ -4645,7 +5009,7 @@
               <a:buChar char="■"/>
               <a:defRPr sz="2322"/>
             </a:lvl6pPr>
-            <a:lvl7pPr indent="-376060" lvl="6" marL="3200400">
+            <a:lvl7pPr marL="3200400" lvl="6" indent="-376060">
               <a:spcBef>
                 <a:spcPts val="0"/>
               </a:spcBef>
@@ -4656,7 +5020,7 @@
               <a:buChar char="●"/>
               <a:defRPr sz="2322"/>
             </a:lvl7pPr>
-            <a:lvl8pPr indent="-376061" lvl="7" marL="3657600">
+            <a:lvl8pPr marL="3657600" lvl="7" indent="-376061">
               <a:spcBef>
                 <a:spcPts val="0"/>
               </a:spcBef>
@@ -4667,7 +5031,7 @@
               <a:buChar char="○"/>
               <a:defRPr sz="2322"/>
             </a:lvl8pPr>
-            <a:lvl9pPr indent="-376061" lvl="8" marL="4114800">
+            <a:lvl9pPr marL="4114800" lvl="8" indent="-376061">
               <a:spcBef>
                 <a:spcPts val="0"/>
               </a:spcBef>
@@ -4679,15 +5043,19 @@
               <a:defRPr sz="2322"/>
             </a:lvl9pPr>
           </a:lstStyle>
-          <a:p/>
+          <a:p>
+            <a:endParaRPr/>
+          </a:p>
         </p:txBody>
       </p:sp>
       <p:sp>
         <p:nvSpPr>
           <p:cNvPr id="23" name="Google Shape;23;p5"/>
-          <p:cNvSpPr txBox="1"/>
+          <p:cNvSpPr txBox="1">
+            <a:spLocks noGrp="1"/>
+          </p:cNvSpPr>
           <p:nvPr>
-            <p:ph idx="2" type="body"/>
+            <p:ph type="body" idx="2"/>
           </p:nvPr>
         </p:nvSpPr>
         <p:spPr>
@@ -4700,11 +5068,11 @@
           </a:prstGeom>
         </p:spPr>
         <p:txBody>
-          <a:bodyPr anchorCtr="0" anchor="t" bIns="176925" lIns="176925" spcFirstLastPara="1" rIns="176925" wrap="square" tIns="176925">
+          <a:bodyPr spcFirstLastPara="1" wrap="square" lIns="176925" tIns="176925" rIns="176925" bIns="176925" anchor="t" anchorCtr="0">
             <a:normAutofit/>
           </a:bodyPr>
           <a:lstStyle>
-            <a:lvl1pPr indent="-400638" lvl="0" marL="457200">
+            <a:lvl1pPr marL="457200" lvl="0" indent="-400638">
               <a:spcBef>
                 <a:spcPts val="0"/>
               </a:spcBef>
@@ -4715,7 +5083,7 @@
               <a:buChar char="●"/>
               <a:defRPr sz="2709"/>
             </a:lvl1pPr>
-            <a:lvl2pPr indent="-376060" lvl="1" marL="914400">
+            <a:lvl2pPr marL="914400" lvl="1" indent="-376060">
               <a:spcBef>
                 <a:spcPts val="0"/>
               </a:spcBef>
@@ -4726,7 +5094,7 @@
               <a:buChar char="○"/>
               <a:defRPr sz="2322"/>
             </a:lvl2pPr>
-            <a:lvl3pPr indent="-376060" lvl="2" marL="1371600">
+            <a:lvl3pPr marL="1371600" lvl="2" indent="-376060">
               <a:spcBef>
                 <a:spcPts val="0"/>
               </a:spcBef>
@@ -4737,7 +5105,7 @@
               <a:buChar char="■"/>
               <a:defRPr sz="2322"/>
             </a:lvl3pPr>
-            <a:lvl4pPr indent="-376060" lvl="3" marL="1828800">
+            <a:lvl4pPr marL="1828800" lvl="3" indent="-376060">
               <a:spcBef>
                 <a:spcPts val="0"/>
               </a:spcBef>
@@ -4748,7 +5116,7 @@
               <a:buChar char="●"/>
               <a:defRPr sz="2322"/>
             </a:lvl4pPr>
-            <a:lvl5pPr indent="-376060" lvl="4" marL="2286000">
+            <a:lvl5pPr marL="2286000" lvl="4" indent="-376060">
               <a:spcBef>
                 <a:spcPts val="0"/>
               </a:spcBef>
@@ -4759,7 +5127,7 @@
               <a:buChar char="○"/>
               <a:defRPr sz="2322"/>
             </a:lvl5pPr>
-            <a:lvl6pPr indent="-376060" lvl="5" marL="2743200">
+            <a:lvl6pPr marL="2743200" lvl="5" indent="-376060">
               <a:spcBef>
                 <a:spcPts val="0"/>
               </a:spcBef>
@@ -4770,7 +5138,7 @@
               <a:buChar char="■"/>
               <a:defRPr sz="2322"/>
             </a:lvl6pPr>
-            <a:lvl7pPr indent="-376060" lvl="6" marL="3200400">
+            <a:lvl7pPr marL="3200400" lvl="6" indent="-376060">
               <a:spcBef>
                 <a:spcPts val="0"/>
               </a:spcBef>
@@ -4781,7 +5149,7 @@
               <a:buChar char="●"/>
               <a:defRPr sz="2322"/>
             </a:lvl7pPr>
-            <a:lvl8pPr indent="-376061" lvl="7" marL="3657600">
+            <a:lvl8pPr marL="3657600" lvl="7" indent="-376061">
               <a:spcBef>
                 <a:spcPts val="0"/>
               </a:spcBef>
@@ -4792,7 +5160,7 @@
               <a:buChar char="○"/>
               <a:defRPr sz="2322"/>
             </a:lvl8pPr>
-            <a:lvl9pPr indent="-376061" lvl="8" marL="4114800">
+            <a:lvl9pPr marL="4114800" lvl="8" indent="-376061">
               <a:spcBef>
                 <a:spcPts val="0"/>
               </a:spcBef>
@@ -4804,15 +5172,19 @@
               <a:defRPr sz="2322"/>
             </a:lvl9pPr>
           </a:lstStyle>
-          <a:p/>
+          <a:p>
+            <a:endParaRPr/>
+          </a:p>
         </p:txBody>
       </p:sp>
       <p:sp>
         <p:nvSpPr>
           <p:cNvPr id="24" name="Google Shape;24;p5"/>
-          <p:cNvSpPr txBox="1"/>
+          <p:cNvSpPr txBox="1">
+            <a:spLocks noGrp="1"/>
+          </p:cNvSpPr>
           <p:nvPr>
-            <p:ph idx="12" type="sldNum"/>
+            <p:ph type="sldNum" idx="12"/>
           </p:nvPr>
         </p:nvSpPr>
         <p:spPr>
@@ -4825,7 +5197,7 @@
           </a:prstGeom>
         </p:spPr>
         <p:txBody>
-          <a:bodyPr anchorCtr="0" anchor="ctr" bIns="176925" lIns="176925" spcFirstLastPara="1" rIns="176925" wrap="square" tIns="176925">
+          <a:bodyPr spcFirstLastPara="1" wrap="square" lIns="176925" tIns="176925" rIns="176925" bIns="176925" anchor="ctr" anchorCtr="0">
             <a:normAutofit/>
           </a:bodyPr>
           <a:lstStyle>
@@ -4867,7 +5239,7 @@
             </a:lvl9pPr>
           </a:lstStyle>
           <a:p>
-            <a:pPr indent="0" lvl="0" marL="0" rtl="0" algn="r">
+            <a:pPr marL="0" lvl="0" indent="0" algn="r" rtl="0">
               <a:spcBef>
                 <a:spcPts val="0"/>
               </a:spcBef>
@@ -4893,11 +5265,11 @@
 </file>
 
 <file path=ppt/slideLayouts/slideLayout5.xml><?xml version="1.0" encoding="utf-8"?>
-<p:sldLayout xmlns:a="http://schemas.openxmlformats.org/drawingml/2006/main" xmlns:r="http://schemas.openxmlformats.org/officeDocument/2006/relationships" xmlns:mc="http://schemas.openxmlformats.org/markup-compatibility/2006" xmlns:mv="urn:schemas-microsoft-com:mac:vml" xmlns:p="http://schemas.openxmlformats.org/presentationml/2006/main" xmlns:c="http://schemas.openxmlformats.org/drawingml/2006/chart" xmlns:dgm="http://schemas.openxmlformats.org/drawingml/2006/diagram" xmlns:o="urn:schemas-microsoft-com:office:office" xmlns:v="urn:schemas-microsoft-com:vml" xmlns:pvml="urn:schemas-microsoft-com:office:powerpoint" xmlns:com="http://schemas.openxmlformats.org/drawingml/2006/compatibility" xmlns:p14="http://schemas.microsoft.com/office/powerpoint/2010/main" xmlns:p15="http://schemas.microsoft.com/office/powerpoint/2012/main" xmlns:ahyp="http://schemas.microsoft.com/office/drawing/2018/hyperlinkcolor" matchingName="Title only" type="titleOnly">
+<p:sldLayout xmlns:a="http://schemas.openxmlformats.org/drawingml/2006/main" xmlns:r="http://schemas.openxmlformats.org/officeDocument/2006/relationships" xmlns:p="http://schemas.openxmlformats.org/presentationml/2006/main" matchingName="Title only" type="titleOnly">
   <p:cSld name="TITLE_ONLY">
     <p:spTree>
       <p:nvGrpSpPr>
-        <p:cNvPr id="25" name="Shape 25"/>
+        <p:cNvPr id="1" name="Shape 25"/>
         <p:cNvGrpSpPr/>
         <p:nvPr/>
       </p:nvGrpSpPr>
@@ -4912,7 +5284,9 @@
       <p:sp>
         <p:nvSpPr>
           <p:cNvPr id="26" name="Google Shape;26;p6"/>
-          <p:cNvSpPr txBox="1"/>
+          <p:cNvSpPr txBox="1">
+            <a:spLocks noGrp="1"/>
+          </p:cNvSpPr>
           <p:nvPr>
             <p:ph type="title"/>
           </p:nvPr>
@@ -4927,7 +5301,7 @@
           </a:prstGeom>
         </p:spPr>
         <p:txBody>
-          <a:bodyPr anchorCtr="0" anchor="t" bIns="176925" lIns="176925" spcFirstLastPara="1" rIns="176925" wrap="square" tIns="176925">
+          <a:bodyPr spcFirstLastPara="1" wrap="square" lIns="176925" tIns="176925" rIns="176925" bIns="176925" anchor="t" anchorCtr="0">
             <a:normAutofit/>
           </a:bodyPr>
           <a:lstStyle>
@@ -5031,15 +5405,19 @@
               <a:defRPr sz="5418"/>
             </a:lvl9pPr>
           </a:lstStyle>
-          <a:p/>
+          <a:p>
+            <a:endParaRPr/>
+          </a:p>
         </p:txBody>
       </p:sp>
       <p:sp>
         <p:nvSpPr>
           <p:cNvPr id="27" name="Google Shape;27;p6"/>
-          <p:cNvSpPr txBox="1"/>
+          <p:cNvSpPr txBox="1">
+            <a:spLocks noGrp="1"/>
+          </p:cNvSpPr>
           <p:nvPr>
-            <p:ph idx="12" type="sldNum"/>
+            <p:ph type="sldNum" idx="12"/>
           </p:nvPr>
         </p:nvSpPr>
         <p:spPr>
@@ -5052,7 +5430,7 @@
           </a:prstGeom>
         </p:spPr>
         <p:txBody>
-          <a:bodyPr anchorCtr="0" anchor="ctr" bIns="176925" lIns="176925" spcFirstLastPara="1" rIns="176925" wrap="square" tIns="176925">
+          <a:bodyPr spcFirstLastPara="1" wrap="square" lIns="176925" tIns="176925" rIns="176925" bIns="176925" anchor="ctr" anchorCtr="0">
             <a:normAutofit/>
           </a:bodyPr>
           <a:lstStyle>
@@ -5094,7 +5472,7 @@
             </a:lvl9pPr>
           </a:lstStyle>
           <a:p>
-            <a:pPr indent="0" lvl="0" marL="0" rtl="0" algn="r">
+            <a:pPr marL="0" lvl="0" indent="0" algn="r" rtl="0">
               <a:spcBef>
                 <a:spcPts val="0"/>
               </a:spcBef>
@@ -5120,11 +5498,11 @@
 </file>
 
 <file path=ppt/slideLayouts/slideLayout6.xml><?xml version="1.0" encoding="utf-8"?>
-<p:sldLayout xmlns:a="http://schemas.openxmlformats.org/drawingml/2006/main" xmlns:r="http://schemas.openxmlformats.org/officeDocument/2006/relationships" xmlns:mc="http://schemas.openxmlformats.org/markup-compatibility/2006" xmlns:mv="urn:schemas-microsoft-com:mac:vml" xmlns:p="http://schemas.openxmlformats.org/presentationml/2006/main" xmlns:c="http://schemas.openxmlformats.org/drawingml/2006/chart" xmlns:dgm="http://schemas.openxmlformats.org/drawingml/2006/diagram" xmlns:o="urn:schemas-microsoft-com:office:office" xmlns:v="urn:schemas-microsoft-com:vml" xmlns:pvml="urn:schemas-microsoft-com:office:powerpoint" xmlns:com="http://schemas.openxmlformats.org/drawingml/2006/compatibility" xmlns:p14="http://schemas.microsoft.com/office/powerpoint/2010/main" xmlns:p15="http://schemas.microsoft.com/office/powerpoint/2012/main" xmlns:ahyp="http://schemas.microsoft.com/office/drawing/2018/hyperlinkcolor" matchingName="One column text">
+<p:sldLayout xmlns:a="http://schemas.openxmlformats.org/drawingml/2006/main" xmlns:r="http://schemas.openxmlformats.org/officeDocument/2006/relationships" xmlns:p="http://schemas.openxmlformats.org/presentationml/2006/main" matchingName="One column text">
   <p:cSld name="ONE_COLUMN_TEXT">
     <p:spTree>
       <p:nvGrpSpPr>
-        <p:cNvPr id="28" name="Shape 28"/>
+        <p:cNvPr id="1" name="Shape 28"/>
         <p:cNvGrpSpPr/>
         <p:nvPr/>
       </p:nvGrpSpPr>
@@ -5139,7 +5517,9 @@
       <p:sp>
         <p:nvSpPr>
           <p:cNvPr id="29" name="Google Shape;29;p7"/>
-          <p:cNvSpPr txBox="1"/>
+          <p:cNvSpPr txBox="1">
+            <a:spLocks noGrp="1"/>
+          </p:cNvSpPr>
           <p:nvPr>
             <p:ph type="title"/>
           </p:nvPr>
@@ -5154,7 +5534,7 @@
           </a:prstGeom>
         </p:spPr>
         <p:txBody>
-          <a:bodyPr anchorCtr="0" anchor="b" bIns="176925" lIns="176925" spcFirstLastPara="1" rIns="176925" wrap="square" tIns="176925">
+          <a:bodyPr spcFirstLastPara="1" wrap="square" lIns="176925" tIns="176925" rIns="176925" bIns="176925" anchor="b" anchorCtr="0">
             <a:normAutofit/>
           </a:bodyPr>
           <a:lstStyle>
@@ -5258,15 +5638,19 @@
               <a:defRPr sz="4644"/>
             </a:lvl9pPr>
           </a:lstStyle>
-          <a:p/>
+          <a:p>
+            <a:endParaRPr/>
+          </a:p>
         </p:txBody>
       </p:sp>
       <p:sp>
         <p:nvSpPr>
           <p:cNvPr id="30" name="Google Shape;30;p7"/>
-          <p:cNvSpPr txBox="1"/>
+          <p:cNvSpPr txBox="1">
+            <a:spLocks noGrp="1"/>
+          </p:cNvSpPr>
           <p:nvPr>
-            <p:ph idx="1" type="body"/>
+            <p:ph type="body" idx="1"/>
           </p:nvPr>
         </p:nvSpPr>
         <p:spPr>
@@ -5279,11 +5663,11 @@
           </a:prstGeom>
         </p:spPr>
         <p:txBody>
-          <a:bodyPr anchorCtr="0" anchor="t" bIns="176925" lIns="176925" spcFirstLastPara="1" rIns="176925" wrap="square" tIns="176925">
+          <a:bodyPr spcFirstLastPara="1" wrap="square" lIns="176925" tIns="176925" rIns="176925" bIns="176925" anchor="t" anchorCtr="0">
             <a:normAutofit/>
           </a:bodyPr>
           <a:lstStyle>
-            <a:lvl1pPr indent="-376060" lvl="0" marL="457200">
+            <a:lvl1pPr marL="457200" lvl="0" indent="-376060">
               <a:spcBef>
                 <a:spcPts val="0"/>
               </a:spcBef>
@@ -5294,7 +5678,7 @@
               <a:buChar char="●"/>
               <a:defRPr sz="2322"/>
             </a:lvl1pPr>
-            <a:lvl2pPr indent="-376060" lvl="1" marL="914400">
+            <a:lvl2pPr marL="914400" lvl="1" indent="-376060">
               <a:spcBef>
                 <a:spcPts val="0"/>
               </a:spcBef>
@@ -5305,7 +5689,7 @@
               <a:buChar char="○"/>
               <a:defRPr sz="2322"/>
             </a:lvl2pPr>
-            <a:lvl3pPr indent="-376060" lvl="2" marL="1371600">
+            <a:lvl3pPr marL="1371600" lvl="2" indent="-376060">
               <a:spcBef>
                 <a:spcPts val="0"/>
               </a:spcBef>
@@ -5316,7 +5700,7 @@
               <a:buChar char="■"/>
               <a:defRPr sz="2322"/>
             </a:lvl3pPr>
-            <a:lvl4pPr indent="-376060" lvl="3" marL="1828800">
+            <a:lvl4pPr marL="1828800" lvl="3" indent="-376060">
               <a:spcBef>
                 <a:spcPts val="0"/>
               </a:spcBef>
@@ -5327,7 +5711,7 @@
               <a:buChar char="●"/>
               <a:defRPr sz="2322"/>
             </a:lvl4pPr>
-            <a:lvl5pPr indent="-376060" lvl="4" marL="2286000">
+            <a:lvl5pPr marL="2286000" lvl="4" indent="-376060">
               <a:spcBef>
                 <a:spcPts val="0"/>
               </a:spcBef>
@@ -5338,7 +5722,7 @@
               <a:buChar char="○"/>
               <a:defRPr sz="2322"/>
             </a:lvl5pPr>
-            <a:lvl6pPr indent="-376060" lvl="5" marL="2743200">
+            <a:lvl6pPr marL="2743200" lvl="5" indent="-376060">
               <a:spcBef>
                 <a:spcPts val="0"/>
               </a:spcBef>
@@ -5349,7 +5733,7 @@
               <a:buChar char="■"/>
               <a:defRPr sz="2322"/>
             </a:lvl6pPr>
-            <a:lvl7pPr indent="-376060" lvl="6" marL="3200400">
+            <a:lvl7pPr marL="3200400" lvl="6" indent="-376060">
               <a:spcBef>
                 <a:spcPts val="0"/>
               </a:spcBef>
@@ -5360,7 +5744,7 @@
               <a:buChar char="●"/>
               <a:defRPr sz="2322"/>
             </a:lvl7pPr>
-            <a:lvl8pPr indent="-376061" lvl="7" marL="3657600">
+            <a:lvl8pPr marL="3657600" lvl="7" indent="-376061">
               <a:spcBef>
                 <a:spcPts val="0"/>
               </a:spcBef>
@@ -5371,7 +5755,7 @@
               <a:buChar char="○"/>
               <a:defRPr sz="2322"/>
             </a:lvl8pPr>
-            <a:lvl9pPr indent="-376061" lvl="8" marL="4114800">
+            <a:lvl9pPr marL="4114800" lvl="8" indent="-376061">
               <a:spcBef>
                 <a:spcPts val="0"/>
               </a:spcBef>
@@ -5383,15 +5767,19 @@
               <a:defRPr sz="2322"/>
             </a:lvl9pPr>
           </a:lstStyle>
-          <a:p/>
+          <a:p>
+            <a:endParaRPr/>
+          </a:p>
         </p:txBody>
       </p:sp>
       <p:sp>
         <p:nvSpPr>
           <p:cNvPr id="31" name="Google Shape;31;p7"/>
-          <p:cNvSpPr txBox="1"/>
+          <p:cNvSpPr txBox="1">
+            <a:spLocks noGrp="1"/>
+          </p:cNvSpPr>
           <p:nvPr>
-            <p:ph idx="12" type="sldNum"/>
+            <p:ph type="sldNum" idx="12"/>
           </p:nvPr>
         </p:nvSpPr>
         <p:spPr>
@@ -5404,7 +5792,7 @@
           </a:prstGeom>
         </p:spPr>
         <p:txBody>
-          <a:bodyPr anchorCtr="0" anchor="ctr" bIns="176925" lIns="176925" spcFirstLastPara="1" rIns="176925" wrap="square" tIns="176925">
+          <a:bodyPr spcFirstLastPara="1" wrap="square" lIns="176925" tIns="176925" rIns="176925" bIns="176925" anchor="ctr" anchorCtr="0">
             <a:normAutofit/>
           </a:bodyPr>
           <a:lstStyle>
@@ -5446,7 +5834,7 @@
             </a:lvl9pPr>
           </a:lstStyle>
           <a:p>
-            <a:pPr indent="0" lvl="0" marL="0" rtl="0" algn="r">
+            <a:pPr marL="0" lvl="0" indent="0" algn="r" rtl="0">
               <a:spcBef>
                 <a:spcPts val="0"/>
               </a:spcBef>
@@ -5472,11 +5860,11 @@
 </file>
 
 <file path=ppt/slideLayouts/slideLayout7.xml><?xml version="1.0" encoding="utf-8"?>
-<p:sldLayout xmlns:a="http://schemas.openxmlformats.org/drawingml/2006/main" xmlns:r="http://schemas.openxmlformats.org/officeDocument/2006/relationships" xmlns:mc="http://schemas.openxmlformats.org/markup-compatibility/2006" xmlns:mv="urn:schemas-microsoft-com:mac:vml" xmlns:p="http://schemas.openxmlformats.org/presentationml/2006/main" xmlns:c="http://schemas.openxmlformats.org/drawingml/2006/chart" xmlns:dgm="http://schemas.openxmlformats.org/drawingml/2006/diagram" xmlns:o="urn:schemas-microsoft-com:office:office" xmlns:v="urn:schemas-microsoft-com:vml" xmlns:pvml="urn:schemas-microsoft-com:office:powerpoint" xmlns:com="http://schemas.openxmlformats.org/drawingml/2006/compatibility" xmlns:p14="http://schemas.microsoft.com/office/powerpoint/2010/main" xmlns:p15="http://schemas.microsoft.com/office/powerpoint/2012/main" xmlns:ahyp="http://schemas.microsoft.com/office/drawing/2018/hyperlinkcolor" matchingName="Main point">
+<p:sldLayout xmlns:a="http://schemas.openxmlformats.org/drawingml/2006/main" xmlns:r="http://schemas.openxmlformats.org/officeDocument/2006/relationships" xmlns:p="http://schemas.openxmlformats.org/presentationml/2006/main" matchingName="Main point">
   <p:cSld name="MAIN_POINT">
     <p:spTree>
       <p:nvGrpSpPr>
-        <p:cNvPr id="32" name="Shape 32"/>
+        <p:cNvPr id="1" name="Shape 32"/>
         <p:cNvGrpSpPr/>
         <p:nvPr/>
       </p:nvGrpSpPr>
@@ -5491,7 +5879,9 @@
       <p:sp>
         <p:nvSpPr>
           <p:cNvPr id="33" name="Google Shape;33;p8"/>
-          <p:cNvSpPr txBox="1"/>
+          <p:cNvSpPr txBox="1">
+            <a:spLocks noGrp="1"/>
+          </p:cNvSpPr>
           <p:nvPr>
             <p:ph type="title"/>
           </p:nvPr>
@@ -5506,7 +5896,7 @@
           </a:prstGeom>
         </p:spPr>
         <p:txBody>
-          <a:bodyPr anchorCtr="0" anchor="ctr" bIns="176925" lIns="176925" spcFirstLastPara="1" rIns="176925" wrap="square" tIns="176925">
+          <a:bodyPr spcFirstLastPara="1" wrap="square" lIns="176925" tIns="176925" rIns="176925" bIns="176925" anchor="ctr" anchorCtr="0">
             <a:normAutofit/>
           </a:bodyPr>
           <a:lstStyle>
@@ -5610,15 +6000,19 @@
               <a:defRPr sz="9288"/>
             </a:lvl9pPr>
           </a:lstStyle>
-          <a:p/>
+          <a:p>
+            <a:endParaRPr/>
+          </a:p>
         </p:txBody>
       </p:sp>
       <p:sp>
         <p:nvSpPr>
           <p:cNvPr id="34" name="Google Shape;34;p8"/>
-          <p:cNvSpPr txBox="1"/>
+          <p:cNvSpPr txBox="1">
+            <a:spLocks noGrp="1"/>
+          </p:cNvSpPr>
           <p:nvPr>
-            <p:ph idx="12" type="sldNum"/>
+            <p:ph type="sldNum" idx="12"/>
           </p:nvPr>
         </p:nvSpPr>
         <p:spPr>
@@ -5631,7 +6025,7 @@
           </a:prstGeom>
         </p:spPr>
         <p:txBody>
-          <a:bodyPr anchorCtr="0" anchor="ctr" bIns="176925" lIns="176925" spcFirstLastPara="1" rIns="176925" wrap="square" tIns="176925">
+          <a:bodyPr spcFirstLastPara="1" wrap="square" lIns="176925" tIns="176925" rIns="176925" bIns="176925" anchor="ctr" anchorCtr="0">
             <a:normAutofit/>
           </a:bodyPr>
           <a:lstStyle>
@@ -5673,7 +6067,7 @@
             </a:lvl9pPr>
           </a:lstStyle>
           <a:p>
-            <a:pPr indent="0" lvl="0" marL="0" rtl="0" algn="r">
+            <a:pPr marL="0" lvl="0" indent="0" algn="r" rtl="0">
               <a:spcBef>
                 <a:spcPts val="0"/>
               </a:spcBef>
@@ -5699,11 +6093,11 @@
 </file>
 
 <file path=ppt/slideLayouts/slideLayout8.xml><?xml version="1.0" encoding="utf-8"?>
-<p:sldLayout xmlns:a="http://schemas.openxmlformats.org/drawingml/2006/main" xmlns:r="http://schemas.openxmlformats.org/officeDocument/2006/relationships" xmlns:mc="http://schemas.openxmlformats.org/markup-compatibility/2006" xmlns:mv="urn:schemas-microsoft-com:mac:vml" xmlns:p="http://schemas.openxmlformats.org/presentationml/2006/main" xmlns:c="http://schemas.openxmlformats.org/drawingml/2006/chart" xmlns:dgm="http://schemas.openxmlformats.org/drawingml/2006/diagram" xmlns:o="urn:schemas-microsoft-com:office:office" xmlns:v="urn:schemas-microsoft-com:vml" xmlns:pvml="urn:schemas-microsoft-com:office:powerpoint" xmlns:com="http://schemas.openxmlformats.org/drawingml/2006/compatibility" xmlns:p14="http://schemas.microsoft.com/office/powerpoint/2010/main" xmlns:p15="http://schemas.microsoft.com/office/powerpoint/2012/main" xmlns:ahyp="http://schemas.microsoft.com/office/drawing/2018/hyperlinkcolor" matchingName="Section title and description">
+<p:sldLayout xmlns:a="http://schemas.openxmlformats.org/drawingml/2006/main" xmlns:r="http://schemas.openxmlformats.org/officeDocument/2006/relationships" xmlns:p="http://schemas.openxmlformats.org/presentationml/2006/main" matchingName="Section title and description">
   <p:cSld name="SECTION_TITLE_AND_DESCRIPTION">
     <p:spTree>
       <p:nvGrpSpPr>
-        <p:cNvPr id="35" name="Shape 35"/>
+        <p:cNvPr id="1" name="Shape 35"/>
         <p:cNvGrpSpPr/>
         <p:nvPr/>
       </p:nvGrpSpPr>
@@ -5737,12 +6131,12 @@
           </a:ln>
         </p:spPr>
         <p:txBody>
-          <a:bodyPr anchorCtr="0" anchor="ctr" bIns="176925" lIns="176925" spcFirstLastPara="1" rIns="176925" wrap="square" tIns="176925">
+          <a:bodyPr spcFirstLastPara="1" wrap="square" lIns="176925" tIns="176925" rIns="176925" bIns="176925" anchor="ctr" anchorCtr="0">
             <a:noAutofit/>
           </a:bodyPr>
           <a:lstStyle/>
           <a:p>
-            <a:pPr indent="0" lvl="0" marL="0" rtl="0" algn="l">
+            <a:pPr marL="0" lvl="0" indent="0" algn="l" rtl="0">
               <a:spcBef>
                 <a:spcPts val="0"/>
               </a:spcBef>
@@ -5751,9 +6145,6 @@
               </a:spcAft>
               <a:buNone/>
             </a:pPr>
-            <a:r>
-              <a:t/>
-            </a:r>
             <a:endParaRPr/>
           </a:p>
         </p:txBody>
@@ -5761,7 +6152,9 @@
       <p:sp>
         <p:nvSpPr>
           <p:cNvPr id="37" name="Google Shape;37;p9"/>
-          <p:cNvSpPr txBox="1"/>
+          <p:cNvSpPr txBox="1">
+            <a:spLocks noGrp="1"/>
+          </p:cNvSpPr>
           <p:nvPr>
             <p:ph type="title"/>
           </p:nvPr>
@@ -5776,7 +6169,7 @@
           </a:prstGeom>
         </p:spPr>
         <p:txBody>
-          <a:bodyPr anchorCtr="0" anchor="b" bIns="176925" lIns="176925" spcFirstLastPara="1" rIns="176925" wrap="square" tIns="176925">
+          <a:bodyPr spcFirstLastPara="1" wrap="square" lIns="176925" tIns="176925" rIns="176925" bIns="176925" anchor="b" anchorCtr="0">
             <a:normAutofit/>
           </a:bodyPr>
           <a:lstStyle>
@@ -5880,15 +6273,19 @@
               <a:defRPr sz="8127"/>
             </a:lvl9pPr>
           </a:lstStyle>
-          <a:p/>
+          <a:p>
+            <a:endParaRPr/>
+          </a:p>
         </p:txBody>
       </p:sp>
       <p:sp>
         <p:nvSpPr>
           <p:cNvPr id="38" name="Google Shape;38;p9"/>
-          <p:cNvSpPr txBox="1"/>
+          <p:cNvSpPr txBox="1">
+            <a:spLocks noGrp="1"/>
+          </p:cNvSpPr>
           <p:nvPr>
-            <p:ph idx="1" type="subTitle"/>
+            <p:ph type="subTitle" idx="1"/>
           </p:nvPr>
         </p:nvSpPr>
         <p:spPr>
@@ -5901,7 +6298,7 @@
           </a:prstGeom>
         </p:spPr>
         <p:txBody>
-          <a:bodyPr anchorCtr="0" anchor="t" bIns="176925" lIns="176925" spcFirstLastPara="1" rIns="176925" wrap="square" tIns="176925">
+          <a:bodyPr spcFirstLastPara="1" wrap="square" lIns="176925" tIns="176925" rIns="176925" bIns="176925" anchor="t" anchorCtr="0">
             <a:normAutofit/>
           </a:bodyPr>
           <a:lstStyle>
@@ -6032,15 +6429,19 @@
               <a:defRPr sz="4063"/>
             </a:lvl9pPr>
           </a:lstStyle>
-          <a:p/>
+          <a:p>
+            <a:endParaRPr/>
+          </a:p>
         </p:txBody>
       </p:sp>
       <p:sp>
         <p:nvSpPr>
           <p:cNvPr id="39" name="Google Shape;39;p9"/>
-          <p:cNvSpPr txBox="1"/>
+          <p:cNvSpPr txBox="1">
+            <a:spLocks noGrp="1"/>
+          </p:cNvSpPr>
           <p:nvPr>
-            <p:ph idx="2" type="body"/>
+            <p:ph type="body" idx="2"/>
           </p:nvPr>
         </p:nvSpPr>
         <p:spPr>
@@ -6053,11 +6454,11 @@
           </a:prstGeom>
         </p:spPr>
         <p:txBody>
-          <a:bodyPr anchorCtr="0" anchor="ctr" bIns="176925" lIns="176925" spcFirstLastPara="1" rIns="176925" wrap="square" tIns="176925">
+          <a:bodyPr spcFirstLastPara="1" wrap="square" lIns="176925" tIns="176925" rIns="176925" bIns="176925" anchor="ctr" anchorCtr="0">
             <a:normAutofit/>
           </a:bodyPr>
           <a:lstStyle>
-            <a:lvl1pPr indent="-449791" lvl="0" marL="457200">
+            <a:lvl1pPr marL="457200" lvl="0" indent="-449791">
               <a:spcBef>
                 <a:spcPts val="0"/>
               </a:spcBef>
@@ -6068,7 +6469,7 @@
               <a:buChar char="●"/>
               <a:defRPr sz="3483"/>
             </a:lvl1pPr>
-            <a:lvl2pPr indent="-400638" lvl="1" marL="914400">
+            <a:lvl2pPr marL="914400" lvl="1" indent="-400638">
               <a:spcBef>
                 <a:spcPts val="0"/>
               </a:spcBef>
@@ -6079,7 +6480,7 @@
               <a:buChar char="○"/>
               <a:defRPr sz="2709"/>
             </a:lvl2pPr>
-            <a:lvl3pPr indent="-400638" lvl="2" marL="1371600">
+            <a:lvl3pPr marL="1371600" lvl="2" indent="-400638">
               <a:spcBef>
                 <a:spcPts val="0"/>
               </a:spcBef>
@@ -6090,7 +6491,7 @@
               <a:buChar char="■"/>
               <a:defRPr sz="2709"/>
             </a:lvl3pPr>
-            <a:lvl4pPr indent="-400638" lvl="3" marL="1828800">
+            <a:lvl4pPr marL="1828800" lvl="3" indent="-400638">
               <a:spcBef>
                 <a:spcPts val="0"/>
               </a:spcBef>
@@ -6101,7 +6502,7 @@
               <a:buChar char="●"/>
               <a:defRPr sz="2709"/>
             </a:lvl4pPr>
-            <a:lvl5pPr indent="-400637" lvl="4" marL="2286000">
+            <a:lvl5pPr marL="2286000" lvl="4" indent="-400637">
               <a:spcBef>
                 <a:spcPts val="0"/>
               </a:spcBef>
@@ -6112,7 +6513,7 @@
               <a:buChar char="○"/>
               <a:defRPr sz="2709"/>
             </a:lvl5pPr>
-            <a:lvl6pPr indent="-400637" lvl="5" marL="2743200">
+            <a:lvl6pPr marL="2743200" lvl="5" indent="-400637">
               <a:spcBef>
                 <a:spcPts val="0"/>
               </a:spcBef>
@@ -6123,7 +6524,7 @@
               <a:buChar char="■"/>
               <a:defRPr sz="2709"/>
             </a:lvl6pPr>
-            <a:lvl7pPr indent="-400637" lvl="6" marL="3200400">
+            <a:lvl7pPr marL="3200400" lvl="6" indent="-400637">
               <a:spcBef>
                 <a:spcPts val="0"/>
               </a:spcBef>
@@ -6134,7 +6535,7 @@
               <a:buChar char="●"/>
               <a:defRPr sz="2709"/>
             </a:lvl7pPr>
-            <a:lvl8pPr indent="-400637" lvl="7" marL="3657600">
+            <a:lvl8pPr marL="3657600" lvl="7" indent="-400637">
               <a:spcBef>
                 <a:spcPts val="0"/>
               </a:spcBef>
@@ -6145,7 +6546,7 @@
               <a:buChar char="○"/>
               <a:defRPr sz="2709"/>
             </a:lvl8pPr>
-            <a:lvl9pPr indent="-400637" lvl="8" marL="4114800">
+            <a:lvl9pPr marL="4114800" lvl="8" indent="-400637">
               <a:spcBef>
                 <a:spcPts val="0"/>
               </a:spcBef>
@@ -6157,15 +6558,19 @@
               <a:defRPr sz="2709"/>
             </a:lvl9pPr>
           </a:lstStyle>
-          <a:p/>
+          <a:p>
+            <a:endParaRPr/>
+          </a:p>
         </p:txBody>
       </p:sp>
       <p:sp>
         <p:nvSpPr>
           <p:cNvPr id="40" name="Google Shape;40;p9"/>
-          <p:cNvSpPr txBox="1"/>
+          <p:cNvSpPr txBox="1">
+            <a:spLocks noGrp="1"/>
+          </p:cNvSpPr>
           <p:nvPr>
-            <p:ph idx="12" type="sldNum"/>
+            <p:ph type="sldNum" idx="12"/>
           </p:nvPr>
         </p:nvSpPr>
         <p:spPr>
@@ -6178,7 +6583,7 @@
           </a:prstGeom>
         </p:spPr>
         <p:txBody>
-          <a:bodyPr anchorCtr="0" anchor="ctr" bIns="176925" lIns="176925" spcFirstLastPara="1" rIns="176925" wrap="square" tIns="176925">
+          <a:bodyPr spcFirstLastPara="1" wrap="square" lIns="176925" tIns="176925" rIns="176925" bIns="176925" anchor="ctr" anchorCtr="0">
             <a:normAutofit/>
           </a:bodyPr>
           <a:lstStyle>
@@ -6220,7 +6625,7 @@
             </a:lvl9pPr>
           </a:lstStyle>
           <a:p>
-            <a:pPr indent="0" lvl="0" marL="0" rtl="0" algn="r">
+            <a:pPr marL="0" lvl="0" indent="0" algn="r" rtl="0">
               <a:spcBef>
                 <a:spcPts val="0"/>
               </a:spcBef>
@@ -6246,11 +6651,11 @@
 </file>
 
 <file path=ppt/slideLayouts/slideLayout9.xml><?xml version="1.0" encoding="utf-8"?>
-<p:sldLayout xmlns:a="http://schemas.openxmlformats.org/drawingml/2006/main" xmlns:r="http://schemas.openxmlformats.org/officeDocument/2006/relationships" xmlns:mc="http://schemas.openxmlformats.org/markup-compatibility/2006" xmlns:mv="urn:schemas-microsoft-com:mac:vml" xmlns:p="http://schemas.openxmlformats.org/presentationml/2006/main" xmlns:c="http://schemas.openxmlformats.org/drawingml/2006/chart" xmlns:dgm="http://schemas.openxmlformats.org/drawingml/2006/diagram" xmlns:o="urn:schemas-microsoft-com:office:office" xmlns:v="urn:schemas-microsoft-com:vml" xmlns:pvml="urn:schemas-microsoft-com:office:powerpoint" xmlns:com="http://schemas.openxmlformats.org/drawingml/2006/compatibility" xmlns:p14="http://schemas.microsoft.com/office/powerpoint/2010/main" xmlns:p15="http://schemas.microsoft.com/office/powerpoint/2012/main" xmlns:ahyp="http://schemas.microsoft.com/office/drawing/2018/hyperlinkcolor" matchingName="Caption">
+<p:sldLayout xmlns:a="http://schemas.openxmlformats.org/drawingml/2006/main" xmlns:r="http://schemas.openxmlformats.org/officeDocument/2006/relationships" xmlns:p="http://schemas.openxmlformats.org/presentationml/2006/main" matchingName="Caption">
   <p:cSld name="CAPTION_ONLY">
     <p:spTree>
       <p:nvGrpSpPr>
-        <p:cNvPr id="41" name="Shape 41"/>
+        <p:cNvPr id="1" name="Shape 41"/>
         <p:cNvGrpSpPr/>
         <p:nvPr/>
       </p:nvGrpSpPr>
@@ -6265,9 +6670,11 @@
       <p:sp>
         <p:nvSpPr>
           <p:cNvPr id="42" name="Google Shape;42;p10"/>
-          <p:cNvSpPr txBox="1"/>
+          <p:cNvSpPr txBox="1">
+            <a:spLocks noGrp="1"/>
+          </p:cNvSpPr>
           <p:nvPr>
-            <p:ph idx="1" type="body"/>
+            <p:ph type="body" idx="1"/>
           </p:nvPr>
         </p:nvSpPr>
         <p:spPr>
@@ -6280,11 +6687,11 @@
           </a:prstGeom>
         </p:spPr>
         <p:txBody>
-          <a:bodyPr anchorCtr="0" anchor="ctr" bIns="176925" lIns="176925" spcFirstLastPara="1" rIns="176925" wrap="square" tIns="176925">
+          <a:bodyPr spcFirstLastPara="1" wrap="square" lIns="176925" tIns="176925" rIns="176925" bIns="176925" anchor="ctr" anchorCtr="0">
             <a:normAutofit/>
           </a:bodyPr>
           <a:lstStyle>
-            <a:lvl1pPr indent="-228600" lvl="0" marL="457200">
+            <a:lvl1pPr marL="457200" lvl="0" indent="-228600">
               <a:lnSpc>
                 <a:spcPct val="100000"/>
               </a:lnSpc>
@@ -6299,15 +6706,19 @@
               <a:defRPr sz="3483"/>
             </a:lvl1pPr>
           </a:lstStyle>
-          <a:p/>
+          <a:p>
+            <a:endParaRPr/>
+          </a:p>
         </p:txBody>
       </p:sp>
       <p:sp>
         <p:nvSpPr>
           <p:cNvPr id="43" name="Google Shape;43;p10"/>
-          <p:cNvSpPr txBox="1"/>
+          <p:cNvSpPr txBox="1">
+            <a:spLocks noGrp="1"/>
+          </p:cNvSpPr>
           <p:nvPr>
-            <p:ph idx="12" type="sldNum"/>
+            <p:ph type="sldNum" idx="12"/>
           </p:nvPr>
         </p:nvSpPr>
         <p:spPr>
@@ -6320,7 +6731,7 @@
           </a:prstGeom>
         </p:spPr>
         <p:txBody>
-          <a:bodyPr anchorCtr="0" anchor="ctr" bIns="176925" lIns="176925" spcFirstLastPara="1" rIns="176925" wrap="square" tIns="176925">
+          <a:bodyPr spcFirstLastPara="1" wrap="square" lIns="176925" tIns="176925" rIns="176925" bIns="176925" anchor="ctr" anchorCtr="0">
             <a:normAutofit/>
           </a:bodyPr>
           <a:lstStyle>
@@ -6362,7 +6773,7 @@
             </a:lvl9pPr>
           </a:lstStyle>
           <a:p>
-            <a:pPr indent="0" lvl="0" marL="0" rtl="0" algn="r">
+            <a:pPr marL="0" lvl="0" indent="0" algn="r" rtl="0">
               <a:spcBef>
                 <a:spcPts val="0"/>
               </a:spcBef>
@@ -6388,18 +6799,19 @@
 </file>
 
 <file path=ppt/slideMasters/slideMaster1.xml><?xml version="1.0" encoding="utf-8"?>
-<p:sldMaster xmlns:a="http://schemas.openxmlformats.org/drawingml/2006/main" xmlns:r="http://schemas.openxmlformats.org/officeDocument/2006/relationships" xmlns:mc="http://schemas.openxmlformats.org/markup-compatibility/2006" xmlns:mv="urn:schemas-microsoft-com:mac:vml" xmlns:p="http://schemas.openxmlformats.org/presentationml/2006/main" xmlns:c="http://schemas.openxmlformats.org/drawingml/2006/chart" xmlns:dgm="http://schemas.openxmlformats.org/drawingml/2006/diagram" xmlns:o="urn:schemas-microsoft-com:office:office" xmlns:v="urn:schemas-microsoft-com:vml" xmlns:pvml="urn:schemas-microsoft-com:office:powerpoint" xmlns:com="http://schemas.openxmlformats.org/drawingml/2006/compatibility" xmlns:p14="http://schemas.microsoft.com/office/powerpoint/2010/main" xmlns:p15="http://schemas.microsoft.com/office/powerpoint/2012/main" xmlns:ahyp="http://schemas.microsoft.com/office/drawing/2018/hyperlinkcolor">
+<p:sldMaster xmlns:a="http://schemas.openxmlformats.org/drawingml/2006/main" xmlns:r="http://schemas.openxmlformats.org/officeDocument/2006/relationships" xmlns:p="http://schemas.openxmlformats.org/presentationml/2006/main">
   <p:cSld name="simple-light-2">
     <p:bg>
       <p:bgPr>
         <a:solidFill>
           <a:schemeClr val="lt1"/>
         </a:solidFill>
+        <a:effectLst/>
       </p:bgPr>
     </p:bg>
     <p:spTree>
       <p:nvGrpSpPr>
-        <p:cNvPr id="5" name="Shape 5"/>
+        <p:cNvPr id="1" name="Shape 5"/>
         <p:cNvGrpSpPr/>
         <p:nvPr/>
       </p:nvGrpSpPr>
@@ -6414,7 +6826,9 @@
       <p:sp>
         <p:nvSpPr>
           <p:cNvPr id="6" name="Google Shape;6;p1"/>
-          <p:cNvSpPr txBox="1"/>
+          <p:cNvSpPr txBox="1">
+            <a:spLocks noGrp="1"/>
+          </p:cNvSpPr>
           <p:nvPr>
             <p:ph type="title"/>
           </p:nvPr>
@@ -6433,7 +6847,7 @@
           </a:ln>
         </p:spPr>
         <p:txBody>
-          <a:bodyPr anchorCtr="0" anchor="t" bIns="176925" lIns="176925" spcFirstLastPara="1" rIns="176925" wrap="square" tIns="176925">
+          <a:bodyPr spcFirstLastPara="1" wrap="square" lIns="176925" tIns="176925" rIns="176925" bIns="176925" anchor="t" anchorCtr="0">
             <a:normAutofit/>
           </a:bodyPr>
           <a:lstStyle>
@@ -6600,15 +7014,19 @@
               </a:defRPr>
             </a:lvl9pPr>
           </a:lstStyle>
-          <a:p/>
+          <a:p>
+            <a:endParaRPr/>
+          </a:p>
         </p:txBody>
       </p:sp>
       <p:sp>
         <p:nvSpPr>
           <p:cNvPr id="7" name="Google Shape;7;p1"/>
-          <p:cNvSpPr txBox="1"/>
+          <p:cNvSpPr txBox="1">
+            <a:spLocks noGrp="1"/>
+          </p:cNvSpPr>
           <p:nvPr>
-            <p:ph idx="1" type="body"/>
+            <p:ph type="body" idx="1"/>
           </p:nvPr>
         </p:nvSpPr>
         <p:spPr>
@@ -6625,11 +7043,11 @@
           </a:ln>
         </p:spPr>
         <p:txBody>
-          <a:bodyPr anchorCtr="0" anchor="t" bIns="176925" lIns="176925" spcFirstLastPara="1" rIns="176925" wrap="square" tIns="176925">
+          <a:bodyPr spcFirstLastPara="1" wrap="square" lIns="176925" tIns="176925" rIns="176925" bIns="176925" anchor="t" anchorCtr="0">
             <a:normAutofit/>
           </a:bodyPr>
           <a:lstStyle>
-            <a:lvl1pPr indent="-449791" lvl="0" marL="457200">
+            <a:lvl1pPr marL="457200" lvl="0" indent="-449791">
               <a:lnSpc>
                 <a:spcPct val="115000"/>
               </a:lnSpc>
@@ -6650,7 +7068,7 @@
                 </a:solidFill>
               </a:defRPr>
             </a:lvl1pPr>
-            <a:lvl2pPr indent="-400638" lvl="1" marL="914400">
+            <a:lvl2pPr marL="914400" lvl="1" indent="-400638">
               <a:lnSpc>
                 <a:spcPct val="115000"/>
               </a:lnSpc>
@@ -6671,7 +7089,7 @@
                 </a:solidFill>
               </a:defRPr>
             </a:lvl2pPr>
-            <a:lvl3pPr indent="-400638" lvl="2" marL="1371600">
+            <a:lvl3pPr marL="1371600" lvl="2" indent="-400638">
               <a:lnSpc>
                 <a:spcPct val="115000"/>
               </a:lnSpc>
@@ -6692,7 +7110,7 @@
                 </a:solidFill>
               </a:defRPr>
             </a:lvl3pPr>
-            <a:lvl4pPr indent="-400638" lvl="3" marL="1828800">
+            <a:lvl4pPr marL="1828800" lvl="3" indent="-400638">
               <a:lnSpc>
                 <a:spcPct val="115000"/>
               </a:lnSpc>
@@ -6713,7 +7131,7 @@
                 </a:solidFill>
               </a:defRPr>
             </a:lvl4pPr>
-            <a:lvl5pPr indent="-400637" lvl="4" marL="2286000">
+            <a:lvl5pPr marL="2286000" lvl="4" indent="-400637">
               <a:lnSpc>
                 <a:spcPct val="115000"/>
               </a:lnSpc>
@@ -6734,7 +7152,7 @@
                 </a:solidFill>
               </a:defRPr>
             </a:lvl5pPr>
-            <a:lvl6pPr indent="-400637" lvl="5" marL="2743200">
+            <a:lvl6pPr marL="2743200" lvl="5" indent="-400637">
               <a:lnSpc>
                 <a:spcPct val="115000"/>
               </a:lnSpc>
@@ -6755,7 +7173,7 @@
                 </a:solidFill>
               </a:defRPr>
             </a:lvl6pPr>
-            <a:lvl7pPr indent="-400637" lvl="6" marL="3200400">
+            <a:lvl7pPr marL="3200400" lvl="6" indent="-400637">
               <a:lnSpc>
                 <a:spcPct val="115000"/>
               </a:lnSpc>
@@ -6776,7 +7194,7 @@
                 </a:solidFill>
               </a:defRPr>
             </a:lvl7pPr>
-            <a:lvl8pPr indent="-400637" lvl="7" marL="3657600">
+            <a:lvl8pPr marL="3657600" lvl="7" indent="-400637">
               <a:lnSpc>
                 <a:spcPct val="115000"/>
               </a:lnSpc>
@@ -6797,7 +7215,7 @@
                 </a:solidFill>
               </a:defRPr>
             </a:lvl8pPr>
-            <a:lvl9pPr indent="-400637" lvl="8" marL="4114800">
+            <a:lvl9pPr marL="4114800" lvl="8" indent="-400637">
               <a:lnSpc>
                 <a:spcPct val="115000"/>
               </a:lnSpc>
@@ -6819,15 +7237,19 @@
               </a:defRPr>
             </a:lvl9pPr>
           </a:lstStyle>
-          <a:p/>
+          <a:p>
+            <a:endParaRPr/>
+          </a:p>
         </p:txBody>
       </p:sp>
       <p:sp>
         <p:nvSpPr>
           <p:cNvPr id="8" name="Google Shape;8;p1"/>
-          <p:cNvSpPr txBox="1"/>
+          <p:cNvSpPr txBox="1">
+            <a:spLocks noGrp="1"/>
+          </p:cNvSpPr>
           <p:nvPr>
-            <p:ph idx="12" type="sldNum"/>
+            <p:ph type="sldNum" idx="12"/>
           </p:nvPr>
         </p:nvSpPr>
         <p:spPr>
@@ -6844,7 +7266,7 @@
           </a:ln>
         </p:spPr>
         <p:txBody>
-          <a:bodyPr anchorCtr="0" anchor="ctr" bIns="176925" lIns="176925" spcFirstLastPara="1" rIns="176925" wrap="square" tIns="176925">
+          <a:bodyPr spcFirstLastPara="1" wrap="square" lIns="176925" tIns="176925" rIns="176925" bIns="176925" anchor="ctr" anchorCtr="0">
             <a:normAutofit/>
           </a:bodyPr>
           <a:lstStyle>
@@ -6922,7 +7344,7 @@
             </a:lvl9pPr>
           </a:lstStyle>
           <a:p>
-            <a:pPr indent="0" lvl="0" marL="0" rtl="0" algn="r">
+            <a:pPr marL="0" lvl="0" indent="0" algn="r" rtl="0">
               <a:spcBef>
                 <a:spcPts val="0"/>
               </a:spcBef>
@@ -6941,7 +7363,7 @@
       </p:sp>
     </p:spTree>
   </p:cSld>
-  <p:clrMap accent1="accent1" accent2="accent2" accent3="accent3" accent4="accent4" accent5="accent5" accent6="accent6" bg1="lt1" bg2="dk2" tx1="dk1" tx2="lt2" folHlink="folHlink" hlink="hlink"/>
+  <p:clrMap bg1="lt1" tx1="dk1" bg2="dk2" tx2="lt2" accent1="accent1" accent2="accent2" accent3="accent3" accent4="accent4" accent5="accent5" accent6="accent6" hlink="hlink" folHlink="folHlink"/>
   <p:sldLayoutIdLst>
     <p:sldLayoutId id="2147483648" r:id="rId1"/>
     <p:sldLayoutId id="2147483649" r:id="rId2"/>
@@ -6955,10 +7377,10 @@
     <p:sldLayoutId id="2147483657" r:id="rId10"/>
     <p:sldLayoutId id="2147483658" r:id="rId11"/>
   </p:sldLayoutIdLst>
-  <p:hf dt="0" ftr="0" hdr="0" sldNum="0"/>
+  <p:hf sldNum="0" hdr="0" ftr="0" dt="0"/>
   <p:txStyles>
     <p:titleStyle>
-      <a:defPPr lvl="0" marR="0" rtl="0" algn="l">
+      <a:defPPr marR="0" lvl="0" algn="l" rtl="0">
         <a:lnSpc>
           <a:spcPct val="100000"/>
         </a:lnSpc>
@@ -6969,7 +7391,7 @@
           <a:spcPts val="0"/>
         </a:spcAft>
       </a:defPPr>
-      <a:lvl1pPr lvl="0" marR="0" rtl="0" algn="l">
+      <a:lvl1pPr marR="0" lvl="0" algn="l" rtl="0">
         <a:lnSpc>
           <a:spcPct val="100000"/>
         </a:lnSpc>
@@ -6983,7 +7405,7 @@
           <a:srgbClr val="000000"/>
         </a:buClr>
         <a:buFont typeface="Arial"/>
-        <a:defRPr b="0" i="0" sz="1400" u="none" cap="none" strike="noStrike">
+        <a:defRPr sz="1400" b="0" i="0" u="none" strike="noStrike" cap="none">
           <a:solidFill>
             <a:srgbClr val="000000"/>
           </a:solidFill>
@@ -6993,7 +7415,7 @@
           <a:sym typeface="Arial"/>
         </a:defRPr>
       </a:lvl1pPr>
-      <a:lvl2pPr lvl="1" marR="0" rtl="0" algn="l">
+      <a:lvl2pPr marR="0" lvl="1" algn="l" rtl="0">
         <a:lnSpc>
           <a:spcPct val="100000"/>
         </a:lnSpc>
@@ -7007,7 +7429,7 @@
           <a:srgbClr val="000000"/>
         </a:buClr>
         <a:buFont typeface="Arial"/>
-        <a:defRPr b="0" i="0" sz="1400" u="none" cap="none" strike="noStrike">
+        <a:defRPr sz="1400" b="0" i="0" u="none" strike="noStrike" cap="none">
           <a:solidFill>
             <a:srgbClr val="000000"/>
           </a:solidFill>
@@ -7017,7 +7439,7 @@
           <a:sym typeface="Arial"/>
         </a:defRPr>
       </a:lvl2pPr>
-      <a:lvl3pPr lvl="2" marR="0" rtl="0" algn="l">
+      <a:lvl3pPr marR="0" lvl="2" algn="l" rtl="0">
         <a:lnSpc>
           <a:spcPct val="100000"/>
         </a:lnSpc>
@@ -7031,7 +7453,7 @@
           <a:srgbClr val="000000"/>
         </a:buClr>
         <a:buFont typeface="Arial"/>
-        <a:defRPr b="0" i="0" sz="1400" u="none" cap="none" strike="noStrike">
+        <a:defRPr sz="1400" b="0" i="0" u="none" strike="noStrike" cap="none">
           <a:solidFill>
             <a:srgbClr val="000000"/>
           </a:solidFill>
@@ -7041,7 +7463,7 @@
           <a:sym typeface="Arial"/>
         </a:defRPr>
       </a:lvl3pPr>
-      <a:lvl4pPr lvl="3" marR="0" rtl="0" algn="l">
+      <a:lvl4pPr marR="0" lvl="3" algn="l" rtl="0">
         <a:lnSpc>
           <a:spcPct val="100000"/>
         </a:lnSpc>
@@ -7055,7 +7477,7 @@
           <a:srgbClr val="000000"/>
         </a:buClr>
         <a:buFont typeface="Arial"/>
-        <a:defRPr b="0" i="0" sz="1400" u="none" cap="none" strike="noStrike">
+        <a:defRPr sz="1400" b="0" i="0" u="none" strike="noStrike" cap="none">
           <a:solidFill>
             <a:srgbClr val="000000"/>
           </a:solidFill>
@@ -7065,7 +7487,7 @@
           <a:sym typeface="Arial"/>
         </a:defRPr>
       </a:lvl4pPr>
-      <a:lvl5pPr lvl="4" marR="0" rtl="0" algn="l">
+      <a:lvl5pPr marR="0" lvl="4" algn="l" rtl="0">
         <a:lnSpc>
           <a:spcPct val="100000"/>
         </a:lnSpc>
@@ -7079,7 +7501,7 @@
           <a:srgbClr val="000000"/>
         </a:buClr>
         <a:buFont typeface="Arial"/>
-        <a:defRPr b="0" i="0" sz="1400" u="none" cap="none" strike="noStrike">
+        <a:defRPr sz="1400" b="0" i="0" u="none" strike="noStrike" cap="none">
           <a:solidFill>
             <a:srgbClr val="000000"/>
           </a:solidFill>
@@ -7089,7 +7511,7 @@
           <a:sym typeface="Arial"/>
         </a:defRPr>
       </a:lvl5pPr>
-      <a:lvl6pPr lvl="5" marR="0" rtl="0" algn="l">
+      <a:lvl6pPr marR="0" lvl="5" algn="l" rtl="0">
         <a:lnSpc>
           <a:spcPct val="100000"/>
         </a:lnSpc>
@@ -7103,7 +7525,7 @@
           <a:srgbClr val="000000"/>
         </a:buClr>
         <a:buFont typeface="Arial"/>
-        <a:defRPr b="0" i="0" sz="1400" u="none" cap="none" strike="noStrike">
+        <a:defRPr sz="1400" b="0" i="0" u="none" strike="noStrike" cap="none">
           <a:solidFill>
             <a:srgbClr val="000000"/>
           </a:solidFill>
@@ -7113,7 +7535,7 @@
           <a:sym typeface="Arial"/>
         </a:defRPr>
       </a:lvl6pPr>
-      <a:lvl7pPr lvl="6" marR="0" rtl="0" algn="l">
+      <a:lvl7pPr marR="0" lvl="6" algn="l" rtl="0">
         <a:lnSpc>
           <a:spcPct val="100000"/>
         </a:lnSpc>
@@ -7127,7 +7549,7 @@
           <a:srgbClr val="000000"/>
         </a:buClr>
         <a:buFont typeface="Arial"/>
-        <a:defRPr b="0" i="0" sz="1400" u="none" cap="none" strike="noStrike">
+        <a:defRPr sz="1400" b="0" i="0" u="none" strike="noStrike" cap="none">
           <a:solidFill>
             <a:srgbClr val="000000"/>
           </a:solidFill>
@@ -7137,7 +7559,7 @@
           <a:sym typeface="Arial"/>
         </a:defRPr>
       </a:lvl7pPr>
-      <a:lvl8pPr lvl="7" marR="0" rtl="0" algn="l">
+      <a:lvl8pPr marR="0" lvl="7" algn="l" rtl="0">
         <a:lnSpc>
           <a:spcPct val="100000"/>
         </a:lnSpc>
@@ -7151,7 +7573,7 @@
           <a:srgbClr val="000000"/>
         </a:buClr>
         <a:buFont typeface="Arial"/>
-        <a:defRPr b="0" i="0" sz="1400" u="none" cap="none" strike="noStrike">
+        <a:defRPr sz="1400" b="0" i="0" u="none" strike="noStrike" cap="none">
           <a:solidFill>
             <a:srgbClr val="000000"/>
           </a:solidFill>
@@ -7161,7 +7583,7 @@
           <a:sym typeface="Arial"/>
         </a:defRPr>
       </a:lvl8pPr>
-      <a:lvl9pPr lvl="8" marR="0" rtl="0" algn="l">
+      <a:lvl9pPr marR="0" lvl="8" algn="l" rtl="0">
         <a:lnSpc>
           <a:spcPct val="100000"/>
         </a:lnSpc>
@@ -7175,7 +7597,7 @@
           <a:srgbClr val="000000"/>
         </a:buClr>
         <a:buFont typeface="Arial"/>
-        <a:defRPr b="0" i="0" sz="1400" u="none" cap="none" strike="noStrike">
+        <a:defRPr sz="1400" b="0" i="0" u="none" strike="noStrike" cap="none">
           <a:solidFill>
             <a:srgbClr val="000000"/>
           </a:solidFill>
@@ -7187,7 +7609,7 @@
       </a:lvl9pPr>
     </p:titleStyle>
     <p:bodyStyle>
-      <a:defPPr lvl="0" marR="0" rtl="0" algn="l">
+      <a:defPPr marR="0" lvl="0" algn="l" rtl="0">
         <a:lnSpc>
           <a:spcPct val="100000"/>
         </a:lnSpc>
@@ -7198,7 +7620,7 @@
           <a:spcPts val="0"/>
         </a:spcAft>
       </a:defPPr>
-      <a:lvl1pPr lvl="0" marR="0" rtl="0" algn="l">
+      <a:lvl1pPr marR="0" lvl="0" algn="l" rtl="0">
         <a:lnSpc>
           <a:spcPct val="100000"/>
         </a:lnSpc>
@@ -7212,7 +7634,7 @@
           <a:srgbClr val="000000"/>
         </a:buClr>
         <a:buFont typeface="Arial"/>
-        <a:defRPr b="0" i="0" sz="1400" u="none" cap="none" strike="noStrike">
+        <a:defRPr sz="1400" b="0" i="0" u="none" strike="noStrike" cap="none">
           <a:solidFill>
             <a:srgbClr val="000000"/>
           </a:solidFill>
@@ -7222,7 +7644,7 @@
           <a:sym typeface="Arial"/>
         </a:defRPr>
       </a:lvl1pPr>
-      <a:lvl2pPr lvl="1" marR="0" rtl="0" algn="l">
+      <a:lvl2pPr marR="0" lvl="1" algn="l" rtl="0">
         <a:lnSpc>
           <a:spcPct val="100000"/>
         </a:lnSpc>
@@ -7236,7 +7658,7 @@
           <a:srgbClr val="000000"/>
         </a:buClr>
         <a:buFont typeface="Arial"/>
-        <a:defRPr b="0" i="0" sz="1400" u="none" cap="none" strike="noStrike">
+        <a:defRPr sz="1400" b="0" i="0" u="none" strike="noStrike" cap="none">
           <a:solidFill>
             <a:srgbClr val="000000"/>
           </a:solidFill>
@@ -7246,7 +7668,7 @@
           <a:sym typeface="Arial"/>
         </a:defRPr>
       </a:lvl2pPr>
-      <a:lvl3pPr lvl="2" marR="0" rtl="0" algn="l">
+      <a:lvl3pPr marR="0" lvl="2" algn="l" rtl="0">
         <a:lnSpc>
           <a:spcPct val="100000"/>
         </a:lnSpc>
@@ -7260,7 +7682,7 @@
           <a:srgbClr val="000000"/>
         </a:buClr>
         <a:buFont typeface="Arial"/>
-        <a:defRPr b="0" i="0" sz="1400" u="none" cap="none" strike="noStrike">
+        <a:defRPr sz="1400" b="0" i="0" u="none" strike="noStrike" cap="none">
           <a:solidFill>
             <a:srgbClr val="000000"/>
           </a:solidFill>
@@ -7270,7 +7692,7 @@
           <a:sym typeface="Arial"/>
         </a:defRPr>
       </a:lvl3pPr>
-      <a:lvl4pPr lvl="3" marR="0" rtl="0" algn="l">
+      <a:lvl4pPr marR="0" lvl="3" algn="l" rtl="0">
         <a:lnSpc>
           <a:spcPct val="100000"/>
         </a:lnSpc>
@@ -7284,7 +7706,7 @@
           <a:srgbClr val="000000"/>
         </a:buClr>
         <a:buFont typeface="Arial"/>
-        <a:defRPr b="0" i="0" sz="1400" u="none" cap="none" strike="noStrike">
+        <a:defRPr sz="1400" b="0" i="0" u="none" strike="noStrike" cap="none">
           <a:solidFill>
             <a:srgbClr val="000000"/>
           </a:solidFill>
@@ -7294,7 +7716,7 @@
           <a:sym typeface="Arial"/>
         </a:defRPr>
       </a:lvl4pPr>
-      <a:lvl5pPr lvl="4" marR="0" rtl="0" algn="l">
+      <a:lvl5pPr marR="0" lvl="4" algn="l" rtl="0">
         <a:lnSpc>
           <a:spcPct val="100000"/>
         </a:lnSpc>
@@ -7308,7 +7730,7 @@
           <a:srgbClr val="000000"/>
         </a:buClr>
         <a:buFont typeface="Arial"/>
-        <a:defRPr b="0" i="0" sz="1400" u="none" cap="none" strike="noStrike">
+        <a:defRPr sz="1400" b="0" i="0" u="none" strike="noStrike" cap="none">
           <a:solidFill>
             <a:srgbClr val="000000"/>
           </a:solidFill>
@@ -7318,7 +7740,7 @@
           <a:sym typeface="Arial"/>
         </a:defRPr>
       </a:lvl5pPr>
-      <a:lvl6pPr lvl="5" marR="0" rtl="0" algn="l">
+      <a:lvl6pPr marR="0" lvl="5" algn="l" rtl="0">
         <a:lnSpc>
           <a:spcPct val="100000"/>
         </a:lnSpc>
@@ -7332,7 +7754,7 @@
           <a:srgbClr val="000000"/>
         </a:buClr>
         <a:buFont typeface="Arial"/>
-        <a:defRPr b="0" i="0" sz="1400" u="none" cap="none" strike="noStrike">
+        <a:defRPr sz="1400" b="0" i="0" u="none" strike="noStrike" cap="none">
           <a:solidFill>
             <a:srgbClr val="000000"/>
           </a:solidFill>
@@ -7342,7 +7764,7 @@
           <a:sym typeface="Arial"/>
         </a:defRPr>
       </a:lvl6pPr>
-      <a:lvl7pPr lvl="6" marR="0" rtl="0" algn="l">
+      <a:lvl7pPr marR="0" lvl="6" algn="l" rtl="0">
         <a:lnSpc>
           <a:spcPct val="100000"/>
         </a:lnSpc>
@@ -7356,7 +7778,7 @@
           <a:srgbClr val="000000"/>
         </a:buClr>
         <a:buFont typeface="Arial"/>
-        <a:defRPr b="0" i="0" sz="1400" u="none" cap="none" strike="noStrike">
+        <a:defRPr sz="1400" b="0" i="0" u="none" strike="noStrike" cap="none">
           <a:solidFill>
             <a:srgbClr val="000000"/>
           </a:solidFill>
@@ -7366,7 +7788,7 @@
           <a:sym typeface="Arial"/>
         </a:defRPr>
       </a:lvl7pPr>
-      <a:lvl8pPr lvl="7" marR="0" rtl="0" algn="l">
+      <a:lvl8pPr marR="0" lvl="7" algn="l" rtl="0">
         <a:lnSpc>
           <a:spcPct val="100000"/>
         </a:lnSpc>
@@ -7380,7 +7802,7 @@
           <a:srgbClr val="000000"/>
         </a:buClr>
         <a:buFont typeface="Arial"/>
-        <a:defRPr b="0" i="0" sz="1400" u="none" cap="none" strike="noStrike">
+        <a:defRPr sz="1400" b="0" i="0" u="none" strike="noStrike" cap="none">
           <a:solidFill>
             <a:srgbClr val="000000"/>
           </a:solidFill>
@@ -7390,7 +7812,7 @@
           <a:sym typeface="Arial"/>
         </a:defRPr>
       </a:lvl8pPr>
-      <a:lvl9pPr lvl="8" marR="0" rtl="0" algn="l">
+      <a:lvl9pPr marR="0" lvl="8" algn="l" rtl="0">
         <a:lnSpc>
           <a:spcPct val="100000"/>
         </a:lnSpc>
@@ -7404,7 +7826,7 @@
           <a:srgbClr val="000000"/>
         </a:buClr>
         <a:buFont typeface="Arial"/>
-        <a:defRPr b="0" i="0" sz="1400" u="none" cap="none" strike="noStrike">
+        <a:defRPr sz="1400" b="0" i="0" u="none" strike="noStrike" cap="none">
           <a:solidFill>
             <a:srgbClr val="000000"/>
           </a:solidFill>
@@ -7416,7 +7838,7 @@
       </a:lvl9pPr>
     </p:bodyStyle>
     <p:otherStyle>
-      <a:defPPr lvl="0" marR="0" rtl="0" algn="l">
+      <a:defPPr marR="0" lvl="0" algn="l" rtl="0">
         <a:lnSpc>
           <a:spcPct val="100000"/>
         </a:lnSpc>
@@ -7427,7 +7849,7 @@
           <a:spcPts val="0"/>
         </a:spcAft>
       </a:defPPr>
-      <a:lvl1pPr lvl="0" marR="0" rtl="0" algn="l">
+      <a:lvl1pPr marR="0" lvl="0" algn="l" rtl="0">
         <a:lnSpc>
           <a:spcPct val="100000"/>
         </a:lnSpc>
@@ -7441,7 +7863,7 @@
           <a:srgbClr val="000000"/>
         </a:buClr>
         <a:buFont typeface="Arial"/>
-        <a:defRPr b="0" i="0" sz="1400" u="none" cap="none" strike="noStrike">
+        <a:defRPr sz="1400" b="0" i="0" u="none" strike="noStrike" cap="none">
           <a:solidFill>
             <a:srgbClr val="000000"/>
           </a:solidFill>
@@ -7451,7 +7873,7 @@
           <a:sym typeface="Arial"/>
         </a:defRPr>
       </a:lvl1pPr>
-      <a:lvl2pPr lvl="1" marR="0" rtl="0" algn="l">
+      <a:lvl2pPr marR="0" lvl="1" algn="l" rtl="0">
         <a:lnSpc>
           <a:spcPct val="100000"/>
         </a:lnSpc>
@@ -7465,7 +7887,7 @@
           <a:srgbClr val="000000"/>
         </a:buClr>
         <a:buFont typeface="Arial"/>
-        <a:defRPr b="0" i="0" sz="1400" u="none" cap="none" strike="noStrike">
+        <a:defRPr sz="1400" b="0" i="0" u="none" strike="noStrike" cap="none">
           <a:solidFill>
             <a:srgbClr val="000000"/>
           </a:solidFill>
@@ -7475,7 +7897,7 @@
           <a:sym typeface="Arial"/>
         </a:defRPr>
       </a:lvl2pPr>
-      <a:lvl3pPr lvl="2" marR="0" rtl="0" algn="l">
+      <a:lvl3pPr marR="0" lvl="2" algn="l" rtl="0">
         <a:lnSpc>
           <a:spcPct val="100000"/>
         </a:lnSpc>
@@ -7489,7 +7911,7 @@
           <a:srgbClr val="000000"/>
         </a:buClr>
         <a:buFont typeface="Arial"/>
-        <a:defRPr b="0" i="0" sz="1400" u="none" cap="none" strike="noStrike">
+        <a:defRPr sz="1400" b="0" i="0" u="none" strike="noStrike" cap="none">
           <a:solidFill>
             <a:srgbClr val="000000"/>
           </a:solidFill>
@@ -7499,7 +7921,7 @@
           <a:sym typeface="Arial"/>
         </a:defRPr>
       </a:lvl3pPr>
-      <a:lvl4pPr lvl="3" marR="0" rtl="0" algn="l">
+      <a:lvl4pPr marR="0" lvl="3" algn="l" rtl="0">
         <a:lnSpc>
           <a:spcPct val="100000"/>
         </a:lnSpc>
@@ -7513,7 +7935,7 @@
           <a:srgbClr val="000000"/>
         </a:buClr>
         <a:buFont typeface="Arial"/>
-        <a:defRPr b="0" i="0" sz="1400" u="none" cap="none" strike="noStrike">
+        <a:defRPr sz="1400" b="0" i="0" u="none" strike="noStrike" cap="none">
           <a:solidFill>
             <a:srgbClr val="000000"/>
           </a:solidFill>
@@ -7523,7 +7945,7 @@
           <a:sym typeface="Arial"/>
         </a:defRPr>
       </a:lvl4pPr>
-      <a:lvl5pPr lvl="4" marR="0" rtl="0" algn="l">
+      <a:lvl5pPr marR="0" lvl="4" algn="l" rtl="0">
         <a:lnSpc>
           <a:spcPct val="100000"/>
         </a:lnSpc>
@@ -7537,7 +7959,7 @@
           <a:srgbClr val="000000"/>
         </a:buClr>
         <a:buFont typeface="Arial"/>
-        <a:defRPr b="0" i="0" sz="1400" u="none" cap="none" strike="noStrike">
+        <a:defRPr sz="1400" b="0" i="0" u="none" strike="noStrike" cap="none">
           <a:solidFill>
             <a:srgbClr val="000000"/>
           </a:solidFill>
@@ -7547,7 +7969,7 @@
           <a:sym typeface="Arial"/>
         </a:defRPr>
       </a:lvl5pPr>
-      <a:lvl6pPr lvl="5" marR="0" rtl="0" algn="l">
+      <a:lvl6pPr marR="0" lvl="5" algn="l" rtl="0">
         <a:lnSpc>
           <a:spcPct val="100000"/>
         </a:lnSpc>
@@ -7561,7 +7983,7 @@
           <a:srgbClr val="000000"/>
         </a:buClr>
         <a:buFont typeface="Arial"/>
-        <a:defRPr b="0" i="0" sz="1400" u="none" cap="none" strike="noStrike">
+        <a:defRPr sz="1400" b="0" i="0" u="none" strike="noStrike" cap="none">
           <a:solidFill>
             <a:srgbClr val="000000"/>
           </a:solidFill>
@@ -7571,7 +7993,7 @@
           <a:sym typeface="Arial"/>
         </a:defRPr>
       </a:lvl6pPr>
-      <a:lvl7pPr lvl="6" marR="0" rtl="0" algn="l">
+      <a:lvl7pPr marR="0" lvl="6" algn="l" rtl="0">
         <a:lnSpc>
           <a:spcPct val="100000"/>
         </a:lnSpc>
@@ -7585,7 +8007,7 @@
           <a:srgbClr val="000000"/>
         </a:buClr>
         <a:buFont typeface="Arial"/>
-        <a:defRPr b="0" i="0" sz="1400" u="none" cap="none" strike="noStrike">
+        <a:defRPr sz="1400" b="0" i="0" u="none" strike="noStrike" cap="none">
           <a:solidFill>
             <a:srgbClr val="000000"/>
           </a:solidFill>
@@ -7595,7 +8017,7 @@
           <a:sym typeface="Arial"/>
         </a:defRPr>
       </a:lvl7pPr>
-      <a:lvl8pPr lvl="7" marR="0" rtl="0" algn="l">
+      <a:lvl8pPr marR="0" lvl="7" algn="l" rtl="0">
         <a:lnSpc>
           <a:spcPct val="100000"/>
         </a:lnSpc>
@@ -7609,7 +8031,7 @@
           <a:srgbClr val="000000"/>
         </a:buClr>
         <a:buFont typeface="Arial"/>
-        <a:defRPr b="0" i="0" sz="1400" u="none" cap="none" strike="noStrike">
+        <a:defRPr sz="1400" b="0" i="0" u="none" strike="noStrike" cap="none">
           <a:solidFill>
             <a:srgbClr val="000000"/>
           </a:solidFill>
@@ -7619,7 +8041,7 @@
           <a:sym typeface="Arial"/>
         </a:defRPr>
       </a:lvl8pPr>
-      <a:lvl9pPr lvl="8" marR="0" rtl="0" algn="l">
+      <a:lvl9pPr marR="0" lvl="8" algn="l" rtl="0">
         <a:lnSpc>
           <a:spcPct val="100000"/>
         </a:lnSpc>
@@ -7633,7 +8055,7 @@
           <a:srgbClr val="000000"/>
         </a:buClr>
         <a:buFont typeface="Arial"/>
-        <a:defRPr b="0" i="0" sz="1400" u="none" cap="none" strike="noStrike">
+        <a:defRPr sz="1400" b="0" i="0" u="none" strike="noStrike" cap="none">
           <a:solidFill>
             <a:srgbClr val="000000"/>
           </a:solidFill>
@@ -7649,7 +8071,7 @@
 </file>
 
 <file path=ppt/slides/slide1.xml><?xml version="1.0" encoding="utf-8"?>
-<p:sld xmlns:a="http://schemas.openxmlformats.org/drawingml/2006/main" xmlns:r="http://schemas.openxmlformats.org/officeDocument/2006/relationships" xmlns:mc="http://schemas.openxmlformats.org/markup-compatibility/2006" xmlns:mv="urn:schemas-microsoft-com:mac:vml" xmlns:p="http://schemas.openxmlformats.org/presentationml/2006/main" xmlns:c="http://schemas.openxmlformats.org/drawingml/2006/chart" xmlns:dgm="http://schemas.openxmlformats.org/drawingml/2006/diagram" xmlns:o="urn:schemas-microsoft-com:office:office" xmlns:v="urn:schemas-microsoft-com:vml" xmlns:pvml="urn:schemas-microsoft-com:office:powerpoint" xmlns:com="http://schemas.openxmlformats.org/drawingml/2006/compatibility" xmlns:p14="http://schemas.microsoft.com/office/powerpoint/2010/main" xmlns:p15="http://schemas.microsoft.com/office/powerpoint/2012/main" xmlns:ahyp="http://schemas.microsoft.com/office/drawing/2018/hyperlinkcolor">
+<p:sld xmlns:a="http://schemas.openxmlformats.org/drawingml/2006/main" xmlns:r="http://schemas.openxmlformats.org/officeDocument/2006/relationships" xmlns:p="http://schemas.openxmlformats.org/presentationml/2006/main">
   <p:cSld>
     <p:bg>
       <p:bgPr>
@@ -7661,11 +8083,12 @@
             <a:fillRect/>
           </a:stretch>
         </a:blipFill>
+        <a:effectLst/>
       </p:bgPr>
     </p:bg>
     <p:spTree>
       <p:nvGrpSpPr>
-        <p:cNvPr id="53" name="Shape 53"/>
+        <p:cNvPr id="1" name="Shape 53"/>
         <p:cNvGrpSpPr/>
         <p:nvPr/>
       </p:nvGrpSpPr>
@@ -7697,12 +8120,12 @@
           </a:ln>
         </p:spPr>
         <p:txBody>
-          <a:bodyPr anchorCtr="0" anchor="t" bIns="91425" lIns="91425" spcFirstLastPara="1" rIns="91425" wrap="square" tIns="91425">
+          <a:bodyPr spcFirstLastPara="1" wrap="square" lIns="91425" tIns="91425" rIns="91425" bIns="91425" anchor="t" anchorCtr="0">
             <a:noAutofit/>
           </a:bodyPr>
           <a:lstStyle/>
           <a:p>
-            <a:pPr indent="0" lvl="0" marL="0" rtl="0" algn="l">
+            <a:pPr marL="0" lvl="0" indent="0" algn="l" rtl="0">
               <a:spcBef>
                 <a:spcPts val="0"/>
               </a:spcBef>
@@ -7712,7 +8135,7 @@
               <a:buNone/>
             </a:pPr>
             <a:r>
-              <a:rPr b="1" lang="en" sz="3500">
+              <a:rPr lang="en" sz="3500" b="1">
                 <a:solidFill>
                   <a:schemeClr val="dk1"/>
                 </a:solidFill>
@@ -7723,7 +8146,7 @@
               </a:rPr>
               <a:t>&lt;&lt;Nombre y Apellido&gt;&gt;</a:t>
             </a:r>
-            <a:endParaRPr b="1" sz="3500">
+            <a:endParaRPr sz="3500" b="1">
               <a:solidFill>
                 <a:schemeClr val="dk1"/>
               </a:solidFill>
@@ -7744,7 +8167,7 @@
 </file>
 
 <file path=ppt/slides/slide10.xml><?xml version="1.0" encoding="utf-8"?>
-<p:sld xmlns:a="http://schemas.openxmlformats.org/drawingml/2006/main" xmlns:r="http://schemas.openxmlformats.org/officeDocument/2006/relationships" xmlns:mc="http://schemas.openxmlformats.org/markup-compatibility/2006" xmlns:mv="urn:schemas-microsoft-com:mac:vml" xmlns:p="http://schemas.openxmlformats.org/presentationml/2006/main" xmlns:c="http://schemas.openxmlformats.org/drawingml/2006/chart" xmlns:dgm="http://schemas.openxmlformats.org/drawingml/2006/diagram" xmlns:o="urn:schemas-microsoft-com:office:office" xmlns:v="urn:schemas-microsoft-com:vml" xmlns:pvml="urn:schemas-microsoft-com:office:powerpoint" xmlns:com="http://schemas.openxmlformats.org/drawingml/2006/compatibility" xmlns:p14="http://schemas.microsoft.com/office/powerpoint/2010/main" xmlns:p15="http://schemas.microsoft.com/office/powerpoint/2012/main" xmlns:ahyp="http://schemas.microsoft.com/office/drawing/2018/hyperlinkcolor">
+<p:sld xmlns:a="http://schemas.openxmlformats.org/drawingml/2006/main" xmlns:r="http://schemas.openxmlformats.org/officeDocument/2006/relationships" xmlns:p="http://schemas.openxmlformats.org/presentationml/2006/main">
   <p:cSld>
     <p:bg>
       <p:bgPr>
@@ -7756,11 +8179,12 @@
             <a:fillRect/>
           </a:stretch>
         </a:blipFill>
+        <a:effectLst/>
       </p:bgPr>
     </p:bg>
     <p:spTree>
       <p:nvGrpSpPr>
-        <p:cNvPr id="127" name="Shape 127"/>
+        <p:cNvPr id="1" name="Shape 127"/>
         <p:cNvGrpSpPr/>
         <p:nvPr/>
       </p:nvGrpSpPr>
@@ -7792,12 +8216,12 @@
           </a:ln>
         </p:spPr>
         <p:txBody>
-          <a:bodyPr anchorCtr="0" anchor="t" bIns="91425" lIns="91425" spcFirstLastPara="1" rIns="91425" wrap="square" tIns="91425">
+          <a:bodyPr spcFirstLastPara="1" wrap="square" lIns="91425" tIns="91425" rIns="91425" bIns="91425" anchor="t" anchorCtr="0">
             <a:noAutofit/>
           </a:bodyPr>
           <a:lstStyle/>
           <a:p>
-            <a:pPr indent="0" lvl="0" marL="0" rtl="0" algn="l">
+            <a:pPr marL="0" lvl="0" indent="0" algn="l" rtl="0">
               <a:spcBef>
                 <a:spcPts val="0"/>
               </a:spcBef>
@@ -7850,12 +8274,12 @@
           </a:ln>
         </p:spPr>
         <p:txBody>
-          <a:bodyPr anchorCtr="0" anchor="t" bIns="91425" lIns="91425" spcFirstLastPara="1" rIns="91425" wrap="square" tIns="91425">
+          <a:bodyPr spcFirstLastPara="1" wrap="square" lIns="91425" tIns="91425" rIns="91425" bIns="91425" anchor="t" anchorCtr="0">
             <a:spAutoFit/>
           </a:bodyPr>
           <a:lstStyle/>
           <a:p>
-            <a:pPr indent="0" lvl="0" marL="0" rtl="0" algn="l">
+            <a:pPr marL="0" lvl="0" indent="0" algn="l" rtl="0">
               <a:spcBef>
                 <a:spcPts val="0"/>
               </a:spcBef>
@@ -7865,7 +8289,7 @@
               <a:buNone/>
             </a:pPr>
             <a:r>
-              <a:rPr b="1" lang="en" sz="4200">
+              <a:rPr lang="en" sz="4200" b="1">
                 <a:solidFill>
                   <a:schemeClr val="dk1"/>
                 </a:solidFill>
@@ -7876,7 +8300,7 @@
               </a:rPr>
               <a:t>&lt;&lt;Holland 03&gt;&gt;</a:t>
             </a:r>
-            <a:endParaRPr b="1" sz="4200">
+            <a:endParaRPr sz="4200" b="1">
               <a:solidFill>
                 <a:schemeClr val="dk1"/>
               </a:solidFill>
@@ -7897,7 +8321,7 @@
 </file>
 
 <file path=ppt/slides/slide11.xml><?xml version="1.0" encoding="utf-8"?>
-<p:sld xmlns:a="http://schemas.openxmlformats.org/drawingml/2006/main" xmlns:r="http://schemas.openxmlformats.org/officeDocument/2006/relationships" xmlns:mc="http://schemas.openxmlformats.org/markup-compatibility/2006" xmlns:mv="urn:schemas-microsoft-com:mac:vml" xmlns:p="http://schemas.openxmlformats.org/presentationml/2006/main" xmlns:c="http://schemas.openxmlformats.org/drawingml/2006/chart" xmlns:dgm="http://schemas.openxmlformats.org/drawingml/2006/diagram" xmlns:o="urn:schemas-microsoft-com:office:office" xmlns:v="urn:schemas-microsoft-com:vml" xmlns:pvml="urn:schemas-microsoft-com:office:powerpoint" xmlns:com="http://schemas.openxmlformats.org/drawingml/2006/compatibility" xmlns:p14="http://schemas.microsoft.com/office/powerpoint/2010/main" xmlns:p15="http://schemas.microsoft.com/office/powerpoint/2012/main" xmlns:ahyp="http://schemas.microsoft.com/office/drawing/2018/hyperlinkcolor">
+<p:sld xmlns:a="http://schemas.openxmlformats.org/drawingml/2006/main" xmlns:r="http://schemas.openxmlformats.org/officeDocument/2006/relationships" xmlns:p="http://schemas.openxmlformats.org/presentationml/2006/main">
   <p:cSld>
     <p:bg>
       <p:bgPr>
@@ -7909,11 +8333,12 @@
             <a:fillRect/>
           </a:stretch>
         </a:blipFill>
+        <a:effectLst/>
       </p:bgPr>
     </p:bg>
     <p:spTree>
       <p:nvGrpSpPr>
-        <p:cNvPr id="133" name="Shape 133"/>
+        <p:cNvPr id="1" name="Shape 133"/>
         <p:cNvGrpSpPr/>
         <p:nvPr/>
       </p:nvGrpSpPr>
@@ -7934,7 +8359,7 @@
 </file>
 
 <file path=ppt/slides/slide12.xml><?xml version="1.0" encoding="utf-8"?>
-<p:sld xmlns:a="http://schemas.openxmlformats.org/drawingml/2006/main" xmlns:r="http://schemas.openxmlformats.org/officeDocument/2006/relationships" xmlns:mc="http://schemas.openxmlformats.org/markup-compatibility/2006" xmlns:mv="urn:schemas-microsoft-com:mac:vml" xmlns:p="http://schemas.openxmlformats.org/presentationml/2006/main" xmlns:c="http://schemas.openxmlformats.org/drawingml/2006/chart" xmlns:dgm="http://schemas.openxmlformats.org/drawingml/2006/diagram" xmlns:o="urn:schemas-microsoft-com:office:office" xmlns:v="urn:schemas-microsoft-com:vml" xmlns:pvml="urn:schemas-microsoft-com:office:powerpoint" xmlns:com="http://schemas.openxmlformats.org/drawingml/2006/compatibility" xmlns:p14="http://schemas.microsoft.com/office/powerpoint/2010/main" xmlns:p15="http://schemas.microsoft.com/office/powerpoint/2012/main" xmlns:ahyp="http://schemas.microsoft.com/office/drawing/2018/hyperlinkcolor">
+<p:sld xmlns:a="http://schemas.openxmlformats.org/drawingml/2006/main" xmlns:r="http://schemas.openxmlformats.org/officeDocument/2006/relationships" xmlns:p="http://schemas.openxmlformats.org/presentationml/2006/main">
   <p:cSld>
     <p:bg>
       <p:bgPr>
@@ -7946,11 +8371,12 @@
             <a:fillRect/>
           </a:stretch>
         </a:blipFill>
+        <a:effectLst/>
       </p:bgPr>
     </p:bg>
     <p:spTree>
       <p:nvGrpSpPr>
-        <p:cNvPr id="137" name="Shape 137"/>
+        <p:cNvPr id="1" name="Shape 137"/>
         <p:cNvGrpSpPr/>
         <p:nvPr/>
       </p:nvGrpSpPr>
@@ -7982,12 +8408,12 @@
           </a:ln>
         </p:spPr>
         <p:txBody>
-          <a:bodyPr anchorCtr="0" anchor="t" bIns="91425" lIns="91425" spcFirstLastPara="1" rIns="91425" wrap="square" tIns="91425">
+          <a:bodyPr spcFirstLastPara="1" wrap="square" lIns="91425" tIns="91425" rIns="91425" bIns="91425" anchor="t" anchorCtr="0">
             <a:spAutoFit/>
           </a:bodyPr>
           <a:lstStyle/>
           <a:p>
-            <a:pPr indent="0" lvl="0" marL="0" rtl="0" algn="l">
+            <a:pPr marL="0" lvl="0" indent="0" algn="l" rtl="0">
               <a:spcBef>
                 <a:spcPts val="0"/>
               </a:spcBef>
@@ -7997,7 +8423,7 @@
               <a:buNone/>
             </a:pPr>
             <a:r>
-              <a:rPr b="1" lang="en" sz="2600">
+              <a:rPr lang="en" sz="2600" b="1">
                 <a:solidFill>
                   <a:srgbClr val="434343"/>
                 </a:solidFill>
@@ -8008,7 +8434,7 @@
               </a:rPr>
               <a:t>&lt;&lt;Gardner 08&gt;&gt;</a:t>
             </a:r>
-            <a:endParaRPr b="1" sz="2600">
+            <a:endParaRPr sz="2600" b="1">
               <a:solidFill>
                 <a:srgbClr val="434343"/>
               </a:solidFill>
@@ -8040,12 +8466,12 @@
           </a:ln>
         </p:spPr>
         <p:txBody>
-          <a:bodyPr anchorCtr="0" anchor="t" bIns="91425" lIns="91425" spcFirstLastPara="1" rIns="91425" wrap="square" tIns="91425">
+          <a:bodyPr spcFirstLastPara="1" wrap="square" lIns="91425" tIns="91425" rIns="91425" bIns="91425" anchor="t" anchorCtr="0">
             <a:spAutoFit/>
           </a:bodyPr>
           <a:lstStyle/>
           <a:p>
-            <a:pPr indent="0" lvl="0" marL="0" rtl="0" algn="l">
+            <a:pPr marL="0" lvl="0" indent="0" algn="l" rtl="0">
               <a:spcBef>
                 <a:spcPts val="0"/>
               </a:spcBef>
@@ -8098,12 +8524,12 @@
           </a:ln>
         </p:spPr>
         <p:txBody>
-          <a:bodyPr anchorCtr="0" anchor="t" bIns="91425" lIns="91425" spcFirstLastPara="1" rIns="91425" wrap="square" tIns="91425">
+          <a:bodyPr spcFirstLastPara="1" wrap="square" lIns="91425" tIns="91425" rIns="91425" bIns="91425" anchor="t" anchorCtr="0">
             <a:spAutoFit/>
           </a:bodyPr>
           <a:lstStyle/>
           <a:p>
-            <a:pPr indent="0" lvl="0" marL="0" rtl="0" algn="l">
+            <a:pPr marL="0" lvl="0" indent="0" algn="l" rtl="0">
               <a:spcBef>
                 <a:spcPts val="0"/>
               </a:spcBef>
@@ -8113,7 +8539,7 @@
               <a:buNone/>
             </a:pPr>
             <a:r>
-              <a:rPr b="1" lang="en" sz="2600">
+              <a:rPr lang="en" sz="2600" b="1">
                 <a:solidFill>
                   <a:srgbClr val="434343"/>
                 </a:solidFill>
@@ -8124,7 +8550,7 @@
               </a:rPr>
               <a:t>&lt;&lt;% Gardner 08&gt;&gt;</a:t>
             </a:r>
-            <a:endParaRPr b="1" sz="2600">
+            <a:endParaRPr sz="2600" b="1">
               <a:solidFill>
                 <a:srgbClr val="434343"/>
               </a:solidFill>
@@ -8156,12 +8582,12 @@
           </a:ln>
         </p:spPr>
         <p:txBody>
-          <a:bodyPr anchorCtr="0" anchor="t" bIns="91425" lIns="91425" spcFirstLastPara="1" rIns="91425" wrap="square" tIns="91425">
+          <a:bodyPr spcFirstLastPara="1" wrap="square" lIns="91425" tIns="91425" rIns="91425" bIns="91425" anchor="t" anchorCtr="0">
             <a:spAutoFit/>
           </a:bodyPr>
           <a:lstStyle/>
           <a:p>
-            <a:pPr indent="0" lvl="0" marL="0" rtl="0" algn="l">
+            <a:pPr marL="0" lvl="0" indent="0" algn="l" rtl="0">
               <a:spcBef>
                 <a:spcPts val="0"/>
               </a:spcBef>
@@ -8171,7 +8597,7 @@
               <a:buNone/>
             </a:pPr>
             <a:r>
-              <a:rPr b="1" lang="en" sz="2600">
+              <a:rPr lang="en" sz="2600" b="1">
                 <a:solidFill>
                   <a:srgbClr val="434343"/>
                 </a:solidFill>
@@ -8182,7 +8608,7 @@
               </a:rPr>
               <a:t>&lt;&lt;Gardner 07&gt;&gt;</a:t>
             </a:r>
-            <a:endParaRPr b="1" sz="2600">
+            <a:endParaRPr sz="2600" b="1">
               <a:solidFill>
                 <a:srgbClr val="434343"/>
               </a:solidFill>
@@ -8214,12 +8640,12 @@
           </a:ln>
         </p:spPr>
         <p:txBody>
-          <a:bodyPr anchorCtr="0" anchor="t" bIns="91425" lIns="91425" spcFirstLastPara="1" rIns="91425" wrap="square" tIns="91425">
+          <a:bodyPr spcFirstLastPara="1" wrap="square" lIns="91425" tIns="91425" rIns="91425" bIns="91425" anchor="t" anchorCtr="0">
             <a:spAutoFit/>
           </a:bodyPr>
           <a:lstStyle/>
           <a:p>
-            <a:pPr indent="0" lvl="0" marL="0" rtl="0" algn="l">
+            <a:pPr marL="0" lvl="0" indent="0" algn="l" rtl="0">
               <a:spcBef>
                 <a:spcPts val="0"/>
               </a:spcBef>
@@ -8272,12 +8698,12 @@
           </a:ln>
         </p:spPr>
         <p:txBody>
-          <a:bodyPr anchorCtr="0" anchor="t" bIns="91425" lIns="91425" spcFirstLastPara="1" rIns="91425" wrap="square" tIns="91425">
+          <a:bodyPr spcFirstLastPara="1" wrap="square" lIns="91425" tIns="91425" rIns="91425" bIns="91425" anchor="t" anchorCtr="0">
             <a:spAutoFit/>
           </a:bodyPr>
           <a:lstStyle/>
           <a:p>
-            <a:pPr indent="0" lvl="0" marL="0" rtl="0" algn="l">
+            <a:pPr marL="0" lvl="0" indent="0" algn="l" rtl="0">
               <a:spcBef>
                 <a:spcPts val="0"/>
               </a:spcBef>
@@ -8287,7 +8713,7 @@
               <a:buNone/>
             </a:pPr>
             <a:r>
-              <a:rPr b="1" lang="en" sz="2600">
+              <a:rPr lang="en" sz="2600" b="1">
                 <a:solidFill>
                   <a:srgbClr val="434343"/>
                 </a:solidFill>
@@ -8298,7 +8724,7 @@
               </a:rPr>
               <a:t>&lt;&lt;% Gardner 07&gt;&gt;</a:t>
             </a:r>
-            <a:endParaRPr b="1" sz="2600">
+            <a:endParaRPr sz="2600" b="1">
               <a:solidFill>
                 <a:srgbClr val="434343"/>
               </a:solidFill>
@@ -8330,12 +8756,12 @@
           </a:ln>
         </p:spPr>
         <p:txBody>
-          <a:bodyPr anchorCtr="0" anchor="t" bIns="91425" lIns="91425" spcFirstLastPara="1" rIns="91425" wrap="square" tIns="91425">
+          <a:bodyPr spcFirstLastPara="1" wrap="square" lIns="91425" tIns="91425" rIns="91425" bIns="91425" anchor="t" anchorCtr="0">
             <a:spAutoFit/>
           </a:bodyPr>
           <a:lstStyle/>
           <a:p>
-            <a:pPr indent="0" lvl="0" marL="0" rtl="0" algn="l">
+            <a:pPr marL="0" lvl="0" indent="0" algn="l" rtl="0">
               <a:spcBef>
                 <a:spcPts val="0"/>
               </a:spcBef>
@@ -8345,7 +8771,7 @@
               <a:buNone/>
             </a:pPr>
             <a:r>
-              <a:rPr b="1" lang="en" sz="2600">
+              <a:rPr lang="en" sz="2600" b="1">
                 <a:solidFill>
                   <a:srgbClr val="434343"/>
                 </a:solidFill>
@@ -8356,7 +8782,7 @@
               </a:rPr>
               <a:t>&lt;&lt;Gardner 06&gt;&gt;</a:t>
             </a:r>
-            <a:endParaRPr b="1" sz="2600">
+            <a:endParaRPr sz="2600" b="1">
               <a:solidFill>
                 <a:srgbClr val="434343"/>
               </a:solidFill>
@@ -8388,12 +8814,12 @@
           </a:ln>
         </p:spPr>
         <p:txBody>
-          <a:bodyPr anchorCtr="0" anchor="t" bIns="91425" lIns="91425" spcFirstLastPara="1" rIns="91425" wrap="square" tIns="91425">
+          <a:bodyPr spcFirstLastPara="1" wrap="square" lIns="91425" tIns="91425" rIns="91425" bIns="91425" anchor="t" anchorCtr="0">
             <a:spAutoFit/>
           </a:bodyPr>
           <a:lstStyle/>
           <a:p>
-            <a:pPr indent="0" lvl="0" marL="0" rtl="0" algn="l">
+            <a:pPr marL="0" lvl="0" indent="0" algn="l" rtl="0">
               <a:spcBef>
                 <a:spcPts val="0"/>
               </a:spcBef>
@@ -8446,12 +8872,12 @@
           </a:ln>
         </p:spPr>
         <p:txBody>
-          <a:bodyPr anchorCtr="0" anchor="t" bIns="91425" lIns="91425" spcFirstLastPara="1" rIns="91425" wrap="square" tIns="91425">
+          <a:bodyPr spcFirstLastPara="1" wrap="square" lIns="91425" tIns="91425" rIns="91425" bIns="91425" anchor="t" anchorCtr="0">
             <a:spAutoFit/>
           </a:bodyPr>
           <a:lstStyle/>
           <a:p>
-            <a:pPr indent="0" lvl="0" marL="0" rtl="0" algn="l">
+            <a:pPr marL="0" lvl="0" indent="0" algn="l" rtl="0">
               <a:spcBef>
                 <a:spcPts val="0"/>
               </a:spcBef>
@@ -8461,7 +8887,7 @@
               <a:buNone/>
             </a:pPr>
             <a:r>
-              <a:rPr b="1" lang="en" sz="2600">
+              <a:rPr lang="en" sz="2600" b="1">
                 <a:solidFill>
                   <a:srgbClr val="434343"/>
                 </a:solidFill>
@@ -8472,7 +8898,7 @@
               </a:rPr>
               <a:t>&lt;&lt;% Gardner 06&gt;&gt;</a:t>
             </a:r>
-            <a:endParaRPr b="1" sz="2600">
+            <a:endParaRPr sz="2600" b="1">
               <a:solidFill>
                 <a:srgbClr val="434343"/>
               </a:solidFill>
@@ -8504,12 +8930,12 @@
           </a:ln>
         </p:spPr>
         <p:txBody>
-          <a:bodyPr anchorCtr="0" anchor="t" bIns="91425" lIns="91425" spcFirstLastPara="1" rIns="91425" wrap="square" tIns="91425">
+          <a:bodyPr spcFirstLastPara="1" wrap="square" lIns="91425" tIns="91425" rIns="91425" bIns="91425" anchor="t" anchorCtr="0">
             <a:spAutoFit/>
           </a:bodyPr>
           <a:lstStyle/>
           <a:p>
-            <a:pPr indent="0" lvl="0" marL="0" rtl="0" algn="l">
+            <a:pPr marL="0" lvl="0" indent="0" algn="l" rtl="0">
               <a:spcBef>
                 <a:spcPts val="0"/>
               </a:spcBef>
@@ -8519,7 +8945,7 @@
               <a:buNone/>
             </a:pPr>
             <a:r>
-              <a:rPr b="1" lang="en" sz="2600">
+              <a:rPr lang="en" sz="2600" b="1">
                 <a:solidFill>
                   <a:srgbClr val="434343"/>
                 </a:solidFill>
@@ -8530,7 +8956,7 @@
               </a:rPr>
               <a:t>&lt;&lt;Gardner 05&gt;&gt;</a:t>
             </a:r>
-            <a:endParaRPr b="1" sz="2600">
+            <a:endParaRPr sz="2600" b="1">
               <a:solidFill>
                 <a:srgbClr val="434343"/>
               </a:solidFill>
@@ -8562,12 +8988,12 @@
           </a:ln>
         </p:spPr>
         <p:txBody>
-          <a:bodyPr anchorCtr="0" anchor="t" bIns="91425" lIns="91425" spcFirstLastPara="1" rIns="91425" wrap="square" tIns="91425">
+          <a:bodyPr spcFirstLastPara="1" wrap="square" lIns="91425" tIns="91425" rIns="91425" bIns="91425" anchor="t" anchorCtr="0">
             <a:spAutoFit/>
           </a:bodyPr>
           <a:lstStyle/>
           <a:p>
-            <a:pPr indent="0" lvl="0" marL="0" rtl="0" algn="l">
+            <a:pPr marL="0" lvl="0" indent="0" algn="l" rtl="0">
               <a:spcBef>
                 <a:spcPts val="0"/>
               </a:spcBef>
@@ -8620,12 +9046,12 @@
           </a:ln>
         </p:spPr>
         <p:txBody>
-          <a:bodyPr anchorCtr="0" anchor="t" bIns="91425" lIns="91425" spcFirstLastPara="1" rIns="91425" wrap="square" tIns="91425">
+          <a:bodyPr spcFirstLastPara="1" wrap="square" lIns="91425" tIns="91425" rIns="91425" bIns="91425" anchor="t" anchorCtr="0">
             <a:spAutoFit/>
           </a:bodyPr>
           <a:lstStyle/>
           <a:p>
-            <a:pPr indent="0" lvl="0" marL="0" rtl="0" algn="l">
+            <a:pPr marL="0" lvl="0" indent="0" algn="l" rtl="0">
               <a:spcBef>
                 <a:spcPts val="0"/>
               </a:spcBef>
@@ -8635,7 +9061,7 @@
               <a:buNone/>
             </a:pPr>
             <a:r>
-              <a:rPr b="1" lang="en" sz="2600">
+              <a:rPr lang="en" sz="2600" b="1">
                 <a:solidFill>
                   <a:srgbClr val="434343"/>
                 </a:solidFill>
@@ -8646,7 +9072,7 @@
               </a:rPr>
               <a:t>&lt;&lt;% Gardner 05&gt;&gt;</a:t>
             </a:r>
-            <a:endParaRPr b="1" sz="2600">
+            <a:endParaRPr sz="2600" b="1">
               <a:solidFill>
                 <a:srgbClr val="434343"/>
               </a:solidFill>
@@ -8678,12 +9104,12 @@
           </a:ln>
         </p:spPr>
         <p:txBody>
-          <a:bodyPr anchorCtr="0" anchor="t" bIns="91425" lIns="91425" spcFirstLastPara="1" rIns="91425" wrap="square" tIns="91425">
+          <a:bodyPr spcFirstLastPara="1" wrap="square" lIns="91425" tIns="91425" rIns="91425" bIns="91425" anchor="t" anchorCtr="0">
             <a:spAutoFit/>
           </a:bodyPr>
           <a:lstStyle/>
           <a:p>
-            <a:pPr indent="0" lvl="0" marL="0" rtl="0" algn="l">
+            <a:pPr marL="0" lvl="0" indent="0" algn="l" rtl="0">
               <a:spcBef>
                 <a:spcPts val="0"/>
               </a:spcBef>
@@ -8693,7 +9119,7 @@
               <a:buNone/>
             </a:pPr>
             <a:r>
-              <a:rPr b="1" lang="en" sz="2600">
+              <a:rPr lang="en" sz="2600" b="1">
                 <a:solidFill>
                   <a:srgbClr val="434343"/>
                 </a:solidFill>
@@ -8704,7 +9130,7 @@
               </a:rPr>
               <a:t>&lt;&lt;Gardner 04&gt;&gt;</a:t>
             </a:r>
-            <a:endParaRPr b="1" sz="2600">
+            <a:endParaRPr sz="2600" b="1">
               <a:solidFill>
                 <a:srgbClr val="434343"/>
               </a:solidFill>
@@ -8736,12 +9162,12 @@
           </a:ln>
         </p:spPr>
         <p:txBody>
-          <a:bodyPr anchorCtr="0" anchor="t" bIns="91425" lIns="91425" spcFirstLastPara="1" rIns="91425" wrap="square" tIns="91425">
+          <a:bodyPr spcFirstLastPara="1" wrap="square" lIns="91425" tIns="91425" rIns="91425" bIns="91425" anchor="t" anchorCtr="0">
             <a:spAutoFit/>
           </a:bodyPr>
           <a:lstStyle/>
           <a:p>
-            <a:pPr indent="0" lvl="0" marL="0" rtl="0" algn="l">
+            <a:pPr marL="0" lvl="0" indent="0" algn="l" rtl="0">
               <a:spcBef>
                 <a:spcPts val="0"/>
               </a:spcBef>
@@ -8794,12 +9220,12 @@
           </a:ln>
         </p:spPr>
         <p:txBody>
-          <a:bodyPr anchorCtr="0" anchor="t" bIns="91425" lIns="91425" spcFirstLastPara="1" rIns="91425" wrap="square" tIns="91425">
+          <a:bodyPr spcFirstLastPara="1" wrap="square" lIns="91425" tIns="91425" rIns="91425" bIns="91425" anchor="t" anchorCtr="0">
             <a:spAutoFit/>
           </a:bodyPr>
           <a:lstStyle/>
           <a:p>
-            <a:pPr indent="0" lvl="0" marL="0" rtl="0" algn="l">
+            <a:pPr marL="0" lvl="0" indent="0" algn="l" rtl="0">
               <a:spcBef>
                 <a:spcPts val="0"/>
               </a:spcBef>
@@ -8809,7 +9235,7 @@
               <a:buNone/>
             </a:pPr>
             <a:r>
-              <a:rPr b="1" lang="en" sz="2600">
+              <a:rPr lang="en" sz="2600" b="1">
                 <a:solidFill>
                   <a:srgbClr val="434343"/>
                 </a:solidFill>
@@ -8820,7 +9246,7 @@
               </a:rPr>
               <a:t>&lt;&lt;% Gardner 04&gt;&gt;</a:t>
             </a:r>
-            <a:endParaRPr b="1" sz="2600">
+            <a:endParaRPr sz="2600" b="1">
               <a:solidFill>
                 <a:srgbClr val="434343"/>
               </a:solidFill>
@@ -8852,12 +9278,12 @@
           </a:ln>
         </p:spPr>
         <p:txBody>
-          <a:bodyPr anchorCtr="0" anchor="t" bIns="91425" lIns="91425" spcFirstLastPara="1" rIns="91425" wrap="square" tIns="91425">
+          <a:bodyPr spcFirstLastPara="1" wrap="square" lIns="91425" tIns="91425" rIns="91425" bIns="91425" anchor="t" anchorCtr="0">
             <a:spAutoFit/>
           </a:bodyPr>
           <a:lstStyle/>
           <a:p>
-            <a:pPr indent="0" lvl="0" marL="0" rtl="0" algn="l">
+            <a:pPr marL="0" lvl="0" indent="0" algn="l" rtl="0">
               <a:spcBef>
                 <a:spcPts val="0"/>
               </a:spcBef>
@@ -8867,7 +9293,7 @@
               <a:buNone/>
             </a:pPr>
             <a:r>
-              <a:rPr b="1" lang="en" sz="2600">
+              <a:rPr lang="en" sz="2600" b="1">
                 <a:solidFill>
                   <a:srgbClr val="434343"/>
                 </a:solidFill>
@@ -8878,7 +9304,7 @@
               </a:rPr>
               <a:t>&lt;&lt;Gardner 03&gt;&gt;</a:t>
             </a:r>
-            <a:endParaRPr b="1" sz="2600">
+            <a:endParaRPr sz="2600" b="1">
               <a:solidFill>
                 <a:srgbClr val="434343"/>
               </a:solidFill>
@@ -8910,12 +9336,12 @@
           </a:ln>
         </p:spPr>
         <p:txBody>
-          <a:bodyPr anchorCtr="0" anchor="t" bIns="91425" lIns="91425" spcFirstLastPara="1" rIns="91425" wrap="square" tIns="91425">
+          <a:bodyPr spcFirstLastPara="1" wrap="square" lIns="91425" tIns="91425" rIns="91425" bIns="91425" anchor="t" anchorCtr="0">
             <a:spAutoFit/>
           </a:bodyPr>
           <a:lstStyle/>
           <a:p>
-            <a:pPr indent="0" lvl="0" marL="0" rtl="0" algn="l">
+            <a:pPr marL="0" lvl="0" indent="0" algn="l" rtl="0">
               <a:spcBef>
                 <a:spcPts val="0"/>
               </a:spcBef>
@@ -8968,12 +9394,12 @@
           </a:ln>
         </p:spPr>
         <p:txBody>
-          <a:bodyPr anchorCtr="0" anchor="t" bIns="91425" lIns="91425" spcFirstLastPara="1" rIns="91425" wrap="square" tIns="91425">
+          <a:bodyPr spcFirstLastPara="1" wrap="square" lIns="91425" tIns="91425" rIns="91425" bIns="91425" anchor="t" anchorCtr="0">
             <a:spAutoFit/>
           </a:bodyPr>
           <a:lstStyle/>
           <a:p>
-            <a:pPr indent="0" lvl="0" marL="0" rtl="0" algn="l">
+            <a:pPr marL="0" lvl="0" indent="0" algn="l" rtl="0">
               <a:spcBef>
                 <a:spcPts val="0"/>
               </a:spcBef>
@@ -8983,7 +9409,7 @@
               <a:buNone/>
             </a:pPr>
             <a:r>
-              <a:rPr b="1" lang="en" sz="2600">
+              <a:rPr lang="en" sz="2600" b="1">
                 <a:solidFill>
                   <a:srgbClr val="434343"/>
                 </a:solidFill>
@@ -8994,7 +9420,7 @@
               </a:rPr>
               <a:t>&lt;&lt;% Gardner 03&gt;&gt;</a:t>
             </a:r>
-            <a:endParaRPr b="1" sz="2600">
+            <a:endParaRPr sz="2600" b="1">
               <a:solidFill>
                 <a:srgbClr val="434343"/>
               </a:solidFill>
@@ -9026,12 +9452,12 @@
           </a:ln>
         </p:spPr>
         <p:txBody>
-          <a:bodyPr anchorCtr="0" anchor="t" bIns="91425" lIns="91425" spcFirstLastPara="1" rIns="91425" wrap="square" tIns="91425">
+          <a:bodyPr spcFirstLastPara="1" wrap="square" lIns="91425" tIns="91425" rIns="91425" bIns="91425" anchor="t" anchorCtr="0">
             <a:spAutoFit/>
           </a:bodyPr>
           <a:lstStyle/>
           <a:p>
-            <a:pPr indent="0" lvl="0" marL="0" rtl="0" algn="l">
+            <a:pPr marL="0" lvl="0" indent="0" algn="l" rtl="0">
               <a:spcBef>
                 <a:spcPts val="0"/>
               </a:spcBef>
@@ -9041,7 +9467,7 @@
               <a:buNone/>
             </a:pPr>
             <a:r>
-              <a:rPr b="1" lang="en" sz="2600">
+              <a:rPr lang="en" sz="2600" b="1">
                 <a:solidFill>
                   <a:srgbClr val="434343"/>
                 </a:solidFill>
@@ -9052,7 +9478,7 @@
               </a:rPr>
               <a:t>&lt;&lt;Gardner 02&gt;&gt;</a:t>
             </a:r>
-            <a:endParaRPr b="1" sz="2600">
+            <a:endParaRPr sz="2600" b="1">
               <a:solidFill>
                 <a:srgbClr val="434343"/>
               </a:solidFill>
@@ -9084,12 +9510,12 @@
           </a:ln>
         </p:spPr>
         <p:txBody>
-          <a:bodyPr anchorCtr="0" anchor="t" bIns="91425" lIns="91425" spcFirstLastPara="1" rIns="91425" wrap="square" tIns="91425">
+          <a:bodyPr spcFirstLastPara="1" wrap="square" lIns="91425" tIns="91425" rIns="91425" bIns="91425" anchor="t" anchorCtr="0">
             <a:spAutoFit/>
           </a:bodyPr>
           <a:lstStyle/>
           <a:p>
-            <a:pPr indent="0" lvl="0" marL="0" rtl="0" algn="l">
+            <a:pPr marL="0" lvl="0" indent="0" algn="l" rtl="0">
               <a:spcBef>
                 <a:spcPts val="0"/>
               </a:spcBef>
@@ -9130,7 +9556,7 @@
         </p:nvSpPr>
         <p:spPr>
           <a:xfrm>
-            <a:off x="7587777" y="1848596"/>
+            <a:off x="7571554" y="1822789"/>
             <a:ext cx="1587600" cy="1385400"/>
           </a:xfrm>
           <a:prstGeom prst="rect">
@@ -9142,12 +9568,12 @@
           </a:ln>
         </p:spPr>
         <p:txBody>
-          <a:bodyPr anchorCtr="0" anchor="t" bIns="91425" lIns="91425" spcFirstLastPara="1" rIns="91425" wrap="square" tIns="91425">
+          <a:bodyPr spcFirstLastPara="1" wrap="square" lIns="91425" tIns="91425" rIns="91425" bIns="91425" anchor="t" anchorCtr="0">
             <a:spAutoFit/>
           </a:bodyPr>
           <a:lstStyle/>
           <a:p>
-            <a:pPr indent="0" lvl="0" marL="0" rtl="0" algn="l">
+            <a:pPr marL="0" lvl="0" indent="0" algn="l" rtl="0">
               <a:spcBef>
                 <a:spcPts val="0"/>
               </a:spcBef>
@@ -9157,7 +9583,7 @@
               <a:buNone/>
             </a:pPr>
             <a:r>
-              <a:rPr b="1" lang="en" sz="2600">
+              <a:rPr lang="en" sz="2600" b="1" dirty="0">
                 <a:solidFill>
                   <a:srgbClr val="434343"/>
                 </a:solidFill>
@@ -9168,7 +9594,7 @@
               </a:rPr>
               <a:t>&lt;&lt;% Gardner 02&gt;&gt;</a:t>
             </a:r>
-            <a:endParaRPr b="1" sz="2600">
+            <a:endParaRPr sz="2600" b="1" dirty="0">
               <a:solidFill>
                 <a:srgbClr val="434343"/>
               </a:solidFill>
@@ -9200,12 +9626,12 @@
           </a:ln>
         </p:spPr>
         <p:txBody>
-          <a:bodyPr anchorCtr="0" anchor="t" bIns="91425" lIns="91425" spcFirstLastPara="1" rIns="91425" wrap="square" tIns="91425">
+          <a:bodyPr spcFirstLastPara="1" wrap="square" lIns="91425" tIns="91425" rIns="91425" bIns="91425" anchor="t" anchorCtr="0">
             <a:spAutoFit/>
           </a:bodyPr>
           <a:lstStyle/>
           <a:p>
-            <a:pPr indent="0" lvl="0" marL="0" rtl="0" algn="l">
+            <a:pPr marL="0" lvl="0" indent="0" algn="l" rtl="0">
               <a:spcBef>
                 <a:spcPts val="0"/>
               </a:spcBef>
@@ -9215,7 +9641,7 @@
               <a:buNone/>
             </a:pPr>
             <a:r>
-              <a:rPr b="1" lang="en" sz="2600">
+              <a:rPr lang="en" sz="2600" b="1">
                 <a:solidFill>
                   <a:srgbClr val="434343"/>
                 </a:solidFill>
@@ -9224,33 +9650,9 @@
                 <a:cs typeface="Public Sans"/>
                 <a:sym typeface="Public Sans"/>
               </a:rPr>
-              <a:t>&lt;&lt;</a:t>
+              <a:t>&lt;&lt;Gardner 01&gt;&gt;</a:t>
             </a:r>
-            <a:r>
-              <a:rPr b="1" lang="en" sz="2600">
-                <a:solidFill>
-                  <a:srgbClr val="434343"/>
-                </a:solidFill>
-                <a:latin typeface="Public Sans"/>
-                <a:ea typeface="Public Sans"/>
-                <a:cs typeface="Public Sans"/>
-                <a:sym typeface="Public Sans"/>
-              </a:rPr>
-              <a:t>Gardner</a:t>
-            </a:r>
-            <a:r>
-              <a:rPr b="1" lang="en" sz="2600">
-                <a:solidFill>
-                  <a:srgbClr val="434343"/>
-                </a:solidFill>
-                <a:latin typeface="Public Sans"/>
-                <a:ea typeface="Public Sans"/>
-                <a:cs typeface="Public Sans"/>
-                <a:sym typeface="Public Sans"/>
-              </a:rPr>
-              <a:t> 01&gt;&gt;</a:t>
-            </a:r>
-            <a:endParaRPr b="1" sz="2600">
+            <a:endParaRPr sz="2600" b="1">
               <a:solidFill>
                 <a:srgbClr val="434343"/>
               </a:solidFill>
@@ -9282,12 +9684,12 @@
           </a:ln>
         </p:spPr>
         <p:txBody>
-          <a:bodyPr anchorCtr="0" anchor="t" bIns="91425" lIns="91425" spcFirstLastPara="1" rIns="91425" wrap="square" tIns="91425">
+          <a:bodyPr spcFirstLastPara="1" wrap="square" lIns="91425" tIns="91425" rIns="91425" bIns="91425" anchor="t" anchorCtr="0">
             <a:spAutoFit/>
           </a:bodyPr>
           <a:lstStyle/>
           <a:p>
-            <a:pPr indent="0" lvl="0" marL="0" rtl="0" algn="l">
+            <a:pPr marL="0" lvl="0" indent="0" algn="l" rtl="0">
               <a:spcBef>
                 <a:spcPts val="0"/>
               </a:spcBef>
@@ -9328,7 +9730,7 @@
         </p:nvSpPr>
         <p:spPr>
           <a:xfrm>
-            <a:off x="7582575" y="460725"/>
+            <a:off x="7583314" y="353025"/>
             <a:ext cx="1587600" cy="1385400"/>
           </a:xfrm>
           <a:prstGeom prst="rect">
@@ -9340,12 +9742,12 @@
           </a:ln>
         </p:spPr>
         <p:txBody>
-          <a:bodyPr anchorCtr="0" anchor="t" bIns="91425" lIns="91425" spcFirstLastPara="1" rIns="91425" wrap="square" tIns="91425">
+          <a:bodyPr spcFirstLastPara="1" wrap="square" lIns="91425" tIns="91425" rIns="91425" bIns="91425" anchor="t" anchorCtr="0">
             <a:spAutoFit/>
           </a:bodyPr>
           <a:lstStyle/>
           <a:p>
-            <a:pPr indent="0" lvl="0" marL="0" rtl="0" algn="l">
+            <a:pPr marL="0" lvl="0" indent="0" algn="l" rtl="0">
               <a:spcBef>
                 <a:spcPts val="0"/>
               </a:spcBef>
@@ -9355,7 +9757,7 @@
               <a:buNone/>
             </a:pPr>
             <a:r>
-              <a:rPr b="1" lang="en" sz="2600">
+              <a:rPr lang="en" sz="2600" b="1" dirty="0">
                 <a:solidFill>
                   <a:srgbClr val="434343"/>
                 </a:solidFill>
@@ -9366,7 +9768,7 @@
               </a:rPr>
               <a:t>&lt;&lt;% Gardner 01&gt;&gt;</a:t>
             </a:r>
-            <a:endParaRPr b="1" sz="2600">
+            <a:endParaRPr sz="2600" b="1" dirty="0">
               <a:solidFill>
                 <a:srgbClr val="434343"/>
               </a:solidFill>
@@ -9387,7 +9789,7 @@
 </file>
 
 <file path=ppt/slides/slide13.xml><?xml version="1.0" encoding="utf-8"?>
-<p:sld xmlns:a="http://schemas.openxmlformats.org/drawingml/2006/main" xmlns:r="http://schemas.openxmlformats.org/officeDocument/2006/relationships" xmlns:mc="http://schemas.openxmlformats.org/markup-compatibility/2006" xmlns:mv="urn:schemas-microsoft-com:mac:vml" xmlns:p="http://schemas.openxmlformats.org/presentationml/2006/main" xmlns:c="http://schemas.openxmlformats.org/drawingml/2006/chart" xmlns:dgm="http://schemas.openxmlformats.org/drawingml/2006/diagram" xmlns:o="urn:schemas-microsoft-com:office:office" xmlns:v="urn:schemas-microsoft-com:vml" xmlns:pvml="urn:schemas-microsoft-com:office:powerpoint" xmlns:com="http://schemas.openxmlformats.org/drawingml/2006/compatibility" xmlns:p14="http://schemas.microsoft.com/office/powerpoint/2010/main" xmlns:p15="http://schemas.microsoft.com/office/powerpoint/2012/main" xmlns:ahyp="http://schemas.microsoft.com/office/drawing/2018/hyperlinkcolor">
+<p:sld xmlns:a="http://schemas.openxmlformats.org/drawingml/2006/main" xmlns:r="http://schemas.openxmlformats.org/officeDocument/2006/relationships" xmlns:p="http://schemas.openxmlformats.org/presentationml/2006/main">
   <p:cSld>
     <p:bg>
       <p:bgPr>
@@ -9399,11 +9801,12 @@
             <a:fillRect/>
           </a:stretch>
         </a:blipFill>
+        <a:effectLst/>
       </p:bgPr>
     </p:bg>
     <p:spTree>
       <p:nvGrpSpPr>
-        <p:cNvPr id="165" name="Shape 165"/>
+        <p:cNvPr id="1" name="Shape 165"/>
         <p:cNvGrpSpPr/>
         <p:nvPr/>
       </p:nvGrpSpPr>
@@ -9435,12 +9838,12 @@
           </a:ln>
         </p:spPr>
         <p:txBody>
-          <a:bodyPr anchorCtr="0" anchor="t" bIns="91425" lIns="91425" spcFirstLastPara="1" rIns="91425" wrap="square" tIns="91425">
+          <a:bodyPr spcFirstLastPara="1" wrap="square" lIns="91425" tIns="91425" rIns="91425" bIns="91425" anchor="t" anchorCtr="0">
             <a:noAutofit/>
           </a:bodyPr>
           <a:lstStyle/>
           <a:p>
-            <a:pPr indent="0" lvl="0" marL="0" rtl="0" algn="l">
+            <a:pPr marL="0" lvl="0" indent="0" algn="l" rtl="0">
               <a:spcBef>
                 <a:spcPts val="0"/>
               </a:spcBef>
@@ -9487,12 +9890,12 @@
           </a:ln>
         </p:spPr>
         <p:txBody>
-          <a:bodyPr anchorCtr="0" anchor="t" bIns="91425" lIns="91425" spcFirstLastPara="1" rIns="91425" wrap="square" tIns="91425">
+          <a:bodyPr spcFirstLastPara="1" wrap="square" lIns="91425" tIns="91425" rIns="91425" bIns="91425" anchor="t" anchorCtr="0">
             <a:spAutoFit/>
           </a:bodyPr>
           <a:lstStyle/>
           <a:p>
-            <a:pPr indent="0" lvl="0" marL="0" rtl="0" algn="ctr">
+            <a:pPr marL="0" lvl="0" indent="0" algn="ctr" rtl="0">
               <a:spcBef>
                 <a:spcPts val="0"/>
               </a:spcBef>
@@ -9502,7 +9905,7 @@
               <a:buNone/>
             </a:pPr>
             <a:r>
-              <a:rPr b="1" lang="en" sz="3000">
+              <a:rPr lang="en" sz="3000" b="1">
                 <a:solidFill>
                   <a:schemeClr val="dk1"/>
                 </a:solidFill>
@@ -9513,7 +9916,7 @@
               </a:rPr>
               <a:t>&lt;&lt;% Gardner 02&gt;&gt;</a:t>
             </a:r>
-            <a:endParaRPr b="1" sz="3000">
+            <a:endParaRPr sz="3000" b="1">
               <a:solidFill>
                 <a:schemeClr val="dk1"/>
               </a:solidFill>
@@ -9545,12 +9948,12 @@
           </a:ln>
         </p:spPr>
         <p:txBody>
-          <a:bodyPr anchorCtr="0" anchor="t" bIns="91425" lIns="91425" spcFirstLastPara="1" rIns="91425" wrap="square" tIns="91425">
+          <a:bodyPr spcFirstLastPara="1" wrap="square" lIns="91425" tIns="91425" rIns="91425" bIns="91425" anchor="t" anchorCtr="0">
             <a:spAutoFit/>
           </a:bodyPr>
           <a:lstStyle/>
           <a:p>
-            <a:pPr indent="0" lvl="0" marL="0" rtl="0" algn="l">
+            <a:pPr marL="0" lvl="0" indent="0" algn="l" rtl="0">
               <a:spcBef>
                 <a:spcPts val="0"/>
               </a:spcBef>
@@ -9560,7 +9963,7 @@
               <a:buNone/>
             </a:pPr>
             <a:r>
-              <a:rPr b="1" lang="en" sz="3000">
+              <a:rPr lang="en" sz="3000" b="1">
                 <a:latin typeface="Public Sans"/>
                 <a:ea typeface="Public Sans"/>
                 <a:cs typeface="Public Sans"/>
@@ -9568,7 +9971,7 @@
               </a:rPr>
               <a:t>&lt;&lt;Gardner 02&gt;&gt;</a:t>
             </a:r>
-            <a:endParaRPr b="1" sz="3000">
+            <a:endParaRPr sz="3000" b="1">
               <a:latin typeface="Public Sans"/>
               <a:ea typeface="Public Sans"/>
               <a:cs typeface="Public Sans"/>
@@ -9597,12 +10000,12 @@
           </a:ln>
         </p:spPr>
         <p:txBody>
-          <a:bodyPr anchorCtr="0" anchor="t" bIns="91425" lIns="91425" spcFirstLastPara="1" rIns="91425" wrap="square" tIns="91425">
+          <a:bodyPr spcFirstLastPara="1" wrap="square" lIns="91425" tIns="91425" rIns="91425" bIns="91425" anchor="t" anchorCtr="0">
             <a:noAutofit/>
           </a:bodyPr>
           <a:lstStyle/>
           <a:p>
-            <a:pPr indent="0" lvl="0" marL="0" rtl="0" algn="l">
+            <a:pPr marL="0" lvl="0" indent="0" algn="l" rtl="0">
               <a:spcBef>
                 <a:spcPts val="0"/>
               </a:spcBef>
@@ -9649,12 +10052,12 @@
           </a:ln>
         </p:spPr>
         <p:txBody>
-          <a:bodyPr anchorCtr="0" anchor="t" bIns="91425" lIns="91425" spcFirstLastPara="1" rIns="91425" wrap="square" tIns="91425">
+          <a:bodyPr spcFirstLastPara="1" wrap="square" lIns="91425" tIns="91425" rIns="91425" bIns="91425" anchor="t" anchorCtr="0">
             <a:spAutoFit/>
           </a:bodyPr>
           <a:lstStyle/>
           <a:p>
-            <a:pPr indent="0" lvl="0" marL="0" rtl="0" algn="ctr">
+            <a:pPr marL="0" lvl="0" indent="0" algn="ctr" rtl="0">
               <a:spcBef>
                 <a:spcPts val="0"/>
               </a:spcBef>
@@ -9664,7 +10067,7 @@
               <a:buNone/>
             </a:pPr>
             <a:r>
-              <a:rPr b="1" lang="en" sz="3000">
+              <a:rPr lang="en" sz="3000" b="1">
                 <a:solidFill>
                   <a:schemeClr val="dk1"/>
                 </a:solidFill>
@@ -9675,7 +10078,7 @@
               </a:rPr>
               <a:t>&lt;&lt;% Gardner 01&gt;&gt;</a:t>
             </a:r>
-            <a:endParaRPr b="1" sz="3000">
+            <a:endParaRPr sz="3000" b="1">
               <a:solidFill>
                 <a:schemeClr val="dk1"/>
               </a:solidFill>
@@ -9707,12 +10110,12 @@
           </a:ln>
         </p:spPr>
         <p:txBody>
-          <a:bodyPr anchorCtr="0" anchor="t" bIns="91425" lIns="91425" spcFirstLastPara="1" rIns="91425" wrap="square" tIns="91425">
+          <a:bodyPr spcFirstLastPara="1" wrap="square" lIns="91425" tIns="91425" rIns="91425" bIns="91425" anchor="t" anchorCtr="0">
             <a:spAutoFit/>
           </a:bodyPr>
           <a:lstStyle/>
           <a:p>
-            <a:pPr indent="0" lvl="0" marL="0" rtl="0" algn="l">
+            <a:pPr marL="0" lvl="0" indent="0" algn="l" rtl="0">
               <a:spcBef>
                 <a:spcPts val="0"/>
               </a:spcBef>
@@ -9722,7 +10125,7 @@
               <a:buNone/>
             </a:pPr>
             <a:r>
-              <a:rPr b="1" lang="en" sz="3000">
+              <a:rPr lang="en" sz="3000" b="1">
                 <a:latin typeface="Public Sans"/>
                 <a:ea typeface="Public Sans"/>
                 <a:cs typeface="Public Sans"/>
@@ -9730,7 +10133,7 @@
               </a:rPr>
               <a:t>&lt;&lt;Gardner 01&gt;&gt;</a:t>
             </a:r>
-            <a:endParaRPr b="1" sz="3000">
+            <a:endParaRPr sz="3000" b="1">
               <a:latin typeface="Public Sans"/>
               <a:ea typeface="Public Sans"/>
               <a:cs typeface="Public Sans"/>
@@ -9748,7 +10151,7 @@
 </file>
 
 <file path=ppt/slides/slide14.xml><?xml version="1.0" encoding="utf-8"?>
-<p:sld xmlns:a="http://schemas.openxmlformats.org/drawingml/2006/main" xmlns:r="http://schemas.openxmlformats.org/officeDocument/2006/relationships" xmlns:mc="http://schemas.openxmlformats.org/markup-compatibility/2006" xmlns:mv="urn:schemas-microsoft-com:mac:vml" xmlns:p="http://schemas.openxmlformats.org/presentationml/2006/main" xmlns:c="http://schemas.openxmlformats.org/drawingml/2006/chart" xmlns:dgm="http://schemas.openxmlformats.org/drawingml/2006/diagram" xmlns:o="urn:schemas-microsoft-com:office:office" xmlns:v="urn:schemas-microsoft-com:vml" xmlns:pvml="urn:schemas-microsoft-com:office:powerpoint" xmlns:com="http://schemas.openxmlformats.org/drawingml/2006/compatibility" xmlns:p14="http://schemas.microsoft.com/office/powerpoint/2010/main" xmlns:p15="http://schemas.microsoft.com/office/powerpoint/2012/main" xmlns:ahyp="http://schemas.microsoft.com/office/drawing/2018/hyperlinkcolor">
+<p:sld xmlns:a="http://schemas.openxmlformats.org/drawingml/2006/main" xmlns:r="http://schemas.openxmlformats.org/officeDocument/2006/relationships" xmlns:p="http://schemas.openxmlformats.org/presentationml/2006/main">
   <p:cSld>
     <p:bg>
       <p:bgPr>
@@ -9760,11 +10163,12 @@
             <a:fillRect/>
           </a:stretch>
         </a:blipFill>
+        <a:effectLst/>
       </p:bgPr>
     </p:bg>
     <p:spTree>
       <p:nvGrpSpPr>
-        <p:cNvPr id="175" name="Shape 175"/>
+        <p:cNvPr id="1" name="Shape 175"/>
         <p:cNvGrpSpPr/>
         <p:nvPr/>
       </p:nvGrpSpPr>
@@ -9796,12 +10200,12 @@
           </a:ln>
         </p:spPr>
         <p:txBody>
-          <a:bodyPr anchorCtr="0" anchor="t" bIns="91425" lIns="91425" spcFirstLastPara="1" rIns="91425" wrap="square" tIns="91425">
+          <a:bodyPr spcFirstLastPara="1" wrap="square" lIns="91425" tIns="91425" rIns="91425" bIns="91425" anchor="t" anchorCtr="0">
             <a:noAutofit/>
           </a:bodyPr>
           <a:lstStyle/>
           <a:p>
-            <a:pPr indent="0" lvl="0" marL="0" rtl="0" algn="l">
+            <a:pPr marL="0" lvl="0" indent="0" algn="l" rtl="0">
               <a:spcBef>
                 <a:spcPts val="0"/>
               </a:spcBef>
@@ -9848,12 +10252,12 @@
           </a:ln>
         </p:spPr>
         <p:txBody>
-          <a:bodyPr anchorCtr="0" anchor="t" bIns="91425" lIns="91425" spcFirstLastPara="1" rIns="91425" wrap="square" tIns="91425">
+          <a:bodyPr spcFirstLastPara="1" wrap="square" lIns="91425" tIns="91425" rIns="91425" bIns="91425" anchor="t" anchorCtr="0">
             <a:spAutoFit/>
           </a:bodyPr>
           <a:lstStyle/>
           <a:p>
-            <a:pPr indent="0" lvl="0" marL="0" rtl="0" algn="ctr">
+            <a:pPr marL="0" lvl="0" indent="0" algn="ctr" rtl="0">
               <a:spcBef>
                 <a:spcPts val="0"/>
               </a:spcBef>
@@ -9863,7 +10267,7 @@
               <a:buNone/>
             </a:pPr>
             <a:r>
-              <a:rPr b="1" lang="en" sz="3000">
+              <a:rPr lang="en" sz="3000" b="1">
                 <a:solidFill>
                   <a:schemeClr val="dk1"/>
                 </a:solidFill>
@@ -9874,7 +10278,7 @@
               </a:rPr>
               <a:t>&lt;&lt;% Gardner 04&gt;&gt;</a:t>
             </a:r>
-            <a:endParaRPr b="1" sz="3000">
+            <a:endParaRPr sz="3000" b="1">
               <a:solidFill>
                 <a:schemeClr val="dk1"/>
               </a:solidFill>
@@ -9906,12 +10310,12 @@
           </a:ln>
         </p:spPr>
         <p:txBody>
-          <a:bodyPr anchorCtr="0" anchor="t" bIns="91425" lIns="91425" spcFirstLastPara="1" rIns="91425" wrap="square" tIns="91425">
+          <a:bodyPr spcFirstLastPara="1" wrap="square" lIns="91425" tIns="91425" rIns="91425" bIns="91425" anchor="t" anchorCtr="0">
             <a:spAutoFit/>
           </a:bodyPr>
           <a:lstStyle/>
           <a:p>
-            <a:pPr indent="0" lvl="0" marL="0" rtl="0" algn="l">
+            <a:pPr marL="0" lvl="0" indent="0" algn="l" rtl="0">
               <a:spcBef>
                 <a:spcPts val="0"/>
               </a:spcBef>
@@ -9921,7 +10325,7 @@
               <a:buNone/>
             </a:pPr>
             <a:r>
-              <a:rPr b="1" lang="en" sz="3000">
+              <a:rPr lang="en" sz="3000" b="1">
                 <a:latin typeface="Public Sans"/>
                 <a:ea typeface="Public Sans"/>
                 <a:cs typeface="Public Sans"/>
@@ -9929,7 +10333,7 @@
               </a:rPr>
               <a:t>&lt;&lt;Gardner 04&gt;&gt;</a:t>
             </a:r>
-            <a:endParaRPr b="1" sz="3000">
+            <a:endParaRPr sz="3000" b="1">
               <a:latin typeface="Public Sans"/>
               <a:ea typeface="Public Sans"/>
               <a:cs typeface="Public Sans"/>
@@ -9958,12 +10362,12 @@
           </a:ln>
         </p:spPr>
         <p:txBody>
-          <a:bodyPr anchorCtr="0" anchor="t" bIns="91425" lIns="91425" spcFirstLastPara="1" rIns="91425" wrap="square" tIns="91425">
+          <a:bodyPr spcFirstLastPara="1" wrap="square" lIns="91425" tIns="91425" rIns="91425" bIns="91425" anchor="t" anchorCtr="0">
             <a:noAutofit/>
           </a:bodyPr>
           <a:lstStyle/>
           <a:p>
-            <a:pPr indent="0" lvl="0" marL="0" rtl="0" algn="l">
+            <a:pPr marL="0" lvl="0" indent="0" algn="l" rtl="0">
               <a:spcBef>
                 <a:spcPts val="0"/>
               </a:spcBef>
@@ -10010,12 +10414,12 @@
           </a:ln>
         </p:spPr>
         <p:txBody>
-          <a:bodyPr anchorCtr="0" anchor="t" bIns="91425" lIns="91425" spcFirstLastPara="1" rIns="91425" wrap="square" tIns="91425">
+          <a:bodyPr spcFirstLastPara="1" wrap="square" lIns="91425" tIns="91425" rIns="91425" bIns="91425" anchor="t" anchorCtr="0">
             <a:spAutoFit/>
           </a:bodyPr>
           <a:lstStyle/>
           <a:p>
-            <a:pPr indent="0" lvl="0" marL="0" rtl="0" algn="ctr">
+            <a:pPr marL="0" lvl="0" indent="0" algn="ctr" rtl="0">
               <a:spcBef>
                 <a:spcPts val="0"/>
               </a:spcBef>
@@ -10025,7 +10429,7 @@
               <a:buNone/>
             </a:pPr>
             <a:r>
-              <a:rPr b="1" lang="en" sz="3000">
+              <a:rPr lang="en" sz="3000" b="1">
                 <a:solidFill>
                   <a:schemeClr val="dk1"/>
                 </a:solidFill>
@@ -10036,7 +10440,7 @@
               </a:rPr>
               <a:t>&lt;&lt;% Gardner 03&gt;&gt;</a:t>
             </a:r>
-            <a:endParaRPr b="1" sz="3000">
+            <a:endParaRPr sz="3000" b="1">
               <a:solidFill>
                 <a:schemeClr val="dk1"/>
               </a:solidFill>
@@ -10068,12 +10472,12 @@
           </a:ln>
         </p:spPr>
         <p:txBody>
-          <a:bodyPr anchorCtr="0" anchor="t" bIns="91425" lIns="91425" spcFirstLastPara="1" rIns="91425" wrap="square" tIns="91425">
+          <a:bodyPr spcFirstLastPara="1" wrap="square" lIns="91425" tIns="91425" rIns="91425" bIns="91425" anchor="t" anchorCtr="0">
             <a:spAutoFit/>
           </a:bodyPr>
           <a:lstStyle/>
           <a:p>
-            <a:pPr indent="0" lvl="0" marL="0" rtl="0" algn="l">
+            <a:pPr marL="0" lvl="0" indent="0" algn="l" rtl="0">
               <a:spcBef>
                 <a:spcPts val="0"/>
               </a:spcBef>
@@ -10083,7 +10487,7 @@
               <a:buNone/>
             </a:pPr>
             <a:r>
-              <a:rPr b="1" lang="en" sz="3000">
+              <a:rPr lang="en" sz="3000" b="1">
                 <a:latin typeface="Public Sans"/>
                 <a:ea typeface="Public Sans"/>
                 <a:cs typeface="Public Sans"/>
@@ -10091,7 +10495,7 @@
               </a:rPr>
               <a:t>&lt;&lt;Gardner 03&gt;&gt;</a:t>
             </a:r>
-            <a:endParaRPr b="1" sz="3000">
+            <a:endParaRPr sz="3000" b="1">
               <a:latin typeface="Public Sans"/>
               <a:ea typeface="Public Sans"/>
               <a:cs typeface="Public Sans"/>
@@ -10109,7 +10513,7 @@
 </file>
 
 <file path=ppt/slides/slide15.xml><?xml version="1.0" encoding="utf-8"?>
-<p:sld xmlns:a="http://schemas.openxmlformats.org/drawingml/2006/main" xmlns:r="http://schemas.openxmlformats.org/officeDocument/2006/relationships" xmlns:mc="http://schemas.openxmlformats.org/markup-compatibility/2006" xmlns:mv="urn:schemas-microsoft-com:mac:vml" xmlns:p="http://schemas.openxmlformats.org/presentationml/2006/main" xmlns:c="http://schemas.openxmlformats.org/drawingml/2006/chart" xmlns:dgm="http://schemas.openxmlformats.org/drawingml/2006/diagram" xmlns:o="urn:schemas-microsoft-com:office:office" xmlns:v="urn:schemas-microsoft-com:vml" xmlns:pvml="urn:schemas-microsoft-com:office:powerpoint" xmlns:com="http://schemas.openxmlformats.org/drawingml/2006/compatibility" xmlns:p14="http://schemas.microsoft.com/office/powerpoint/2010/main" xmlns:p15="http://schemas.microsoft.com/office/powerpoint/2012/main" xmlns:ahyp="http://schemas.microsoft.com/office/drawing/2018/hyperlinkcolor">
+<p:sld xmlns:a="http://schemas.openxmlformats.org/drawingml/2006/main" xmlns:r="http://schemas.openxmlformats.org/officeDocument/2006/relationships" xmlns:p="http://schemas.openxmlformats.org/presentationml/2006/main">
   <p:cSld>
     <p:bg>
       <p:bgPr>
@@ -10121,11 +10525,12 @@
             <a:fillRect/>
           </a:stretch>
         </a:blipFill>
+        <a:effectLst/>
       </p:bgPr>
     </p:bg>
     <p:spTree>
       <p:nvGrpSpPr>
-        <p:cNvPr id="185" name="Shape 185"/>
+        <p:cNvPr id="1" name="Shape 185"/>
         <p:cNvGrpSpPr/>
         <p:nvPr/>
       </p:nvGrpSpPr>
@@ -10157,12 +10562,12 @@
           </a:ln>
         </p:spPr>
         <p:txBody>
-          <a:bodyPr anchorCtr="0" anchor="t" bIns="91425" lIns="91425" spcFirstLastPara="1" rIns="91425" wrap="square" tIns="91425">
+          <a:bodyPr spcFirstLastPara="1" wrap="square" lIns="91425" tIns="91425" rIns="91425" bIns="91425" anchor="t" anchorCtr="0">
             <a:noAutofit/>
           </a:bodyPr>
           <a:lstStyle/>
           <a:p>
-            <a:pPr indent="0" lvl="0" marL="0" rtl="0" algn="l">
+            <a:pPr marL="0" lvl="0" indent="0" algn="l" rtl="0">
               <a:spcBef>
                 <a:spcPts val="0"/>
               </a:spcBef>
@@ -10209,12 +10614,12 @@
           </a:ln>
         </p:spPr>
         <p:txBody>
-          <a:bodyPr anchorCtr="0" anchor="t" bIns="91425" lIns="91425" spcFirstLastPara="1" rIns="91425" wrap="square" tIns="91425">
+          <a:bodyPr spcFirstLastPara="1" wrap="square" lIns="91425" tIns="91425" rIns="91425" bIns="91425" anchor="t" anchorCtr="0">
             <a:spAutoFit/>
           </a:bodyPr>
           <a:lstStyle/>
           <a:p>
-            <a:pPr indent="0" lvl="0" marL="0" rtl="0" algn="ctr">
+            <a:pPr marL="0" lvl="0" indent="0" algn="ctr" rtl="0">
               <a:spcBef>
                 <a:spcPts val="0"/>
               </a:spcBef>
@@ -10224,7 +10629,7 @@
               <a:buNone/>
             </a:pPr>
             <a:r>
-              <a:rPr b="1" lang="en" sz="3000">
+              <a:rPr lang="en" sz="3000" b="1">
                 <a:solidFill>
                   <a:schemeClr val="dk1"/>
                 </a:solidFill>
@@ -10235,7 +10640,7 @@
               </a:rPr>
               <a:t>&lt;&lt;% Gardner 06&gt;&gt;</a:t>
             </a:r>
-            <a:endParaRPr b="1" sz="3000">
+            <a:endParaRPr sz="3000" b="1">
               <a:solidFill>
                 <a:schemeClr val="dk1"/>
               </a:solidFill>
@@ -10267,12 +10672,12 @@
           </a:ln>
         </p:spPr>
         <p:txBody>
-          <a:bodyPr anchorCtr="0" anchor="t" bIns="91425" lIns="91425" spcFirstLastPara="1" rIns="91425" wrap="square" tIns="91425">
+          <a:bodyPr spcFirstLastPara="1" wrap="square" lIns="91425" tIns="91425" rIns="91425" bIns="91425" anchor="t" anchorCtr="0">
             <a:spAutoFit/>
           </a:bodyPr>
           <a:lstStyle/>
           <a:p>
-            <a:pPr indent="0" lvl="0" marL="0" rtl="0" algn="l">
+            <a:pPr marL="0" lvl="0" indent="0" algn="l" rtl="0">
               <a:spcBef>
                 <a:spcPts val="0"/>
               </a:spcBef>
@@ -10282,7 +10687,7 @@
               <a:buNone/>
             </a:pPr>
             <a:r>
-              <a:rPr b="1" lang="en" sz="3000">
+              <a:rPr lang="en" sz="3000" b="1">
                 <a:latin typeface="Public Sans"/>
                 <a:ea typeface="Public Sans"/>
                 <a:cs typeface="Public Sans"/>
@@ -10290,7 +10695,7 @@
               </a:rPr>
               <a:t>&lt;&lt;Gardner 06&gt;&gt;</a:t>
             </a:r>
-            <a:endParaRPr b="1" sz="3000">
+            <a:endParaRPr sz="3000" b="1">
               <a:latin typeface="Public Sans"/>
               <a:ea typeface="Public Sans"/>
               <a:cs typeface="Public Sans"/>
@@ -10319,12 +10724,12 @@
           </a:ln>
         </p:spPr>
         <p:txBody>
-          <a:bodyPr anchorCtr="0" anchor="t" bIns="91425" lIns="91425" spcFirstLastPara="1" rIns="91425" wrap="square" tIns="91425">
+          <a:bodyPr spcFirstLastPara="1" wrap="square" lIns="91425" tIns="91425" rIns="91425" bIns="91425" anchor="t" anchorCtr="0">
             <a:noAutofit/>
           </a:bodyPr>
           <a:lstStyle/>
           <a:p>
-            <a:pPr indent="0" lvl="0" marL="0" rtl="0" algn="l">
+            <a:pPr marL="0" lvl="0" indent="0" algn="l" rtl="0">
               <a:spcBef>
                 <a:spcPts val="0"/>
               </a:spcBef>
@@ -10371,12 +10776,12 @@
           </a:ln>
         </p:spPr>
         <p:txBody>
-          <a:bodyPr anchorCtr="0" anchor="t" bIns="91425" lIns="91425" spcFirstLastPara="1" rIns="91425" wrap="square" tIns="91425">
+          <a:bodyPr spcFirstLastPara="1" wrap="square" lIns="91425" tIns="91425" rIns="91425" bIns="91425" anchor="t" anchorCtr="0">
             <a:spAutoFit/>
           </a:bodyPr>
           <a:lstStyle/>
           <a:p>
-            <a:pPr indent="0" lvl="0" marL="0" rtl="0" algn="ctr">
+            <a:pPr marL="0" lvl="0" indent="0" algn="ctr" rtl="0">
               <a:spcBef>
                 <a:spcPts val="0"/>
               </a:spcBef>
@@ -10386,7 +10791,7 @@
               <a:buNone/>
             </a:pPr>
             <a:r>
-              <a:rPr b="1" lang="en" sz="3000">
+              <a:rPr lang="en" sz="3000" b="1">
                 <a:solidFill>
                   <a:schemeClr val="dk1"/>
                 </a:solidFill>
@@ -10397,7 +10802,7 @@
               </a:rPr>
               <a:t>&lt;&lt;% Gardner 05&gt;&gt;</a:t>
             </a:r>
-            <a:endParaRPr b="1" sz="3000">
+            <a:endParaRPr sz="3000" b="1">
               <a:solidFill>
                 <a:schemeClr val="dk1"/>
               </a:solidFill>
@@ -10429,12 +10834,12 @@
           </a:ln>
         </p:spPr>
         <p:txBody>
-          <a:bodyPr anchorCtr="0" anchor="t" bIns="91425" lIns="91425" spcFirstLastPara="1" rIns="91425" wrap="square" tIns="91425">
+          <a:bodyPr spcFirstLastPara="1" wrap="square" lIns="91425" tIns="91425" rIns="91425" bIns="91425" anchor="t" anchorCtr="0">
             <a:spAutoFit/>
           </a:bodyPr>
           <a:lstStyle/>
           <a:p>
-            <a:pPr indent="0" lvl="0" marL="0" rtl="0" algn="l">
+            <a:pPr marL="0" lvl="0" indent="0" algn="l" rtl="0">
               <a:spcBef>
                 <a:spcPts val="0"/>
               </a:spcBef>
@@ -10444,7 +10849,7 @@
               <a:buNone/>
             </a:pPr>
             <a:r>
-              <a:rPr b="1" lang="en" sz="3000">
+              <a:rPr lang="en" sz="3000" b="1">
                 <a:latin typeface="Public Sans"/>
                 <a:ea typeface="Public Sans"/>
                 <a:cs typeface="Public Sans"/>
@@ -10452,7 +10857,7 @@
               </a:rPr>
               <a:t>&lt;&lt;Gardner 05&gt;&gt;</a:t>
             </a:r>
-            <a:endParaRPr b="1" sz="3000">
+            <a:endParaRPr sz="3000" b="1">
               <a:latin typeface="Public Sans"/>
               <a:ea typeface="Public Sans"/>
               <a:cs typeface="Public Sans"/>
@@ -10470,7 +10875,7 @@
 </file>
 
 <file path=ppt/slides/slide16.xml><?xml version="1.0" encoding="utf-8"?>
-<p:sld xmlns:a="http://schemas.openxmlformats.org/drawingml/2006/main" xmlns:r="http://schemas.openxmlformats.org/officeDocument/2006/relationships" xmlns:mc="http://schemas.openxmlformats.org/markup-compatibility/2006" xmlns:mv="urn:schemas-microsoft-com:mac:vml" xmlns:p="http://schemas.openxmlformats.org/presentationml/2006/main" xmlns:c="http://schemas.openxmlformats.org/drawingml/2006/chart" xmlns:dgm="http://schemas.openxmlformats.org/drawingml/2006/diagram" xmlns:o="urn:schemas-microsoft-com:office:office" xmlns:v="urn:schemas-microsoft-com:vml" xmlns:pvml="urn:schemas-microsoft-com:office:powerpoint" xmlns:com="http://schemas.openxmlformats.org/drawingml/2006/compatibility" xmlns:p14="http://schemas.microsoft.com/office/powerpoint/2010/main" xmlns:p15="http://schemas.microsoft.com/office/powerpoint/2012/main" xmlns:ahyp="http://schemas.microsoft.com/office/drawing/2018/hyperlinkcolor">
+<p:sld xmlns:a="http://schemas.openxmlformats.org/drawingml/2006/main" xmlns:r="http://schemas.openxmlformats.org/officeDocument/2006/relationships" xmlns:p="http://schemas.openxmlformats.org/presentationml/2006/main">
   <p:cSld>
     <p:bg>
       <p:bgPr>
@@ -10482,11 +10887,12 @@
             <a:fillRect/>
           </a:stretch>
         </a:blipFill>
+        <a:effectLst/>
       </p:bgPr>
     </p:bg>
     <p:spTree>
       <p:nvGrpSpPr>
-        <p:cNvPr id="195" name="Shape 195"/>
+        <p:cNvPr id="1" name="Shape 195"/>
         <p:cNvGrpSpPr/>
         <p:nvPr/>
       </p:nvGrpSpPr>
@@ -10518,12 +10924,12 @@
           </a:ln>
         </p:spPr>
         <p:txBody>
-          <a:bodyPr anchorCtr="0" anchor="t" bIns="91425" lIns="91425" spcFirstLastPara="1" rIns="91425" wrap="square" tIns="91425">
+          <a:bodyPr spcFirstLastPara="1" wrap="square" lIns="91425" tIns="91425" rIns="91425" bIns="91425" anchor="t" anchorCtr="0">
             <a:noAutofit/>
           </a:bodyPr>
           <a:lstStyle/>
           <a:p>
-            <a:pPr indent="0" lvl="0" marL="0" rtl="0" algn="l">
+            <a:pPr marL="0" lvl="0" indent="0" algn="l" rtl="0">
               <a:spcBef>
                 <a:spcPts val="0"/>
               </a:spcBef>
@@ -10570,12 +10976,12 @@
           </a:ln>
         </p:spPr>
         <p:txBody>
-          <a:bodyPr anchorCtr="0" anchor="t" bIns="91425" lIns="91425" spcFirstLastPara="1" rIns="91425" wrap="square" tIns="91425">
+          <a:bodyPr spcFirstLastPara="1" wrap="square" lIns="91425" tIns="91425" rIns="91425" bIns="91425" anchor="t" anchorCtr="0">
             <a:spAutoFit/>
           </a:bodyPr>
           <a:lstStyle/>
           <a:p>
-            <a:pPr indent="0" lvl="0" marL="0" rtl="0" algn="ctr">
+            <a:pPr marL="0" lvl="0" indent="0" algn="ctr" rtl="0">
               <a:spcBef>
                 <a:spcPts val="0"/>
               </a:spcBef>
@@ -10585,7 +10991,7 @@
               <a:buNone/>
             </a:pPr>
             <a:r>
-              <a:rPr b="1" lang="en" sz="3000">
+              <a:rPr lang="en" sz="3000" b="1">
                 <a:solidFill>
                   <a:schemeClr val="dk1"/>
                 </a:solidFill>
@@ -10596,7 +11002,7 @@
               </a:rPr>
               <a:t>&lt;&lt;% Gardner 08&gt;&gt;</a:t>
             </a:r>
-            <a:endParaRPr b="1" sz="3000">
+            <a:endParaRPr sz="3000" b="1">
               <a:solidFill>
                 <a:schemeClr val="dk1"/>
               </a:solidFill>
@@ -10628,12 +11034,12 @@
           </a:ln>
         </p:spPr>
         <p:txBody>
-          <a:bodyPr anchorCtr="0" anchor="t" bIns="91425" lIns="91425" spcFirstLastPara="1" rIns="91425" wrap="square" tIns="91425">
+          <a:bodyPr spcFirstLastPara="1" wrap="square" lIns="91425" tIns="91425" rIns="91425" bIns="91425" anchor="t" anchorCtr="0">
             <a:spAutoFit/>
           </a:bodyPr>
           <a:lstStyle/>
           <a:p>
-            <a:pPr indent="0" lvl="0" marL="0" rtl="0" algn="l">
+            <a:pPr marL="0" lvl="0" indent="0" algn="l" rtl="0">
               <a:spcBef>
                 <a:spcPts val="0"/>
               </a:spcBef>
@@ -10643,7 +11049,7 @@
               <a:buNone/>
             </a:pPr>
             <a:r>
-              <a:rPr b="1" lang="en" sz="3000">
+              <a:rPr lang="en" sz="3000" b="1">
                 <a:latin typeface="Public Sans"/>
                 <a:ea typeface="Public Sans"/>
                 <a:cs typeface="Public Sans"/>
@@ -10651,7 +11057,7 @@
               </a:rPr>
               <a:t>&lt;&lt;Gardner 08&gt;&gt;</a:t>
             </a:r>
-            <a:endParaRPr b="1" sz="3000">
+            <a:endParaRPr sz="3000" b="1">
               <a:latin typeface="Public Sans"/>
               <a:ea typeface="Public Sans"/>
               <a:cs typeface="Public Sans"/>
@@ -10680,12 +11086,12 @@
           </a:ln>
         </p:spPr>
         <p:txBody>
-          <a:bodyPr anchorCtr="0" anchor="t" bIns="91425" lIns="91425" spcFirstLastPara="1" rIns="91425" wrap="square" tIns="91425">
+          <a:bodyPr spcFirstLastPara="1" wrap="square" lIns="91425" tIns="91425" rIns="91425" bIns="91425" anchor="t" anchorCtr="0">
             <a:noAutofit/>
           </a:bodyPr>
           <a:lstStyle/>
           <a:p>
-            <a:pPr indent="0" lvl="0" marL="0" rtl="0" algn="l">
+            <a:pPr marL="0" lvl="0" indent="0" algn="l" rtl="0">
               <a:spcBef>
                 <a:spcPts val="0"/>
               </a:spcBef>
@@ -10732,12 +11138,12 @@
           </a:ln>
         </p:spPr>
         <p:txBody>
-          <a:bodyPr anchorCtr="0" anchor="t" bIns="91425" lIns="91425" spcFirstLastPara="1" rIns="91425" wrap="square" tIns="91425">
+          <a:bodyPr spcFirstLastPara="1" wrap="square" lIns="91425" tIns="91425" rIns="91425" bIns="91425" anchor="t" anchorCtr="0">
             <a:spAutoFit/>
           </a:bodyPr>
           <a:lstStyle/>
           <a:p>
-            <a:pPr indent="0" lvl="0" marL="0" rtl="0" algn="ctr">
+            <a:pPr marL="0" lvl="0" indent="0" algn="ctr" rtl="0">
               <a:spcBef>
                 <a:spcPts val="0"/>
               </a:spcBef>
@@ -10747,7 +11153,7 @@
               <a:buNone/>
             </a:pPr>
             <a:r>
-              <a:rPr b="1" lang="en" sz="3000">
+              <a:rPr lang="en" sz="3000" b="1">
                 <a:solidFill>
                   <a:schemeClr val="dk1"/>
                 </a:solidFill>
@@ -10758,7 +11164,7 @@
               </a:rPr>
               <a:t>&lt;&lt;% Gardner 07&gt;&gt;</a:t>
             </a:r>
-            <a:endParaRPr b="1" sz="3000">
+            <a:endParaRPr sz="3000" b="1">
               <a:solidFill>
                 <a:schemeClr val="dk1"/>
               </a:solidFill>
@@ -10790,12 +11196,12 @@
           </a:ln>
         </p:spPr>
         <p:txBody>
-          <a:bodyPr anchorCtr="0" anchor="t" bIns="91425" lIns="91425" spcFirstLastPara="1" rIns="91425" wrap="square" tIns="91425">
+          <a:bodyPr spcFirstLastPara="1" wrap="square" lIns="91425" tIns="91425" rIns="91425" bIns="91425" anchor="t" anchorCtr="0">
             <a:spAutoFit/>
           </a:bodyPr>
           <a:lstStyle/>
           <a:p>
-            <a:pPr indent="0" lvl="0" marL="0" rtl="0" algn="l">
+            <a:pPr marL="0" lvl="0" indent="0" algn="l" rtl="0">
               <a:spcBef>
                 <a:spcPts val="0"/>
               </a:spcBef>
@@ -10805,7 +11211,7 @@
               <a:buNone/>
             </a:pPr>
             <a:r>
-              <a:rPr b="1" lang="en" sz="3000">
+              <a:rPr lang="en" sz="3000" b="1">
                 <a:latin typeface="Public Sans"/>
                 <a:ea typeface="Public Sans"/>
                 <a:cs typeface="Public Sans"/>
@@ -10813,7 +11219,7 @@
               </a:rPr>
               <a:t>&lt;&lt;Gardner 07&gt;&gt;</a:t>
             </a:r>
-            <a:endParaRPr b="1" sz="3000">
+            <a:endParaRPr sz="3000" b="1">
               <a:latin typeface="Public Sans"/>
               <a:ea typeface="Public Sans"/>
               <a:cs typeface="Public Sans"/>
@@ -10831,7 +11237,7 @@
 </file>
 
 <file path=ppt/slides/slide17.xml><?xml version="1.0" encoding="utf-8"?>
-<p:sld xmlns:a="http://schemas.openxmlformats.org/drawingml/2006/main" xmlns:r="http://schemas.openxmlformats.org/officeDocument/2006/relationships" xmlns:mc="http://schemas.openxmlformats.org/markup-compatibility/2006" xmlns:mv="urn:schemas-microsoft-com:mac:vml" xmlns:p="http://schemas.openxmlformats.org/presentationml/2006/main" xmlns:c="http://schemas.openxmlformats.org/drawingml/2006/chart" xmlns:dgm="http://schemas.openxmlformats.org/drawingml/2006/diagram" xmlns:o="urn:schemas-microsoft-com:office:office" xmlns:v="urn:schemas-microsoft-com:vml" xmlns:pvml="urn:schemas-microsoft-com:office:powerpoint" xmlns:com="http://schemas.openxmlformats.org/drawingml/2006/compatibility" xmlns:p14="http://schemas.microsoft.com/office/powerpoint/2010/main" xmlns:p15="http://schemas.microsoft.com/office/powerpoint/2012/main" xmlns:ahyp="http://schemas.microsoft.com/office/drawing/2018/hyperlinkcolor">
+<p:sld xmlns:a="http://schemas.openxmlformats.org/drawingml/2006/main" xmlns:r="http://schemas.openxmlformats.org/officeDocument/2006/relationships" xmlns:p="http://schemas.openxmlformats.org/presentationml/2006/main">
   <p:cSld>
     <p:bg>
       <p:bgPr>
@@ -10843,11 +11249,12 @@
             <a:fillRect/>
           </a:stretch>
         </a:blipFill>
+        <a:effectLst/>
       </p:bgPr>
     </p:bg>
     <p:spTree>
       <p:nvGrpSpPr>
-        <p:cNvPr id="205" name="Shape 205"/>
+        <p:cNvPr id="1" name="Shape 205"/>
         <p:cNvGrpSpPr/>
         <p:nvPr/>
       </p:nvGrpSpPr>
@@ -10868,7 +11275,7 @@
 </file>
 
 <file path=ppt/slides/slide18.xml><?xml version="1.0" encoding="utf-8"?>
-<p:sld xmlns:a="http://schemas.openxmlformats.org/drawingml/2006/main" xmlns:r="http://schemas.openxmlformats.org/officeDocument/2006/relationships" xmlns:mc="http://schemas.openxmlformats.org/markup-compatibility/2006" xmlns:mv="urn:schemas-microsoft-com:mac:vml" xmlns:p="http://schemas.openxmlformats.org/presentationml/2006/main" xmlns:c="http://schemas.openxmlformats.org/drawingml/2006/chart" xmlns:dgm="http://schemas.openxmlformats.org/drawingml/2006/diagram" xmlns:o="urn:schemas-microsoft-com:office:office" xmlns:v="urn:schemas-microsoft-com:vml" xmlns:pvml="urn:schemas-microsoft-com:office:powerpoint" xmlns:com="http://schemas.openxmlformats.org/drawingml/2006/compatibility" xmlns:p14="http://schemas.microsoft.com/office/powerpoint/2010/main" xmlns:p15="http://schemas.microsoft.com/office/powerpoint/2012/main" xmlns:ahyp="http://schemas.microsoft.com/office/drawing/2018/hyperlinkcolor">
+<p:sld xmlns:a="http://schemas.openxmlformats.org/drawingml/2006/main" xmlns:r="http://schemas.openxmlformats.org/officeDocument/2006/relationships" xmlns:p="http://schemas.openxmlformats.org/presentationml/2006/main">
   <p:cSld>
     <p:bg>
       <p:bgPr>
@@ -10880,11 +11287,12 @@
             <a:fillRect/>
           </a:stretch>
         </a:blipFill>
+        <a:effectLst/>
       </p:bgPr>
     </p:bg>
     <p:spTree>
       <p:nvGrpSpPr>
-        <p:cNvPr id="209" name="Shape 209"/>
+        <p:cNvPr id="1" name="Shape 209"/>
         <p:cNvGrpSpPr/>
         <p:nvPr/>
       </p:nvGrpSpPr>
@@ -10916,12 +11324,12 @@
           </a:ln>
         </p:spPr>
         <p:txBody>
-          <a:bodyPr anchorCtr="0" anchor="t" bIns="91425" lIns="91425" spcFirstLastPara="1" rIns="91425" wrap="square" tIns="91425">
+          <a:bodyPr spcFirstLastPara="1" wrap="square" lIns="91425" tIns="91425" rIns="91425" bIns="91425" anchor="t" anchorCtr="0">
             <a:spAutoFit/>
           </a:bodyPr>
           <a:lstStyle/>
           <a:p>
-            <a:pPr indent="0" lvl="0" marL="0" rtl="0" algn="l">
+            <a:pPr marL="0" lvl="0" indent="0" algn="l" rtl="0">
               <a:spcBef>
                 <a:spcPts val="0"/>
               </a:spcBef>
@@ -10931,7 +11339,7 @@
               <a:buNone/>
             </a:pPr>
             <a:r>
-              <a:rPr i="1" lang="en" sz="1800">
+              <a:rPr lang="en" sz="1800" i="1">
                 <a:latin typeface="Public Sans"/>
                 <a:ea typeface="Public Sans"/>
                 <a:cs typeface="Public Sans"/>
@@ -10939,7 +11347,7 @@
               </a:rPr>
               <a:t>&lt;&lt;AE Carrera 04&gt;&gt;</a:t>
             </a:r>
-            <a:endParaRPr i="1" sz="1800">
+            <a:endParaRPr sz="1800" i="1">
               <a:latin typeface="Public Sans"/>
               <a:ea typeface="Public Sans"/>
               <a:cs typeface="Public Sans"/>
@@ -10968,12 +11376,12 @@
           </a:ln>
         </p:spPr>
         <p:txBody>
-          <a:bodyPr anchorCtr="0" anchor="t" bIns="91425" lIns="91425" spcFirstLastPara="1" rIns="91425" wrap="square" tIns="91425">
+          <a:bodyPr spcFirstLastPara="1" wrap="square" lIns="91425" tIns="91425" rIns="91425" bIns="91425" anchor="t" anchorCtr="0">
             <a:spAutoFit/>
           </a:bodyPr>
           <a:lstStyle/>
           <a:p>
-            <a:pPr indent="0" lvl="0" marL="0" rtl="0" algn="l">
+            <a:pPr marL="0" lvl="0" indent="0" algn="l" rtl="0">
               <a:spcBef>
                 <a:spcPts val="0"/>
               </a:spcBef>
@@ -10983,7 +11391,7 @@
               <a:buNone/>
             </a:pPr>
             <a:r>
-              <a:rPr i="1" lang="en" sz="1800">
+              <a:rPr lang="en" sz="1800" i="1">
                 <a:latin typeface="Public Sans"/>
                 <a:ea typeface="Public Sans"/>
                 <a:cs typeface="Public Sans"/>
@@ -10991,7 +11399,7 @@
               </a:rPr>
               <a:t>&lt;&lt;AE Carrera 03&gt;&gt;</a:t>
             </a:r>
-            <a:endParaRPr i="1" sz="1800">
+            <a:endParaRPr sz="1800" i="1">
               <a:latin typeface="Public Sans"/>
               <a:ea typeface="Public Sans"/>
               <a:cs typeface="Public Sans"/>
@@ -11020,12 +11428,12 @@
           </a:ln>
         </p:spPr>
         <p:txBody>
-          <a:bodyPr anchorCtr="0" anchor="t" bIns="91425" lIns="91425" spcFirstLastPara="1" rIns="91425" wrap="square" tIns="91425">
+          <a:bodyPr spcFirstLastPara="1" wrap="square" lIns="91425" tIns="91425" rIns="91425" bIns="91425" anchor="t" anchorCtr="0">
             <a:spAutoFit/>
           </a:bodyPr>
           <a:lstStyle/>
           <a:p>
-            <a:pPr indent="0" lvl="0" marL="0" rtl="0" algn="l">
+            <a:pPr marL="0" lvl="0" indent="0" algn="l" rtl="0">
               <a:spcBef>
                 <a:spcPts val="0"/>
               </a:spcBef>
@@ -11035,7 +11443,7 @@
               <a:buNone/>
             </a:pPr>
             <a:r>
-              <a:rPr i="1" lang="en" sz="1800">
+              <a:rPr lang="en" sz="1800" i="1">
                 <a:latin typeface="Public Sans"/>
                 <a:ea typeface="Public Sans"/>
                 <a:cs typeface="Public Sans"/>
@@ -11043,7 +11451,7 @@
               </a:rPr>
               <a:t>&lt;&lt;AE Carrera 02&gt;&gt;</a:t>
             </a:r>
-            <a:endParaRPr i="1" sz="1800">
+            <a:endParaRPr sz="1800" i="1">
               <a:latin typeface="Public Sans"/>
               <a:ea typeface="Public Sans"/>
               <a:cs typeface="Public Sans"/>
@@ -11072,12 +11480,12 @@
           </a:ln>
         </p:spPr>
         <p:txBody>
-          <a:bodyPr anchorCtr="0" anchor="t" bIns="91425" lIns="91425" spcFirstLastPara="1" rIns="91425" wrap="square" tIns="91425">
+          <a:bodyPr spcFirstLastPara="1" wrap="square" lIns="91425" tIns="91425" rIns="91425" bIns="91425" anchor="t" anchorCtr="0">
             <a:spAutoFit/>
           </a:bodyPr>
           <a:lstStyle/>
           <a:p>
-            <a:pPr indent="0" lvl="0" marL="0" rtl="0" algn="l">
+            <a:pPr marL="0" lvl="0" indent="0" algn="l" rtl="0">
               <a:spcBef>
                 <a:spcPts val="0"/>
               </a:spcBef>
@@ -11087,7 +11495,7 @@
               <a:buNone/>
             </a:pPr>
             <a:r>
-              <a:rPr i="1" lang="en" sz="1800">
+              <a:rPr lang="en" sz="1800" i="1">
                 <a:latin typeface="Public Sans"/>
                 <a:ea typeface="Public Sans"/>
                 <a:cs typeface="Public Sans"/>
@@ -11095,7 +11503,7 @@
               </a:rPr>
               <a:t>&lt;&lt;AE Carrera 01&gt;&gt;</a:t>
             </a:r>
-            <a:endParaRPr i="1" sz="1800">
+            <a:endParaRPr sz="1800" i="1">
               <a:latin typeface="Public Sans"/>
               <a:ea typeface="Public Sans"/>
               <a:cs typeface="Public Sans"/>
@@ -11113,7 +11521,7 @@
         <p:spPr>
           <a:xfrm>
             <a:off x="1115700" y="12133775"/>
-            <a:ext cx="8055600" cy="569400"/>
+            <a:ext cx="8055600" cy="569356"/>
           </a:xfrm>
           <a:prstGeom prst="rect">
             <a:avLst/>
@@ -11124,12 +11532,12 @@
           </a:ln>
         </p:spPr>
         <p:txBody>
-          <a:bodyPr anchorCtr="0" anchor="t" bIns="91425" lIns="91425" spcFirstLastPara="1" rIns="91425" wrap="square" tIns="91425">
+          <a:bodyPr spcFirstLastPara="1" wrap="square" lIns="91425" tIns="91425" rIns="91425" bIns="91425" anchor="t" anchorCtr="0">
             <a:spAutoFit/>
           </a:bodyPr>
           <a:lstStyle/>
           <a:p>
-            <a:pPr indent="0" lvl="0" marL="0" rtl="0" algn="ctr">
+            <a:pPr marL="0" lvl="0" indent="0" algn="ctr" rtl="0">
               <a:spcBef>
                 <a:spcPts val="0"/>
               </a:spcBef>
@@ -11139,7 +11547,7 @@
               <a:buNone/>
             </a:pPr>
             <a:r>
-              <a:rPr b="1" lang="en" sz="2500">
+              <a:rPr lang="en" sz="2500" b="1">
                 <a:latin typeface="Public Sans"/>
                 <a:ea typeface="Public Sans"/>
                 <a:cs typeface="Public Sans"/>
@@ -11147,7 +11555,7 @@
               </a:rPr>
               <a:t>&lt;&lt;Carrera 04&gt;&gt;</a:t>
             </a:r>
-            <a:endParaRPr b="1" sz="2500">
+            <a:endParaRPr sz="2500" b="1">
               <a:latin typeface="Public Sans"/>
               <a:ea typeface="Public Sans"/>
               <a:cs typeface="Public Sans"/>
@@ -11165,7 +11573,7 @@
         <p:spPr>
           <a:xfrm>
             <a:off x="1089450" y="9771575"/>
-            <a:ext cx="8055600" cy="569400"/>
+            <a:ext cx="8055600" cy="569356"/>
           </a:xfrm>
           <a:prstGeom prst="rect">
             <a:avLst/>
@@ -11176,12 +11584,12 @@
           </a:ln>
         </p:spPr>
         <p:txBody>
-          <a:bodyPr anchorCtr="0" anchor="t" bIns="91425" lIns="91425" spcFirstLastPara="1" rIns="91425" wrap="square" tIns="91425">
+          <a:bodyPr spcFirstLastPara="1" wrap="square" lIns="91425" tIns="91425" rIns="91425" bIns="91425" anchor="t" anchorCtr="0">
             <a:spAutoFit/>
           </a:bodyPr>
           <a:lstStyle/>
           <a:p>
-            <a:pPr indent="0" lvl="0" marL="0" rtl="0" algn="ctr">
+            <a:pPr marL="0" lvl="0" indent="0" algn="ctr" rtl="0">
               <a:spcBef>
                 <a:spcPts val="0"/>
               </a:spcBef>
@@ -11191,7 +11599,7 @@
               <a:buNone/>
             </a:pPr>
             <a:r>
-              <a:rPr b="1" lang="en" sz="2500">
+              <a:rPr lang="en" sz="2500" b="1">
                 <a:latin typeface="Public Sans"/>
                 <a:ea typeface="Public Sans"/>
                 <a:cs typeface="Public Sans"/>
@@ -11199,7 +11607,7 @@
               </a:rPr>
               <a:t>&lt;&lt;Carrera 03&gt;&gt;</a:t>
             </a:r>
-            <a:endParaRPr b="1" sz="2500">
+            <a:endParaRPr sz="2500" b="1">
               <a:latin typeface="Public Sans"/>
               <a:ea typeface="Public Sans"/>
               <a:cs typeface="Public Sans"/>
@@ -11217,7 +11625,7 @@
         <p:spPr>
           <a:xfrm>
             <a:off x="1115700" y="7409375"/>
-            <a:ext cx="8055600" cy="569400"/>
+            <a:ext cx="8055600" cy="569356"/>
           </a:xfrm>
           <a:prstGeom prst="rect">
             <a:avLst/>
@@ -11228,12 +11636,12 @@
           </a:ln>
         </p:spPr>
         <p:txBody>
-          <a:bodyPr anchorCtr="0" anchor="t" bIns="91425" lIns="91425" spcFirstLastPara="1" rIns="91425" wrap="square" tIns="91425">
+          <a:bodyPr spcFirstLastPara="1" wrap="square" lIns="91425" tIns="91425" rIns="91425" bIns="91425" anchor="t" anchorCtr="0">
             <a:spAutoFit/>
           </a:bodyPr>
           <a:lstStyle/>
           <a:p>
-            <a:pPr indent="0" lvl="0" marL="0" rtl="0" algn="ctr">
+            <a:pPr marL="0" lvl="0" indent="0" algn="ctr" rtl="0">
               <a:spcBef>
                 <a:spcPts val="0"/>
               </a:spcBef>
@@ -11243,7 +11651,7 @@
               <a:buNone/>
             </a:pPr>
             <a:r>
-              <a:rPr b="1" lang="en" sz="2500">
+              <a:rPr lang="en" sz="2500" b="1">
                 <a:latin typeface="Public Sans"/>
                 <a:ea typeface="Public Sans"/>
                 <a:cs typeface="Public Sans"/>
@@ -11251,7 +11659,7 @@
               </a:rPr>
               <a:t>&lt;&lt;Carrera 02&gt;&gt;</a:t>
             </a:r>
-            <a:endParaRPr b="1" sz="2500">
+            <a:endParaRPr sz="2500" b="1">
               <a:latin typeface="Public Sans"/>
               <a:ea typeface="Public Sans"/>
               <a:cs typeface="Public Sans"/>
@@ -11269,7 +11677,7 @@
         <p:spPr>
           <a:xfrm>
             <a:off x="1089450" y="5038925"/>
-            <a:ext cx="8055600" cy="569400"/>
+            <a:ext cx="8055600" cy="569356"/>
           </a:xfrm>
           <a:prstGeom prst="rect">
             <a:avLst/>
@@ -11280,12 +11688,12 @@
           </a:ln>
         </p:spPr>
         <p:txBody>
-          <a:bodyPr anchorCtr="0" anchor="t" bIns="91425" lIns="91425" spcFirstLastPara="1" rIns="91425" wrap="square" tIns="91425">
+          <a:bodyPr spcFirstLastPara="1" wrap="square" lIns="91425" tIns="91425" rIns="91425" bIns="91425" anchor="t" anchorCtr="0">
             <a:spAutoFit/>
           </a:bodyPr>
           <a:lstStyle/>
           <a:p>
-            <a:pPr indent="0" lvl="0" marL="0" rtl="0" algn="ctr">
+            <a:pPr marL="0" lvl="0" indent="0" algn="ctr" rtl="0">
               <a:spcBef>
                 <a:spcPts val="0"/>
               </a:spcBef>
@@ -11295,7 +11703,7 @@
               <a:buNone/>
             </a:pPr>
             <a:r>
-              <a:rPr b="1" lang="en" sz="2500">
+              <a:rPr lang="en" sz="2500" b="1">
                 <a:latin typeface="Public Sans"/>
                 <a:ea typeface="Public Sans"/>
                 <a:cs typeface="Public Sans"/>
@@ -11303,7 +11711,7 @@
               </a:rPr>
               <a:t>&lt;&lt;Carrera 01&gt;&gt;</a:t>
             </a:r>
-            <a:endParaRPr b="1" sz="2500">
+            <a:endParaRPr sz="2500" b="1">
               <a:latin typeface="Public Sans"/>
               <a:ea typeface="Public Sans"/>
               <a:cs typeface="Public Sans"/>
@@ -11332,12 +11740,12 @@
           </a:ln>
         </p:spPr>
         <p:txBody>
-          <a:bodyPr anchorCtr="0" anchor="t" bIns="91425" lIns="91425" spcFirstLastPara="1" rIns="91425" wrap="square" tIns="91425">
+          <a:bodyPr spcFirstLastPara="1" wrap="square" lIns="91425" tIns="91425" rIns="91425" bIns="91425" anchor="t" anchorCtr="0">
             <a:normAutofit/>
           </a:bodyPr>
           <a:lstStyle/>
           <a:p>
-            <a:pPr indent="0" lvl="0" marL="0" rtl="0" algn="l">
+            <a:pPr marL="0" lvl="0" indent="0" algn="l" rtl="0">
               <a:lnSpc>
                 <a:spcPct val="115000"/>
               </a:lnSpc>
@@ -11362,7 +11770,7 @@
               <a:t>Considerando los intereses, estilo de vida deseado, características de personalidad y aptitudes presentadas anteriormente, se le recomienda a </a:t>
             </a:r>
             <a:r>
-              <a:rPr b="1" lang="en" sz="2600">
+              <a:rPr lang="en" sz="2600" b="1">
                 <a:solidFill>
                   <a:schemeClr val="dk1"/>
                 </a:solidFill>
@@ -11418,7 +11826,7 @@
 </file>
 
 <file path=ppt/slides/slide19.xml><?xml version="1.0" encoding="utf-8"?>
-<p:sld xmlns:a="http://schemas.openxmlformats.org/drawingml/2006/main" xmlns:r="http://schemas.openxmlformats.org/officeDocument/2006/relationships" xmlns:mc="http://schemas.openxmlformats.org/markup-compatibility/2006" xmlns:mv="urn:schemas-microsoft-com:mac:vml" xmlns:p="http://schemas.openxmlformats.org/presentationml/2006/main" xmlns:c="http://schemas.openxmlformats.org/drawingml/2006/chart" xmlns:dgm="http://schemas.openxmlformats.org/drawingml/2006/diagram" xmlns:o="urn:schemas-microsoft-com:office:office" xmlns:v="urn:schemas-microsoft-com:vml" xmlns:pvml="urn:schemas-microsoft-com:office:powerpoint" xmlns:com="http://schemas.openxmlformats.org/drawingml/2006/compatibility" xmlns:p14="http://schemas.microsoft.com/office/powerpoint/2010/main" xmlns:p15="http://schemas.microsoft.com/office/powerpoint/2012/main" xmlns:ahyp="http://schemas.microsoft.com/office/drawing/2018/hyperlinkcolor">
+<p:sld xmlns:a="http://schemas.openxmlformats.org/drawingml/2006/main" xmlns:r="http://schemas.openxmlformats.org/officeDocument/2006/relationships" xmlns:p="http://schemas.openxmlformats.org/presentationml/2006/main">
   <p:cSld>
     <p:bg>
       <p:bgPr>
@@ -11430,11 +11838,12 @@
             <a:fillRect/>
           </a:stretch>
         </a:blipFill>
+        <a:effectLst/>
       </p:bgPr>
     </p:bg>
     <p:spTree>
       <p:nvGrpSpPr>
-        <p:cNvPr id="222" name="Shape 222"/>
+        <p:cNvPr id="1" name="Shape 222"/>
         <p:cNvGrpSpPr/>
         <p:nvPr/>
       </p:nvGrpSpPr>
@@ -11466,12 +11875,12 @@
           </a:ln>
         </p:spPr>
         <p:txBody>
-          <a:bodyPr anchorCtr="0" anchor="ctr" bIns="91425" lIns="91425" spcFirstLastPara="1" rIns="91425" wrap="square" tIns="91425">
+          <a:bodyPr spcFirstLastPara="1" wrap="square" lIns="91425" tIns="91425" rIns="91425" bIns="91425" anchor="ctr" anchorCtr="0">
             <a:noAutofit/>
           </a:bodyPr>
           <a:lstStyle/>
           <a:p>
-            <a:pPr indent="0" lvl="0" marL="0" rtl="0" algn="ctr">
+            <a:pPr marL="0" lvl="0" indent="0" algn="ctr" rtl="0">
               <a:spcBef>
                 <a:spcPts val="0"/>
               </a:spcBef>
@@ -11481,7 +11890,7 @@
               <a:buNone/>
             </a:pPr>
             <a:r>
-              <a:rPr b="1" lang="en" sz="3500">
+              <a:rPr lang="en" sz="2800" b="1">
                 <a:solidFill>
                   <a:schemeClr val="dk1"/>
                 </a:solidFill>
@@ -11492,7 +11901,7 @@
               </a:rPr>
               <a:t>&lt;&lt;Carrera 01&gt;&gt;</a:t>
             </a:r>
-            <a:endParaRPr b="1" sz="3500">
+            <a:endParaRPr sz="2800" b="1">
               <a:solidFill>
                 <a:schemeClr val="dk1"/>
               </a:solidFill>
@@ -11524,12 +11933,12 @@
           </a:ln>
         </p:spPr>
         <p:txBody>
-          <a:bodyPr anchorCtr="0" anchor="t" bIns="91425" lIns="91425" spcFirstLastPara="1" rIns="91425" wrap="square" tIns="91425">
+          <a:bodyPr spcFirstLastPara="1" wrap="square" lIns="91425" tIns="91425" rIns="91425" bIns="91425" anchor="t" anchorCtr="0">
             <a:spAutoFit/>
           </a:bodyPr>
           <a:lstStyle/>
           <a:p>
-            <a:pPr indent="0" lvl="0" marL="0" rtl="0" algn="l">
+            <a:pPr marL="0" lvl="0" indent="0" algn="l" rtl="0">
               <a:spcBef>
                 <a:spcPts val="0"/>
               </a:spcBef>
@@ -11539,7 +11948,7 @@
               <a:buNone/>
             </a:pPr>
             <a:r>
-              <a:rPr i="1" lang="en" sz="2000">
+              <a:rPr lang="en" sz="2000" i="1">
                 <a:solidFill>
                   <a:schemeClr val="dk1"/>
                 </a:solidFill>
@@ -11550,7 +11959,7 @@
               </a:rPr>
               <a:t>&lt;&lt;AE Carrera 01&gt;&gt;</a:t>
             </a:r>
-            <a:endParaRPr i="1" sz="2000">
+            <a:endParaRPr sz="2000" i="1">
               <a:solidFill>
                 <a:schemeClr val="dk1"/>
               </a:solidFill>
@@ -11582,12 +11991,12 @@
           </a:ln>
         </p:spPr>
         <p:txBody>
-          <a:bodyPr anchorCtr="0" anchor="t" bIns="91425" lIns="91425" spcFirstLastPara="1" rIns="91425" wrap="square" tIns="91425">
+          <a:bodyPr spcFirstLastPara="1" wrap="square" lIns="91425" tIns="91425" rIns="91425" bIns="91425" anchor="t" anchorCtr="0">
             <a:noAutofit/>
           </a:bodyPr>
           <a:lstStyle/>
           <a:p>
-            <a:pPr indent="0" lvl="0" marL="0" rtl="0" algn="l">
+            <a:pPr marL="0" lvl="0" indent="0" algn="l" rtl="0">
               <a:lnSpc>
                 <a:spcPct val="115000"/>
               </a:lnSpc>
@@ -11643,12 +12052,12 @@
           </a:ln>
         </p:spPr>
         <p:txBody>
-          <a:bodyPr anchorCtr="0" anchor="t" bIns="91425" lIns="91425" spcFirstLastPara="1" rIns="91425" wrap="square" tIns="91425">
+          <a:bodyPr spcFirstLastPara="1" wrap="square" lIns="91425" tIns="91425" rIns="91425" bIns="91425" anchor="t" anchorCtr="0">
             <a:noAutofit/>
           </a:bodyPr>
           <a:lstStyle/>
           <a:p>
-            <a:pPr indent="0" lvl="0" marL="0" rtl="0" algn="l">
+            <a:pPr marL="0" lvl="0" indent="0" algn="l" rtl="0">
               <a:lnSpc>
                 <a:spcPct val="115000"/>
               </a:lnSpc>
@@ -11693,7 +12102,7 @@
 </file>
 
 <file path=ppt/slides/slide2.xml><?xml version="1.0" encoding="utf-8"?>
-<p:sld xmlns:a="http://schemas.openxmlformats.org/drawingml/2006/main" xmlns:r="http://schemas.openxmlformats.org/officeDocument/2006/relationships" xmlns:mc="http://schemas.openxmlformats.org/markup-compatibility/2006" xmlns:mv="urn:schemas-microsoft-com:mac:vml" xmlns:p="http://schemas.openxmlformats.org/presentationml/2006/main" xmlns:c="http://schemas.openxmlformats.org/drawingml/2006/chart" xmlns:dgm="http://schemas.openxmlformats.org/drawingml/2006/diagram" xmlns:o="urn:schemas-microsoft-com:office:office" xmlns:v="urn:schemas-microsoft-com:vml" xmlns:pvml="urn:schemas-microsoft-com:office:powerpoint" xmlns:com="http://schemas.openxmlformats.org/drawingml/2006/compatibility" xmlns:p14="http://schemas.microsoft.com/office/powerpoint/2010/main" xmlns:p15="http://schemas.microsoft.com/office/powerpoint/2012/main" xmlns:ahyp="http://schemas.microsoft.com/office/drawing/2018/hyperlinkcolor">
+<p:sld xmlns:a="http://schemas.openxmlformats.org/drawingml/2006/main" xmlns:r="http://schemas.openxmlformats.org/officeDocument/2006/relationships" xmlns:p="http://schemas.openxmlformats.org/presentationml/2006/main">
   <p:cSld>
     <p:bg>
       <p:bgPr>
@@ -11705,11 +12114,12 @@
             <a:fillRect/>
           </a:stretch>
         </a:blipFill>
+        <a:effectLst/>
       </p:bgPr>
     </p:bg>
     <p:spTree>
       <p:nvGrpSpPr>
-        <p:cNvPr id="58" name="Shape 58"/>
+        <p:cNvPr id="1" name="Shape 58"/>
         <p:cNvGrpSpPr/>
         <p:nvPr/>
       </p:nvGrpSpPr>
@@ -11743,12 +12153,12 @@
           </a:ln>
         </p:spPr>
         <p:txBody>
-          <a:bodyPr anchorCtr="0" anchor="ctr" bIns="91425" lIns="91425" spcFirstLastPara="1" rIns="91425" wrap="square" tIns="91425">
+          <a:bodyPr spcFirstLastPara="1" wrap="square" lIns="91425" tIns="91425" rIns="91425" bIns="91425" anchor="ctr" anchorCtr="0">
             <a:noAutofit/>
           </a:bodyPr>
           <a:lstStyle/>
           <a:p>
-            <a:pPr indent="0" lvl="0" marL="0" rtl="0" algn="ctr">
+            <a:pPr marL="0" lvl="0" indent="0" algn="ctr" rtl="0">
               <a:spcBef>
                 <a:spcPts val="0"/>
               </a:spcBef>
@@ -11757,9 +12167,6 @@
               </a:spcAft>
               <a:buNone/>
             </a:pPr>
-            <a:r>
-              <a:t/>
-            </a:r>
             <a:endParaRPr/>
           </a:p>
         </p:txBody>
@@ -11801,7 +12208,7 @@
 </file>
 
 <file path=ppt/slides/slide20.xml><?xml version="1.0" encoding="utf-8"?>
-<p:sld xmlns:a="http://schemas.openxmlformats.org/drawingml/2006/main" xmlns:r="http://schemas.openxmlformats.org/officeDocument/2006/relationships" xmlns:mc="http://schemas.openxmlformats.org/markup-compatibility/2006" xmlns:mv="urn:schemas-microsoft-com:mac:vml" xmlns:p="http://schemas.openxmlformats.org/presentationml/2006/main" xmlns:c="http://schemas.openxmlformats.org/drawingml/2006/chart" xmlns:dgm="http://schemas.openxmlformats.org/drawingml/2006/diagram" xmlns:o="urn:schemas-microsoft-com:office:office" xmlns:v="urn:schemas-microsoft-com:vml" xmlns:pvml="urn:schemas-microsoft-com:office:powerpoint" xmlns:com="http://schemas.openxmlformats.org/drawingml/2006/compatibility" xmlns:p14="http://schemas.microsoft.com/office/powerpoint/2010/main" xmlns:p15="http://schemas.microsoft.com/office/powerpoint/2012/main" xmlns:ahyp="http://schemas.microsoft.com/office/drawing/2018/hyperlinkcolor">
+<p:sld xmlns:a="http://schemas.openxmlformats.org/drawingml/2006/main" xmlns:r="http://schemas.openxmlformats.org/officeDocument/2006/relationships" xmlns:p="http://schemas.openxmlformats.org/presentationml/2006/main">
   <p:cSld>
     <p:bg>
       <p:bgPr>
@@ -11813,11 +12220,12 @@
             <a:fillRect/>
           </a:stretch>
         </a:blipFill>
+        <a:effectLst/>
       </p:bgPr>
     </p:bg>
     <p:spTree>
       <p:nvGrpSpPr>
-        <p:cNvPr id="230" name="Shape 230"/>
+        <p:cNvPr id="1" name="Shape 230"/>
         <p:cNvGrpSpPr/>
         <p:nvPr/>
       </p:nvGrpSpPr>
@@ -11849,12 +12257,12 @@
           </a:ln>
         </p:spPr>
         <p:txBody>
-          <a:bodyPr anchorCtr="0" anchor="ctr" bIns="91425" lIns="91425" spcFirstLastPara="1" rIns="91425" wrap="square" tIns="91425">
+          <a:bodyPr spcFirstLastPara="1" wrap="square" lIns="91425" tIns="91425" rIns="91425" bIns="91425" anchor="ctr" anchorCtr="0">
             <a:noAutofit/>
           </a:bodyPr>
           <a:lstStyle/>
           <a:p>
-            <a:pPr indent="0" lvl="0" marL="0" rtl="0" algn="ctr">
+            <a:pPr marL="0" lvl="0" indent="0" algn="ctr" rtl="0">
               <a:spcBef>
                 <a:spcPts val="0"/>
               </a:spcBef>
@@ -11864,7 +12272,7 @@
               <a:buNone/>
             </a:pPr>
             <a:r>
-              <a:rPr b="1" lang="en" sz="3500">
+              <a:rPr lang="en" sz="3500" b="1" dirty="0">
                 <a:solidFill>
                   <a:schemeClr val="dk1"/>
                 </a:solidFill>
@@ -11873,9 +12281,33 @@
                 <a:cs typeface="Public Sans"/>
                 <a:sym typeface="Public Sans"/>
               </a:rPr>
-              <a:t>&lt;&lt;Carrera 02&gt;&gt;</a:t>
+              <a:t>&lt;&lt;Carrera </a:t>
             </a:r>
-            <a:endParaRPr b="1" sz="3500">
+            <a:r>
+              <a:rPr lang="en" sz="2800" b="1" dirty="0">
+                <a:solidFill>
+                  <a:schemeClr val="dk1"/>
+                </a:solidFill>
+                <a:latin typeface="Public Sans"/>
+                <a:ea typeface="Public Sans"/>
+                <a:cs typeface="Public Sans"/>
+                <a:sym typeface="Public Sans"/>
+              </a:rPr>
+              <a:t>02</a:t>
+            </a:r>
+            <a:r>
+              <a:rPr lang="en" sz="3500" b="1" dirty="0">
+                <a:solidFill>
+                  <a:schemeClr val="dk1"/>
+                </a:solidFill>
+                <a:latin typeface="Public Sans"/>
+                <a:ea typeface="Public Sans"/>
+                <a:cs typeface="Public Sans"/>
+                <a:sym typeface="Public Sans"/>
+              </a:rPr>
+              <a:t>&gt;&gt;</a:t>
+            </a:r>
+            <a:endParaRPr sz="3500" b="1" dirty="0">
               <a:solidFill>
                 <a:schemeClr val="dk1"/>
               </a:solidFill>
@@ -11907,12 +12339,12 @@
           </a:ln>
         </p:spPr>
         <p:txBody>
-          <a:bodyPr anchorCtr="0" anchor="t" bIns="91425" lIns="91425" spcFirstLastPara="1" rIns="91425" wrap="square" tIns="91425">
+          <a:bodyPr spcFirstLastPara="1" wrap="square" lIns="91425" tIns="91425" rIns="91425" bIns="91425" anchor="t" anchorCtr="0">
             <a:spAutoFit/>
           </a:bodyPr>
           <a:lstStyle/>
           <a:p>
-            <a:pPr indent="0" lvl="0" marL="0" rtl="0" algn="l">
+            <a:pPr marL="0" lvl="0" indent="0" algn="l" rtl="0">
               <a:spcBef>
                 <a:spcPts val="0"/>
               </a:spcBef>
@@ -11922,7 +12354,7 @@
               <a:buNone/>
             </a:pPr>
             <a:r>
-              <a:rPr i="1" lang="en" sz="2000">
+              <a:rPr lang="en" sz="2000" i="1">
                 <a:solidFill>
                   <a:schemeClr val="dk1"/>
                 </a:solidFill>
@@ -11933,7 +12365,7 @@
               </a:rPr>
               <a:t>&lt;&lt;AE Carrera 02&gt;&gt;</a:t>
             </a:r>
-            <a:endParaRPr i="1" sz="2000">
+            <a:endParaRPr sz="2000" i="1">
               <a:solidFill>
                 <a:schemeClr val="dk1"/>
               </a:solidFill>
@@ -11965,12 +12397,12 @@
           </a:ln>
         </p:spPr>
         <p:txBody>
-          <a:bodyPr anchorCtr="0" anchor="t" bIns="91425" lIns="91425" spcFirstLastPara="1" rIns="91425" wrap="square" tIns="91425">
+          <a:bodyPr spcFirstLastPara="1" wrap="square" lIns="91425" tIns="91425" rIns="91425" bIns="91425" anchor="t" anchorCtr="0">
             <a:noAutofit/>
           </a:bodyPr>
           <a:lstStyle/>
           <a:p>
-            <a:pPr indent="0" lvl="0" marL="0" rtl="0" algn="l">
+            <a:pPr marL="0" lvl="0" indent="0" algn="l" rtl="0">
               <a:lnSpc>
                 <a:spcPct val="115000"/>
               </a:lnSpc>
@@ -12026,12 +12458,12 @@
           </a:ln>
         </p:spPr>
         <p:txBody>
-          <a:bodyPr anchorCtr="0" anchor="t" bIns="91425" lIns="91425" spcFirstLastPara="1" rIns="91425" wrap="square" tIns="91425">
+          <a:bodyPr spcFirstLastPara="1" wrap="square" lIns="91425" tIns="91425" rIns="91425" bIns="91425" anchor="t" anchorCtr="0">
             <a:noAutofit/>
           </a:bodyPr>
           <a:lstStyle/>
           <a:p>
-            <a:pPr indent="0" lvl="0" marL="0" rtl="0" algn="l">
+            <a:pPr marL="0" lvl="0" indent="0" algn="l" rtl="0">
               <a:lnSpc>
                 <a:spcPct val="115000"/>
               </a:lnSpc>
@@ -12076,7 +12508,7 @@
 </file>
 
 <file path=ppt/slides/slide21.xml><?xml version="1.0" encoding="utf-8"?>
-<p:sld xmlns:a="http://schemas.openxmlformats.org/drawingml/2006/main" xmlns:r="http://schemas.openxmlformats.org/officeDocument/2006/relationships" xmlns:mc="http://schemas.openxmlformats.org/markup-compatibility/2006" xmlns:mv="urn:schemas-microsoft-com:mac:vml" xmlns:p="http://schemas.openxmlformats.org/presentationml/2006/main" xmlns:c="http://schemas.openxmlformats.org/drawingml/2006/chart" xmlns:dgm="http://schemas.openxmlformats.org/drawingml/2006/diagram" xmlns:o="urn:schemas-microsoft-com:office:office" xmlns:v="urn:schemas-microsoft-com:vml" xmlns:pvml="urn:schemas-microsoft-com:office:powerpoint" xmlns:com="http://schemas.openxmlformats.org/drawingml/2006/compatibility" xmlns:p14="http://schemas.microsoft.com/office/powerpoint/2010/main" xmlns:p15="http://schemas.microsoft.com/office/powerpoint/2012/main" xmlns:ahyp="http://schemas.microsoft.com/office/drawing/2018/hyperlinkcolor">
+<p:sld xmlns:a="http://schemas.openxmlformats.org/drawingml/2006/main" xmlns:r="http://schemas.openxmlformats.org/officeDocument/2006/relationships" xmlns:p="http://schemas.openxmlformats.org/presentationml/2006/main">
   <p:cSld>
     <p:bg>
       <p:bgPr>
@@ -12088,11 +12520,12 @@
             <a:fillRect/>
           </a:stretch>
         </a:blipFill>
+        <a:effectLst/>
       </p:bgPr>
     </p:bg>
     <p:spTree>
       <p:nvGrpSpPr>
-        <p:cNvPr id="238" name="Shape 238"/>
+        <p:cNvPr id="1" name="Shape 238"/>
         <p:cNvGrpSpPr/>
         <p:nvPr/>
       </p:nvGrpSpPr>
@@ -12124,12 +12557,12 @@
           </a:ln>
         </p:spPr>
         <p:txBody>
-          <a:bodyPr anchorCtr="0" anchor="ctr" bIns="91425" lIns="91425" spcFirstLastPara="1" rIns="91425" wrap="square" tIns="91425">
+          <a:bodyPr spcFirstLastPara="1" wrap="square" lIns="91425" tIns="91425" rIns="91425" bIns="91425" anchor="ctr" anchorCtr="0">
             <a:noAutofit/>
           </a:bodyPr>
           <a:lstStyle/>
           <a:p>
-            <a:pPr indent="0" lvl="0" marL="0" rtl="0" algn="ctr">
+            <a:pPr marL="0" lvl="0" indent="0" algn="ctr" rtl="0">
               <a:spcBef>
                 <a:spcPts val="0"/>
               </a:spcBef>
@@ -12139,7 +12572,7 @@
               <a:buNone/>
             </a:pPr>
             <a:r>
-              <a:rPr b="1" lang="en" sz="3500">
+              <a:rPr lang="en" sz="2800" b="1">
                 <a:solidFill>
                   <a:schemeClr val="dk1"/>
                 </a:solidFill>
@@ -12150,7 +12583,7 @@
               </a:rPr>
               <a:t>&lt;&lt;Carrera 03&gt;&gt;</a:t>
             </a:r>
-            <a:endParaRPr b="1" sz="3500">
+            <a:endParaRPr sz="2800" b="1">
               <a:solidFill>
                 <a:schemeClr val="dk1"/>
               </a:solidFill>
@@ -12182,12 +12615,12 @@
           </a:ln>
         </p:spPr>
         <p:txBody>
-          <a:bodyPr anchorCtr="0" anchor="t" bIns="91425" lIns="91425" spcFirstLastPara="1" rIns="91425" wrap="square" tIns="91425">
+          <a:bodyPr spcFirstLastPara="1" wrap="square" lIns="91425" tIns="91425" rIns="91425" bIns="91425" anchor="t" anchorCtr="0">
             <a:spAutoFit/>
           </a:bodyPr>
           <a:lstStyle/>
           <a:p>
-            <a:pPr indent="0" lvl="0" marL="0" rtl="0" algn="l">
+            <a:pPr marL="0" lvl="0" indent="0" algn="l" rtl="0">
               <a:spcBef>
                 <a:spcPts val="0"/>
               </a:spcBef>
@@ -12197,7 +12630,7 @@
               <a:buNone/>
             </a:pPr>
             <a:r>
-              <a:rPr i="1" lang="en" sz="2000">
+              <a:rPr lang="en" sz="2000" i="1">
                 <a:solidFill>
                   <a:schemeClr val="dk1"/>
                 </a:solidFill>
@@ -12208,7 +12641,7 @@
               </a:rPr>
               <a:t>&lt;&lt;AE Carrera 03&gt;&gt;</a:t>
             </a:r>
-            <a:endParaRPr i="1" sz="2000">
+            <a:endParaRPr sz="2000" i="1">
               <a:solidFill>
                 <a:schemeClr val="dk1"/>
               </a:solidFill>
@@ -12240,12 +12673,12 @@
           </a:ln>
         </p:spPr>
         <p:txBody>
-          <a:bodyPr anchorCtr="0" anchor="t" bIns="91425" lIns="91425" spcFirstLastPara="1" rIns="91425" wrap="square" tIns="91425">
+          <a:bodyPr spcFirstLastPara="1" wrap="square" lIns="91425" tIns="91425" rIns="91425" bIns="91425" anchor="t" anchorCtr="0">
             <a:noAutofit/>
           </a:bodyPr>
           <a:lstStyle/>
           <a:p>
-            <a:pPr indent="0" lvl="0" marL="0" rtl="0" algn="l">
+            <a:pPr marL="0" lvl="0" indent="0" algn="l" rtl="0">
               <a:lnSpc>
                 <a:spcPct val="115000"/>
               </a:lnSpc>
@@ -12301,12 +12734,12 @@
           </a:ln>
         </p:spPr>
         <p:txBody>
-          <a:bodyPr anchorCtr="0" anchor="t" bIns="91425" lIns="91425" spcFirstLastPara="1" rIns="91425" wrap="square" tIns="91425">
+          <a:bodyPr spcFirstLastPara="1" wrap="square" lIns="91425" tIns="91425" rIns="91425" bIns="91425" anchor="t" anchorCtr="0">
             <a:noAutofit/>
           </a:bodyPr>
           <a:lstStyle/>
           <a:p>
-            <a:pPr indent="0" lvl="0" marL="0" rtl="0" algn="l">
+            <a:pPr marL="0" lvl="0" indent="0" algn="l" rtl="0">
               <a:lnSpc>
                 <a:spcPct val="115000"/>
               </a:lnSpc>
@@ -12351,7 +12784,7 @@
 </file>
 
 <file path=ppt/slides/slide22.xml><?xml version="1.0" encoding="utf-8"?>
-<p:sld xmlns:a="http://schemas.openxmlformats.org/drawingml/2006/main" xmlns:r="http://schemas.openxmlformats.org/officeDocument/2006/relationships" xmlns:mc="http://schemas.openxmlformats.org/markup-compatibility/2006" xmlns:mv="urn:schemas-microsoft-com:mac:vml" xmlns:p="http://schemas.openxmlformats.org/presentationml/2006/main" xmlns:c="http://schemas.openxmlformats.org/drawingml/2006/chart" xmlns:dgm="http://schemas.openxmlformats.org/drawingml/2006/diagram" xmlns:o="urn:schemas-microsoft-com:office:office" xmlns:v="urn:schemas-microsoft-com:vml" xmlns:pvml="urn:schemas-microsoft-com:office:powerpoint" xmlns:com="http://schemas.openxmlformats.org/drawingml/2006/compatibility" xmlns:p14="http://schemas.microsoft.com/office/powerpoint/2010/main" xmlns:p15="http://schemas.microsoft.com/office/powerpoint/2012/main" xmlns:ahyp="http://schemas.microsoft.com/office/drawing/2018/hyperlinkcolor">
+<p:sld xmlns:a="http://schemas.openxmlformats.org/drawingml/2006/main" xmlns:r="http://schemas.openxmlformats.org/officeDocument/2006/relationships" xmlns:p="http://schemas.openxmlformats.org/presentationml/2006/main">
   <p:cSld>
     <p:bg>
       <p:bgPr>
@@ -12363,11 +12796,12 @@
             <a:fillRect/>
           </a:stretch>
         </a:blipFill>
+        <a:effectLst/>
       </p:bgPr>
     </p:bg>
     <p:spTree>
       <p:nvGrpSpPr>
-        <p:cNvPr id="246" name="Shape 246"/>
+        <p:cNvPr id="1" name="Shape 246"/>
         <p:cNvGrpSpPr/>
         <p:nvPr/>
       </p:nvGrpSpPr>
@@ -12399,12 +12833,12 @@
           </a:ln>
         </p:spPr>
         <p:txBody>
-          <a:bodyPr anchorCtr="0" anchor="ctr" bIns="91425" lIns="91425" spcFirstLastPara="1" rIns="91425" wrap="square" tIns="91425">
+          <a:bodyPr spcFirstLastPara="1" wrap="square" lIns="91425" tIns="91425" rIns="91425" bIns="91425" anchor="ctr" anchorCtr="0">
             <a:noAutofit/>
           </a:bodyPr>
           <a:lstStyle/>
           <a:p>
-            <a:pPr indent="0" lvl="0" marL="0" rtl="0" algn="ctr">
+            <a:pPr marL="0" lvl="0" indent="0" algn="ctr" rtl="0">
               <a:spcBef>
                 <a:spcPts val="0"/>
               </a:spcBef>
@@ -12414,7 +12848,7 @@
               <a:buNone/>
             </a:pPr>
             <a:r>
-              <a:rPr b="1" lang="en" sz="3500">
+              <a:rPr lang="en" sz="3500" b="1">
                 <a:solidFill>
                   <a:schemeClr val="dk1"/>
                 </a:solidFill>
@@ -12425,7 +12859,7 @@
               </a:rPr>
               <a:t>&lt;&lt;Carrera 04&gt;&gt;</a:t>
             </a:r>
-            <a:endParaRPr b="1" sz="3500">
+            <a:endParaRPr sz="3500" b="1">
               <a:solidFill>
                 <a:schemeClr val="dk1"/>
               </a:solidFill>
@@ -12457,12 +12891,12 @@
           </a:ln>
         </p:spPr>
         <p:txBody>
-          <a:bodyPr anchorCtr="0" anchor="t" bIns="91425" lIns="91425" spcFirstLastPara="1" rIns="91425" wrap="square" tIns="91425">
+          <a:bodyPr spcFirstLastPara="1" wrap="square" lIns="91425" tIns="91425" rIns="91425" bIns="91425" anchor="t" anchorCtr="0">
             <a:spAutoFit/>
           </a:bodyPr>
           <a:lstStyle/>
           <a:p>
-            <a:pPr indent="0" lvl="0" marL="0" rtl="0" algn="l">
+            <a:pPr marL="0" lvl="0" indent="0" algn="l" rtl="0">
               <a:spcBef>
                 <a:spcPts val="0"/>
               </a:spcBef>
@@ -12472,7 +12906,7 @@
               <a:buNone/>
             </a:pPr>
             <a:r>
-              <a:rPr i="1" lang="en" sz="2000">
+              <a:rPr lang="en" sz="2000" i="1">
                 <a:solidFill>
                   <a:schemeClr val="dk1"/>
                 </a:solidFill>
@@ -12483,7 +12917,7 @@
               </a:rPr>
               <a:t>&lt;&lt;AE Carrera 04&gt;&gt;</a:t>
             </a:r>
-            <a:endParaRPr i="1" sz="2000">
+            <a:endParaRPr sz="2000" i="1">
               <a:solidFill>
                 <a:schemeClr val="dk1"/>
               </a:solidFill>
@@ -12515,12 +12949,12 @@
           </a:ln>
         </p:spPr>
         <p:txBody>
-          <a:bodyPr anchorCtr="0" anchor="t" bIns="91425" lIns="91425" spcFirstLastPara="1" rIns="91425" wrap="square" tIns="91425">
+          <a:bodyPr spcFirstLastPara="1" wrap="square" lIns="91425" tIns="91425" rIns="91425" bIns="91425" anchor="t" anchorCtr="0">
             <a:noAutofit/>
           </a:bodyPr>
           <a:lstStyle/>
           <a:p>
-            <a:pPr indent="0" lvl="0" marL="0" rtl="0" algn="l">
+            <a:pPr marL="0" lvl="0" indent="0" algn="l" rtl="0">
               <a:lnSpc>
                 <a:spcPct val="115000"/>
               </a:lnSpc>
@@ -12576,12 +13010,12 @@
           </a:ln>
         </p:spPr>
         <p:txBody>
-          <a:bodyPr anchorCtr="0" anchor="t" bIns="91425" lIns="91425" spcFirstLastPara="1" rIns="91425" wrap="square" tIns="91425">
+          <a:bodyPr spcFirstLastPara="1" wrap="square" lIns="91425" tIns="91425" rIns="91425" bIns="91425" anchor="t" anchorCtr="0">
             <a:noAutofit/>
           </a:bodyPr>
           <a:lstStyle/>
           <a:p>
-            <a:pPr indent="0" lvl="0" marL="0" rtl="0" algn="l">
+            <a:pPr marL="0" lvl="0" indent="0" algn="l" rtl="0">
               <a:lnSpc>
                 <a:spcPct val="115000"/>
               </a:lnSpc>
@@ -12626,7 +13060,7 @@
 </file>
 
 <file path=ppt/slides/slide23.xml><?xml version="1.0" encoding="utf-8"?>
-<p:sld xmlns:a="http://schemas.openxmlformats.org/drawingml/2006/main" xmlns:r="http://schemas.openxmlformats.org/officeDocument/2006/relationships" xmlns:mc="http://schemas.openxmlformats.org/markup-compatibility/2006" xmlns:mv="urn:schemas-microsoft-com:mac:vml" xmlns:p="http://schemas.openxmlformats.org/presentationml/2006/main" xmlns:c="http://schemas.openxmlformats.org/drawingml/2006/chart" xmlns:dgm="http://schemas.openxmlformats.org/drawingml/2006/diagram" xmlns:o="urn:schemas-microsoft-com:office:office" xmlns:v="urn:schemas-microsoft-com:vml" xmlns:pvml="urn:schemas-microsoft-com:office:powerpoint" xmlns:com="http://schemas.openxmlformats.org/drawingml/2006/compatibility" xmlns:p14="http://schemas.microsoft.com/office/powerpoint/2010/main" xmlns:p15="http://schemas.microsoft.com/office/powerpoint/2012/main" xmlns:ahyp="http://schemas.microsoft.com/office/drawing/2018/hyperlinkcolor">
+<p:sld xmlns:a="http://schemas.openxmlformats.org/drawingml/2006/main" xmlns:r="http://schemas.openxmlformats.org/officeDocument/2006/relationships" xmlns:p="http://schemas.openxmlformats.org/presentationml/2006/main">
   <p:cSld>
     <p:bg>
       <p:bgPr>
@@ -12638,11 +13072,12 @@
             <a:fillRect/>
           </a:stretch>
         </a:blipFill>
+        <a:effectLst/>
       </p:bgPr>
     </p:bg>
     <p:spTree>
       <p:nvGrpSpPr>
-        <p:cNvPr id="254" name="Shape 254"/>
+        <p:cNvPr id="1" name="Shape 254"/>
         <p:cNvGrpSpPr/>
         <p:nvPr/>
       </p:nvGrpSpPr>
@@ -12663,7 +13098,7 @@
 </file>
 
 <file path=ppt/slides/slide3.xml><?xml version="1.0" encoding="utf-8"?>
-<p:sld xmlns:a="http://schemas.openxmlformats.org/drawingml/2006/main" xmlns:r="http://schemas.openxmlformats.org/officeDocument/2006/relationships" xmlns:mc="http://schemas.openxmlformats.org/markup-compatibility/2006" xmlns:mv="urn:schemas-microsoft-com:mac:vml" xmlns:p="http://schemas.openxmlformats.org/presentationml/2006/main" xmlns:c="http://schemas.openxmlformats.org/drawingml/2006/chart" xmlns:dgm="http://schemas.openxmlformats.org/drawingml/2006/diagram" xmlns:o="urn:schemas-microsoft-com:office:office" xmlns:v="urn:schemas-microsoft-com:vml" xmlns:pvml="urn:schemas-microsoft-com:office:powerpoint" xmlns:com="http://schemas.openxmlformats.org/drawingml/2006/compatibility" xmlns:p14="http://schemas.microsoft.com/office/powerpoint/2010/main" xmlns:p15="http://schemas.microsoft.com/office/powerpoint/2012/main" xmlns:ahyp="http://schemas.microsoft.com/office/drawing/2018/hyperlinkcolor">
+<p:sld xmlns:a="http://schemas.openxmlformats.org/drawingml/2006/main" xmlns:r="http://schemas.openxmlformats.org/officeDocument/2006/relationships" xmlns:p="http://schemas.openxmlformats.org/presentationml/2006/main">
   <p:cSld>
     <p:bg>
       <p:bgPr>
@@ -12675,11 +13110,12 @@
             <a:fillRect/>
           </a:stretch>
         </a:blipFill>
+        <a:effectLst/>
       </p:bgPr>
     </p:bg>
     <p:spTree>
       <p:nvGrpSpPr>
-        <p:cNvPr id="64" name="Shape 64"/>
+        <p:cNvPr id="1" name="Shape 64"/>
         <p:cNvGrpSpPr/>
         <p:nvPr/>
       </p:nvGrpSpPr>
@@ -12700,7 +13136,7 @@
 </file>
 
 <file path=ppt/slides/slide4.xml><?xml version="1.0" encoding="utf-8"?>
-<p:sld xmlns:a="http://schemas.openxmlformats.org/drawingml/2006/main" xmlns:r="http://schemas.openxmlformats.org/officeDocument/2006/relationships" xmlns:mc="http://schemas.openxmlformats.org/markup-compatibility/2006" xmlns:mv="urn:schemas-microsoft-com:mac:vml" xmlns:p="http://schemas.openxmlformats.org/presentationml/2006/main" xmlns:c="http://schemas.openxmlformats.org/drawingml/2006/chart" xmlns:dgm="http://schemas.openxmlformats.org/drawingml/2006/diagram" xmlns:o="urn:schemas-microsoft-com:office:office" xmlns:v="urn:schemas-microsoft-com:vml" xmlns:pvml="urn:schemas-microsoft-com:office:powerpoint" xmlns:com="http://schemas.openxmlformats.org/drawingml/2006/compatibility" xmlns:p14="http://schemas.microsoft.com/office/powerpoint/2010/main" xmlns:p15="http://schemas.microsoft.com/office/powerpoint/2012/main" xmlns:ahyp="http://schemas.microsoft.com/office/drawing/2018/hyperlinkcolor">
+<p:sld xmlns:a="http://schemas.openxmlformats.org/drawingml/2006/main" xmlns:r="http://schemas.openxmlformats.org/officeDocument/2006/relationships" xmlns:p="http://schemas.openxmlformats.org/presentationml/2006/main">
   <p:cSld>
     <p:bg>
       <p:bgPr>
@@ -12712,11 +13148,12 @@
             <a:fillRect/>
           </a:stretch>
         </a:blipFill>
+        <a:effectLst/>
       </p:bgPr>
     </p:bg>
     <p:spTree>
       <p:nvGrpSpPr>
-        <p:cNvPr id="68" name="Shape 68"/>
+        <p:cNvPr id="1" name="Shape 68"/>
         <p:cNvGrpSpPr/>
         <p:nvPr/>
       </p:nvGrpSpPr>
@@ -12748,12 +13185,12 @@
           </a:ln>
         </p:spPr>
         <p:txBody>
-          <a:bodyPr anchorCtr="0" anchor="t" bIns="91425" lIns="91425" spcFirstLastPara="1" rIns="91425" wrap="square" tIns="91425">
+          <a:bodyPr spcFirstLastPara="1" wrap="square" lIns="91425" tIns="91425" rIns="91425" bIns="91425" anchor="t" anchorCtr="0">
             <a:normAutofit/>
           </a:bodyPr>
           <a:lstStyle/>
           <a:p>
-            <a:pPr indent="0" lvl="0" marL="0" rtl="0" algn="l">
+            <a:pPr marL="0" lvl="0" indent="0" algn="l" rtl="0">
               <a:spcBef>
                 <a:spcPts val="0"/>
               </a:spcBef>
@@ -12806,12 +13243,12 @@
           </a:ln>
         </p:spPr>
         <p:txBody>
-          <a:bodyPr anchorCtr="0" anchor="t" bIns="91425" lIns="91425" spcFirstLastPara="1" rIns="91425" wrap="square" tIns="91425">
+          <a:bodyPr spcFirstLastPara="1" wrap="square" lIns="91425" tIns="91425" rIns="91425" bIns="91425" anchor="t" anchorCtr="0">
             <a:normAutofit/>
           </a:bodyPr>
           <a:lstStyle/>
           <a:p>
-            <a:pPr indent="0" lvl="0" marL="0" rtl="0" algn="l">
+            <a:pPr marL="0" lvl="0" indent="0" algn="l" rtl="0">
               <a:spcBef>
                 <a:spcPts val="0"/>
               </a:spcBef>
@@ -12864,12 +13301,12 @@
           </a:ln>
         </p:spPr>
         <p:txBody>
-          <a:bodyPr anchorCtr="0" anchor="t" bIns="91425" lIns="91425" spcFirstLastPara="1" rIns="91425" wrap="square" tIns="91425">
+          <a:bodyPr spcFirstLastPara="1" wrap="square" lIns="91425" tIns="91425" rIns="91425" bIns="91425" anchor="t" anchorCtr="0">
             <a:spAutoFit/>
           </a:bodyPr>
           <a:lstStyle/>
           <a:p>
-            <a:pPr indent="0" lvl="0" marL="0" rtl="0" algn="l">
+            <a:pPr marL="0" lvl="0" indent="0" algn="l" rtl="0">
               <a:spcBef>
                 <a:spcPts val="0"/>
               </a:spcBef>
@@ -12879,7 +13316,7 @@
               <a:buNone/>
             </a:pPr>
             <a:r>
-              <a:rPr b="1" lang="en" sz="3400">
+              <a:rPr lang="en" sz="3400" b="1">
                 <a:solidFill>
                   <a:schemeClr val="dk1"/>
                 </a:solidFill>
@@ -12890,7 +13327,7 @@
               </a:rPr>
               <a:t>¿Qué nos ha contado &lt;&lt;Nombre y Apellido&gt;&gt;?</a:t>
             </a:r>
-            <a:endParaRPr b="1" sz="3400">
+            <a:endParaRPr sz="3400" b="1">
               <a:solidFill>
                 <a:schemeClr val="dk1"/>
               </a:solidFill>
@@ -12911,7 +13348,7 @@
 </file>
 
 <file path=ppt/slides/slide5.xml><?xml version="1.0" encoding="utf-8"?>
-<p:sld xmlns:a="http://schemas.openxmlformats.org/drawingml/2006/main" xmlns:r="http://schemas.openxmlformats.org/officeDocument/2006/relationships" xmlns:mc="http://schemas.openxmlformats.org/markup-compatibility/2006" xmlns:mv="urn:schemas-microsoft-com:mac:vml" xmlns:p="http://schemas.openxmlformats.org/presentationml/2006/main" xmlns:c="http://schemas.openxmlformats.org/drawingml/2006/chart" xmlns:dgm="http://schemas.openxmlformats.org/drawingml/2006/diagram" xmlns:o="urn:schemas-microsoft-com:office:office" xmlns:v="urn:schemas-microsoft-com:vml" xmlns:pvml="urn:schemas-microsoft-com:office:powerpoint" xmlns:com="http://schemas.openxmlformats.org/drawingml/2006/compatibility" xmlns:p14="http://schemas.microsoft.com/office/powerpoint/2010/main" xmlns:p15="http://schemas.microsoft.com/office/powerpoint/2012/main" xmlns:ahyp="http://schemas.microsoft.com/office/drawing/2018/hyperlinkcolor">
+<p:sld xmlns:a="http://schemas.openxmlformats.org/drawingml/2006/main" xmlns:r="http://schemas.openxmlformats.org/officeDocument/2006/relationships" xmlns:p="http://schemas.openxmlformats.org/presentationml/2006/main">
   <p:cSld>
     <p:bg>
       <p:bgPr>
@@ -12923,11 +13360,12 @@
             <a:fillRect/>
           </a:stretch>
         </a:blipFill>
+        <a:effectLst/>
       </p:bgPr>
     </p:bg>
     <p:spTree>
       <p:nvGrpSpPr>
-        <p:cNvPr id="75" name="Shape 75"/>
+        <p:cNvPr id="1" name="Shape 75"/>
         <p:cNvGrpSpPr/>
         <p:nvPr/>
       </p:nvGrpSpPr>
@@ -12959,12 +13397,12 @@
           </a:ln>
         </p:spPr>
         <p:txBody>
-          <a:bodyPr anchorCtr="0" anchor="t" bIns="91425" lIns="91425" spcFirstLastPara="1" rIns="91425" wrap="square" tIns="91425">
+          <a:bodyPr spcFirstLastPara="1" wrap="square" lIns="91425" tIns="91425" rIns="91425" bIns="91425" anchor="t" anchorCtr="0">
             <a:spAutoFit/>
           </a:bodyPr>
           <a:lstStyle/>
           <a:p>
-            <a:pPr indent="0" lvl="0" marL="0" rtl="0" algn="l">
+            <a:pPr marL="0" lvl="0" indent="0" algn="l" rtl="0">
               <a:spcBef>
                 <a:spcPts val="0"/>
               </a:spcBef>
@@ -13017,12 +13455,12 @@
           </a:ln>
         </p:spPr>
         <p:txBody>
-          <a:bodyPr anchorCtr="0" anchor="t" bIns="91425" lIns="91425" spcFirstLastPara="1" rIns="91425" wrap="square" tIns="91425">
+          <a:bodyPr spcFirstLastPara="1" wrap="square" lIns="91425" tIns="91425" rIns="91425" bIns="91425" anchor="t" anchorCtr="0">
             <a:spAutoFit/>
           </a:bodyPr>
           <a:lstStyle/>
           <a:p>
-            <a:pPr indent="0" lvl="0" marL="0" rtl="0" algn="l">
+            <a:pPr marL="0" lvl="0" indent="0" algn="l" rtl="0">
               <a:spcBef>
                 <a:spcPts val="0"/>
               </a:spcBef>
@@ -13032,7 +13470,7 @@
               <a:buNone/>
             </a:pPr>
             <a:r>
-              <a:rPr b="1" lang="en" sz="1900">
+              <a:rPr lang="en" sz="1900" b="1" dirty="0">
                 <a:solidFill>
                   <a:srgbClr val="434343"/>
                 </a:solidFill>
@@ -13041,9 +13479,9 @@
                 <a:cs typeface="Public Sans"/>
                 <a:sym typeface="Public Sans"/>
               </a:rPr>
-              <a:t>&lt;&lt;%AE 02&gt;&gt;</a:t>
+              <a:t>&lt;&lt;% AE 02&gt;&gt;</a:t>
             </a:r>
-            <a:endParaRPr b="1" sz="1900">
+            <a:endParaRPr sz="1900" b="1" dirty="0">
               <a:solidFill>
                 <a:srgbClr val="434343"/>
               </a:solidFill>
@@ -13075,12 +13513,12 @@
           </a:ln>
         </p:spPr>
         <p:txBody>
-          <a:bodyPr anchorCtr="0" anchor="t" bIns="91425" lIns="91425" spcFirstLastPara="1" rIns="91425" wrap="square" tIns="91425">
+          <a:bodyPr spcFirstLastPara="1" wrap="square" lIns="91425" tIns="91425" rIns="91425" bIns="91425" anchor="t" anchorCtr="0">
             <a:noAutofit/>
           </a:bodyPr>
           <a:lstStyle/>
           <a:p>
-            <a:pPr indent="0" lvl="0" marL="0" rtl="0" algn="l">
+            <a:pPr marL="0" lvl="0" indent="0" algn="l" rtl="0">
               <a:spcBef>
                 <a:spcPts val="0"/>
               </a:spcBef>
@@ -13090,7 +13528,7 @@
               <a:buNone/>
             </a:pPr>
             <a:r>
-              <a:rPr b="1" lang="en" sz="1900">
+              <a:rPr lang="en" sz="1900" b="1">
                 <a:solidFill>
                   <a:srgbClr val="434343"/>
                 </a:solidFill>
@@ -13101,7 +13539,7 @@
               </a:rPr>
               <a:t>&lt;&lt;AE 02&gt;&gt;</a:t>
             </a:r>
-            <a:endParaRPr b="1" sz="1900">
+            <a:endParaRPr sz="1900" b="1">
               <a:solidFill>
                 <a:srgbClr val="434343"/>
               </a:solidFill>
@@ -13133,12 +13571,12 @@
           </a:ln>
         </p:spPr>
         <p:txBody>
-          <a:bodyPr anchorCtr="0" anchor="t" bIns="91425" lIns="91425" spcFirstLastPara="1" rIns="91425" wrap="square" tIns="91425">
+          <a:bodyPr spcFirstLastPara="1" wrap="square" lIns="91425" tIns="91425" rIns="91425" bIns="91425" anchor="t" anchorCtr="0">
             <a:spAutoFit/>
           </a:bodyPr>
           <a:lstStyle/>
           <a:p>
-            <a:pPr indent="0" lvl="0" marL="0" rtl="0" algn="l">
+            <a:pPr marL="0" lvl="0" indent="0" algn="l" rtl="0">
               <a:spcBef>
                 <a:spcPts val="0"/>
               </a:spcBef>
@@ -13191,12 +13629,12 @@
           </a:ln>
         </p:spPr>
         <p:txBody>
-          <a:bodyPr anchorCtr="0" anchor="t" bIns="91425" lIns="91425" spcFirstLastPara="1" rIns="91425" wrap="square" tIns="91425">
+          <a:bodyPr spcFirstLastPara="1" wrap="square" lIns="91425" tIns="91425" rIns="91425" bIns="91425" anchor="t" anchorCtr="0">
             <a:spAutoFit/>
           </a:bodyPr>
           <a:lstStyle/>
           <a:p>
-            <a:pPr indent="0" lvl="0" marL="0" rtl="0" algn="l">
+            <a:pPr marL="0" lvl="0" indent="0" algn="l" rtl="0">
               <a:spcBef>
                 <a:spcPts val="0"/>
               </a:spcBef>
@@ -13206,7 +13644,7 @@
               <a:buNone/>
             </a:pPr>
             <a:r>
-              <a:rPr b="1" lang="en" sz="1900">
+              <a:rPr lang="en" sz="1900" b="1" dirty="0">
                 <a:solidFill>
                   <a:srgbClr val="434343"/>
                 </a:solidFill>
@@ -13215,9 +13653,9 @@
                 <a:cs typeface="Public Sans"/>
                 <a:sym typeface="Public Sans"/>
               </a:rPr>
-              <a:t>&lt;&lt;%AE 03&gt;&gt;</a:t>
+              <a:t>&lt;&lt;% AE 03&gt;&gt;</a:t>
             </a:r>
-            <a:endParaRPr b="1" sz="1900">
+            <a:endParaRPr sz="1900" b="1" dirty="0">
               <a:solidFill>
                 <a:srgbClr val="434343"/>
               </a:solidFill>
@@ -13249,12 +13687,12 @@
           </a:ln>
         </p:spPr>
         <p:txBody>
-          <a:bodyPr anchorCtr="0" anchor="t" bIns="91425" lIns="91425" spcFirstLastPara="1" rIns="91425" wrap="square" tIns="91425">
+          <a:bodyPr spcFirstLastPara="1" wrap="square" lIns="91425" tIns="91425" rIns="91425" bIns="91425" anchor="t" anchorCtr="0">
             <a:noAutofit/>
           </a:bodyPr>
           <a:lstStyle/>
           <a:p>
-            <a:pPr indent="0" lvl="0" marL="0" rtl="0" algn="l">
+            <a:pPr marL="0" lvl="0" indent="0" algn="l" rtl="0">
               <a:spcBef>
                 <a:spcPts val="0"/>
               </a:spcBef>
@@ -13264,7 +13702,7 @@
               <a:buNone/>
             </a:pPr>
             <a:r>
-              <a:rPr b="1" lang="en" sz="1900">
+              <a:rPr lang="en" sz="1900" b="1">
                 <a:solidFill>
                   <a:srgbClr val="434343"/>
                 </a:solidFill>
@@ -13275,7 +13713,7 @@
               </a:rPr>
               <a:t>&lt;&lt;AE 03&gt;&gt;</a:t>
             </a:r>
-            <a:endParaRPr b="1" sz="1900">
+            <a:endParaRPr sz="1900" b="1">
               <a:solidFill>
                 <a:srgbClr val="434343"/>
               </a:solidFill>
@@ -13307,12 +13745,12 @@
           </a:ln>
         </p:spPr>
         <p:txBody>
-          <a:bodyPr anchorCtr="0" anchor="t" bIns="91425" lIns="91425" spcFirstLastPara="1" rIns="91425" wrap="square" tIns="91425">
+          <a:bodyPr spcFirstLastPara="1" wrap="square" lIns="91425" tIns="91425" rIns="91425" bIns="91425" anchor="t" anchorCtr="0">
             <a:spAutoFit/>
           </a:bodyPr>
           <a:lstStyle/>
           <a:p>
-            <a:pPr indent="0" lvl="0" marL="0" rtl="0" algn="l">
+            <a:pPr marL="0" lvl="0" indent="0" algn="l" rtl="0">
               <a:spcBef>
                 <a:spcPts val="0"/>
               </a:spcBef>
@@ -13365,12 +13803,12 @@
           </a:ln>
         </p:spPr>
         <p:txBody>
-          <a:bodyPr anchorCtr="0" anchor="t" bIns="91425" lIns="91425" spcFirstLastPara="1" rIns="91425" wrap="square" tIns="91425">
+          <a:bodyPr spcFirstLastPara="1" wrap="square" lIns="91425" tIns="91425" rIns="91425" bIns="91425" anchor="t" anchorCtr="0">
             <a:spAutoFit/>
           </a:bodyPr>
           <a:lstStyle/>
           <a:p>
-            <a:pPr indent="0" lvl="0" marL="0" rtl="0" algn="l">
+            <a:pPr marL="0" lvl="0" indent="0" algn="l" rtl="0">
               <a:spcBef>
                 <a:spcPts val="0"/>
               </a:spcBef>
@@ -13380,7 +13818,7 @@
               <a:buNone/>
             </a:pPr>
             <a:r>
-              <a:rPr b="1" lang="en" sz="1900">
+              <a:rPr lang="en" sz="1900" b="1" dirty="0">
                 <a:solidFill>
                   <a:srgbClr val="434343"/>
                 </a:solidFill>
@@ -13389,9 +13827,9 @@
                 <a:cs typeface="Public Sans"/>
                 <a:sym typeface="Public Sans"/>
               </a:rPr>
-              <a:t>&lt;&lt;%AE 04&gt;&gt;</a:t>
+              <a:t>&lt;&lt;% AE 04&gt;&gt;</a:t>
             </a:r>
-            <a:endParaRPr b="1" sz="1900">
+            <a:endParaRPr sz="1900" b="1" dirty="0">
               <a:solidFill>
                 <a:srgbClr val="434343"/>
               </a:solidFill>
@@ -13423,12 +13861,12 @@
           </a:ln>
         </p:spPr>
         <p:txBody>
-          <a:bodyPr anchorCtr="0" anchor="t" bIns="91425" lIns="91425" spcFirstLastPara="1" rIns="91425" wrap="square" tIns="91425">
+          <a:bodyPr spcFirstLastPara="1" wrap="square" lIns="91425" tIns="91425" rIns="91425" bIns="91425" anchor="t" anchorCtr="0">
             <a:noAutofit/>
           </a:bodyPr>
           <a:lstStyle/>
           <a:p>
-            <a:pPr indent="0" lvl="0" marL="0" rtl="0" algn="l">
+            <a:pPr marL="0" lvl="0" indent="0" algn="l" rtl="0">
               <a:spcBef>
                 <a:spcPts val="0"/>
               </a:spcBef>
@@ -13438,7 +13876,7 @@
               <a:buNone/>
             </a:pPr>
             <a:r>
-              <a:rPr b="1" lang="en" sz="1900">
+              <a:rPr lang="en" sz="1900" b="1">
                 <a:solidFill>
                   <a:srgbClr val="434343"/>
                 </a:solidFill>
@@ -13449,7 +13887,7 @@
               </a:rPr>
               <a:t>&lt;&lt;AE 04&gt;&gt;</a:t>
             </a:r>
-            <a:endParaRPr b="1" sz="1900">
+            <a:endParaRPr sz="1900" b="1">
               <a:solidFill>
                 <a:srgbClr val="434343"/>
               </a:solidFill>
@@ -13481,12 +13919,12 @@
           </a:ln>
         </p:spPr>
         <p:txBody>
-          <a:bodyPr anchorCtr="0" anchor="t" bIns="91425" lIns="91425" spcFirstLastPara="1" rIns="91425" wrap="square" tIns="91425">
+          <a:bodyPr spcFirstLastPara="1" wrap="square" lIns="91425" tIns="91425" rIns="91425" bIns="91425" anchor="t" anchorCtr="0">
             <a:spAutoFit/>
           </a:bodyPr>
           <a:lstStyle/>
           <a:p>
-            <a:pPr indent="0" lvl="0" marL="0" rtl="0" algn="l">
+            <a:pPr marL="0" lvl="0" indent="0" algn="l" rtl="0">
               <a:spcBef>
                 <a:spcPts val="0"/>
               </a:spcBef>
@@ -13539,12 +13977,12 @@
           </a:ln>
         </p:spPr>
         <p:txBody>
-          <a:bodyPr anchorCtr="0" anchor="t" bIns="91425" lIns="91425" spcFirstLastPara="1" rIns="91425" wrap="square" tIns="91425">
+          <a:bodyPr spcFirstLastPara="1" wrap="square" lIns="91425" tIns="91425" rIns="91425" bIns="91425" anchor="t" anchorCtr="0">
             <a:spAutoFit/>
           </a:bodyPr>
           <a:lstStyle/>
           <a:p>
-            <a:pPr indent="0" lvl="0" marL="0" rtl="0" algn="l">
+            <a:pPr marL="0" lvl="0" indent="0" algn="l" rtl="0">
               <a:spcBef>
                 <a:spcPts val="0"/>
               </a:spcBef>
@@ -13554,7 +13992,7 @@
               <a:buNone/>
             </a:pPr>
             <a:r>
-              <a:rPr b="1" lang="en" sz="1900">
+              <a:rPr lang="en" sz="1900" b="1" dirty="0">
                 <a:solidFill>
                   <a:srgbClr val="434343"/>
                 </a:solidFill>
@@ -13563,9 +14001,9 @@
                 <a:cs typeface="Public Sans"/>
                 <a:sym typeface="Public Sans"/>
               </a:rPr>
-              <a:t>&lt;&lt;%AE 05&gt;&gt;</a:t>
+              <a:t>&lt;&lt;% AE 05&gt;&gt;</a:t>
             </a:r>
-            <a:endParaRPr b="1" sz="1900">
+            <a:endParaRPr sz="1900" b="1" dirty="0">
               <a:solidFill>
                 <a:srgbClr val="434343"/>
               </a:solidFill>
@@ -13597,12 +14035,12 @@
           </a:ln>
         </p:spPr>
         <p:txBody>
-          <a:bodyPr anchorCtr="0" anchor="t" bIns="91425" lIns="91425" spcFirstLastPara="1" rIns="91425" wrap="square" tIns="91425">
+          <a:bodyPr spcFirstLastPara="1" wrap="square" lIns="91425" tIns="91425" rIns="91425" bIns="91425" anchor="t" anchorCtr="0">
             <a:noAutofit/>
           </a:bodyPr>
           <a:lstStyle/>
           <a:p>
-            <a:pPr indent="0" lvl="0" marL="0" rtl="0" algn="l">
+            <a:pPr marL="0" lvl="0" indent="0" algn="l" rtl="0">
               <a:spcBef>
                 <a:spcPts val="0"/>
               </a:spcBef>
@@ -13612,7 +14050,7 @@
               <a:buNone/>
             </a:pPr>
             <a:r>
-              <a:rPr b="1" lang="en" sz="1900">
+              <a:rPr lang="en" sz="1900" b="1">
                 <a:solidFill>
                   <a:srgbClr val="434343"/>
                 </a:solidFill>
@@ -13623,7 +14061,7 @@
               </a:rPr>
               <a:t>&lt;&lt;AE 05&gt;&gt;</a:t>
             </a:r>
-            <a:endParaRPr b="1" sz="1900">
+            <a:endParaRPr sz="1900" b="1">
               <a:solidFill>
                 <a:srgbClr val="434343"/>
               </a:solidFill>
@@ -13655,12 +14093,12 @@
           </a:ln>
         </p:spPr>
         <p:txBody>
-          <a:bodyPr anchorCtr="0" anchor="t" bIns="91425" lIns="91425" spcFirstLastPara="1" rIns="91425" wrap="square" tIns="91425">
+          <a:bodyPr spcFirstLastPara="1" wrap="square" lIns="91425" tIns="91425" rIns="91425" bIns="91425" anchor="t" anchorCtr="0">
             <a:spAutoFit/>
           </a:bodyPr>
           <a:lstStyle/>
           <a:p>
-            <a:pPr indent="0" lvl="0" marL="0" rtl="0" algn="l">
+            <a:pPr marL="0" lvl="0" indent="0" algn="l" rtl="0">
               <a:spcBef>
                 <a:spcPts val="0"/>
               </a:spcBef>
@@ -13713,12 +14151,12 @@
           </a:ln>
         </p:spPr>
         <p:txBody>
-          <a:bodyPr anchorCtr="0" anchor="t" bIns="91425" lIns="91425" spcFirstLastPara="1" rIns="91425" wrap="square" tIns="91425">
+          <a:bodyPr spcFirstLastPara="1" wrap="square" lIns="91425" tIns="91425" rIns="91425" bIns="91425" anchor="t" anchorCtr="0">
             <a:spAutoFit/>
           </a:bodyPr>
           <a:lstStyle/>
           <a:p>
-            <a:pPr indent="0" lvl="0" marL="0" rtl="0" algn="l">
+            <a:pPr marL="0" lvl="0" indent="0" algn="l" rtl="0">
               <a:spcBef>
                 <a:spcPts val="0"/>
               </a:spcBef>
@@ -13728,7 +14166,7 @@
               <a:buNone/>
             </a:pPr>
             <a:r>
-              <a:rPr b="1" lang="en" sz="1900">
+              <a:rPr lang="en" sz="1900" b="1" dirty="0">
                 <a:solidFill>
                   <a:srgbClr val="434343"/>
                 </a:solidFill>
@@ -13737,9 +14175,9 @@
                 <a:cs typeface="Public Sans"/>
                 <a:sym typeface="Public Sans"/>
               </a:rPr>
-              <a:t>&lt;&lt;%AE 06&gt;&gt;</a:t>
+              <a:t>&lt;&lt;% AE 06&gt;&gt;</a:t>
             </a:r>
-            <a:endParaRPr b="1" sz="1900">
+            <a:endParaRPr sz="1900" b="1" dirty="0">
               <a:solidFill>
                 <a:srgbClr val="434343"/>
               </a:solidFill>
@@ -13771,12 +14209,12 @@
           </a:ln>
         </p:spPr>
         <p:txBody>
-          <a:bodyPr anchorCtr="0" anchor="t" bIns="91425" lIns="91425" spcFirstLastPara="1" rIns="91425" wrap="square" tIns="91425">
+          <a:bodyPr spcFirstLastPara="1" wrap="square" lIns="91425" tIns="91425" rIns="91425" bIns="91425" anchor="t" anchorCtr="0">
             <a:noAutofit/>
           </a:bodyPr>
           <a:lstStyle/>
           <a:p>
-            <a:pPr indent="0" lvl="0" marL="0" rtl="0" algn="l">
+            <a:pPr marL="0" lvl="0" indent="0" algn="l" rtl="0">
               <a:spcBef>
                 <a:spcPts val="0"/>
               </a:spcBef>
@@ -13786,7 +14224,7 @@
               <a:buNone/>
             </a:pPr>
             <a:r>
-              <a:rPr b="1" lang="en" sz="1900">
+              <a:rPr lang="en" sz="1900" b="1">
                 <a:solidFill>
                   <a:srgbClr val="434343"/>
                 </a:solidFill>
@@ -13797,7 +14235,7 @@
               </a:rPr>
               <a:t>&lt;&lt;AE 06&gt;&gt;</a:t>
             </a:r>
-            <a:endParaRPr b="1" sz="1900">
+            <a:endParaRPr sz="1900" b="1">
               <a:solidFill>
                 <a:srgbClr val="434343"/>
               </a:solidFill>
@@ -13829,12 +14267,12 @@
           </a:ln>
         </p:spPr>
         <p:txBody>
-          <a:bodyPr anchorCtr="0" anchor="t" bIns="91425" lIns="91425" spcFirstLastPara="1" rIns="91425" wrap="square" tIns="91425">
+          <a:bodyPr spcFirstLastPara="1" wrap="square" lIns="91425" tIns="91425" rIns="91425" bIns="91425" anchor="t" anchorCtr="0">
             <a:spAutoFit/>
           </a:bodyPr>
           <a:lstStyle/>
           <a:p>
-            <a:pPr indent="0" lvl="0" marL="0" rtl="0" algn="l">
+            <a:pPr marL="0" lvl="0" indent="0" algn="l" rtl="0">
               <a:spcBef>
                 <a:spcPts val="0"/>
               </a:spcBef>
@@ -13887,12 +14325,12 @@
           </a:ln>
         </p:spPr>
         <p:txBody>
-          <a:bodyPr anchorCtr="0" anchor="t" bIns="91425" lIns="91425" spcFirstLastPara="1" rIns="91425" wrap="square" tIns="91425">
+          <a:bodyPr spcFirstLastPara="1" wrap="square" lIns="91425" tIns="91425" rIns="91425" bIns="91425" anchor="t" anchorCtr="0">
             <a:spAutoFit/>
           </a:bodyPr>
           <a:lstStyle/>
           <a:p>
-            <a:pPr indent="0" lvl="0" marL="0" rtl="0" algn="l">
+            <a:pPr marL="0" lvl="0" indent="0" algn="l" rtl="0">
               <a:spcBef>
                 <a:spcPts val="0"/>
               </a:spcBef>
@@ -13902,7 +14340,7 @@
               <a:buNone/>
             </a:pPr>
             <a:r>
-              <a:rPr b="1" lang="en" sz="1900">
+              <a:rPr lang="en" sz="1900" b="1" dirty="0">
                 <a:solidFill>
                   <a:srgbClr val="434343"/>
                 </a:solidFill>
@@ -13911,9 +14349,9 @@
                 <a:cs typeface="Public Sans"/>
                 <a:sym typeface="Public Sans"/>
               </a:rPr>
-              <a:t>&lt;&lt;%AE 07&gt;&gt;</a:t>
+              <a:t>&lt;&lt;% AE 07&gt;&gt;</a:t>
             </a:r>
-            <a:endParaRPr b="1" sz="1900">
+            <a:endParaRPr sz="1900" b="1" dirty="0">
               <a:solidFill>
                 <a:srgbClr val="434343"/>
               </a:solidFill>
@@ -13945,12 +14383,12 @@
           </a:ln>
         </p:spPr>
         <p:txBody>
-          <a:bodyPr anchorCtr="0" anchor="t" bIns="91425" lIns="91425" spcFirstLastPara="1" rIns="91425" wrap="square" tIns="91425">
+          <a:bodyPr spcFirstLastPara="1" wrap="square" lIns="91425" tIns="91425" rIns="91425" bIns="91425" anchor="t" anchorCtr="0">
             <a:noAutofit/>
           </a:bodyPr>
           <a:lstStyle/>
           <a:p>
-            <a:pPr indent="0" lvl="0" marL="0" rtl="0" algn="l">
+            <a:pPr marL="0" lvl="0" indent="0" algn="l" rtl="0">
               <a:spcBef>
                 <a:spcPts val="0"/>
               </a:spcBef>
@@ -13960,7 +14398,7 @@
               <a:buNone/>
             </a:pPr>
             <a:r>
-              <a:rPr b="1" lang="en" sz="1900">
+              <a:rPr lang="en" sz="1900" b="1">
                 <a:solidFill>
                   <a:srgbClr val="434343"/>
                 </a:solidFill>
@@ -13971,7 +14409,7 @@
               </a:rPr>
               <a:t>&lt;&lt;AE 07&gt;&gt;</a:t>
             </a:r>
-            <a:endParaRPr b="1" sz="1900">
+            <a:endParaRPr sz="1900" b="1">
               <a:solidFill>
                 <a:srgbClr val="434343"/>
               </a:solidFill>
@@ -14003,12 +14441,12 @@
           </a:ln>
         </p:spPr>
         <p:txBody>
-          <a:bodyPr anchorCtr="0" anchor="t" bIns="91425" lIns="91425" spcFirstLastPara="1" rIns="91425" wrap="square" tIns="91425">
+          <a:bodyPr spcFirstLastPara="1" wrap="square" lIns="91425" tIns="91425" rIns="91425" bIns="91425" anchor="t" anchorCtr="0">
             <a:spAutoFit/>
           </a:bodyPr>
           <a:lstStyle/>
           <a:p>
-            <a:pPr indent="0" lvl="0" marL="0" rtl="0" algn="l">
+            <a:pPr marL="0" lvl="0" indent="0" algn="l" rtl="0">
               <a:spcBef>
                 <a:spcPts val="0"/>
               </a:spcBef>
@@ -14061,12 +14499,12 @@
           </a:ln>
         </p:spPr>
         <p:txBody>
-          <a:bodyPr anchorCtr="0" anchor="t" bIns="91425" lIns="91425" spcFirstLastPara="1" rIns="91425" wrap="square" tIns="91425">
+          <a:bodyPr spcFirstLastPara="1" wrap="square" lIns="91425" tIns="91425" rIns="91425" bIns="91425" anchor="t" anchorCtr="0">
             <a:spAutoFit/>
           </a:bodyPr>
           <a:lstStyle/>
           <a:p>
-            <a:pPr indent="0" lvl="0" marL="0" rtl="0" algn="l">
+            <a:pPr marL="0" lvl="0" indent="0" algn="l" rtl="0">
               <a:spcBef>
                 <a:spcPts val="0"/>
               </a:spcBef>
@@ -14076,7 +14514,7 @@
               <a:buNone/>
             </a:pPr>
             <a:r>
-              <a:rPr b="1" lang="en" sz="1900">
+              <a:rPr lang="en" sz="1900" b="1" dirty="0">
                 <a:solidFill>
                   <a:srgbClr val="434343"/>
                 </a:solidFill>
@@ -14085,9 +14523,9 @@
                 <a:cs typeface="Public Sans"/>
                 <a:sym typeface="Public Sans"/>
               </a:rPr>
-              <a:t>&lt;&lt;%AE 08&gt;&gt;</a:t>
+              <a:t>&lt;&lt;% AE 08&gt;&gt;</a:t>
             </a:r>
-            <a:endParaRPr b="1" sz="1900">
+            <a:endParaRPr sz="1900" b="1" dirty="0">
               <a:solidFill>
                 <a:srgbClr val="434343"/>
               </a:solidFill>
@@ -14119,12 +14557,12 @@
           </a:ln>
         </p:spPr>
         <p:txBody>
-          <a:bodyPr anchorCtr="0" anchor="t" bIns="91425" lIns="91425" spcFirstLastPara="1" rIns="91425" wrap="square" tIns="91425">
+          <a:bodyPr spcFirstLastPara="1" wrap="square" lIns="91425" tIns="91425" rIns="91425" bIns="91425" anchor="t" anchorCtr="0">
             <a:noAutofit/>
           </a:bodyPr>
           <a:lstStyle/>
           <a:p>
-            <a:pPr indent="0" lvl="0" marL="0" rtl="0" algn="l">
+            <a:pPr marL="0" lvl="0" indent="0" algn="l" rtl="0">
               <a:spcBef>
                 <a:spcPts val="0"/>
               </a:spcBef>
@@ -14134,7 +14572,7 @@
               <a:buNone/>
             </a:pPr>
             <a:r>
-              <a:rPr b="1" lang="en" sz="1900">
+              <a:rPr lang="en" sz="1900" b="1">
                 <a:solidFill>
                   <a:srgbClr val="434343"/>
                 </a:solidFill>
@@ -14145,7 +14583,7 @@
               </a:rPr>
               <a:t>&lt;&lt;AE 08&gt;&gt;</a:t>
             </a:r>
-            <a:endParaRPr b="1" sz="1900">
+            <a:endParaRPr sz="1900" b="1">
               <a:solidFill>
                 <a:srgbClr val="434343"/>
               </a:solidFill>
@@ -14177,12 +14615,12 @@
           </a:ln>
         </p:spPr>
         <p:txBody>
-          <a:bodyPr anchorCtr="0" anchor="t" bIns="91425" lIns="91425" spcFirstLastPara="1" rIns="91425" wrap="square" tIns="91425">
+          <a:bodyPr spcFirstLastPara="1" wrap="square" lIns="91425" tIns="91425" rIns="91425" bIns="91425" anchor="t" anchorCtr="0">
             <a:spAutoFit/>
           </a:bodyPr>
           <a:lstStyle/>
           <a:p>
-            <a:pPr indent="0" lvl="0" marL="0" rtl="0" algn="l">
+            <a:pPr marL="0" lvl="0" indent="0" algn="l" rtl="0">
               <a:spcBef>
                 <a:spcPts val="0"/>
               </a:spcBef>
@@ -14235,12 +14673,12 @@
           </a:ln>
         </p:spPr>
         <p:txBody>
-          <a:bodyPr anchorCtr="0" anchor="t" bIns="91425" lIns="91425" spcFirstLastPara="1" rIns="91425" wrap="square" tIns="91425">
+          <a:bodyPr spcFirstLastPara="1" wrap="square" lIns="91425" tIns="91425" rIns="91425" bIns="91425" anchor="t" anchorCtr="0">
             <a:spAutoFit/>
           </a:bodyPr>
           <a:lstStyle/>
           <a:p>
-            <a:pPr indent="0" lvl="0" marL="0" rtl="0" algn="l">
+            <a:pPr marL="0" lvl="0" indent="0" algn="l" rtl="0">
               <a:spcBef>
                 <a:spcPts val="0"/>
               </a:spcBef>
@@ -14250,7 +14688,7 @@
               <a:buNone/>
             </a:pPr>
             <a:r>
-              <a:rPr b="1" lang="en" sz="1900">
+              <a:rPr lang="en" sz="1900" b="1" dirty="0">
                 <a:solidFill>
                   <a:srgbClr val="434343"/>
                 </a:solidFill>
@@ -14259,9 +14697,9 @@
                 <a:cs typeface="Public Sans"/>
                 <a:sym typeface="Public Sans"/>
               </a:rPr>
-              <a:t>&lt;&lt;%AE 01&gt;&gt;</a:t>
+              <a:t>&lt;&lt;% AE 01&gt;&gt;</a:t>
             </a:r>
-            <a:endParaRPr b="1" sz="1900">
+            <a:endParaRPr sz="1900" b="1" dirty="0">
               <a:solidFill>
                 <a:srgbClr val="434343"/>
               </a:solidFill>
@@ -14293,12 +14731,12 @@
           </a:ln>
         </p:spPr>
         <p:txBody>
-          <a:bodyPr anchorCtr="0" anchor="t" bIns="91425" lIns="91425" spcFirstLastPara="1" rIns="91425" wrap="square" tIns="91425">
+          <a:bodyPr spcFirstLastPara="1" wrap="square" lIns="91425" tIns="91425" rIns="91425" bIns="91425" anchor="t" anchorCtr="0">
             <a:noAutofit/>
           </a:bodyPr>
           <a:lstStyle/>
           <a:p>
-            <a:pPr indent="0" lvl="0" marL="0" rtl="0" algn="l">
+            <a:pPr marL="0" lvl="0" indent="0" algn="l" rtl="0">
               <a:spcBef>
                 <a:spcPts val="0"/>
               </a:spcBef>
@@ -14308,7 +14746,7 @@
               <a:buNone/>
             </a:pPr>
             <a:r>
-              <a:rPr b="1" lang="en" sz="1900">
+              <a:rPr lang="en" sz="1900" b="1">
                 <a:solidFill>
                   <a:srgbClr val="434343"/>
                 </a:solidFill>
@@ -14319,7 +14757,7 @@
               </a:rPr>
               <a:t>&lt;&lt;AE 01&gt;&gt;</a:t>
             </a:r>
-            <a:endParaRPr b="1" sz="1900">
+            <a:endParaRPr sz="1900" b="1">
               <a:solidFill>
                 <a:srgbClr val="434343"/>
               </a:solidFill>
@@ -14340,7 +14778,7 @@
 </file>
 
 <file path=ppt/slides/slide6.xml><?xml version="1.0" encoding="utf-8"?>
-<p:sld xmlns:a="http://schemas.openxmlformats.org/drawingml/2006/main" xmlns:r="http://schemas.openxmlformats.org/officeDocument/2006/relationships" xmlns:mc="http://schemas.openxmlformats.org/markup-compatibility/2006" xmlns:mv="urn:schemas-microsoft-com:mac:vml" xmlns:p="http://schemas.openxmlformats.org/presentationml/2006/main" xmlns:c="http://schemas.openxmlformats.org/drawingml/2006/chart" xmlns:dgm="http://schemas.openxmlformats.org/drawingml/2006/diagram" xmlns:o="urn:schemas-microsoft-com:office:office" xmlns:v="urn:schemas-microsoft-com:vml" xmlns:pvml="urn:schemas-microsoft-com:office:powerpoint" xmlns:com="http://schemas.openxmlformats.org/drawingml/2006/compatibility" xmlns:p14="http://schemas.microsoft.com/office/powerpoint/2010/main" xmlns:p15="http://schemas.microsoft.com/office/powerpoint/2012/main" xmlns:ahyp="http://schemas.microsoft.com/office/drawing/2018/hyperlinkcolor">
+<p:sld xmlns:a="http://schemas.openxmlformats.org/drawingml/2006/main" xmlns:r="http://schemas.openxmlformats.org/officeDocument/2006/relationships" xmlns:p="http://schemas.openxmlformats.org/presentationml/2006/main">
   <p:cSld>
     <p:bg>
       <p:bgPr>
@@ -14352,11 +14790,12 @@
             <a:fillRect/>
           </a:stretch>
         </a:blipFill>
+        <a:effectLst/>
       </p:bgPr>
     </p:bg>
     <p:spTree>
       <p:nvGrpSpPr>
-        <p:cNvPr id="103" name="Shape 103"/>
+        <p:cNvPr id="1" name="Shape 103"/>
         <p:cNvGrpSpPr/>
         <p:nvPr/>
       </p:nvGrpSpPr>
@@ -14388,12 +14827,12 @@
           </a:ln>
         </p:spPr>
         <p:txBody>
-          <a:bodyPr anchorCtr="0" anchor="t" bIns="91425" lIns="91425" spcFirstLastPara="1" rIns="91425" wrap="square" tIns="91425">
+          <a:bodyPr spcFirstLastPara="1" wrap="square" lIns="91425" tIns="91425" rIns="91425" bIns="91425" anchor="t" anchorCtr="0">
             <a:noAutofit/>
           </a:bodyPr>
           <a:lstStyle/>
           <a:p>
-            <a:pPr indent="0" lvl="0" marL="0" rtl="0" algn="l">
+            <a:pPr marL="0" lvl="0" indent="0" algn="l" rtl="0">
               <a:spcBef>
                 <a:spcPts val="0"/>
               </a:spcBef>
@@ -14446,12 +14885,12 @@
           </a:ln>
         </p:spPr>
         <p:txBody>
-          <a:bodyPr anchorCtr="0" anchor="t" bIns="91425" lIns="91425" spcFirstLastPara="1" rIns="91425" wrap="square" tIns="91425">
+          <a:bodyPr spcFirstLastPara="1" wrap="square" lIns="91425" tIns="91425" rIns="91425" bIns="91425" anchor="t" anchorCtr="0">
             <a:spAutoFit/>
           </a:bodyPr>
           <a:lstStyle/>
           <a:p>
-            <a:pPr indent="0" lvl="0" marL="0" rtl="0" algn="l">
+            <a:pPr marL="0" lvl="0" indent="0" algn="l" rtl="0">
               <a:spcBef>
                 <a:spcPts val="0"/>
               </a:spcBef>
@@ -14461,7 +14900,7 @@
               <a:buNone/>
             </a:pPr>
             <a:r>
-              <a:rPr b="1" lang="en" sz="3000">
+              <a:rPr lang="en" sz="3000" b="1">
                 <a:solidFill>
                   <a:schemeClr val="dk1"/>
                 </a:solidFill>
@@ -14472,7 +14911,7 @@
               </a:rPr>
               <a:t>¿Qué nos ha contado &lt;&lt;Nombre y Apellido&gt;&gt; ?</a:t>
             </a:r>
-            <a:endParaRPr b="1" sz="3000">
+            <a:endParaRPr sz="3000" b="1">
               <a:solidFill>
                 <a:schemeClr val="dk1"/>
               </a:solidFill>
@@ -14493,7 +14932,7 @@
 </file>
 
 <file path=ppt/slides/slide7.xml><?xml version="1.0" encoding="utf-8"?>
-<p:sld xmlns:a="http://schemas.openxmlformats.org/drawingml/2006/main" xmlns:r="http://schemas.openxmlformats.org/officeDocument/2006/relationships" xmlns:mc="http://schemas.openxmlformats.org/markup-compatibility/2006" xmlns:mv="urn:schemas-microsoft-com:mac:vml" xmlns:p="http://schemas.openxmlformats.org/presentationml/2006/main" xmlns:c="http://schemas.openxmlformats.org/drawingml/2006/chart" xmlns:dgm="http://schemas.openxmlformats.org/drawingml/2006/diagram" xmlns:o="urn:schemas-microsoft-com:office:office" xmlns:v="urn:schemas-microsoft-com:vml" xmlns:pvml="urn:schemas-microsoft-com:office:powerpoint" xmlns:com="http://schemas.openxmlformats.org/drawingml/2006/compatibility" xmlns:p14="http://schemas.microsoft.com/office/powerpoint/2010/main" xmlns:p15="http://schemas.microsoft.com/office/powerpoint/2012/main" xmlns:ahyp="http://schemas.microsoft.com/office/drawing/2018/hyperlinkcolor">
+<p:sld xmlns:a="http://schemas.openxmlformats.org/drawingml/2006/main" xmlns:r="http://schemas.openxmlformats.org/officeDocument/2006/relationships" xmlns:p="http://schemas.openxmlformats.org/presentationml/2006/main">
   <p:cSld>
     <p:bg>
       <p:bgPr>
@@ -14505,11 +14944,12 @@
             <a:fillRect/>
           </a:stretch>
         </a:blipFill>
+        <a:effectLst/>
       </p:bgPr>
     </p:bg>
     <p:spTree>
       <p:nvGrpSpPr>
-        <p:cNvPr id="109" name="Shape 109"/>
+        <p:cNvPr id="1" name="Shape 109"/>
         <p:cNvGrpSpPr/>
         <p:nvPr/>
       </p:nvGrpSpPr>
@@ -14541,12 +14981,12 @@
           </a:ln>
         </p:spPr>
         <p:txBody>
-          <a:bodyPr anchorCtr="0" anchor="t" bIns="91425" lIns="91425" spcFirstLastPara="1" rIns="91425" wrap="square" tIns="91425">
+          <a:bodyPr spcFirstLastPara="1" wrap="square" lIns="91425" tIns="91425" rIns="91425" bIns="91425" anchor="t" anchorCtr="0">
             <a:noAutofit/>
           </a:bodyPr>
           <a:lstStyle/>
           <a:p>
-            <a:pPr indent="0" lvl="0" marL="0" rtl="0" algn="l">
+            <a:pPr marL="0" lvl="0" indent="0" algn="l" rtl="0">
               <a:spcBef>
                 <a:spcPts val="0"/>
               </a:spcBef>
@@ -14591,12 +15031,12 @@
           </a:ln>
         </p:spPr>
         <p:txBody>
-          <a:bodyPr anchorCtr="0" anchor="t" bIns="91425" lIns="91425" spcFirstLastPara="1" rIns="91425" wrap="square" tIns="91425">
+          <a:bodyPr spcFirstLastPara="1" wrap="square" lIns="91425" tIns="91425" rIns="91425" bIns="91425" anchor="t" anchorCtr="0">
             <a:normAutofit/>
           </a:bodyPr>
           <a:lstStyle/>
           <a:p>
-            <a:pPr indent="0" lvl="0" marL="0" rtl="0" algn="l">
+            <a:pPr marL="0" lvl="0" indent="0" algn="l" rtl="0">
               <a:spcBef>
                 <a:spcPts val="0"/>
               </a:spcBef>
@@ -14615,7 +15055,7 @@
               <a:t>Veamos en detalle los estilos predominantes en el perfil de </a:t>
             </a:r>
             <a:r>
-              <a:rPr b="1" lang="en" sz="2900">
+              <a:rPr lang="en" sz="2900" b="1">
                 <a:solidFill>
                   <a:schemeClr val="dk1"/>
                 </a:solidFill>
@@ -14644,7 +15084,7 @@
 </file>
 
 <file path=ppt/slides/slide8.xml><?xml version="1.0" encoding="utf-8"?>
-<p:sld xmlns:a="http://schemas.openxmlformats.org/drawingml/2006/main" xmlns:r="http://schemas.openxmlformats.org/officeDocument/2006/relationships" xmlns:mc="http://schemas.openxmlformats.org/markup-compatibility/2006" xmlns:mv="urn:schemas-microsoft-com:mac:vml" xmlns:p="http://schemas.openxmlformats.org/presentationml/2006/main" xmlns:c="http://schemas.openxmlformats.org/drawingml/2006/chart" xmlns:dgm="http://schemas.openxmlformats.org/drawingml/2006/diagram" xmlns:o="urn:schemas-microsoft-com:office:office" xmlns:v="urn:schemas-microsoft-com:vml" xmlns:pvml="urn:schemas-microsoft-com:office:powerpoint" xmlns:com="http://schemas.openxmlformats.org/drawingml/2006/compatibility" xmlns:p14="http://schemas.microsoft.com/office/powerpoint/2010/main" xmlns:p15="http://schemas.microsoft.com/office/powerpoint/2012/main" xmlns:ahyp="http://schemas.microsoft.com/office/drawing/2018/hyperlinkcolor">
+<p:sld xmlns:a="http://schemas.openxmlformats.org/drawingml/2006/main" xmlns:r="http://schemas.openxmlformats.org/officeDocument/2006/relationships" xmlns:p="http://schemas.openxmlformats.org/presentationml/2006/main">
   <p:cSld>
     <p:bg>
       <p:bgPr>
@@ -14656,11 +15096,12 @@
             <a:fillRect/>
           </a:stretch>
         </a:blipFill>
+        <a:effectLst/>
       </p:bgPr>
     </p:bg>
     <p:spTree>
       <p:nvGrpSpPr>
-        <p:cNvPr id="115" name="Shape 115"/>
+        <p:cNvPr id="1" name="Shape 115"/>
         <p:cNvGrpSpPr/>
         <p:nvPr/>
       </p:nvGrpSpPr>
@@ -14692,12 +15133,12 @@
           </a:ln>
         </p:spPr>
         <p:txBody>
-          <a:bodyPr anchorCtr="0" anchor="t" bIns="91425" lIns="91425" spcFirstLastPara="1" rIns="91425" wrap="square" tIns="91425">
+          <a:bodyPr spcFirstLastPara="1" wrap="square" lIns="91425" tIns="91425" rIns="91425" bIns="91425" anchor="t" anchorCtr="0">
             <a:noAutofit/>
           </a:bodyPr>
           <a:lstStyle/>
           <a:p>
-            <a:pPr indent="0" lvl="0" marL="0" rtl="0" algn="l">
+            <a:pPr marL="0" lvl="0" indent="0" algn="l" rtl="0">
               <a:spcBef>
                 <a:spcPts val="0"/>
               </a:spcBef>
@@ -14750,12 +15191,12 @@
           </a:ln>
         </p:spPr>
         <p:txBody>
-          <a:bodyPr anchorCtr="0" anchor="t" bIns="91425" lIns="91425" spcFirstLastPara="1" rIns="91425" wrap="square" tIns="91425">
+          <a:bodyPr spcFirstLastPara="1" wrap="square" lIns="91425" tIns="91425" rIns="91425" bIns="91425" anchor="t" anchorCtr="0">
             <a:spAutoFit/>
           </a:bodyPr>
           <a:lstStyle/>
           <a:p>
-            <a:pPr indent="0" lvl="0" marL="0" rtl="0" algn="l">
+            <a:pPr marL="0" lvl="0" indent="0" algn="l" rtl="0">
               <a:spcBef>
                 <a:spcPts val="0"/>
               </a:spcBef>
@@ -14765,7 +15206,7 @@
               <a:buNone/>
             </a:pPr>
             <a:r>
-              <a:rPr b="1" lang="en" sz="4200">
+              <a:rPr lang="en" sz="4200" b="1">
                 <a:solidFill>
                   <a:schemeClr val="dk1"/>
                 </a:solidFill>
@@ -14776,7 +15217,7 @@
               </a:rPr>
               <a:t>&lt;&lt;Holland 01&gt;&gt;</a:t>
             </a:r>
-            <a:endParaRPr b="1" sz="4200">
+            <a:endParaRPr sz="4200" b="1">
               <a:solidFill>
                 <a:schemeClr val="dk1"/>
               </a:solidFill>
@@ -14797,7 +15238,7 @@
 </file>
 
 <file path=ppt/slides/slide9.xml><?xml version="1.0" encoding="utf-8"?>
-<p:sld xmlns:a="http://schemas.openxmlformats.org/drawingml/2006/main" xmlns:r="http://schemas.openxmlformats.org/officeDocument/2006/relationships" xmlns:mc="http://schemas.openxmlformats.org/markup-compatibility/2006" xmlns:mv="urn:schemas-microsoft-com:mac:vml" xmlns:p="http://schemas.openxmlformats.org/presentationml/2006/main" xmlns:c="http://schemas.openxmlformats.org/drawingml/2006/chart" xmlns:dgm="http://schemas.openxmlformats.org/drawingml/2006/diagram" xmlns:o="urn:schemas-microsoft-com:office:office" xmlns:v="urn:schemas-microsoft-com:vml" xmlns:pvml="urn:schemas-microsoft-com:office:powerpoint" xmlns:com="http://schemas.openxmlformats.org/drawingml/2006/compatibility" xmlns:p14="http://schemas.microsoft.com/office/powerpoint/2010/main" xmlns:p15="http://schemas.microsoft.com/office/powerpoint/2012/main" xmlns:ahyp="http://schemas.microsoft.com/office/drawing/2018/hyperlinkcolor">
+<p:sld xmlns:a="http://schemas.openxmlformats.org/drawingml/2006/main" xmlns:r="http://schemas.openxmlformats.org/officeDocument/2006/relationships" xmlns:p="http://schemas.openxmlformats.org/presentationml/2006/main">
   <p:cSld>
     <p:bg>
       <p:bgPr>
@@ -14809,11 +15250,12 @@
             <a:fillRect/>
           </a:stretch>
         </a:blipFill>
+        <a:effectLst/>
       </p:bgPr>
     </p:bg>
     <p:spTree>
       <p:nvGrpSpPr>
-        <p:cNvPr id="121" name="Shape 121"/>
+        <p:cNvPr id="1" name="Shape 121"/>
         <p:cNvGrpSpPr/>
         <p:nvPr/>
       </p:nvGrpSpPr>
@@ -14845,12 +15287,12 @@
           </a:ln>
         </p:spPr>
         <p:txBody>
-          <a:bodyPr anchorCtr="0" anchor="t" bIns="91425" lIns="91425" spcFirstLastPara="1" rIns="91425" wrap="square" tIns="91425">
+          <a:bodyPr spcFirstLastPara="1" wrap="square" lIns="91425" tIns="91425" rIns="91425" bIns="91425" anchor="t" anchorCtr="0">
             <a:noAutofit/>
           </a:bodyPr>
           <a:lstStyle/>
           <a:p>
-            <a:pPr indent="0" lvl="0" marL="0" rtl="0" algn="l">
+            <a:pPr marL="0" lvl="0" indent="0" algn="l" rtl="0">
               <a:spcBef>
                 <a:spcPts val="0"/>
               </a:spcBef>
@@ -14903,12 +15345,12 @@
           </a:ln>
         </p:spPr>
         <p:txBody>
-          <a:bodyPr anchorCtr="0" anchor="t" bIns="91425" lIns="91425" spcFirstLastPara="1" rIns="91425" wrap="square" tIns="91425">
+          <a:bodyPr spcFirstLastPara="1" wrap="square" lIns="91425" tIns="91425" rIns="91425" bIns="91425" anchor="t" anchorCtr="0">
             <a:spAutoFit/>
           </a:bodyPr>
           <a:lstStyle/>
           <a:p>
-            <a:pPr indent="0" lvl="0" marL="0" rtl="0" algn="l">
+            <a:pPr marL="0" lvl="0" indent="0" algn="l" rtl="0">
               <a:spcBef>
                 <a:spcPts val="0"/>
               </a:spcBef>
@@ -14918,7 +15360,7 @@
               <a:buNone/>
             </a:pPr>
             <a:r>
-              <a:rPr b="1" lang="en" sz="4200">
+              <a:rPr lang="en" sz="4200" b="1">
                 <a:solidFill>
                   <a:schemeClr val="dk1"/>
                 </a:solidFill>
@@ -14929,7 +15371,7 @@
               </a:rPr>
               <a:t>&lt;&lt;Holland 02&gt;&gt;</a:t>
             </a:r>
-            <a:endParaRPr b="1" sz="4200">
+            <a:endParaRPr sz="4200" b="1">
               <a:solidFill>
                 <a:schemeClr val="dk1"/>
               </a:solidFill>
@@ -14950,7 +15392,288 @@
 </file>
 
 <file path=ppt/theme/theme1.xml><?xml version="1.0" encoding="utf-8"?>
-<a:theme xmlns:a="http://schemas.openxmlformats.org/drawingml/2006/main" xmlns:r="http://schemas.openxmlformats.org/officeDocument/2006/relationships">
+<a:theme xmlns:a="http://schemas.openxmlformats.org/drawingml/2006/main" name="Simple Light">
+  <a:themeElements>
+    <a:clrScheme name="Simple Light">
+      <a:dk1>
+        <a:srgbClr val="000000"/>
+      </a:dk1>
+      <a:lt1>
+        <a:srgbClr val="FFFFFF"/>
+      </a:lt1>
+      <a:dk2>
+        <a:srgbClr val="595959"/>
+      </a:dk2>
+      <a:lt2>
+        <a:srgbClr val="EEEEEE"/>
+      </a:lt2>
+      <a:accent1>
+        <a:srgbClr val="4285F4"/>
+      </a:accent1>
+      <a:accent2>
+        <a:srgbClr val="212121"/>
+      </a:accent2>
+      <a:accent3>
+        <a:srgbClr val="78909C"/>
+      </a:accent3>
+      <a:accent4>
+        <a:srgbClr val="FFAB40"/>
+      </a:accent4>
+      <a:accent5>
+        <a:srgbClr val="0097A7"/>
+      </a:accent5>
+      <a:accent6>
+        <a:srgbClr val="EEFF41"/>
+      </a:accent6>
+      <a:hlink>
+        <a:srgbClr val="0097A7"/>
+      </a:hlink>
+      <a:folHlink>
+        <a:srgbClr val="0097A7"/>
+      </a:folHlink>
+    </a:clrScheme>
+    <a:fontScheme name="Office">
+      <a:majorFont>
+        <a:latin typeface="Arial"/>
+        <a:ea typeface=""/>
+        <a:cs typeface=""/>
+        <a:font script="Jpan" typeface="ＭＳ Ｐゴシック"/>
+        <a:font script="Hang" typeface="맑은 고딕"/>
+        <a:font script="Hans" typeface="宋体"/>
+        <a:font script="Hant" typeface="新細明體"/>
+        <a:font script="Arab" typeface="Times New Roman"/>
+        <a:font script="Hebr" typeface="Times New Roman"/>
+        <a:font script="Thai" typeface="Angsana New"/>
+        <a:font script="Ethi" typeface="Nyala"/>
+        <a:font script="Beng" typeface="Vrinda"/>
+        <a:font script="Gujr" typeface="Shruti"/>
+        <a:font script="Khmr" typeface="MoolBoran"/>
+        <a:font script="Knda" typeface="Tunga"/>
+        <a:font script="Guru" typeface="Raavi"/>
+        <a:font script="Cans" typeface="Euphemia"/>
+        <a:font script="Cher" typeface="Plantagenet Cherokee"/>
+        <a:font script="Yiii" typeface="Microsoft Yi Baiti"/>
+        <a:font script="Tibt" typeface="Microsoft Himalaya"/>
+        <a:font script="Thaa" typeface="MV Boli"/>
+        <a:font script="Deva" typeface="Mangal"/>
+        <a:font script="Telu" typeface="Gautami"/>
+        <a:font script="Taml" typeface="Latha"/>
+        <a:font script="Syrc" typeface="Estrangelo Edessa"/>
+        <a:font script="Orya" typeface="Kalinga"/>
+        <a:font script="Mlym" typeface="Kartika"/>
+        <a:font script="Laoo" typeface="DokChampa"/>
+        <a:font script="Sinh" typeface="Iskoola Pota"/>
+        <a:font script="Mong" typeface="Mongolian Baiti"/>
+        <a:font script="Viet" typeface="Times New Roman"/>
+        <a:font script="Uigh" typeface="Microsoft Uighur"/>
+        <a:font script="Geor" typeface="Sylfaen"/>
+      </a:majorFont>
+      <a:minorFont>
+        <a:latin typeface="Arial"/>
+        <a:ea typeface=""/>
+        <a:cs typeface=""/>
+        <a:font script="Jpan" typeface="ＭＳ Ｐゴシック"/>
+        <a:font script="Hang" typeface="맑은 고딕"/>
+        <a:font script="Hans" typeface="宋体"/>
+        <a:font script="Hant" typeface="新細明體"/>
+        <a:font script="Arab" typeface="Arial"/>
+        <a:font script="Hebr" typeface="Arial"/>
+        <a:font script="Thai" typeface="Cordia New"/>
+        <a:font script="Ethi" typeface="Nyala"/>
+        <a:font script="Beng" typeface="Vrinda"/>
+        <a:font script="Gujr" typeface="Shruti"/>
+        <a:font script="Khmr" typeface="DaunPenh"/>
+        <a:font script="Knda" typeface="Tunga"/>
+        <a:font script="Guru" typeface="Raavi"/>
+        <a:font script="Cans" typeface="Euphemia"/>
+        <a:font script="Cher" typeface="Plantagenet Cherokee"/>
+        <a:font script="Yiii" typeface="Microsoft Yi Baiti"/>
+        <a:font script="Tibt" typeface="Microsoft Himalaya"/>
+        <a:font script="Thaa" typeface="MV Boli"/>
+        <a:font script="Deva" typeface="Mangal"/>
+        <a:font script="Telu" typeface="Gautami"/>
+        <a:font script="Taml" typeface="Latha"/>
+        <a:font script="Syrc" typeface="Estrangelo Edessa"/>
+        <a:font script="Orya" typeface="Kalinga"/>
+        <a:font script="Mlym" typeface="Kartika"/>
+        <a:font script="Laoo" typeface="DokChampa"/>
+        <a:font script="Sinh" typeface="Iskoola Pota"/>
+        <a:font script="Mong" typeface="Mongolian Baiti"/>
+        <a:font script="Viet" typeface="Arial"/>
+        <a:font script="Uigh" typeface="Microsoft Uighur"/>
+        <a:font script="Geor" typeface="Sylfaen"/>
+      </a:minorFont>
+    </a:fontScheme>
+    <a:fmtScheme name="Office">
+      <a:fillStyleLst>
+        <a:solidFill>
+          <a:schemeClr val="phClr"/>
+        </a:solidFill>
+        <a:gradFill rotWithShape="1">
+          <a:gsLst>
+            <a:gs pos="0">
+              <a:schemeClr val="phClr">
+                <a:tint val="50000"/>
+                <a:satMod val="300000"/>
+              </a:schemeClr>
+            </a:gs>
+            <a:gs pos="35000">
+              <a:schemeClr val="phClr">
+                <a:tint val="37000"/>
+                <a:satMod val="300000"/>
+              </a:schemeClr>
+            </a:gs>
+            <a:gs pos="100000">
+              <a:schemeClr val="phClr">
+                <a:tint val="15000"/>
+                <a:satMod val="350000"/>
+              </a:schemeClr>
+            </a:gs>
+          </a:gsLst>
+          <a:lin ang="16200000" scaled="1"/>
+        </a:gradFill>
+        <a:gradFill rotWithShape="1">
+          <a:gsLst>
+            <a:gs pos="0">
+              <a:schemeClr val="phClr">
+                <a:tint val="100000"/>
+                <a:shade val="100000"/>
+                <a:satMod val="130000"/>
+              </a:schemeClr>
+            </a:gs>
+            <a:gs pos="100000">
+              <a:schemeClr val="phClr">
+                <a:tint val="50000"/>
+                <a:shade val="100000"/>
+                <a:satMod val="350000"/>
+              </a:schemeClr>
+            </a:gs>
+          </a:gsLst>
+          <a:lin ang="16200000" scaled="0"/>
+        </a:gradFill>
+      </a:fillStyleLst>
+      <a:lnStyleLst>
+        <a:ln w="9525" cap="flat" cmpd="sng" algn="ctr">
+          <a:solidFill>
+            <a:schemeClr val="phClr">
+              <a:shade val="95000"/>
+              <a:satMod val="105000"/>
+            </a:schemeClr>
+          </a:solidFill>
+          <a:prstDash val="solid"/>
+        </a:ln>
+        <a:ln w="25400" cap="flat" cmpd="sng" algn="ctr">
+          <a:solidFill>
+            <a:schemeClr val="phClr"/>
+          </a:solidFill>
+          <a:prstDash val="solid"/>
+        </a:ln>
+        <a:ln w="38100" cap="flat" cmpd="sng" algn="ctr">
+          <a:solidFill>
+            <a:schemeClr val="phClr"/>
+          </a:solidFill>
+          <a:prstDash val="solid"/>
+        </a:ln>
+      </a:lnStyleLst>
+      <a:effectStyleLst>
+        <a:effectStyle>
+          <a:effectLst>
+            <a:outerShdw blurRad="40000" dist="20000" dir="5400000" rotWithShape="0">
+              <a:srgbClr val="000000">
+                <a:alpha val="38000"/>
+              </a:srgbClr>
+            </a:outerShdw>
+          </a:effectLst>
+        </a:effectStyle>
+        <a:effectStyle>
+          <a:effectLst>
+            <a:outerShdw blurRad="40000" dist="23000" dir="5400000" rotWithShape="0">
+              <a:srgbClr val="000000">
+                <a:alpha val="35000"/>
+              </a:srgbClr>
+            </a:outerShdw>
+          </a:effectLst>
+        </a:effectStyle>
+        <a:effectStyle>
+          <a:effectLst>
+            <a:outerShdw blurRad="40000" dist="23000" dir="5400000" rotWithShape="0">
+              <a:srgbClr val="000000">
+                <a:alpha val="35000"/>
+              </a:srgbClr>
+            </a:outerShdw>
+          </a:effectLst>
+          <a:scene3d>
+            <a:camera prst="orthographicFront">
+              <a:rot lat="0" lon="0" rev="0"/>
+            </a:camera>
+            <a:lightRig rig="threePt" dir="t">
+              <a:rot lat="0" lon="0" rev="1200000"/>
+            </a:lightRig>
+          </a:scene3d>
+          <a:sp3d>
+            <a:bevelT w="63500" h="25400"/>
+          </a:sp3d>
+        </a:effectStyle>
+      </a:effectStyleLst>
+      <a:bgFillStyleLst>
+        <a:solidFill>
+          <a:schemeClr val="phClr"/>
+        </a:solidFill>
+        <a:gradFill rotWithShape="1">
+          <a:gsLst>
+            <a:gs pos="0">
+              <a:schemeClr val="phClr">
+                <a:tint val="40000"/>
+                <a:satMod val="350000"/>
+              </a:schemeClr>
+            </a:gs>
+            <a:gs pos="40000">
+              <a:schemeClr val="phClr">
+                <a:tint val="45000"/>
+                <a:shade val="99000"/>
+                <a:satMod val="350000"/>
+              </a:schemeClr>
+            </a:gs>
+            <a:gs pos="100000">
+              <a:schemeClr val="phClr">
+                <a:shade val="20000"/>
+                <a:satMod val="255000"/>
+              </a:schemeClr>
+            </a:gs>
+          </a:gsLst>
+          <a:path path="circle">
+            <a:fillToRect l="50000" t="-80000" r="50000" b="180000"/>
+          </a:path>
+        </a:gradFill>
+        <a:gradFill rotWithShape="1">
+          <a:gsLst>
+            <a:gs pos="0">
+              <a:schemeClr val="phClr">
+                <a:tint val="80000"/>
+                <a:satMod val="300000"/>
+              </a:schemeClr>
+            </a:gs>
+            <a:gs pos="100000">
+              <a:schemeClr val="phClr">
+                <a:shade val="30000"/>
+                <a:satMod val="200000"/>
+              </a:schemeClr>
+            </a:gs>
+          </a:gsLst>
+          <a:path path="circle">
+            <a:fillToRect l="50000" t="50000" r="50000" b="50000"/>
+          </a:path>
+        </a:gradFill>
+      </a:bgFillStyleLst>
+    </a:fmtScheme>
+  </a:themeElements>
+  <a:objectDefaults/>
+  <a:extraClrSchemeLst/>
+</a:theme>
+</file>
+
+<file path=ppt/theme/theme2.xml><?xml version="1.0" encoding="utf-8"?>
+<a:theme xmlns:a="http://schemas.openxmlformats.org/drawingml/2006/main">
   <a:themeElements>
     <a:clrScheme name="Default">
       <a:dk1>
@@ -15225,284 +15948,7 @@
       </a:bgFillStyleLst>
     </a:fmtScheme>
   </a:themeElements>
-</a:theme>
-</file>
-
-<file path=ppt/theme/theme2.xml><?xml version="1.0" encoding="utf-8"?>
-<a:theme xmlns:a="http://schemas.openxmlformats.org/drawingml/2006/main" xmlns:r="http://schemas.openxmlformats.org/officeDocument/2006/relationships" name="Simple Light">
-  <a:themeElements>
-    <a:clrScheme name="Simple Light">
-      <a:dk1>
-        <a:srgbClr val="000000"/>
-      </a:dk1>
-      <a:lt1>
-        <a:srgbClr val="FFFFFF"/>
-      </a:lt1>
-      <a:dk2>
-        <a:srgbClr val="595959"/>
-      </a:dk2>
-      <a:lt2>
-        <a:srgbClr val="EEEEEE"/>
-      </a:lt2>
-      <a:accent1>
-        <a:srgbClr val="4285F4"/>
-      </a:accent1>
-      <a:accent2>
-        <a:srgbClr val="212121"/>
-      </a:accent2>
-      <a:accent3>
-        <a:srgbClr val="78909C"/>
-      </a:accent3>
-      <a:accent4>
-        <a:srgbClr val="FFAB40"/>
-      </a:accent4>
-      <a:accent5>
-        <a:srgbClr val="0097A7"/>
-      </a:accent5>
-      <a:accent6>
-        <a:srgbClr val="EEFF41"/>
-      </a:accent6>
-      <a:hlink>
-        <a:srgbClr val="0097A7"/>
-      </a:hlink>
-      <a:folHlink>
-        <a:srgbClr val="0097A7"/>
-      </a:folHlink>
-    </a:clrScheme>
-    <a:fontScheme name="Office">
-      <a:majorFont>
-        <a:latin typeface="Arial"/>
-        <a:ea typeface=""/>
-        <a:cs typeface=""/>
-        <a:font script="Jpan" typeface="ＭＳ Ｐゴシック"/>
-        <a:font script="Hang" typeface="맑은 고딕"/>
-        <a:font script="Hans" typeface="宋体"/>
-        <a:font script="Hant" typeface="新細明體"/>
-        <a:font script="Arab" typeface="Times New Roman"/>
-        <a:font script="Hebr" typeface="Times New Roman"/>
-        <a:font script="Thai" typeface="Angsana New"/>
-        <a:font script="Ethi" typeface="Nyala"/>
-        <a:font script="Beng" typeface="Vrinda"/>
-        <a:font script="Gujr" typeface="Shruti"/>
-        <a:font script="Khmr" typeface="MoolBoran"/>
-        <a:font script="Knda" typeface="Tunga"/>
-        <a:font script="Guru" typeface="Raavi"/>
-        <a:font script="Cans" typeface="Euphemia"/>
-        <a:font script="Cher" typeface="Plantagenet Cherokee"/>
-        <a:font script="Yiii" typeface="Microsoft Yi Baiti"/>
-        <a:font script="Tibt" typeface="Microsoft Himalaya"/>
-        <a:font script="Thaa" typeface="MV Boli"/>
-        <a:font script="Deva" typeface="Mangal"/>
-        <a:font script="Telu" typeface="Gautami"/>
-        <a:font script="Taml" typeface="Latha"/>
-        <a:font script="Syrc" typeface="Estrangelo Edessa"/>
-        <a:font script="Orya" typeface="Kalinga"/>
-        <a:font script="Mlym" typeface="Kartika"/>
-        <a:font script="Laoo" typeface="DokChampa"/>
-        <a:font script="Sinh" typeface="Iskoola Pota"/>
-        <a:font script="Mong" typeface="Mongolian Baiti"/>
-        <a:font script="Viet" typeface="Times New Roman"/>
-        <a:font script="Uigh" typeface="Microsoft Uighur"/>
-        <a:font script="Geor" typeface="Sylfaen"/>
-      </a:majorFont>
-      <a:minorFont>
-        <a:latin typeface="Arial"/>
-        <a:ea typeface=""/>
-        <a:cs typeface=""/>
-        <a:font script="Jpan" typeface="ＭＳ Ｐゴシック"/>
-        <a:font script="Hang" typeface="맑은 고딕"/>
-        <a:font script="Hans" typeface="宋体"/>
-        <a:font script="Hant" typeface="新細明體"/>
-        <a:font script="Arab" typeface="Arial"/>
-        <a:font script="Hebr" typeface="Arial"/>
-        <a:font script="Thai" typeface="Cordia New"/>
-        <a:font script="Ethi" typeface="Nyala"/>
-        <a:font script="Beng" typeface="Vrinda"/>
-        <a:font script="Gujr" typeface="Shruti"/>
-        <a:font script="Khmr" typeface="DaunPenh"/>
-        <a:font script="Knda" typeface="Tunga"/>
-        <a:font script="Guru" typeface="Raavi"/>
-        <a:font script="Cans" typeface="Euphemia"/>
-        <a:font script="Cher" typeface="Plantagenet Cherokee"/>
-        <a:font script="Yiii" typeface="Microsoft Yi Baiti"/>
-        <a:font script="Tibt" typeface="Microsoft Himalaya"/>
-        <a:font script="Thaa" typeface="MV Boli"/>
-        <a:font script="Deva" typeface="Mangal"/>
-        <a:font script="Telu" typeface="Gautami"/>
-        <a:font script="Taml" typeface="Latha"/>
-        <a:font script="Syrc" typeface="Estrangelo Edessa"/>
-        <a:font script="Orya" typeface="Kalinga"/>
-        <a:font script="Mlym" typeface="Kartika"/>
-        <a:font script="Laoo" typeface="DokChampa"/>
-        <a:font script="Sinh" typeface="Iskoola Pota"/>
-        <a:font script="Mong" typeface="Mongolian Baiti"/>
-        <a:font script="Viet" typeface="Arial"/>
-        <a:font script="Uigh" typeface="Microsoft Uighur"/>
-        <a:font script="Geor" typeface="Sylfaen"/>
-      </a:minorFont>
-    </a:fontScheme>
-    <a:fmtScheme name="Office">
-      <a:fillStyleLst>
-        <a:solidFill>
-          <a:schemeClr val="phClr"/>
-        </a:solidFill>
-        <a:gradFill rotWithShape="1">
-          <a:gsLst>
-            <a:gs pos="0">
-              <a:schemeClr val="phClr">
-                <a:tint val="50000"/>
-                <a:satMod val="300000"/>
-              </a:schemeClr>
-            </a:gs>
-            <a:gs pos="35000">
-              <a:schemeClr val="phClr">
-                <a:tint val="37000"/>
-                <a:satMod val="300000"/>
-              </a:schemeClr>
-            </a:gs>
-            <a:gs pos="100000">
-              <a:schemeClr val="phClr">
-                <a:tint val="15000"/>
-                <a:satMod val="350000"/>
-              </a:schemeClr>
-            </a:gs>
-          </a:gsLst>
-          <a:lin ang="16200000" scaled="1"/>
-        </a:gradFill>
-        <a:gradFill rotWithShape="1">
-          <a:gsLst>
-            <a:gs pos="0">
-              <a:schemeClr val="phClr">
-                <a:tint val="100000"/>
-                <a:shade val="100000"/>
-                <a:satMod val="130000"/>
-              </a:schemeClr>
-            </a:gs>
-            <a:gs pos="100000">
-              <a:schemeClr val="phClr">
-                <a:tint val="50000"/>
-                <a:shade val="100000"/>
-                <a:satMod val="350000"/>
-              </a:schemeClr>
-            </a:gs>
-          </a:gsLst>
-          <a:lin ang="16200000" scaled="0"/>
-        </a:gradFill>
-      </a:fillStyleLst>
-      <a:lnStyleLst>
-        <a:ln w="9525" cap="flat" cmpd="sng" algn="ctr">
-          <a:solidFill>
-            <a:schemeClr val="phClr">
-              <a:shade val="95000"/>
-              <a:satMod val="105000"/>
-            </a:schemeClr>
-          </a:solidFill>
-          <a:prstDash val="solid"/>
-        </a:ln>
-        <a:ln w="25400" cap="flat" cmpd="sng" algn="ctr">
-          <a:solidFill>
-            <a:schemeClr val="phClr"/>
-          </a:solidFill>
-          <a:prstDash val="solid"/>
-        </a:ln>
-        <a:ln w="38100" cap="flat" cmpd="sng" algn="ctr">
-          <a:solidFill>
-            <a:schemeClr val="phClr"/>
-          </a:solidFill>
-          <a:prstDash val="solid"/>
-        </a:ln>
-      </a:lnStyleLst>
-      <a:effectStyleLst>
-        <a:effectStyle>
-          <a:effectLst>
-            <a:outerShdw blurRad="40000" dist="20000" dir="5400000" rotWithShape="0">
-              <a:srgbClr val="000000">
-                <a:alpha val="38000"/>
-              </a:srgbClr>
-            </a:outerShdw>
-          </a:effectLst>
-        </a:effectStyle>
-        <a:effectStyle>
-          <a:effectLst>
-            <a:outerShdw blurRad="40000" dist="23000" dir="5400000" rotWithShape="0">
-              <a:srgbClr val="000000">
-                <a:alpha val="35000"/>
-              </a:srgbClr>
-            </a:outerShdw>
-          </a:effectLst>
-        </a:effectStyle>
-        <a:effectStyle>
-          <a:effectLst>
-            <a:outerShdw blurRad="40000" dist="23000" dir="5400000" rotWithShape="0">
-              <a:srgbClr val="000000">
-                <a:alpha val="35000"/>
-              </a:srgbClr>
-            </a:outerShdw>
-          </a:effectLst>
-          <a:scene3d>
-            <a:camera prst="orthographicFront">
-              <a:rot lat="0" lon="0" rev="0"/>
-            </a:camera>
-            <a:lightRig rig="threePt" dir="t">
-              <a:rot lat="0" lon="0" rev="1200000"/>
-            </a:lightRig>
-          </a:scene3d>
-          <a:sp3d>
-            <a:bevelT w="63500" h="25400"/>
-          </a:sp3d>
-        </a:effectStyle>
-      </a:effectStyleLst>
-      <a:bgFillStyleLst>
-        <a:solidFill>
-          <a:schemeClr val="phClr"/>
-        </a:solidFill>
-        <a:gradFill rotWithShape="1">
-          <a:gsLst>
-            <a:gs pos="0">
-              <a:schemeClr val="phClr">
-                <a:tint val="40000"/>
-                <a:satMod val="350000"/>
-              </a:schemeClr>
-            </a:gs>
-            <a:gs pos="40000">
-              <a:schemeClr val="phClr">
-                <a:tint val="45000"/>
-                <a:shade val="99000"/>
-                <a:satMod val="350000"/>
-              </a:schemeClr>
-            </a:gs>
-            <a:gs pos="100000">
-              <a:schemeClr val="phClr">
-                <a:shade val="20000"/>
-                <a:satMod val="255000"/>
-              </a:schemeClr>
-            </a:gs>
-          </a:gsLst>
-          <a:path path="circle">
-            <a:fillToRect l="50000" t="-80000" r="50000" b="180000"/>
-          </a:path>
-        </a:gradFill>
-        <a:gradFill rotWithShape="1">
-          <a:gsLst>
-            <a:gs pos="0">
-              <a:schemeClr val="phClr">
-                <a:tint val="80000"/>
-                <a:satMod val="300000"/>
-              </a:schemeClr>
-            </a:gs>
-            <a:gs pos="100000">
-              <a:schemeClr val="phClr">
-                <a:shade val="30000"/>
-                <a:satMod val="200000"/>
-              </a:schemeClr>
-            </a:gs>
-          </a:gsLst>
-          <a:path path="circle">
-            <a:fillToRect l="50000" t="50000" r="50000" b="50000"/>
-          </a:path>
-        </a:gradFill>
-      </a:bgFillStyleLst>
-    </a:fmtScheme>
-  </a:themeElements>
+  <a:objectDefaults/>
+  <a:extraClrSchemeLst/>
 </a:theme>
 </file>
--- a/assets/Template_Autoconocimiento 2.0 (Padres - Counseling).pptx
+++ b/assets/Template_Autoconocimiento 2.0 (Padres - Counseling).pptx
@@ -296,190 +296,66 @@
 </p:presentation>
 </file>
 
+<file path=ppt/revisionInfo.xml><?xml version="1.0" encoding="utf-8"?>
+<p1510:revInfo xmlns:a="http://schemas.openxmlformats.org/drawingml/2006/main" xmlns:r="http://schemas.openxmlformats.org/officeDocument/2006/relationships" xmlns:p1510="http://schemas.microsoft.com/office/powerpoint/2015/10/main">
+  <p1510:revLst>
+    <p1510:client id="{E1EA94A1-D25D-4285-962E-3C7C3E22BFD3}" v="2" dt="2026-03-02T22:45:07.783"/>
+  </p1510:revLst>
+</p1510:revInfo>
+</file>
+
 <file path=ppt/changesInfos/changesInfo1.xml><?xml version="1.0" encoding="utf-8"?>
 <pc:chgInfo xmlns:a="http://schemas.openxmlformats.org/drawingml/2006/main" xmlns:r="http://schemas.openxmlformats.org/officeDocument/2006/relationships" xmlns:ac="http://schemas.microsoft.com/office/drawing/2013/main/command" xmlns:pc="http://schemas.microsoft.com/office/powerpoint/2013/main/command">
   <pc:docChgLst>
     <pc:chgData name="juani vila bach" userId="140d79d91c36b714" providerId="LiveId" clId="{681BBBA0-CB6B-4408-8383-25A2ECA50787}"/>
     <pc:docChg chg="undo custSel modSld">
-      <pc:chgData name="juani vila bach" userId="140d79d91c36b714" providerId="LiveId" clId="{681BBBA0-CB6B-4408-8383-25A2ECA50787}" dt="2025-12-28T06:00:35.493" v="18" actId="255"/>
+      <pc:chgData name="juani vila bach" userId="140d79d91c36b714" providerId="LiveId" clId="{681BBBA0-CB6B-4408-8383-25A2ECA50787}" dt="2026-03-02T22:45:10.132" v="33" actId="20577"/>
       <pc:docMkLst>
         <pc:docMk/>
       </pc:docMkLst>
-      <pc:sldChg chg="modSp mod">
-        <pc:chgData name="juani vila bach" userId="140d79d91c36b714" providerId="LiveId" clId="{681BBBA0-CB6B-4408-8383-25A2ECA50787}" dt="2025-12-28T05:59:19.388" v="9" actId="20577"/>
-        <pc:sldMkLst>
-          <pc:docMk/>
-          <pc:sldMk cId="0" sldId="260"/>
-        </pc:sldMkLst>
-        <pc:spChg chg="mod">
-          <ac:chgData name="juani vila bach" userId="140d79d91c36b714" providerId="LiveId" clId="{681BBBA0-CB6B-4408-8383-25A2ECA50787}" dt="2025-12-28T05:59:09.552" v="1" actId="20577"/>
-          <ac:spMkLst>
-            <pc:docMk/>
-            <pc:sldMk cId="0" sldId="260"/>
-            <ac:spMk id="77" creationId="{00000000-0000-0000-0000-000000000000}"/>
-          </ac:spMkLst>
-        </pc:spChg>
-        <pc:spChg chg="mod">
-          <ac:chgData name="juani vila bach" userId="140d79d91c36b714" providerId="LiveId" clId="{681BBBA0-CB6B-4408-8383-25A2ECA50787}" dt="2025-12-28T05:59:10.811" v="2" actId="20577"/>
-          <ac:spMkLst>
-            <pc:docMk/>
-            <pc:sldMk cId="0" sldId="260"/>
-            <ac:spMk id="80" creationId="{00000000-0000-0000-0000-000000000000}"/>
-          </ac:spMkLst>
-        </pc:spChg>
-        <pc:spChg chg="mod">
-          <ac:chgData name="juani vila bach" userId="140d79d91c36b714" providerId="LiveId" clId="{681BBBA0-CB6B-4408-8383-25A2ECA50787}" dt="2025-12-28T05:59:11.895" v="3" actId="20577"/>
-          <ac:spMkLst>
-            <pc:docMk/>
-            <pc:sldMk cId="0" sldId="260"/>
-            <ac:spMk id="83" creationId="{00000000-0000-0000-0000-000000000000}"/>
-          </ac:spMkLst>
-        </pc:spChg>
-        <pc:spChg chg="mod">
-          <ac:chgData name="juani vila bach" userId="140d79d91c36b714" providerId="LiveId" clId="{681BBBA0-CB6B-4408-8383-25A2ECA50787}" dt="2025-12-28T05:59:12.796" v="4" actId="20577"/>
-          <ac:spMkLst>
-            <pc:docMk/>
-            <pc:sldMk cId="0" sldId="260"/>
-            <ac:spMk id="86" creationId="{00000000-0000-0000-0000-000000000000}"/>
-          </ac:spMkLst>
-        </pc:spChg>
-        <pc:spChg chg="mod">
-          <ac:chgData name="juani vila bach" userId="140d79d91c36b714" providerId="LiveId" clId="{681BBBA0-CB6B-4408-8383-25A2ECA50787}" dt="2025-12-28T05:59:14.330" v="5" actId="20577"/>
-          <ac:spMkLst>
-            <pc:docMk/>
-            <pc:sldMk cId="0" sldId="260"/>
-            <ac:spMk id="89" creationId="{00000000-0000-0000-0000-000000000000}"/>
-          </ac:spMkLst>
-        </pc:spChg>
-        <pc:spChg chg="mod">
-          <ac:chgData name="juani vila bach" userId="140d79d91c36b714" providerId="LiveId" clId="{681BBBA0-CB6B-4408-8383-25A2ECA50787}" dt="2025-12-28T05:59:15.499" v="6" actId="20577"/>
-          <ac:spMkLst>
-            <pc:docMk/>
-            <pc:sldMk cId="0" sldId="260"/>
-            <ac:spMk id="92" creationId="{00000000-0000-0000-0000-000000000000}"/>
-          </ac:spMkLst>
-        </pc:spChg>
-        <pc:spChg chg="mod">
-          <ac:chgData name="juani vila bach" userId="140d79d91c36b714" providerId="LiveId" clId="{681BBBA0-CB6B-4408-8383-25A2ECA50787}" dt="2025-12-28T05:59:19.388" v="9" actId="20577"/>
-          <ac:spMkLst>
-            <pc:docMk/>
-            <pc:sldMk cId="0" sldId="260"/>
-            <ac:spMk id="95" creationId="{00000000-0000-0000-0000-000000000000}"/>
-          </ac:spMkLst>
-        </pc:spChg>
-        <pc:spChg chg="mod">
-          <ac:chgData name="juani vila bach" userId="140d79d91c36b714" providerId="LiveId" clId="{681BBBA0-CB6B-4408-8383-25A2ECA50787}" dt="2025-12-28T05:59:08.390" v="0" actId="20577"/>
-          <ac:spMkLst>
-            <pc:docMk/>
-            <pc:sldMk cId="0" sldId="260"/>
-            <ac:spMk id="98" creationId="{00000000-0000-0000-0000-000000000000}"/>
-          </ac:spMkLst>
-        </pc:spChg>
-      </pc:sldChg>
-      <pc:sldChg chg="modSp mod">
-        <pc:chgData name="juani vila bach" userId="140d79d91c36b714" providerId="LiveId" clId="{681BBBA0-CB6B-4408-8383-25A2ECA50787}" dt="2025-12-28T06:00:02.732" v="13" actId="1076"/>
-        <pc:sldMkLst>
-          <pc:docMk/>
-          <pc:sldMk cId="0" sldId="267"/>
-        </pc:sldMkLst>
-        <pc:spChg chg="mod">
-          <ac:chgData name="juani vila bach" userId="140d79d91c36b714" providerId="LiveId" clId="{681BBBA0-CB6B-4408-8383-25A2ECA50787}" dt="2025-12-28T06:00:02.732" v="13" actId="1076"/>
-          <ac:spMkLst>
-            <pc:docMk/>
-            <pc:sldMk cId="0" sldId="267"/>
-            <ac:spMk id="158" creationId="{00000000-0000-0000-0000-000000000000}"/>
-          </ac:spMkLst>
-        </pc:spChg>
-        <pc:spChg chg="mod">
-          <ac:chgData name="juani vila bach" userId="140d79d91c36b714" providerId="LiveId" clId="{681BBBA0-CB6B-4408-8383-25A2ECA50787}" dt="2025-12-28T05:59:40.353" v="10" actId="1076"/>
-          <ac:spMkLst>
-            <pc:docMk/>
-            <pc:sldMk cId="0" sldId="267"/>
-            <ac:spMk id="161" creationId="{00000000-0000-0000-0000-000000000000}"/>
-          </ac:spMkLst>
-        </pc:spChg>
-      </pc:sldChg>
-      <pc:sldChg chg="modSp mod">
-        <pc:chgData name="juani vila bach" userId="140d79d91c36b714" providerId="LiveId" clId="{681BBBA0-CB6B-4408-8383-25A2ECA50787}" dt="2025-12-28T06:00:21.796" v="15" actId="255"/>
+      <pc:sldChg chg="addSp delSp modSp mod">
+        <pc:chgData name="juani vila bach" userId="140d79d91c36b714" providerId="LiveId" clId="{681BBBA0-CB6B-4408-8383-25A2ECA50787}" dt="2026-03-02T22:41:24.207" v="20" actId="478"/>
         <pc:sldMkLst>
           <pc:docMk/>
           <pc:sldMk cId="0" sldId="273"/>
         </pc:sldMkLst>
-        <pc:spChg chg="mod">
-          <ac:chgData name="juani vila bach" userId="140d79d91c36b714" providerId="LiveId" clId="{681BBBA0-CB6B-4408-8383-25A2ECA50787}" dt="2025-12-28T06:00:21.796" v="15" actId="255"/>
+        <pc:spChg chg="add del">
+          <ac:chgData name="juani vila bach" userId="140d79d91c36b714" providerId="LiveId" clId="{681BBBA0-CB6B-4408-8383-25A2ECA50787}" dt="2026-03-02T22:41:24.207" v="20" actId="478"/>
           <ac:spMkLst>
             <pc:docMk/>
             <pc:sldMk cId="0" sldId="273"/>
-            <ac:spMk id="214" creationId="{00000000-0000-0000-0000-000000000000}"/>
-          </ac:spMkLst>
-        </pc:spChg>
-        <pc:spChg chg="mod">
-          <ac:chgData name="juani vila bach" userId="140d79d91c36b714" providerId="LiveId" clId="{681BBBA0-CB6B-4408-8383-25A2ECA50787}" dt="2025-12-28T06:00:21.796" v="15" actId="255"/>
-          <ac:spMkLst>
-            <pc:docMk/>
-            <pc:sldMk cId="0" sldId="273"/>
-            <ac:spMk id="215" creationId="{00000000-0000-0000-0000-000000000000}"/>
-          </ac:spMkLst>
-        </pc:spChg>
-        <pc:spChg chg="mod">
-          <ac:chgData name="juani vila bach" userId="140d79d91c36b714" providerId="LiveId" clId="{681BBBA0-CB6B-4408-8383-25A2ECA50787}" dt="2025-12-28T06:00:21.796" v="15" actId="255"/>
-          <ac:spMkLst>
-            <pc:docMk/>
-            <pc:sldMk cId="0" sldId="273"/>
-            <ac:spMk id="216" creationId="{00000000-0000-0000-0000-000000000000}"/>
-          </ac:spMkLst>
-        </pc:spChg>
-        <pc:spChg chg="mod">
-          <ac:chgData name="juani vila bach" userId="140d79d91c36b714" providerId="LiveId" clId="{681BBBA0-CB6B-4408-8383-25A2ECA50787}" dt="2025-12-28T06:00:21.796" v="15" actId="255"/>
-          <ac:spMkLst>
-            <pc:docMk/>
-            <pc:sldMk cId="0" sldId="273"/>
-            <ac:spMk id="217" creationId="{00000000-0000-0000-0000-000000000000}"/>
+            <ac:spMk id="2" creationId="{2B98F375-FB93-7420-7E07-926C2FD18049}"/>
           </ac:spMkLst>
         </pc:spChg>
       </pc:sldChg>
-      <pc:sldChg chg="modSp mod">
-        <pc:chgData name="juani vila bach" userId="140d79d91c36b714" providerId="LiveId" clId="{681BBBA0-CB6B-4408-8383-25A2ECA50787}" dt="2025-12-28T06:00:28.365" v="16" actId="255"/>
-        <pc:sldMkLst>
-          <pc:docMk/>
-          <pc:sldMk cId="0" sldId="274"/>
-        </pc:sldMkLst>
-        <pc:spChg chg="mod">
-          <ac:chgData name="juani vila bach" userId="140d79d91c36b714" providerId="LiveId" clId="{681BBBA0-CB6B-4408-8383-25A2ECA50787}" dt="2025-12-28T06:00:28.365" v="16" actId="255"/>
-          <ac:spMkLst>
-            <pc:docMk/>
-            <pc:sldMk cId="0" sldId="274"/>
-            <ac:spMk id="223" creationId="{00000000-0000-0000-0000-000000000000}"/>
-          </ac:spMkLst>
-        </pc:spChg>
-      </pc:sldChg>
-      <pc:sldChg chg="modSp mod">
-        <pc:chgData name="juani vila bach" userId="140d79d91c36b714" providerId="LiveId" clId="{681BBBA0-CB6B-4408-8383-25A2ECA50787}" dt="2025-12-28T06:00:32.009" v="17" actId="255"/>
+      <pc:sldChg chg="addSp delSp modSp mod">
+        <pc:chgData name="juani vila bach" userId="140d79d91c36b714" providerId="LiveId" clId="{681BBBA0-CB6B-4408-8383-25A2ECA50787}" dt="2026-03-02T22:45:10.132" v="33" actId="20577"/>
         <pc:sldMkLst>
           <pc:docMk/>
           <pc:sldMk cId="0" sldId="275"/>
         </pc:sldMkLst>
-        <pc:spChg chg="mod">
-          <ac:chgData name="juani vila bach" userId="140d79d91c36b714" providerId="LiveId" clId="{681BBBA0-CB6B-4408-8383-25A2ECA50787}" dt="2025-12-28T06:00:32.009" v="17" actId="255"/>
+        <pc:spChg chg="add del mod">
+          <ac:chgData name="juani vila bach" userId="140d79d91c36b714" providerId="LiveId" clId="{681BBBA0-CB6B-4408-8383-25A2ECA50787}" dt="2026-03-02T22:44:59.454" v="28" actId="478"/>
+          <ac:spMkLst>
+            <pc:docMk/>
+            <pc:sldMk cId="0" sldId="275"/>
+            <ac:spMk id="2" creationId="{540565C8-7F72-033B-3BF4-AFC40FD32019}"/>
+          </ac:spMkLst>
+        </pc:spChg>
+        <pc:spChg chg="add mod">
+          <ac:chgData name="juani vila bach" userId="140d79d91c36b714" providerId="LiveId" clId="{681BBBA0-CB6B-4408-8383-25A2ECA50787}" dt="2026-03-02T22:45:10.132" v="33" actId="20577"/>
+          <ac:spMkLst>
+            <pc:docMk/>
+            <pc:sldMk cId="0" sldId="275"/>
+            <ac:spMk id="3" creationId="{4F524C5E-FEA7-9C9E-6288-4E7E629BBC1F}"/>
+          </ac:spMkLst>
+        </pc:spChg>
+        <pc:spChg chg="del mod">
+          <ac:chgData name="juani vila bach" userId="140d79d91c36b714" providerId="LiveId" clId="{681BBBA0-CB6B-4408-8383-25A2ECA50787}" dt="2026-03-02T22:45:02.144" v="30" actId="478"/>
           <ac:spMkLst>
             <pc:docMk/>
             <pc:sldMk cId="0" sldId="275"/>
             <ac:spMk id="231" creationId="{00000000-0000-0000-0000-000000000000}"/>
-          </ac:spMkLst>
-        </pc:spChg>
-      </pc:sldChg>
-      <pc:sldChg chg="modSp mod">
-        <pc:chgData name="juani vila bach" userId="140d79d91c36b714" providerId="LiveId" clId="{681BBBA0-CB6B-4408-8383-25A2ECA50787}" dt="2025-12-28T06:00:35.493" v="18" actId="255"/>
-        <pc:sldMkLst>
-          <pc:docMk/>
-          <pc:sldMk cId="0" sldId="276"/>
-        </pc:sldMkLst>
-        <pc:spChg chg="mod">
-          <ac:chgData name="juani vila bach" userId="140d79d91c36b714" providerId="LiveId" clId="{681BBBA0-CB6B-4408-8383-25A2ECA50787}" dt="2025-12-28T06:00:35.493" v="18" actId="255"/>
-          <ac:spMkLst>
-            <pc:docMk/>
-            <pc:sldMk cId="0" sldId="276"/>
-            <ac:spMk id="239" creationId="{00000000-0000-0000-0000-000000000000}"/>
           </ac:spMkLst>
         </pc:spChg>
       </pc:sldChg>
@@ -11890,7 +11766,7 @@
               <a:buNone/>
             </a:pPr>
             <a:r>
-              <a:rPr lang="en" sz="2800" b="1">
+              <a:rPr lang="en" sz="2800" b="1" dirty="0">
                 <a:solidFill>
                   <a:schemeClr val="dk1"/>
                 </a:solidFill>
@@ -11901,7 +11777,7 @@
               </a:rPr>
               <a:t>&lt;&lt;Carrera 01&gt;&gt;</a:t>
             </a:r>
-            <a:endParaRPr sz="2800" b="1">
+            <a:endParaRPr sz="2800" b="1" dirty="0">
               <a:solidFill>
                 <a:schemeClr val="dk1"/>
               </a:solidFill>
@@ -12239,88 +12115,6 @@
       </p:grpSpPr>
       <p:sp>
         <p:nvSpPr>
-          <p:cNvPr id="231" name="Google Shape;231;p32"/>
-          <p:cNvSpPr txBox="1"/>
-          <p:nvPr/>
-        </p:nvSpPr>
-        <p:spPr>
-          <a:xfrm>
-            <a:off x="1251450" y="1188625"/>
-            <a:ext cx="7784100" cy="673200"/>
-          </a:xfrm>
-          <a:prstGeom prst="rect">
-            <a:avLst/>
-          </a:prstGeom>
-          <a:noFill/>
-          <a:ln>
-            <a:noFill/>
-          </a:ln>
-        </p:spPr>
-        <p:txBody>
-          <a:bodyPr spcFirstLastPara="1" wrap="square" lIns="91425" tIns="91425" rIns="91425" bIns="91425" anchor="ctr" anchorCtr="0">
-            <a:noAutofit/>
-          </a:bodyPr>
-          <a:lstStyle/>
-          <a:p>
-            <a:pPr marL="0" lvl="0" indent="0" algn="ctr" rtl="0">
-              <a:spcBef>
-                <a:spcPts val="0"/>
-              </a:spcBef>
-              <a:spcAft>
-                <a:spcPts val="0"/>
-              </a:spcAft>
-              <a:buNone/>
-            </a:pPr>
-            <a:r>
-              <a:rPr lang="en" sz="3500" b="1" dirty="0">
-                <a:solidFill>
-                  <a:schemeClr val="dk1"/>
-                </a:solidFill>
-                <a:latin typeface="Public Sans"/>
-                <a:ea typeface="Public Sans"/>
-                <a:cs typeface="Public Sans"/>
-                <a:sym typeface="Public Sans"/>
-              </a:rPr>
-              <a:t>&lt;&lt;Carrera </a:t>
-            </a:r>
-            <a:r>
-              <a:rPr lang="en" sz="2800" b="1" dirty="0">
-                <a:solidFill>
-                  <a:schemeClr val="dk1"/>
-                </a:solidFill>
-                <a:latin typeface="Public Sans"/>
-                <a:ea typeface="Public Sans"/>
-                <a:cs typeface="Public Sans"/>
-                <a:sym typeface="Public Sans"/>
-              </a:rPr>
-              <a:t>02</a:t>
-            </a:r>
-            <a:r>
-              <a:rPr lang="en" sz="3500" b="1" dirty="0">
-                <a:solidFill>
-                  <a:schemeClr val="dk1"/>
-                </a:solidFill>
-                <a:latin typeface="Public Sans"/>
-                <a:ea typeface="Public Sans"/>
-                <a:cs typeface="Public Sans"/>
-                <a:sym typeface="Public Sans"/>
-              </a:rPr>
-              <a:t>&gt;&gt;</a:t>
-            </a:r>
-            <a:endParaRPr sz="3500" b="1" dirty="0">
-              <a:solidFill>
-                <a:schemeClr val="dk1"/>
-              </a:solidFill>
-              <a:latin typeface="Public Sans"/>
-              <a:ea typeface="Public Sans"/>
-              <a:cs typeface="Public Sans"/>
-              <a:sym typeface="Public Sans"/>
-            </a:endParaRPr>
-          </a:p>
-        </p:txBody>
-      </p:sp>
-      <p:sp>
-        <p:nvSpPr>
           <p:cNvPr id="232" name="Google Shape;232;p32"/>
           <p:cNvSpPr txBox="1"/>
           <p:nvPr/>
@@ -12488,6 +12282,70 @@
               <a:t>&lt;&lt;DESC 02 Carrera 02&gt;&gt;</a:t>
             </a:r>
             <a:endParaRPr sz="2500">
+              <a:solidFill>
+                <a:schemeClr val="dk1"/>
+              </a:solidFill>
+              <a:latin typeface="Public Sans"/>
+              <a:ea typeface="Public Sans"/>
+              <a:cs typeface="Public Sans"/>
+              <a:sym typeface="Public Sans"/>
+            </a:endParaRPr>
+          </a:p>
+        </p:txBody>
+      </p:sp>
+      <p:sp>
+        <p:nvSpPr>
+          <p:cNvPr id="3" name="Google Shape;239;p33">
+            <a:extLst>
+              <a:ext uri="{FF2B5EF4-FFF2-40B4-BE49-F238E27FC236}">
+                <a16:creationId xmlns:a16="http://schemas.microsoft.com/office/drawing/2014/main" id="{4F524C5E-FEA7-9C9E-6288-4E7E629BBC1F}"/>
+              </a:ext>
+            </a:extLst>
+          </p:cNvPr>
+          <p:cNvSpPr txBox="1"/>
+          <p:nvPr/>
+        </p:nvSpPr>
+        <p:spPr>
+          <a:xfrm>
+            <a:off x="1251450" y="1188625"/>
+            <a:ext cx="7784100" cy="673200"/>
+          </a:xfrm>
+          <a:prstGeom prst="rect">
+            <a:avLst/>
+          </a:prstGeom>
+          <a:noFill/>
+          <a:ln>
+            <a:noFill/>
+          </a:ln>
+        </p:spPr>
+        <p:txBody>
+          <a:bodyPr spcFirstLastPara="1" wrap="square" lIns="91425" tIns="91425" rIns="91425" bIns="91425" anchor="ctr" anchorCtr="0">
+            <a:noAutofit/>
+          </a:bodyPr>
+          <a:lstStyle/>
+          <a:p>
+            <a:pPr marL="0" lvl="0" indent="0" algn="ctr" rtl="0">
+              <a:spcBef>
+                <a:spcPts val="0"/>
+              </a:spcBef>
+              <a:spcAft>
+                <a:spcPts val="0"/>
+              </a:spcAft>
+              <a:buNone/>
+            </a:pPr>
+            <a:r>
+              <a:rPr lang="en" sz="2800" b="1" dirty="0">
+                <a:solidFill>
+                  <a:schemeClr val="dk1"/>
+                </a:solidFill>
+                <a:latin typeface="Public Sans"/>
+                <a:ea typeface="Public Sans"/>
+                <a:cs typeface="Public Sans"/>
+                <a:sym typeface="Public Sans"/>
+              </a:rPr>
+              <a:t>&lt;&lt;Carrera 02&gt;&gt;</a:t>
+            </a:r>
+            <a:endParaRPr sz="2800" b="1" dirty="0">
               <a:solidFill>
                 <a:schemeClr val="dk1"/>
               </a:solidFill>
@@ -12572,7 +12430,7 @@
               <a:buNone/>
             </a:pPr>
             <a:r>
-              <a:rPr lang="en" sz="2800" b="1">
+              <a:rPr lang="en" sz="2800" b="1" dirty="0">
                 <a:solidFill>
                   <a:schemeClr val="dk1"/>
                 </a:solidFill>
@@ -12583,7 +12441,7 @@
               </a:rPr>
               <a:t>&lt;&lt;Carrera 03&gt;&gt;</a:t>
             </a:r>
-            <a:endParaRPr sz="2800" b="1">
+            <a:endParaRPr sz="2800" b="1" dirty="0">
               <a:solidFill>
                 <a:schemeClr val="dk1"/>
               </a:solidFill>
